--- a/presentation_full(diagram change).pptx
+++ b/presentation_full(diagram change).pptx
@@ -4,43 +4,43 @@
   <p:sldMasterIdLst>
     <p:sldMasterId id="2147483648" r:id="rId1"/>
   </p:sldMasterIdLst>
-  <p:notesMasterIdLst>
-    <p:notesMasterId r:id="rId33"/>
-  </p:notesMasterIdLst>
   <p:sldIdLst>
     <p:sldId id="256" r:id="rId2"/>
-    <p:sldId id="260" r:id="rId3"/>
-    <p:sldId id="261" r:id="rId4"/>
-    <p:sldId id="257" r:id="rId5"/>
-    <p:sldId id="258" r:id="rId6"/>
-    <p:sldId id="259" r:id="rId7"/>
-    <p:sldId id="262" r:id="rId8"/>
-    <p:sldId id="263" r:id="rId9"/>
-    <p:sldId id="264" r:id="rId10"/>
-    <p:sldId id="265" r:id="rId11"/>
-    <p:sldId id="266" r:id="rId12"/>
-    <p:sldId id="267" r:id="rId13"/>
-    <p:sldId id="268" r:id="rId14"/>
-    <p:sldId id="269" r:id="rId15"/>
-    <p:sldId id="270" r:id="rId16"/>
-    <p:sldId id="271" r:id="rId17"/>
-    <p:sldId id="272" r:id="rId18"/>
-    <p:sldId id="273" r:id="rId19"/>
-    <p:sldId id="274" r:id="rId20"/>
-    <p:sldId id="275" r:id="rId21"/>
-    <p:sldId id="276" r:id="rId22"/>
-    <p:sldId id="277" r:id="rId23"/>
-    <p:sldId id="278" r:id="rId24"/>
-    <p:sldId id="279" r:id="rId25"/>
-    <p:sldId id="280" r:id="rId26"/>
-    <p:sldId id="281" r:id="rId27"/>
-    <p:sldId id="282" r:id="rId28"/>
-    <p:sldId id="283" r:id="rId29"/>
-    <p:sldId id="284" r:id="rId30"/>
-    <p:sldId id="285" r:id="rId31"/>
-    <p:sldId id="286" r:id="rId32"/>
+    <p:sldId id="260" r:id="rId11"/>
+    <p:sldId id="261" r:id="rId12"/>
+    <p:sldId id="257" r:id="rId3"/>
+    <p:sldId id="258" r:id="rId4"/>
+    <p:sldId id="259" r:id="rId5"/>
+    <p:sldId id="262" r:id="rId13"/>
+    <p:sldId id="263" r:id="rId14"/>
+    <p:sldId id="264" r:id="rId15"/>
+    <p:sldId id="265" r:id="rId16"/>
+    <p:sldId id="266" r:id="rId17"/>
+    <p:sldId id="267" r:id="rId18"/>
+    <p:sldId id="268" r:id="rId19"/>
+    <p:sldId id="269" r:id="rId20"/>
+    <p:sldId id="270" r:id="rId21"/>
+    <p:sldId id="271" r:id="rId22"/>
+    <p:sldId id="272" r:id="rId23"/>
+    <p:sldId id="273" r:id="rId24"/>
+    <p:sldId id="274" r:id="rId25"/>
+    <p:sldId id="275" r:id="rId26"/>
+    <p:sldId id="276" r:id="rId27"/>
+    <p:sldId id="277" r:id="rId28"/>
+    <p:sldId id="278" r:id="rId29"/>
+    <p:sldId id="279" r:id="rId30"/>
+    <p:sldId id="280" r:id="rId31"/>
+    <p:sldId id="281" r:id="rId32"/>
+    <p:sldId id="282" r:id="rId33"/>
+    <p:sldId id="283" r:id="rId34"/>
+    <p:sldId id="284" r:id="rId35"/>
+    <p:sldId id="285" r:id="rId36"/>
+    <p:sldId id="286" r:id="rId37"/>
   </p:sldIdLst>
-  <p:sldSz cx="9144000" cy="5143500" type="screen16x9"/>
+  <p:notesMasterIdLst>
+    <p:notesMasterId r:id="rId6"/>
+  </p:notesMasterIdLst>
+  <p:sldSz cx="9144000" cy="5143500"/>
   <p:notesSz cx="5143500" cy="9144000"/>
   <p:defaultTextStyle>
     <a:lvl1pPr marL="0" algn="l" defTabSz="914400" rtl="0" eaLnBrk="1" latinLnBrk="0" hangingPunct="1">
@@ -134,11 +134,6 @@
       </a:defRPr>
     </a:lvl9pPr>
   </p:defaultTextStyle>
-  <p:extLst>
-    <p:ext uri="{EFAFB233-063F-42B5-8137-9DF3F51BA10A}">
-      <p15:sldGuideLst xmlns:p15="http://schemas.microsoft.com/office/powerpoint/2012/main"/>
-    </p:ext>
-  </p:extLst>
 </p:presentation>
 </file>
 
@@ -164,16 +159,240 @@
           <a:chExt cx="0" cy="0"/>
         </a:xfrm>
       </p:grpSpPr>
+      <p:sp>
+        <p:nvSpPr>
+          <p:cNvPr id="2" name="Header Placeholder 1"/>
+          <p:cNvSpPr>
+            <a:spLocks noGrp="1"/>
+          </p:cNvSpPr>
+          <p:nvPr>
+            <p:ph type="hdr" sz="quarter"/>
+          </p:nvPr>
+        </p:nvSpPr>
+        <p:spPr>
+          <a:xfrm>
+            <a:off x="0" y="0"/>
+            <a:ext cx="2971800" cy="458788"/>
+          </a:xfrm>
+          <a:prstGeom prst="rect">
+            <a:avLst/>
+          </a:prstGeom>
+        </p:spPr>
+        <p:txBody>
+          <a:bodyPr vert="horz" lIns="91440" tIns="45720" rIns="91440" bIns="45720" rtlCol="0"/>
+          <a:lstStyle>
+            <a:lvl1pPr algn="l">
+              <a:defRPr sz="1200"/>
+            </a:lvl1pPr>
+          </a:lstStyle>
+          <a:p>
+            <a:endParaRPr lang="en-US"/>
+          </a:p>
+        </p:txBody>
+      </p:sp>
+      <p:sp>
+        <p:nvSpPr>
+          <p:cNvPr id="3" name="Date Placeholder 2"/>
+          <p:cNvSpPr>
+            <a:spLocks noGrp="1"/>
+          </p:cNvSpPr>
+          <p:nvPr>
+            <p:ph type="dt" idx="1"/>
+          </p:nvPr>
+        </p:nvSpPr>
+        <p:spPr>
+          <a:xfrm>
+            <a:off x="3884613" y="0"/>
+            <a:ext cx="2971800" cy="458788"/>
+          </a:xfrm>
+          <a:prstGeom prst="rect">
+            <a:avLst/>
+          </a:prstGeom>
+        </p:spPr>
+        <p:txBody>
+          <a:bodyPr vert="horz" lIns="91440" tIns="45720" rIns="91440" bIns="45720" rtlCol="0"/>
+          <a:lstStyle>
+            <a:lvl1pPr algn="r">
+              <a:defRPr sz="1200"/>
+            </a:lvl1pPr>
+          </a:lstStyle>
+          <a:p>
+            <a:fld id="{5282F153-3F37-0F45-9E97-73ACFA13230C}" type="datetimeFigureOut">
+              <a:rPr lang="en-US"/>
+              <a:t>7/23/19</a:t>
+            </a:fld>
+            <a:endParaRPr lang="en-US"/>
+          </a:p>
+        </p:txBody>
+      </p:sp>
+      <p:sp>
+        <p:nvSpPr>
+          <p:cNvPr id="4" name="Slide Image Placeholder 3"/>
+          <p:cNvSpPr>
+            <a:spLocks noGrp="1" noRot="1" noChangeAspect="1"/>
+          </p:cNvSpPr>
+          <p:nvPr>
+            <p:ph type="sldImg" idx="2"/>
+          </p:nvPr>
+        </p:nvSpPr>
+        <p:spPr>
+          <a:xfrm>
+            <a:off x="685800" y="1143000"/>
+            <a:ext cx="5486400" cy="3086100"/>
+          </a:xfrm>
+          <a:prstGeom prst="rect">
+            <a:avLst/>
+          </a:prstGeom>
+          <a:noFill/>
+          <a:ln w="12700">
+            <a:solidFill>
+              <a:prstClr val="black"/>
+            </a:solidFill>
+          </a:ln>
+        </p:spPr>
+        <p:txBody>
+          <a:bodyPr vert="horz" lIns="91440" tIns="45720" rIns="91440" bIns="45720" rtlCol="0" anchor="ctr"/>
+          <a:lstStyle/>
+          <a:p>
+            <a:endParaRPr lang="en-US"/>
+          </a:p>
+        </p:txBody>
+      </p:sp>
+      <p:sp>
+        <p:nvSpPr>
+          <p:cNvPr id="5" name="Notes Placeholder 4"/>
+          <p:cNvSpPr>
+            <a:spLocks noGrp="1"/>
+          </p:cNvSpPr>
+          <p:nvPr>
+            <p:ph type="body" sz="quarter" idx="3"/>
+          </p:nvPr>
+        </p:nvSpPr>
+        <p:spPr>
+          <a:xfrm>
+            <a:off x="685800" y="4400550"/>
+            <a:ext cx="5486400" cy="3600450"/>
+          </a:xfrm>
+          <a:prstGeom prst="rect">
+            <a:avLst/>
+          </a:prstGeom>
+        </p:spPr>
+        <p:txBody>
+          <a:bodyPr vert="horz" lIns="91440" tIns="45720" rIns="91440" bIns="45720" rtlCol="0"/>
+          <a:lstStyle/>
+          <a:p>
+            <a:pPr lvl="0"/>
+            <a:r>
+              <a:rPr lang="en-US"/>
+              <a:t>Click to edit Master text styles</a:t>
+            </a:r>
+          </a:p>
+          <a:p>
+            <a:pPr lvl="1"/>
+            <a:r>
+              <a:rPr lang="en-US"/>
+              <a:t>Second level</a:t>
+            </a:r>
+          </a:p>
+          <a:p>
+            <a:pPr lvl="2"/>
+            <a:r>
+              <a:rPr lang="en-US"/>
+              <a:t>Third level</a:t>
+            </a:r>
+          </a:p>
+          <a:p>
+            <a:pPr lvl="3"/>
+            <a:r>
+              <a:rPr lang="en-US"/>
+              <a:t>Fourth level</a:t>
+            </a:r>
+          </a:p>
+          <a:p>
+            <a:pPr lvl="4"/>
+            <a:r>
+              <a:rPr lang="en-US"/>
+              <a:t>Fifth level</a:t>
+            </a:r>
+          </a:p>
+        </p:txBody>
+      </p:sp>
+      <p:sp>
+        <p:nvSpPr>
+          <p:cNvPr id="6" name="Footer Placeholder 5"/>
+          <p:cNvSpPr>
+            <a:spLocks noGrp="1"/>
+          </p:cNvSpPr>
+          <p:nvPr>
+            <p:ph type="ftr" sz="quarter" idx="4"/>
+          </p:nvPr>
+        </p:nvSpPr>
+        <p:spPr>
+          <a:xfrm>
+            <a:off x="0" y="8685213"/>
+            <a:ext cx="2971800" cy="458787"/>
+          </a:xfrm>
+          <a:prstGeom prst="rect">
+            <a:avLst/>
+          </a:prstGeom>
+        </p:spPr>
+        <p:txBody>
+          <a:bodyPr vert="horz" lIns="91440" tIns="45720" rIns="91440" bIns="45720" rtlCol="0" anchor="b"/>
+          <a:lstStyle>
+            <a:lvl1pPr algn="l">
+              <a:defRPr sz="1200"/>
+            </a:lvl1pPr>
+          </a:lstStyle>
+          <a:p>
+            <a:endParaRPr lang="en-US"/>
+          </a:p>
+        </p:txBody>
+      </p:sp>
+      <p:sp>
+        <p:nvSpPr>
+          <p:cNvPr id="7" name="Slide Number Placeholder 6"/>
+          <p:cNvSpPr>
+            <a:spLocks noGrp="1"/>
+          </p:cNvSpPr>
+          <p:nvPr>
+            <p:ph type="sldNum" sz="quarter" idx="5"/>
+          </p:nvPr>
+        </p:nvSpPr>
+        <p:spPr>
+          <a:xfrm>
+            <a:off x="3884613" y="8685213"/>
+            <a:ext cx="2971800" cy="458787"/>
+          </a:xfrm>
+          <a:prstGeom prst="rect">
+            <a:avLst/>
+          </a:prstGeom>
+        </p:spPr>
+        <p:txBody>
+          <a:bodyPr vert="horz" lIns="91440" tIns="45720" rIns="91440" bIns="45720" rtlCol="0" anchor="b"/>
+          <a:lstStyle>
+            <a:lvl1pPr algn="r">
+              <a:defRPr sz="1200"/>
+            </a:lvl1pPr>
+          </a:lstStyle>
+          <a:p>
+            <a:fld id="{CE5E9CC1-C706-0F49-92D6-E571CC5EEA8F}" type="slidenum">
+              <a:rPr lang="en-US"/>
+              <a:t>‹#›</a:t>
+            </a:fld>
+            <a:endParaRPr lang="en-US"/>
+          </a:p>
+        </p:txBody>
+      </p:sp>
     </p:spTree>
     <p:extLst>
       <p:ext uri="{BB962C8B-B14F-4D97-AF65-F5344CB8AC3E}">
-        <p14:creationId xmlns:p14="http://schemas.microsoft.com/office/powerpoint/2010/main" val="3175557372"/>
+        <p14:creationId xmlns:p14="http://schemas.microsoft.com/office/powerpoint/2010/main" val="1024086991"/>
       </p:ext>
     </p:extLst>
   </p:cSld>
   <p:clrMap bg1="lt1" tx1="dk1" bg2="lt2" tx2="dk2" accent1="accent1" accent2="accent2" accent3="accent3" accent4="accent4" accent5="accent5" accent6="accent6" hlink="hlink" folHlink="folHlink"/>
   <p:notesStyle>
-    <a:lvl1pPr marL="0" algn="l" defTabSz="914400" rtl="0" eaLnBrk="1" latinLnBrk="1" hangingPunct="1">
+    <a:lvl1pPr marL="0" algn="l" defTabSz="914400" rtl="0" eaLnBrk="1" latinLnBrk="0" hangingPunct="1">
       <a:defRPr sz="1200" kern="1200">
         <a:solidFill>
           <a:schemeClr val="tx1"/>
@@ -183,7 +402,7 @@
         <a:cs typeface="+mn-cs"/>
       </a:defRPr>
     </a:lvl1pPr>
-    <a:lvl2pPr marL="457200" algn="l" defTabSz="914400" rtl="0" eaLnBrk="1" latinLnBrk="1" hangingPunct="1">
+    <a:lvl2pPr marL="457200" algn="l" defTabSz="914400" rtl="0" eaLnBrk="1" latinLnBrk="0" hangingPunct="1">
       <a:defRPr sz="1200" kern="1200">
         <a:solidFill>
           <a:schemeClr val="tx1"/>
@@ -193,7 +412,7 @@
         <a:cs typeface="+mn-cs"/>
       </a:defRPr>
     </a:lvl2pPr>
-    <a:lvl3pPr marL="914400" algn="l" defTabSz="914400" rtl="0" eaLnBrk="1" latinLnBrk="1" hangingPunct="1">
+    <a:lvl3pPr marL="914400" algn="l" defTabSz="914400" rtl="0" eaLnBrk="1" latinLnBrk="0" hangingPunct="1">
       <a:defRPr sz="1200" kern="1200">
         <a:solidFill>
           <a:schemeClr val="tx1"/>
@@ -203,7 +422,7 @@
         <a:cs typeface="+mn-cs"/>
       </a:defRPr>
     </a:lvl3pPr>
-    <a:lvl4pPr marL="1371600" algn="l" defTabSz="914400" rtl="0" eaLnBrk="1" latinLnBrk="1" hangingPunct="1">
+    <a:lvl4pPr marL="1371600" algn="l" defTabSz="914400" rtl="0" eaLnBrk="1" latinLnBrk="0" hangingPunct="1">
       <a:defRPr sz="1200" kern="1200">
         <a:solidFill>
           <a:schemeClr val="tx1"/>
@@ -213,7 +432,7 @@
         <a:cs typeface="+mn-cs"/>
       </a:defRPr>
     </a:lvl4pPr>
-    <a:lvl5pPr marL="1828800" algn="l" defTabSz="914400" rtl="0" eaLnBrk="1" latinLnBrk="1" hangingPunct="1">
+    <a:lvl5pPr marL="1828800" algn="l" defTabSz="914400" rtl="0" eaLnBrk="1" latinLnBrk="0" hangingPunct="1">
       <a:defRPr sz="1200" kern="1200">
         <a:solidFill>
           <a:schemeClr val="tx1"/>
@@ -223,7 +442,7 @@
         <a:cs typeface="+mn-cs"/>
       </a:defRPr>
     </a:lvl5pPr>
-    <a:lvl6pPr marL="2286000" algn="l" defTabSz="914400" rtl="0" eaLnBrk="1" latinLnBrk="1" hangingPunct="1">
+    <a:lvl6pPr marL="2286000" algn="l" defTabSz="914400" rtl="0" eaLnBrk="1" latinLnBrk="0" hangingPunct="1">
       <a:defRPr sz="1200" kern="1200">
         <a:solidFill>
           <a:schemeClr val="tx1"/>
@@ -233,7 +452,7 @@
         <a:cs typeface="+mn-cs"/>
       </a:defRPr>
     </a:lvl6pPr>
-    <a:lvl7pPr marL="2743200" algn="l" defTabSz="914400" rtl="0" eaLnBrk="1" latinLnBrk="1" hangingPunct="1">
+    <a:lvl7pPr marL="2743200" algn="l" defTabSz="914400" rtl="0" eaLnBrk="1" latinLnBrk="0" hangingPunct="1">
       <a:defRPr sz="1200" kern="1200">
         <a:solidFill>
           <a:schemeClr val="tx1"/>
@@ -243,7 +462,7 @@
         <a:cs typeface="+mn-cs"/>
       </a:defRPr>
     </a:lvl7pPr>
-    <a:lvl8pPr marL="3200400" algn="l" defTabSz="914400" rtl="0" eaLnBrk="1" latinLnBrk="1" hangingPunct="1">
+    <a:lvl8pPr marL="3200400" algn="l" defTabSz="914400" rtl="0" eaLnBrk="1" latinLnBrk="0" hangingPunct="1">
       <a:defRPr sz="1200" kern="1200">
         <a:solidFill>
           <a:schemeClr val="tx1"/>
@@ -253,7 +472,7 @@
         <a:cs typeface="+mn-cs"/>
       </a:defRPr>
     </a:lvl8pPr>
-    <a:lvl9pPr marL="3657600" algn="l" defTabSz="914400" rtl="0" eaLnBrk="1" latinLnBrk="1" hangingPunct="1">
+    <a:lvl9pPr marL="3657600" algn="l" defTabSz="914400" rtl="0" eaLnBrk="1" latinLnBrk="0" hangingPunct="1">
       <a:defRPr sz="1200" kern="1200">
         <a:solidFill>
           <a:schemeClr val="tx1"/>
@@ -311,6 +530,10 @@
           <a:bodyPr/>
           <a:lstStyle/>
           <a:p>
+            <a:r>
+              <a:rPr lang="en-US" dirty="0"/>
+              <a:t/>
+            </a:r>
             <a:endParaRPr lang="en-US" dirty="0"/>
           </a:p>
         </p:txBody>
@@ -395,6 +618,10 @@
           <a:bodyPr/>
           <a:lstStyle/>
           <a:p>
+            <a:r>
+              <a:rPr lang="en-US" dirty="0"/>
+              <a:t/>
+            </a:r>
             <a:endParaRPr lang="en-US" dirty="0"/>
           </a:p>
         </p:txBody>
@@ -416,7 +643,7 @@
           <a:p>
             <a:fld id="{F7021451-1387-4CA6-816F-3879F97B5CBC}" type="slidenum">
               <a:rPr lang="en-US"/>
-              <a:t>4</a:t>
+              <a:t>2</a:t>
             </a:fld>
             <a:endParaRPr lang="en-US"/>
           </a:p>
@@ -479,6 +706,10 @@
           <a:bodyPr/>
           <a:lstStyle/>
           <a:p>
+            <a:r>
+              <a:rPr lang="en-US" dirty="0"/>
+              <a:t/>
+            </a:r>
             <a:endParaRPr lang="en-US" dirty="0"/>
           </a:p>
         </p:txBody>
@@ -500,7 +731,7 @@
           <a:p>
             <a:fld id="{F7021451-1387-4CA6-816F-3879F97B5CBC}" type="slidenum">
               <a:rPr lang="en-US"/>
-              <a:t>5</a:t>
+              <a:t>3</a:t>
             </a:fld>
             <a:endParaRPr lang="en-US"/>
           </a:p>
@@ -563,6 +794,10 @@
           <a:bodyPr/>
           <a:lstStyle/>
           <a:p>
+            <a:r>
+              <a:rPr lang="en-US" dirty="0"/>
+              <a:t/>
+            </a:r>
             <a:endParaRPr lang="en-US" dirty="0"/>
           </a:p>
         </p:txBody>
@@ -584,7 +819,7 @@
           <a:p>
             <a:fld id="{F7021451-1387-4CA6-816F-3879F97B5CBC}" type="slidenum">
               <a:rPr lang="en-US"/>
-              <a:t>6</a:t>
+              <a:t>4</a:t>
             </a:fld>
             <a:endParaRPr lang="en-US"/>
           </a:p>
@@ -636,11 +871,6 @@
 <file path=ppt/slideMasters/slideMaster1.xml><?xml version="1.0" encoding="utf-8"?>
 <p:sldMaster xmlns:a="http://schemas.openxmlformats.org/drawingml/2006/main" xmlns:r="http://schemas.openxmlformats.org/officeDocument/2006/relationships" xmlns:p="http://schemas.openxmlformats.org/presentationml/2006/main">
   <p:cSld>
-    <p:bg>
-      <p:bgRef idx="1001">
-        <a:schemeClr val="bg1"/>
-      </p:bgRef>
-    </p:bg>
     <p:spTree>
       <p:nvGrpSpPr>
         <p:cNvPr id="1" name=""/>
@@ -953,7 +1183,7 @@
           <a:bodyPr wrap="square" rtlCol="0" anchor="t"/>
           <a:lstStyle/>
           <a:p>
-            <a:pPr marL="0" indent="0" algn="l">
+            <a:pPr algn="l" indent="0" marL="0">
               <a:buNone/>
             </a:pPr>
             <a:r>
@@ -992,7 +1222,7 @@
           <a:bodyPr wrap="square" rtlCol="0" anchor="ctr"/>
           <a:lstStyle/>
           <a:p>
-            <a:pPr marL="0" indent="0" algn="l">
+            <a:pPr algn="l" indent="0" marL="0">
               <a:buNone/>
             </a:pPr>
             <a:r>
@@ -1031,7 +1261,7 @@
           <a:bodyPr wrap="square" rtlCol="0" anchor="ctr"/>
           <a:lstStyle/>
           <a:p>
-            <a:pPr marL="0" indent="0" algn="l">
+            <a:pPr algn="l" indent="0" marL="0">
               <a:buNone/>
             </a:pPr>
             <a:r>
@@ -1070,7 +1300,7 @@
           <a:bodyPr wrap="square" rtlCol="0" anchor="ctr"/>
           <a:lstStyle/>
           <a:p>
-            <a:pPr marL="0" indent="0" algn="r">
+            <a:pPr algn="r" indent="0" marL="0">
               <a:buNone/>
             </a:pPr>
             <a:r>
@@ -1097,8 +1327,2317 @@
 </file>
 
 <file path=ppt/slides/slide10.xml><?xml version="1.0" encoding="utf-8"?>
+<p:sld xmlns:a="http://schemas.openxmlformats.org/drawingml/2006/main" xmlns:p="http://schemas.openxmlformats.org/presentationml/2006/main" xmlns:r="http://schemas.openxmlformats.org/officeDocument/2006/relationships">
+  <p:cSld>
+    <p:spTree>
+      <p:nvGrpSpPr>
+        <p:cNvPr id="1" name=""/>
+        <p:cNvGrpSpPr/>
+        <p:nvPr/>
+      </p:nvGrpSpPr>
+      <p:grpSpPr/>
+      <p:sp>
+        <p:nvSpPr>
+          <p:cNvPr id="2" name="Text 0"/>
+          <p:cNvSpPr/>
+          <p:nvPr/>
+        </p:nvSpPr>
+        <p:spPr>
+          <a:xfrm>
+            <a:off x="548640" y="274320"/>
+            <a:ext cx="8046720" cy="777240"/>
+          </a:xfrm>
+          <a:prstGeom prst="rect">
+            <a:avLst/>
+          </a:prstGeom>
+          <a:noFill/>
+          <a:ln/>
+        </p:spPr>
+        <p:txBody>
+          <a:bodyPr wrap="square" lIns="0" tIns="0" rIns="0" bIns="0" rtlCol="0" anchor="ctr"/>
+          <a:lstStyle/>
+          <a:p>
+            <a:pPr indent="0" marL="0">
+              <a:buNone/>
+            </a:pPr>
+            <a:r>
+              <a:rPr lang="en-US" sz="3600" b="1" dirty="0">
+                <a:solidFill>
+                  <a:srgbClr val="111111"/>
+                </a:solidFill>
+                <a:latin typeface="Noto Sans CJK KR" pitchFamily="34" charset="0"/>
+                <a:ea typeface="Noto Sans CJK KR" pitchFamily="34" charset="-122"/>
+                <a:cs typeface="Noto Sans CJK KR" pitchFamily="34" charset="-120"/>
+              </a:rPr>
+              <a:t>DLL - Slave 프레임 구조</a:t>
+            </a:r>
+            <a:endParaRPr lang="en-US" sz="3600" dirty="0"/>
+          </a:p>
+        </p:txBody>
+      </p:sp>
+      <p:sp>
+        <p:nvSpPr>
+          <p:cNvPr id="3" name="Text 1"/>
+          <p:cNvSpPr/>
+          <p:nvPr/>
+        </p:nvSpPr>
+        <p:spPr>
+          <a:xfrm>
+            <a:off x="548640" y="1234440"/>
+            <a:ext cx="8046720" cy="1874520"/>
+          </a:xfrm>
+          <a:prstGeom prst="rect">
+            <a:avLst/>
+          </a:prstGeom>
+          <a:noFill/>
+          <a:ln/>
+        </p:spPr>
+        <p:txBody>
+          <a:bodyPr wrap="square" rtlCol="0" anchor="t"/>
+          <a:lstStyle/>
+          <a:p>
+            <a:pPr marL="342900" indent="-342900">
+              <a:spcAft>
+                <a:spcPts val="800"/>
+              </a:spcAft>
+              <a:buSzPct val="100000"/>
+              <a:buChar char="•"/>
+            </a:pPr>
+            <a:r>
+              <a:rPr lang="en-US" sz="1900" dirty="0">
+                <a:solidFill>
+                  <a:srgbClr val="222222"/>
+                </a:solidFill>
+                <a:latin typeface="Noto Sans CJK KR" pitchFamily="34" charset="0"/>
+                <a:ea typeface="Noto Sans CJK KR" pitchFamily="34" charset="-122"/>
+                <a:cs typeface="Noto Sans CJK KR" pitchFamily="34" charset="-120"/>
+              </a:rPr>
+              <a:t>필드 구성 (총 50비트)</a:t>
+            </a:r>
+            <a:endParaRPr lang="en-US" sz="1900" dirty="0"/>
+          </a:p>
+          <a:p>
+            <a:pPr lvl="1" marL="685800" indent="-342900">
+              <a:spcAft>
+                <a:spcPts val="600"/>
+              </a:spcAft>
+              <a:buSzPct val="100000"/>
+              <a:buChar char="•"/>
+            </a:pPr>
+            <a:r>
+              <a:rPr lang="en-US" sz="1600" dirty="0">
+                <a:solidFill>
+                  <a:srgbClr val="444444"/>
+                </a:solidFill>
+                <a:latin typeface="Noto Sans CJK KR" pitchFamily="34" charset="0"/>
+                <a:ea typeface="Noto Sans CJK KR" pitchFamily="34" charset="-122"/>
+                <a:cs typeface="Noto Sans CJK KR" pitchFamily="34" charset="-120"/>
+              </a:rPr>
+              <a:t>preamble(8, 0xAA) + slot_id(3) + payload(32) + hamming parity(7)</a:t>
+            </a:r>
+            <a:endParaRPr lang="en-US" sz="1900" dirty="0"/>
+          </a:p>
+          <a:p>
+            <a:pPr marL="342900" indent="-342900">
+              <a:spcAft>
+                <a:spcPts val="800"/>
+              </a:spcAft>
+              <a:buSzPct val="100000"/>
+              <a:buChar char="•"/>
+            </a:pPr>
+            <a:r>
+              <a:rPr lang="en-US" sz="1900" dirty="0">
+                <a:solidFill>
+                  <a:srgbClr val="222222"/>
+                </a:solidFill>
+                <a:latin typeface="Noto Sans CJK KR" pitchFamily="34" charset="0"/>
+                <a:ea typeface="Noto Sans CJK KR" pitchFamily="34" charset="-122"/>
+                <a:cs typeface="Noto Sans CJK KR" pitchFamily="34" charset="-120"/>
+              </a:rPr>
+              <a:t>에러 검출/정정</a:t>
+            </a:r>
+            <a:endParaRPr lang="en-US" sz="1900" dirty="0"/>
+          </a:p>
+          <a:p>
+            <a:pPr lvl="1" marL="685800" indent="-342900">
+              <a:spcAft>
+                <a:spcPts val="600"/>
+              </a:spcAft>
+              <a:buSzPct val="100000"/>
+              <a:buChar char="•"/>
+            </a:pPr>
+            <a:r>
+              <a:rPr lang="en-US" sz="1600" dirty="0">
+                <a:solidFill>
+                  <a:srgbClr val="444444"/>
+                </a:solidFill>
+                <a:latin typeface="Noto Sans CJK KR" pitchFamily="34" charset="0"/>
+                <a:ea typeface="Noto Sans CJK KR" pitchFamily="34" charset="-122"/>
+                <a:cs typeface="Noto Sans CJK KR" pitchFamily="34" charset="-120"/>
+              </a:rPr>
+              <a:t>SEC-DED 방식 — 1비트 에러는 검출 후 정정, 2비트 에러는 검출만 가능</a:t>
+            </a:r>
+            <a:endParaRPr lang="en-US" sz="1900" dirty="0"/>
+          </a:p>
+          <a:p>
+            <a:pPr marL="342900" indent="-342900">
+              <a:spcAft>
+                <a:spcPts val="800"/>
+              </a:spcAft>
+              <a:buSzPct val="100000"/>
+              <a:buChar char="•"/>
+            </a:pPr>
+            <a:r>
+              <a:rPr lang="en-US" sz="1900" dirty="0">
+                <a:solidFill>
+                  <a:srgbClr val="222222"/>
+                </a:solidFill>
+                <a:latin typeface="Noto Sans CJK KR" pitchFamily="34" charset="0"/>
+                <a:ea typeface="Noto Sans CJK KR" pitchFamily="34" charset="-122"/>
+                <a:cs typeface="Noto Sans CJK KR" pitchFamily="34" charset="-120"/>
+              </a:rPr>
+              <a:t>slot_id의 의미</a:t>
+            </a:r>
+            <a:endParaRPr lang="en-US" sz="1900" dirty="0"/>
+          </a:p>
+          <a:p>
+            <a:pPr lvl="1" marL="685800" indent="-342900">
+              <a:buSzPct val="100000"/>
+              <a:buChar char="•"/>
+            </a:pPr>
+            <a:r>
+              <a:rPr lang="en-US" sz="1600" dirty="0">
+                <a:solidFill>
+                  <a:srgbClr val="444444"/>
+                </a:solidFill>
+                <a:latin typeface="Noto Sans CJK KR" pitchFamily="34" charset="0"/>
+                <a:ea typeface="Noto Sans CJK KR" pitchFamily="34" charset="-122"/>
+                <a:cs typeface="Noto Sans CJK KR" pitchFamily="34" charset="-120"/>
+              </a:rPr>
+              <a:t>Slave 고유 식별자가 아니라 TDMA 슬롯 번호로 운용됨</a:t>
+            </a:r>
+            <a:endParaRPr lang="en-US" sz="1900" dirty="0"/>
+          </a:p>
+        </p:txBody>
+      </p:sp>
+      <p:pic>
+        <p:nvPicPr>
+          <p:cNvPr id="4" name="Image 0" descr="/home/user/SoC_Design_and_Programming/diagrams/slave_frame.png">    </p:cNvPr>
+          <p:cNvPicPr>
+            <a:picLocks noChangeAspect="1"/>
+          </p:cNvPicPr>
+          <p:nvPr/>
+        </p:nvPicPr>
+        <p:blipFill>
+          <a:blip r:embed="rId2"/>
+          <a:srcRect l="0" r="0" t="0" b="0"/>
+          <a:stretch/>
+        </p:blipFill>
+        <p:spPr>
+          <a:xfrm>
+            <a:off x="548640" y="3246120"/>
+            <a:ext cx="8046720" cy="563270"/>
+          </a:xfrm>
+          <a:prstGeom prst="rect">
+            <a:avLst/>
+          </a:prstGeom>
+        </p:spPr>
+      </p:pic>
+      <p:sp>
+        <p:nvSpPr>
+          <p:cNvPr id="5" name="Text 2"/>
+          <p:cNvSpPr/>
+          <p:nvPr/>
+        </p:nvSpPr>
+        <p:spPr>
+          <a:xfrm>
+            <a:off x="548640" y="3900830"/>
+            <a:ext cx="8046720" cy="228600"/>
+          </a:xfrm>
+          <a:prstGeom prst="rect">
+            <a:avLst/>
+          </a:prstGeom>
+          <a:noFill/>
+          <a:ln/>
+        </p:spPr>
+        <p:txBody>
+          <a:bodyPr wrap="square" rtlCol="0" anchor="ctr"/>
+          <a:lstStyle/>
+          <a:p>
+            <a:pPr algn="ctr" indent="0" marL="0">
+              <a:buNone/>
+            </a:pPr>
+            <a:r>
+              <a:rPr lang="en-US" sz="900" dirty="0">
+                <a:solidFill>
+                  <a:srgbClr val="999999"/>
+                </a:solidFill>
+                <a:latin typeface="Noto Sans CJK KR" pitchFamily="34" charset="0"/>
+                <a:ea typeface="Noto Sans CJK KR" pitchFamily="34" charset="-122"/>
+                <a:cs typeface="Noto Sans CJK KR" pitchFamily="34" charset="-120"/>
+              </a:rPr>
+              <a:t>Slave 프레임 비트필드 (전송 순서: preamble → slot_id → payload → hamming)</a:t>
+            </a:r>
+            <a:endParaRPr lang="en-US" sz="900" dirty="0"/>
+          </a:p>
+        </p:txBody>
+      </p:sp>
+      <p:sp>
+        <p:nvSpPr>
+          <p:cNvPr id="6" name="Text 3"/>
+          <p:cNvSpPr/>
+          <p:nvPr/>
+        </p:nvSpPr>
+        <p:spPr>
+          <a:xfrm>
+            <a:off x="8503920" y="4754880"/>
+            <a:ext cx="457200" cy="274320"/>
+          </a:xfrm>
+          <a:prstGeom prst="rect">
+            <a:avLst/>
+          </a:prstGeom>
+          <a:noFill/>
+          <a:ln/>
+        </p:spPr>
+        <p:txBody>
+          <a:bodyPr wrap="square" rtlCol="0" anchor="ctr"/>
+          <a:lstStyle/>
+          <a:p>
+            <a:pPr algn="r" indent="0" marL="0">
+              <a:buNone/>
+            </a:pPr>
+            <a:r>
+              <a:rPr lang="en-US" sz="1200" dirty="0">
+                <a:solidFill>
+                  <a:srgbClr val="999999"/>
+                </a:solidFill>
+                <a:latin typeface="Noto Sans CJK KR" pitchFamily="34" charset="0"/>
+                <a:ea typeface="Noto Sans CJK KR" pitchFamily="34" charset="-122"/>
+                <a:cs typeface="Noto Sans CJK KR" pitchFamily="34" charset="-120"/>
+              </a:rPr>
+              <a:t>10</a:t>
+            </a:r>
+            <a:endParaRPr lang="en-US" sz="1200" dirty="0"/>
+          </a:p>
+        </p:txBody>
+      </p:sp>
+    </p:spTree>
+  </p:cSld>
+  <p:clrMapOvr>
+    <a:masterClrMapping/>
+  </p:clrMapOvr>
+</p:sld>
+</file>
+
+<file path=ppt/slides/slide11.xml><?xml version="1.0" encoding="utf-8"?>
+<p:sld xmlns:a="http://schemas.openxmlformats.org/drawingml/2006/main" xmlns:p="http://schemas.openxmlformats.org/presentationml/2006/main" xmlns:r="http://schemas.openxmlformats.org/officeDocument/2006/relationships">
+  <p:cSld>
+    <p:spTree>
+      <p:nvGrpSpPr>
+        <p:cNvPr id="1" name=""/>
+        <p:cNvGrpSpPr/>
+        <p:nvPr/>
+      </p:nvGrpSpPr>
+      <p:grpSpPr/>
+      <p:sp>
+        <p:nvSpPr>
+          <p:cNvPr id="2" name="Text 0"/>
+          <p:cNvSpPr/>
+          <p:nvPr/>
+        </p:nvSpPr>
+        <p:spPr>
+          <a:xfrm>
+            <a:off x="548640" y="274320"/>
+            <a:ext cx="8046720" cy="777240"/>
+          </a:xfrm>
+          <a:prstGeom prst="rect">
+            <a:avLst/>
+          </a:prstGeom>
+          <a:noFill/>
+          <a:ln/>
+        </p:spPr>
+        <p:txBody>
+          <a:bodyPr wrap="square" lIns="0" tIns="0" rIns="0" bIns="0" rtlCol="0" anchor="ctr"/>
+          <a:lstStyle/>
+          <a:p>
+            <a:pPr indent="0" marL="0">
+              <a:buNone/>
+            </a:pPr>
+            <a:r>
+              <a:rPr lang="en-US" sz="3600" b="1" dirty="0">
+                <a:solidFill>
+                  <a:srgbClr val="111111"/>
+                </a:solidFill>
+                <a:latin typeface="Noto Sans CJK KR" pitchFamily="34" charset="0"/>
+                <a:ea typeface="Noto Sans CJK KR" pitchFamily="34" charset="-122"/>
+                <a:cs typeface="Noto Sans CJK KR" pitchFamily="34" charset="-120"/>
+              </a:rPr>
+              <a:t>DLL - Master 프레임 구조</a:t>
+            </a:r>
+            <a:endParaRPr lang="en-US" sz="3600" dirty="0"/>
+          </a:p>
+        </p:txBody>
+      </p:sp>
+      <p:sp>
+        <p:nvSpPr>
+          <p:cNvPr id="3" name="Text 1"/>
+          <p:cNvSpPr/>
+          <p:nvPr/>
+        </p:nvSpPr>
+        <p:spPr>
+          <a:xfrm>
+            <a:off x="548640" y="1234440"/>
+            <a:ext cx="8046720" cy="2057400"/>
+          </a:xfrm>
+          <a:prstGeom prst="rect">
+            <a:avLst/>
+          </a:prstGeom>
+          <a:noFill/>
+          <a:ln/>
+        </p:spPr>
+        <p:txBody>
+          <a:bodyPr wrap="square" rtlCol="0" anchor="t"/>
+          <a:lstStyle/>
+          <a:p>
+            <a:pPr marL="342900" indent="-342900">
+              <a:spcAft>
+                <a:spcPts val="800"/>
+              </a:spcAft>
+              <a:buSzPct val="100000"/>
+              <a:buChar char="•"/>
+            </a:pPr>
+            <a:r>
+              <a:rPr lang="en-US" sz="1900" dirty="0">
+                <a:solidFill>
+                  <a:srgbClr val="222222"/>
+                </a:solidFill>
+                <a:latin typeface="Noto Sans CJK KR" pitchFamily="34" charset="0"/>
+                <a:ea typeface="Noto Sans CJK KR" pitchFamily="34" charset="-122"/>
+                <a:cs typeface="Noto Sans CJK KR" pitchFamily="34" charset="-120"/>
+              </a:rPr>
+              <a:t>필드 구성</a:t>
+            </a:r>
+            <a:endParaRPr lang="en-US" sz="1900" dirty="0"/>
+          </a:p>
+          <a:p>
+            <a:pPr lvl="1" marL="685800" indent="-342900">
+              <a:spcAft>
+                <a:spcPts val="600"/>
+              </a:spcAft>
+              <a:buSzPct val="100000"/>
+              <a:buChar char="•"/>
+            </a:pPr>
+            <a:r>
+              <a:rPr lang="en-US" sz="1600" dirty="0">
+                <a:solidFill>
+                  <a:srgbClr val="444444"/>
+                </a:solidFill>
+                <a:latin typeface="Noto Sans CJK KR" pitchFamily="34" charset="0"/>
+                <a:ea typeface="Noto Sans CJK KR" pitchFamily="34" charset="-122"/>
+                <a:cs typeface="Noto Sans CJK KR" pitchFamily="34" charset="-120"/>
+              </a:rPr>
+              <a:t>preamble(8) + halt_cmd(8) + guard_ticks(10) + reserved(17) + hamming parity(7)</a:t>
+            </a:r>
+            <a:endParaRPr lang="en-US" sz="1900" dirty="0"/>
+          </a:p>
+          <a:p>
+            <a:pPr marL="342900" indent="-342900">
+              <a:spcAft>
+                <a:spcPts val="800"/>
+              </a:spcAft>
+              <a:buSzPct val="100000"/>
+              <a:buChar char="•"/>
+            </a:pPr>
+            <a:r>
+              <a:rPr lang="en-US" sz="1900" dirty="0">
+                <a:solidFill>
+                  <a:srgbClr val="222222"/>
+                </a:solidFill>
+                <a:latin typeface="Noto Sans CJK KR" pitchFamily="34" charset="0"/>
+                <a:ea typeface="Noto Sans CJK KR" pitchFamily="34" charset="-122"/>
+                <a:cs typeface="Noto Sans CJK KR" pitchFamily="34" charset="-120"/>
+              </a:rPr>
+              <a:t>halt_cmd</a:t>
+            </a:r>
+            <a:endParaRPr lang="en-US" sz="1900" dirty="0"/>
+          </a:p>
+          <a:p>
+            <a:pPr lvl="1" marL="685800" indent="-342900">
+              <a:spcAft>
+                <a:spcPts val="600"/>
+              </a:spcAft>
+              <a:buSzPct val="100000"/>
+              <a:buChar char="•"/>
+            </a:pPr>
+            <a:r>
+              <a:rPr lang="en-US" sz="1600" dirty="0">
+                <a:solidFill>
+                  <a:srgbClr val="444444"/>
+                </a:solidFill>
+                <a:latin typeface="Noto Sans CJK KR" pitchFamily="34" charset="0"/>
+                <a:ea typeface="Noto Sans CJK KR" pitchFamily="34" charset="-122"/>
+                <a:cs typeface="Noto Sans CJK KR" pitchFamily="34" charset="-120"/>
+              </a:rPr>
+              <a:t>Slave별 1비트 마스크 — err_cnt가 임계치(FAULT_TH) 초과 시 해당 비트 set, 고장 Slave 중단 명령</a:t>
+            </a:r>
+            <a:endParaRPr lang="en-US" sz="1900" dirty="0"/>
+          </a:p>
+          <a:p>
+            <a:pPr marL="342900" indent="-342900">
+              <a:spcAft>
+                <a:spcPts val="800"/>
+              </a:spcAft>
+              <a:buSzPct val="100000"/>
+              <a:buChar char="•"/>
+            </a:pPr>
+            <a:r>
+              <a:rPr lang="en-US" sz="1900" dirty="0">
+                <a:solidFill>
+                  <a:srgbClr val="222222"/>
+                </a:solidFill>
+                <a:latin typeface="Noto Sans CJK KR" pitchFamily="34" charset="0"/>
+                <a:ea typeface="Noto Sans CJK KR" pitchFamily="34" charset="-122"/>
+                <a:cs typeface="Noto Sans CJK KR" pitchFamily="34" charset="-120"/>
+              </a:rPr>
+              <a:t>에러 검출/정정</a:t>
+            </a:r>
+            <a:endParaRPr lang="en-US" sz="1900" dirty="0"/>
+          </a:p>
+          <a:p>
+            <a:pPr lvl="1" marL="685800" indent="-342900">
+              <a:buSzPct val="100000"/>
+              <a:buChar char="•"/>
+            </a:pPr>
+            <a:r>
+              <a:rPr lang="en-US" sz="1600" dirty="0">
+                <a:solidFill>
+                  <a:srgbClr val="444444"/>
+                </a:solidFill>
+                <a:latin typeface="Noto Sans CJK KR" pitchFamily="34" charset="0"/>
+                <a:ea typeface="Noto Sans CJK KR" pitchFamily="34" charset="-122"/>
+                <a:cs typeface="Noto Sans CJK KR" pitchFamily="34" charset="-120"/>
+              </a:rPr>
+              <a:t>Slave 프레임과 동일한 SEC-DED 방식 적용</a:t>
+            </a:r>
+            <a:endParaRPr lang="en-US" sz="1900" dirty="0"/>
+          </a:p>
+        </p:txBody>
+      </p:sp>
+      <p:pic>
+        <p:nvPicPr>
+          <p:cNvPr id="4" name="Image 0" descr="/home/user/SoC_Design_and_Programming/diagrams/master_frame.png">    </p:cNvPr>
+          <p:cNvPicPr>
+            <a:picLocks noChangeAspect="1"/>
+          </p:cNvPicPr>
+          <p:nvPr/>
+        </p:nvPicPr>
+        <p:blipFill>
+          <a:blip r:embed="rId2"/>
+          <a:srcRect l="0" r="0" t="0" b="0"/>
+          <a:stretch/>
+        </p:blipFill>
+        <p:spPr>
+          <a:xfrm>
+            <a:off x="548640" y="3383280"/>
+            <a:ext cx="8046720" cy="563270"/>
+          </a:xfrm>
+          <a:prstGeom prst="rect">
+            <a:avLst/>
+          </a:prstGeom>
+        </p:spPr>
+      </p:pic>
+      <p:sp>
+        <p:nvSpPr>
+          <p:cNvPr id="5" name="Text 2"/>
+          <p:cNvSpPr/>
+          <p:nvPr/>
+        </p:nvSpPr>
+        <p:spPr>
+          <a:xfrm>
+            <a:off x="548640" y="4037990"/>
+            <a:ext cx="8046720" cy="228600"/>
+          </a:xfrm>
+          <a:prstGeom prst="rect">
+            <a:avLst/>
+          </a:prstGeom>
+          <a:noFill/>
+          <a:ln/>
+        </p:spPr>
+        <p:txBody>
+          <a:bodyPr wrap="square" rtlCol="0" anchor="ctr"/>
+          <a:lstStyle/>
+          <a:p>
+            <a:pPr algn="ctr" indent="0" marL="0">
+              <a:buNone/>
+            </a:pPr>
+            <a:r>
+              <a:rPr lang="en-US" sz="900" dirty="0">
+                <a:solidFill>
+                  <a:srgbClr val="999999"/>
+                </a:solidFill>
+                <a:latin typeface="Noto Sans CJK KR" pitchFamily="34" charset="0"/>
+                <a:ea typeface="Noto Sans CJK KR" pitchFamily="34" charset="-122"/>
+                <a:cs typeface="Noto Sans CJK KR" pitchFamily="34" charset="-120"/>
+              </a:rPr>
+              <a:t>Master 프레임 비트필드 (전송 순서: preamble → halt_cmd → guard_ticks → reserved → hamming)</a:t>
+            </a:r>
+            <a:endParaRPr lang="en-US" sz="900" dirty="0"/>
+          </a:p>
+        </p:txBody>
+      </p:sp>
+      <p:sp>
+        <p:nvSpPr>
+          <p:cNvPr id="6" name="Text 3"/>
+          <p:cNvSpPr/>
+          <p:nvPr/>
+        </p:nvSpPr>
+        <p:spPr>
+          <a:xfrm>
+            <a:off x="8503920" y="4754880"/>
+            <a:ext cx="457200" cy="274320"/>
+          </a:xfrm>
+          <a:prstGeom prst="rect">
+            <a:avLst/>
+          </a:prstGeom>
+          <a:noFill/>
+          <a:ln/>
+        </p:spPr>
+        <p:txBody>
+          <a:bodyPr wrap="square" rtlCol="0" anchor="ctr"/>
+          <a:lstStyle/>
+          <a:p>
+            <a:pPr algn="r" indent="0" marL="0">
+              <a:buNone/>
+            </a:pPr>
+            <a:r>
+              <a:rPr lang="en-US" sz="1200" dirty="0">
+                <a:solidFill>
+                  <a:srgbClr val="999999"/>
+                </a:solidFill>
+                <a:latin typeface="Noto Sans CJK KR" pitchFamily="34" charset="0"/>
+                <a:ea typeface="Noto Sans CJK KR" pitchFamily="34" charset="-122"/>
+                <a:cs typeface="Noto Sans CJK KR" pitchFamily="34" charset="-120"/>
+              </a:rPr>
+              <a:t>11</a:t>
+            </a:r>
+            <a:endParaRPr lang="en-US" sz="1200" dirty="0"/>
+          </a:p>
+        </p:txBody>
+      </p:sp>
+    </p:spTree>
+  </p:cSld>
+  <p:clrMapOvr>
+    <a:masterClrMapping/>
+  </p:clrMapOvr>
+</p:sld>
+</file>
+
+<file path=ppt/slides/slide12.xml><?xml version="1.0" encoding="utf-8"?>
+<p:sld xmlns:a="http://schemas.openxmlformats.org/drawingml/2006/main" xmlns:p="http://schemas.openxmlformats.org/presentationml/2006/main" xmlns:r="http://schemas.openxmlformats.org/officeDocument/2006/relationships">
+  <p:cSld>
+    <p:spTree>
+      <p:nvGrpSpPr>
+        <p:cNvPr id="1" name=""/>
+        <p:cNvGrpSpPr/>
+        <p:nvPr/>
+      </p:nvGrpSpPr>
+      <p:grpSpPr/>
+      <p:sp>
+        <p:nvSpPr>
+          <p:cNvPr id="2" name="Text 0"/>
+          <p:cNvSpPr/>
+          <p:nvPr/>
+        </p:nvSpPr>
+        <p:spPr>
+          <a:xfrm>
+            <a:off x="548640" y="274320"/>
+            <a:ext cx="8046720" cy="777240"/>
+          </a:xfrm>
+          <a:prstGeom prst="rect">
+            <a:avLst/>
+          </a:prstGeom>
+          <a:noFill/>
+          <a:ln/>
+        </p:spPr>
+        <p:txBody>
+          <a:bodyPr wrap="square" lIns="0" tIns="0" rIns="0" bIns="0" rtlCol="0" anchor="ctr"/>
+          <a:lstStyle/>
+          <a:p>
+            <a:pPr indent="0" marL="0">
+              <a:buNone/>
+            </a:pPr>
+            <a:r>
+              <a:rPr lang="en-US" sz="3600" b="1" dirty="0">
+                <a:solidFill>
+                  <a:srgbClr val="111111"/>
+                </a:solidFill>
+                <a:latin typeface="Noto Sans CJK KR" pitchFamily="34" charset="0"/>
+                <a:ea typeface="Noto Sans CJK KR" pitchFamily="34" charset="-122"/>
+                <a:cs typeface="Noto Sans CJK KR" pitchFamily="34" charset="-120"/>
+              </a:rPr>
+              <a:t>DLL - MAC: 동기화와 타임슬롯</a:t>
+            </a:r>
+            <a:endParaRPr lang="en-US" sz="3600" dirty="0"/>
+          </a:p>
+        </p:txBody>
+      </p:sp>
+      <p:sp>
+        <p:nvSpPr>
+          <p:cNvPr id="3" name="Text 1"/>
+          <p:cNvSpPr/>
+          <p:nvPr/>
+        </p:nvSpPr>
+        <p:spPr>
+          <a:xfrm>
+            <a:off x="548640" y="1234440"/>
+            <a:ext cx="8046720" cy="1371600"/>
+          </a:xfrm>
+          <a:prstGeom prst="rect">
+            <a:avLst/>
+          </a:prstGeom>
+          <a:noFill/>
+          <a:ln/>
+        </p:spPr>
+        <p:txBody>
+          <a:bodyPr wrap="square" rtlCol="0" anchor="t"/>
+          <a:lstStyle/>
+          <a:p>
+            <a:pPr marL="342900" indent="-342900">
+              <a:spcAft>
+                <a:spcPts val="600"/>
+              </a:spcAft>
+              <a:buSzPct val="100000"/>
+              <a:buChar char="•"/>
+            </a:pPr>
+            <a:r>
+              <a:rPr lang="en-US" sz="1800" dirty="0">
+                <a:solidFill>
+                  <a:srgbClr val="222222"/>
+                </a:solidFill>
+                <a:latin typeface="Noto Sans CJK KR" pitchFamily="34" charset="0"/>
+                <a:ea typeface="Noto Sans CJK KR" pitchFamily="34" charset="-122"/>
+                <a:cs typeface="Noto Sans CJK KR" pitchFamily="34" charset="-120"/>
+              </a:rPr>
+              <a:t>Sync 기준점</a:t>
+            </a:r>
+            <a:endParaRPr lang="en-US" sz="1800" dirty="0"/>
+          </a:p>
+          <a:p>
+            <a:pPr lvl="1" marL="685800" indent="-342900">
+              <a:spcAft>
+                <a:spcPts val="400"/>
+              </a:spcAft>
+              <a:buSzPct val="100000"/>
+              <a:buChar char="•"/>
+            </a:pPr>
+            <a:r>
+              <a:rPr lang="en-US" sz="1500" dirty="0">
+                <a:solidFill>
+                  <a:srgbClr val="444444"/>
+                </a:solidFill>
+                <a:latin typeface="Noto Sans CJK KR" pitchFamily="34" charset="0"/>
+                <a:ea typeface="Noto Sans CJK KR" pitchFamily="34" charset="-122"/>
+                <a:cs typeface="Noto Sans CJK KR" pitchFamily="34" charset="-120"/>
+              </a:rPr>
+              <a:t>Master가 매 사이클 마지막 슬롯에서 전송한 sync를 다음 사이클 슬롯 계산 기준점으로 사용</a:t>
+            </a:r>
+            <a:endParaRPr lang="en-US" sz="1800" dirty="0"/>
+          </a:p>
+          <a:p>
+            <a:pPr marL="342900" indent="-342900">
+              <a:spcAft>
+                <a:spcPts val="600"/>
+              </a:spcAft>
+              <a:buSzPct val="100000"/>
+              <a:buChar char="•"/>
+            </a:pPr>
+            <a:r>
+              <a:rPr lang="en-US" sz="1800" dirty="0">
+                <a:solidFill>
+                  <a:srgbClr val="222222"/>
+                </a:solidFill>
+                <a:latin typeface="Noto Sans CJK KR" pitchFamily="34" charset="0"/>
+                <a:ea typeface="Noto Sans CJK KR" pitchFamily="34" charset="-122"/>
+                <a:cs typeface="Noto Sans CJK KR" pitchFamily="34" charset="-120"/>
+              </a:rPr>
+              <a:t>슬롯 내부 구조</a:t>
+            </a:r>
+            <a:endParaRPr lang="en-US" sz="1800" dirty="0"/>
+          </a:p>
+          <a:p>
+            <a:pPr lvl="1" marL="685800" indent="-342900">
+              <a:spcAft>
+                <a:spcPts val="400"/>
+              </a:spcAft>
+              <a:buSzPct val="100000"/>
+              <a:buChar char="•"/>
+            </a:pPr>
+            <a:r>
+              <a:rPr lang="en-US" sz="1500" dirty="0">
+                <a:solidFill>
+                  <a:srgbClr val="444444"/>
+                </a:solidFill>
+                <a:latin typeface="Noto Sans CJK KR" pitchFamily="34" charset="0"/>
+                <a:ea typeface="Noto Sans CJK KR" pitchFamily="34" charset="-122"/>
+                <a:cs typeface="Noto Sans CJK KR" pitchFamily="34" charset="-120"/>
+              </a:rPr>
+              <a:t>½ guard tick 대기 → 데이터 전송 → ½ guard tick 대기</a:t>
+            </a:r>
+            <a:endParaRPr lang="en-US" sz="1800" dirty="0"/>
+          </a:p>
+          <a:p>
+            <a:pPr marL="342900" indent="-342900">
+              <a:spcAft>
+                <a:spcPts val="600"/>
+              </a:spcAft>
+              <a:buSzPct val="100000"/>
+              <a:buChar char="•"/>
+            </a:pPr>
+            <a:r>
+              <a:rPr lang="en-US" sz="1800" dirty="0">
+                <a:solidFill>
+                  <a:srgbClr val="222222"/>
+                </a:solidFill>
+                <a:latin typeface="Noto Sans CJK KR" pitchFamily="34" charset="0"/>
+                <a:ea typeface="Noto Sans CJK KR" pitchFamily="34" charset="-122"/>
+                <a:cs typeface="Noto Sans CJK KR" pitchFamily="34" charset="-120"/>
+              </a:rPr>
+              <a:t>Guard Tick의 역할</a:t>
+            </a:r>
+            <a:endParaRPr lang="en-US" sz="1800" dirty="0"/>
+          </a:p>
+          <a:p>
+            <a:pPr lvl="1" marL="685800" indent="-342900">
+              <a:buSzPct val="100000"/>
+              <a:buChar char="•"/>
+            </a:pPr>
+            <a:r>
+              <a:rPr lang="en-US" sz="1500" dirty="0">
+                <a:solidFill>
+                  <a:srgbClr val="444444"/>
+                </a:solidFill>
+                <a:latin typeface="Noto Sans CJK KR" pitchFamily="34" charset="0"/>
+                <a:ea typeface="Noto Sans CJK KR" pitchFamily="34" charset="-122"/>
+                <a:cs typeface="Noto Sans CJK KR" pitchFamily="34" charset="-120"/>
+              </a:rPr>
+              <a:t>인접 슬롯의 절반씩이 경계에서 맞물려 슬롯 침범 방지</a:t>
+            </a:r>
+            <a:endParaRPr lang="en-US" sz="1800" dirty="0"/>
+          </a:p>
+        </p:txBody>
+      </p:sp>
+      <p:pic>
+        <p:nvPicPr>
+          <p:cNvPr id="4" name="Image 0" descr="/home/user/SoC_Design_and_Programming/diagrams/slot_timeline.png">    </p:cNvPr>
+          <p:cNvPicPr>
+            <a:picLocks noChangeAspect="1"/>
+          </p:cNvPicPr>
+          <p:nvPr/>
+        </p:nvPicPr>
+        <p:blipFill>
+          <a:blip r:embed="rId2"/>
+          <a:srcRect l="0" r="0" t="0" b="0"/>
+          <a:stretch/>
+        </p:blipFill>
+        <p:spPr>
+          <a:xfrm>
+            <a:off x="1371600" y="2743200"/>
+            <a:ext cx="6400800" cy="2081893"/>
+          </a:xfrm>
+          <a:prstGeom prst="rect">
+            <a:avLst/>
+          </a:prstGeom>
+        </p:spPr>
+      </p:pic>
+      <p:sp>
+        <p:nvSpPr>
+          <p:cNvPr id="5" name="Text 2"/>
+          <p:cNvSpPr/>
+          <p:nvPr/>
+        </p:nvSpPr>
+        <p:spPr>
+          <a:xfrm>
+            <a:off x="1371600" y="4916533"/>
+            <a:ext cx="6400800" cy="228600"/>
+          </a:xfrm>
+          <a:prstGeom prst="rect">
+            <a:avLst/>
+          </a:prstGeom>
+          <a:noFill/>
+          <a:ln/>
+        </p:spPr>
+        <p:txBody>
+          <a:bodyPr wrap="square" rtlCol="0" anchor="ctr"/>
+          <a:lstStyle/>
+          <a:p>
+            <a:pPr algn="ctr" indent="0" marL="0">
+              <a:buNone/>
+            </a:pPr>
+            <a:r>
+              <a:rPr lang="en-US" sz="900" dirty="0">
+                <a:solidFill>
+                  <a:srgbClr val="999999"/>
+                </a:solidFill>
+                <a:latin typeface="Noto Sans CJK KR" pitchFamily="34" charset="0"/>
+                <a:ea typeface="Noto Sans CJK KR" pitchFamily="34" charset="-122"/>
+                <a:cs typeface="Noto Sans CJK KR" pitchFamily="34" charset="-120"/>
+              </a:rPr>
+              <a:t>Sync → [½G · 데이터 · ½G] × (Slot 0...N) → Sync</a:t>
+            </a:r>
+            <a:endParaRPr lang="en-US" sz="900" dirty="0"/>
+          </a:p>
+        </p:txBody>
+      </p:sp>
+      <p:sp>
+        <p:nvSpPr>
+          <p:cNvPr id="6" name="Text 3"/>
+          <p:cNvSpPr/>
+          <p:nvPr/>
+        </p:nvSpPr>
+        <p:spPr>
+          <a:xfrm>
+            <a:off x="8503920" y="4754880"/>
+            <a:ext cx="457200" cy="274320"/>
+          </a:xfrm>
+          <a:prstGeom prst="rect">
+            <a:avLst/>
+          </a:prstGeom>
+          <a:noFill/>
+          <a:ln/>
+        </p:spPr>
+        <p:txBody>
+          <a:bodyPr wrap="square" rtlCol="0" anchor="ctr"/>
+          <a:lstStyle/>
+          <a:p>
+            <a:pPr algn="r" indent="0" marL="0">
+              <a:buNone/>
+            </a:pPr>
+            <a:r>
+              <a:rPr lang="en-US" sz="1200" dirty="0">
+                <a:solidFill>
+                  <a:srgbClr val="999999"/>
+                </a:solidFill>
+                <a:latin typeface="Noto Sans CJK KR" pitchFamily="34" charset="0"/>
+                <a:ea typeface="Noto Sans CJK KR" pitchFamily="34" charset="-122"/>
+                <a:cs typeface="Noto Sans CJK KR" pitchFamily="34" charset="-120"/>
+              </a:rPr>
+              <a:t>12</a:t>
+            </a:r>
+            <a:endParaRPr lang="en-US" sz="1200" dirty="0"/>
+          </a:p>
+        </p:txBody>
+      </p:sp>
+    </p:spTree>
+  </p:cSld>
+  <p:clrMapOvr>
+    <a:masterClrMapping/>
+  </p:clrMapOvr>
+</p:sld>
+</file>
+
+<file path=ppt/slides/slide13.xml><?xml version="1.0" encoding="utf-8"?>
+<p:sld xmlns:a="http://schemas.openxmlformats.org/drawingml/2006/main" xmlns:p="http://schemas.openxmlformats.org/presentationml/2006/main" xmlns:r="http://schemas.openxmlformats.org/officeDocument/2006/relationships">
+  <p:cSld>
+    <p:spTree>
+      <p:nvGrpSpPr>
+        <p:cNvPr id="1" name=""/>
+        <p:cNvGrpSpPr/>
+        <p:nvPr/>
+      </p:nvGrpSpPr>
+      <p:grpSpPr/>
+      <p:sp>
+        <p:nvSpPr>
+          <p:cNvPr id="2" name="Text 0"/>
+          <p:cNvSpPr/>
+          <p:nvPr/>
+        </p:nvSpPr>
+        <p:spPr>
+          <a:xfrm>
+            <a:off x="548640" y="274320"/>
+            <a:ext cx="8046720" cy="777240"/>
+          </a:xfrm>
+          <a:prstGeom prst="rect">
+            <a:avLst/>
+          </a:prstGeom>
+          <a:noFill/>
+          <a:ln/>
+        </p:spPr>
+        <p:txBody>
+          <a:bodyPr wrap="square" lIns="0" tIns="0" rIns="0" bIns="0" rtlCol="0" anchor="ctr"/>
+          <a:lstStyle/>
+          <a:p>
+            <a:pPr indent="0" marL="0">
+              <a:buNone/>
+            </a:pPr>
+            <a:r>
+              <a:rPr lang="en-US" sz="3600" b="1" dirty="0">
+                <a:solidFill>
+                  <a:srgbClr val="111111"/>
+                </a:solidFill>
+                <a:latin typeface="Noto Sans CJK KR" pitchFamily="34" charset="0"/>
+                <a:ea typeface="Noto Sans CJK KR" pitchFamily="34" charset="-122"/>
+                <a:cs typeface="Noto Sans CJK KR" pitchFamily="34" charset="-120"/>
+              </a:rPr>
+              <a:t>DLL - 클럭 동기</a:t>
+            </a:r>
+            <a:endParaRPr lang="en-US" sz="3600" dirty="0"/>
+          </a:p>
+        </p:txBody>
+      </p:sp>
+      <p:sp>
+        <p:nvSpPr>
+          <p:cNvPr id="3" name="Text 1"/>
+          <p:cNvSpPr/>
+          <p:nvPr/>
+        </p:nvSpPr>
+        <p:spPr>
+          <a:xfrm>
+            <a:off x="548640" y="1234440"/>
+            <a:ext cx="8046720" cy="2971800"/>
+          </a:xfrm>
+          <a:prstGeom prst="rect">
+            <a:avLst/>
+          </a:prstGeom>
+          <a:noFill/>
+          <a:ln/>
+        </p:spPr>
+        <p:txBody>
+          <a:bodyPr wrap="square" rtlCol="0" anchor="t"/>
+          <a:lstStyle/>
+          <a:p>
+            <a:pPr marL="342900" indent="-342900">
+              <a:spcAft>
+                <a:spcPts val="1200"/>
+              </a:spcAft>
+              <a:buSzPct val="100000"/>
+              <a:buChar char="•"/>
+            </a:pPr>
+            <a:r>
+              <a:rPr lang="en-US" sz="2000" dirty="0">
+                <a:solidFill>
+                  <a:srgbClr val="222222"/>
+                </a:solidFill>
+                <a:latin typeface="Noto Sans CJK KR" pitchFamily="34" charset="0"/>
+                <a:ea typeface="Noto Sans CJK KR" pitchFamily="34" charset="-122"/>
+                <a:cs typeface="Noto Sans CJK KR" pitchFamily="34" charset="-120"/>
+              </a:rPr>
+              <a:t>Master·Slave는 클럭을 공유하지 않음</a:t>
+            </a:r>
+            <a:endParaRPr lang="en-US" sz="2000" dirty="0"/>
+          </a:p>
+          <a:p>
+            <a:pPr lvl="1" marL="685800" indent="-342900">
+              <a:spcAft>
+                <a:spcPts val="800"/>
+              </a:spcAft>
+              <a:buSzPct val="100000"/>
+              <a:buChar char="•"/>
+            </a:pPr>
+            <a:r>
+              <a:rPr lang="en-US" sz="1700" dirty="0">
+                <a:solidFill>
+                  <a:srgbClr val="444444"/>
+                </a:solidFill>
+                <a:latin typeface="Noto Sans CJK KR" pitchFamily="34" charset="0"/>
+                <a:ea typeface="Noto Sans CJK KR" pitchFamily="34" charset="-122"/>
+                <a:cs typeface="Noto Sans CJK KR" pitchFamily="34" charset="-120"/>
+              </a:rPr>
+              <a:t>클럭 오차가 통신에 치명적인 방해 요인 — guard tick만으로는 누적 오차를 막을 수 없음</a:t>
+            </a:r>
+            <a:endParaRPr lang="en-US" sz="2000" dirty="0"/>
+          </a:p>
+          <a:p>
+            <a:pPr marL="342900" indent="-342900">
+              <a:spcAft>
+                <a:spcPts val="1200"/>
+              </a:spcAft>
+              <a:buSzPct val="100000"/>
+              <a:buChar char="•"/>
+            </a:pPr>
+            <a:r>
+              <a:rPr lang="en-US" sz="2000" dirty="0">
+                <a:solidFill>
+                  <a:srgbClr val="222222"/>
+                </a:solidFill>
+                <a:latin typeface="Noto Sans CJK KR" pitchFamily="34" charset="0"/>
+                <a:ea typeface="Noto Sans CJK KR" pitchFamily="34" charset="-122"/>
+                <a:cs typeface="Noto Sans CJK KR" pitchFamily="34" charset="-120"/>
+              </a:rPr>
+              <a:t>분주 클럭으로 동일 타이밍 가정</a:t>
+            </a:r>
+            <a:endParaRPr lang="en-US" sz="2000" dirty="0"/>
+          </a:p>
+          <a:p>
+            <a:pPr lvl="1" marL="685800" indent="-342900">
+              <a:spcAft>
+                <a:spcPts val="800"/>
+              </a:spcAft>
+              <a:buSzPct val="100000"/>
+              <a:buChar char="•"/>
+            </a:pPr>
+            <a:r>
+              <a:rPr lang="en-US" sz="1700" dirty="0">
+                <a:solidFill>
+                  <a:srgbClr val="444444"/>
+                </a:solidFill>
+                <a:latin typeface="Noto Sans CJK KR" pitchFamily="34" charset="0"/>
+                <a:ea typeface="Noto Sans CJK KR" pitchFamily="34" charset="-122"/>
+                <a:cs typeface="Noto Sans CJK KR" pitchFamily="34" charset="-120"/>
+              </a:rPr>
+              <a:t>DIV 값을 AXI 레지스터로 설정, Master·Slave 양쪽에 동일한 DIV 값을 쓴다고 가정 — 분주 클럭은 메인 클럭 / (DIV + 1)</a:t>
+            </a:r>
+            <a:endParaRPr lang="en-US" sz="2000" dirty="0"/>
+          </a:p>
+          <a:p>
+            <a:pPr marL="342900" indent="-342900">
+              <a:spcAft>
+                <a:spcPts val="1200"/>
+              </a:spcAft>
+              <a:buSzPct val="100000"/>
+              <a:buChar char="•"/>
+            </a:pPr>
+            <a:r>
+              <a:rPr lang="en-US" sz="2000" dirty="0">
+                <a:solidFill>
+                  <a:srgbClr val="222222"/>
+                </a:solidFill>
+                <a:latin typeface="Noto Sans CJK KR" pitchFamily="34" charset="0"/>
+                <a:ea typeface="Noto Sans CJK KR" pitchFamily="34" charset="-122"/>
+                <a:cs typeface="Noto Sans CJK KR" pitchFamily="34" charset="-120"/>
+              </a:rPr>
+              <a:t>샘플링 방식</a:t>
+            </a:r>
+            <a:endParaRPr lang="en-US" sz="2000" dirty="0"/>
+          </a:p>
+          <a:p>
+            <a:pPr lvl="1" marL="685800" indent="-342900">
+              <a:buSzPct val="100000"/>
+              <a:buChar char="•"/>
+            </a:pPr>
+            <a:r>
+              <a:rPr lang="en-US" sz="1700" dirty="0">
+                <a:solidFill>
+                  <a:srgbClr val="444444"/>
+                </a:solidFill>
+                <a:latin typeface="Noto Sans CJK KR" pitchFamily="34" charset="0"/>
+                <a:ea typeface="Noto Sans CJK KR" pitchFamily="34" charset="-122"/>
+                <a:cs typeface="Noto Sans CJK KR" pitchFamily="34" charset="-120"/>
+              </a:rPr>
+              <a:t>수신 샘플링은 비트 구간의 중간 지점에서 1회만 수행</a:t>
+            </a:r>
+            <a:endParaRPr lang="en-US" sz="2000" dirty="0"/>
+          </a:p>
+        </p:txBody>
+      </p:sp>
+      <p:sp>
+        <p:nvSpPr>
+          <p:cNvPr id="4" name="Text 2"/>
+          <p:cNvSpPr/>
+          <p:nvPr/>
+        </p:nvSpPr>
+        <p:spPr>
+          <a:xfrm>
+            <a:off x="8503920" y="4754880"/>
+            <a:ext cx="457200" cy="274320"/>
+          </a:xfrm>
+          <a:prstGeom prst="rect">
+            <a:avLst/>
+          </a:prstGeom>
+          <a:noFill/>
+          <a:ln/>
+        </p:spPr>
+        <p:txBody>
+          <a:bodyPr wrap="square" rtlCol="0" anchor="ctr"/>
+          <a:lstStyle/>
+          <a:p>
+            <a:pPr algn="r" indent="0" marL="0">
+              <a:buNone/>
+            </a:pPr>
+            <a:r>
+              <a:rPr lang="en-US" sz="1200" dirty="0">
+                <a:solidFill>
+                  <a:srgbClr val="999999"/>
+                </a:solidFill>
+                <a:latin typeface="Noto Sans CJK KR" pitchFamily="34" charset="0"/>
+                <a:ea typeface="Noto Sans CJK KR" pitchFamily="34" charset="-122"/>
+                <a:cs typeface="Noto Sans CJK KR" pitchFamily="34" charset="-120"/>
+              </a:rPr>
+              <a:t>13</a:t>
+            </a:r>
+            <a:endParaRPr lang="en-US" sz="1200" dirty="0"/>
+          </a:p>
+        </p:txBody>
+      </p:sp>
+    </p:spTree>
+  </p:cSld>
+  <p:clrMapOvr>
+    <a:masterClrMapping/>
+  </p:clrMapOvr>
+</p:sld>
+</file>
+
+<file path=ppt/slides/slide14.xml><?xml version="1.0" encoding="utf-8"?>
+<p:sld xmlns:a="http://schemas.openxmlformats.org/drawingml/2006/main" xmlns:p="http://schemas.openxmlformats.org/presentationml/2006/main" xmlns:r="http://schemas.openxmlformats.org/officeDocument/2006/relationships">
+  <p:cSld>
+    <p:spTree>
+      <p:nvGrpSpPr>
+        <p:cNvPr id="1" name=""/>
+        <p:cNvGrpSpPr/>
+        <p:nvPr/>
+      </p:nvGrpSpPr>
+      <p:grpSpPr/>
+      <p:sp>
+        <p:nvSpPr>
+          <p:cNvPr id="2" name="Text 0"/>
+          <p:cNvSpPr/>
+          <p:nvPr/>
+        </p:nvSpPr>
+        <p:spPr>
+          <a:xfrm>
+            <a:off x="548640" y="274320"/>
+            <a:ext cx="8046720" cy="777240"/>
+          </a:xfrm>
+          <a:prstGeom prst="rect">
+            <a:avLst/>
+          </a:prstGeom>
+          <a:noFill/>
+          <a:ln/>
+        </p:spPr>
+        <p:txBody>
+          <a:bodyPr wrap="square" lIns="0" tIns="0" rIns="0" bIns="0" rtlCol="0" anchor="ctr"/>
+          <a:lstStyle/>
+          <a:p>
+            <a:pPr indent="0" marL="0">
+              <a:buNone/>
+            </a:pPr>
+            <a:r>
+              <a:rPr lang="en-US" sz="3600" b="1" dirty="0">
+                <a:solidFill>
+                  <a:srgbClr val="111111"/>
+                </a:solidFill>
+                <a:latin typeface="Noto Sans CJK KR" pitchFamily="34" charset="0"/>
+                <a:ea typeface="Noto Sans CJK KR" pitchFamily="34" charset="-122"/>
+                <a:cs typeface="Noto Sans CJK KR" pitchFamily="34" charset="-120"/>
+              </a:rPr>
+              <a:t>DLL - Flow Control</a:t>
+            </a:r>
+            <a:endParaRPr lang="en-US" sz="3600" dirty="0"/>
+          </a:p>
+        </p:txBody>
+      </p:sp>
+      <p:sp>
+        <p:nvSpPr>
+          <p:cNvPr id="3" name="Text 1"/>
+          <p:cNvSpPr/>
+          <p:nvPr/>
+        </p:nvSpPr>
+        <p:spPr>
+          <a:xfrm>
+            <a:off x="548640" y="1234440"/>
+            <a:ext cx="4023360" cy="2971800"/>
+          </a:xfrm>
+          <a:prstGeom prst="rect">
+            <a:avLst/>
+          </a:prstGeom>
+          <a:noFill/>
+          <a:ln/>
+        </p:spPr>
+        <p:txBody>
+          <a:bodyPr wrap="square" rtlCol="0" anchor="t"/>
+          <a:lstStyle/>
+          <a:p>
+            <a:pPr marL="342900" indent="-342900">
+              <a:spcAft>
+                <a:spcPts val="1200"/>
+              </a:spcAft>
+              <a:buSzPct val="100000"/>
+              <a:buChar char="•"/>
+            </a:pPr>
+            <a:r>
+              <a:rPr lang="en-US" sz="2000" dirty="0">
+                <a:solidFill>
+                  <a:srgbClr val="222222"/>
+                </a:solidFill>
+                <a:latin typeface="Noto Sans CJK KR" pitchFamily="34" charset="0"/>
+                <a:ea typeface="Noto Sans CJK KR" pitchFamily="34" charset="-122"/>
+                <a:cs typeface="Noto Sans CJK KR" pitchFamily="34" charset="-120"/>
+              </a:rPr>
+              <a:t>1비트 에러</a:t>
+            </a:r>
+            <a:endParaRPr lang="en-US" sz="2000" dirty="0"/>
+          </a:p>
+          <a:p>
+            <a:pPr lvl="1" marL="685800" indent="-342900">
+              <a:spcAft>
+                <a:spcPts val="800"/>
+              </a:spcAft>
+              <a:buSzPct val="100000"/>
+              <a:buChar char="•"/>
+            </a:pPr>
+            <a:r>
+              <a:rPr lang="en-US" sz="1700" dirty="0">
+                <a:solidFill>
+                  <a:srgbClr val="444444"/>
+                </a:solidFill>
+                <a:latin typeface="Noto Sans CJK KR" pitchFamily="34" charset="0"/>
+                <a:ea typeface="Noto Sans CJK KR" pitchFamily="34" charset="-122"/>
+                <a:cs typeface="Noto Sans CJK KR" pitchFamily="34" charset="-120"/>
+              </a:rPr>
+              <a:t>Hamming으로 정정하여 정상 데이터로 사용</a:t>
+            </a:r>
+            <a:endParaRPr lang="en-US" sz="2000" dirty="0"/>
+          </a:p>
+          <a:p>
+            <a:pPr marL="342900" indent="-342900">
+              <a:spcAft>
+                <a:spcPts val="1200"/>
+              </a:spcAft>
+              <a:buSzPct val="100000"/>
+              <a:buChar char="•"/>
+            </a:pPr>
+            <a:r>
+              <a:rPr lang="en-US" sz="2000" dirty="0">
+                <a:solidFill>
+                  <a:srgbClr val="222222"/>
+                </a:solidFill>
+                <a:latin typeface="Noto Sans CJK KR" pitchFamily="34" charset="0"/>
+                <a:ea typeface="Noto Sans CJK KR" pitchFamily="34" charset="-122"/>
+                <a:cs typeface="Noto Sans CJK KR" pitchFamily="34" charset="-120"/>
+              </a:rPr>
+              <a:t>2비트 에러 (정정 불가)</a:t>
+            </a:r>
+            <a:endParaRPr lang="en-US" sz="2000" dirty="0"/>
+          </a:p>
+          <a:p>
+            <a:pPr lvl="1" marL="685800" indent="-342900">
+              <a:spcAft>
+                <a:spcPts val="800"/>
+              </a:spcAft>
+              <a:buSzPct val="100000"/>
+              <a:buChar char="•"/>
+            </a:pPr>
+            <a:r>
+              <a:rPr lang="en-US" sz="1700" dirty="0">
+                <a:solidFill>
+                  <a:srgbClr val="444444"/>
+                </a:solidFill>
+                <a:latin typeface="Noto Sans CJK KR" pitchFamily="34" charset="0"/>
+                <a:ea typeface="Noto Sans CJK KR" pitchFamily="34" charset="-122"/>
+                <a:cs typeface="Noto Sans CJK KR" pitchFamily="34" charset="-120"/>
+              </a:rPr>
+              <a:t>해당 프레임을 무효 처리하고 폐기, 이전 값 유지</a:t>
+            </a:r>
+            <a:endParaRPr lang="en-US" sz="2000" dirty="0"/>
+          </a:p>
+          <a:p>
+            <a:pPr marL="342900" indent="-342900">
+              <a:spcAft>
+                <a:spcPts val="1200"/>
+              </a:spcAft>
+              <a:buSzPct val="100000"/>
+              <a:buChar char="•"/>
+            </a:pPr>
+            <a:r>
+              <a:rPr lang="en-US" sz="2000" dirty="0">
+                <a:solidFill>
+                  <a:srgbClr val="222222"/>
+                </a:solidFill>
+                <a:latin typeface="Noto Sans CJK KR" pitchFamily="34" charset="0"/>
+                <a:ea typeface="Noto Sans CJK KR" pitchFamily="34" charset="-122"/>
+                <a:cs typeface="Noto Sans CJK KR" pitchFamily="34" charset="-120"/>
+              </a:rPr>
+              <a:t>Implicit Flow Control</a:t>
+            </a:r>
+            <a:endParaRPr lang="en-US" sz="2000" dirty="0"/>
+          </a:p>
+          <a:p>
+            <a:pPr lvl="1" marL="685800" indent="-342900">
+              <a:buSzPct val="100000"/>
+              <a:buChar char="•"/>
+            </a:pPr>
+            <a:r>
+              <a:rPr lang="en-US" sz="1700" dirty="0">
+                <a:solidFill>
+                  <a:srgbClr val="444444"/>
+                </a:solidFill>
+                <a:latin typeface="Noto Sans CJK KR" pitchFamily="34" charset="0"/>
+                <a:ea typeface="Noto Sans CJK KR" pitchFamily="34" charset="-122"/>
+                <a:cs typeface="Noto Sans CJK KR" pitchFamily="34" charset="-120"/>
+              </a:rPr>
+              <a:t>명시적 재전송 요청(ARQ/NACK) 없음 — 다음 TDMA 사이클의 갱신 데이터를 기다림</a:t>
+            </a:r>
+            <a:endParaRPr lang="en-US" sz="2000" dirty="0"/>
+          </a:p>
+        </p:txBody>
+      </p:sp>
+      <p:pic>
+        <p:nvPicPr>
+          <p:cNvPr id="4" name="Image 0" descr="/home/user/SoC_Design_and_Programming/diagrams/flow_control.png">    </p:cNvPr>
+          <p:cNvPicPr>
+            <a:picLocks noChangeAspect="1"/>
+          </p:cNvPicPr>
+          <p:nvPr/>
+        </p:nvPicPr>
+        <p:blipFill>
+          <a:blip r:embed="rId2"/>
+          <a:srcRect l="0" r="0" t="0" b="0"/>
+          <a:stretch/>
+        </p:blipFill>
+        <p:spPr>
+          <a:xfrm>
+            <a:off x="5029200" y="1371600"/>
+            <a:ext cx="3200400" cy="2319606"/>
+          </a:xfrm>
+          <a:prstGeom prst="rect">
+            <a:avLst/>
+          </a:prstGeom>
+        </p:spPr>
+      </p:pic>
+      <p:sp>
+        <p:nvSpPr>
+          <p:cNvPr id="5" name="Text 2"/>
+          <p:cNvSpPr/>
+          <p:nvPr/>
+        </p:nvSpPr>
+        <p:spPr>
+          <a:xfrm>
+            <a:off x="8503920" y="4754880"/>
+            <a:ext cx="457200" cy="274320"/>
+          </a:xfrm>
+          <a:prstGeom prst="rect">
+            <a:avLst/>
+          </a:prstGeom>
+          <a:noFill/>
+          <a:ln/>
+        </p:spPr>
+        <p:txBody>
+          <a:bodyPr wrap="square" rtlCol="0" anchor="ctr"/>
+          <a:lstStyle/>
+          <a:p>
+            <a:pPr algn="r" indent="0" marL="0">
+              <a:buNone/>
+            </a:pPr>
+            <a:r>
+              <a:rPr lang="en-US" sz="1200" dirty="0">
+                <a:solidFill>
+                  <a:srgbClr val="999999"/>
+                </a:solidFill>
+                <a:latin typeface="Noto Sans CJK KR" pitchFamily="34" charset="0"/>
+                <a:ea typeface="Noto Sans CJK KR" pitchFamily="34" charset="-122"/>
+                <a:cs typeface="Noto Sans CJK KR" pitchFamily="34" charset="-120"/>
+              </a:rPr>
+              <a:t>14</a:t>
+            </a:r>
+            <a:endParaRPr lang="en-US" sz="1200" dirty="0"/>
+          </a:p>
+        </p:txBody>
+      </p:sp>
+    </p:spTree>
+  </p:cSld>
+  <p:clrMapOvr>
+    <a:masterClrMapping/>
+  </p:clrMapOvr>
+</p:sld>
+</file>
+
+<file path=ppt/slides/slide15.xml><?xml version="1.0" encoding="utf-8"?>
+<p:sld xmlns:a="http://schemas.openxmlformats.org/drawingml/2006/main" xmlns:p="http://schemas.openxmlformats.org/presentationml/2006/main" xmlns:r="http://schemas.openxmlformats.org/officeDocument/2006/relationships">
+  <p:cSld>
+    <p:bg>
+      <p:bgPr>
+        <a:solidFill>
+          <a:srgbClr val="F2F2F2"/>
+        </a:solidFill>
+      </p:bgPr>
+    </p:bg>
+    <p:spTree>
+      <p:nvGrpSpPr>
+        <p:cNvPr id="1" name=""/>
+        <p:cNvGrpSpPr/>
+        <p:nvPr/>
+      </p:nvGrpSpPr>
+      <p:grpSpPr/>
+      <p:sp>
+        <p:nvSpPr>
+          <p:cNvPr id="2" name="Text 0"/>
+          <p:cNvSpPr/>
+          <p:nvPr/>
+        </p:nvSpPr>
+        <p:spPr>
+          <a:xfrm>
+            <a:off x="548640" y="1828800"/>
+            <a:ext cx="8046720" cy="1371600"/>
+          </a:xfrm>
+          <a:prstGeom prst="rect">
+            <a:avLst/>
+          </a:prstGeom>
+          <a:noFill/>
+          <a:ln/>
+        </p:spPr>
+        <p:txBody>
+          <a:bodyPr wrap="square" rtlCol="0" anchor="ctr"/>
+          <a:lstStyle/>
+          <a:p>
+            <a:pPr algn="l" indent="0" marL="0">
+              <a:buNone/>
+            </a:pPr>
+            <a:r>
+              <a:rPr lang="en-US" sz="4000" b="1" dirty="0">
+                <a:solidFill>
+                  <a:srgbClr val="111111"/>
+                </a:solidFill>
+                <a:latin typeface="Noto Sans CJK KR" pitchFamily="34" charset="0"/>
+                <a:ea typeface="Noto Sans CJK KR" pitchFamily="34" charset="-122"/>
+                <a:cs typeface="Noto Sans CJK KR" pitchFamily="34" charset="-120"/>
+              </a:rPr>
+              <a:t>3. Master / Slave 구현 사항</a:t>
+            </a:r>
+            <a:endParaRPr lang="en-US" sz="4000" dirty="0"/>
+          </a:p>
+        </p:txBody>
+      </p:sp>
+      <p:sp>
+        <p:nvSpPr>
+          <p:cNvPr id="3" name="Text 1"/>
+          <p:cNvSpPr/>
+          <p:nvPr/>
+        </p:nvSpPr>
+        <p:spPr>
+          <a:xfrm>
+            <a:off x="548640" y="3108960"/>
+            <a:ext cx="8046720" cy="457200"/>
+          </a:xfrm>
+          <a:prstGeom prst="rect">
+            <a:avLst/>
+          </a:prstGeom>
+          <a:noFill/>
+          <a:ln/>
+        </p:spPr>
+        <p:txBody>
+          <a:bodyPr wrap="square" rtlCol="0" anchor="ctr"/>
+          <a:lstStyle/>
+          <a:p>
+            <a:pPr algn="l" indent="0" marL="0">
+              <a:buNone/>
+            </a:pPr>
+            <a:r>
+              <a:rPr lang="en-US" sz="2000" dirty="0">
+                <a:solidFill>
+                  <a:srgbClr val="666666"/>
+                </a:solidFill>
+                <a:latin typeface="Noto Sans CJK KR" pitchFamily="34" charset="0"/>
+                <a:ea typeface="Noto Sans CJK KR" pitchFamily="34" charset="-122"/>
+                <a:cs typeface="Noto Sans CJK KR" pitchFamily="34" charset="-120"/>
+              </a:rPr>
+              <a:t>하드웨어 블록 구성부터 고장 처리 로직까지 구현 세부사항을 짚는다</a:t>
+            </a:r>
+            <a:endParaRPr lang="en-US" sz="2000" dirty="0"/>
+          </a:p>
+        </p:txBody>
+      </p:sp>
+      <p:sp>
+        <p:nvSpPr>
+          <p:cNvPr id="4" name="Text 2"/>
+          <p:cNvSpPr/>
+          <p:nvPr/>
+        </p:nvSpPr>
+        <p:spPr>
+          <a:xfrm>
+            <a:off x="8503920" y="4754880"/>
+            <a:ext cx="457200" cy="274320"/>
+          </a:xfrm>
+          <a:prstGeom prst="rect">
+            <a:avLst/>
+          </a:prstGeom>
+          <a:noFill/>
+          <a:ln/>
+        </p:spPr>
+        <p:txBody>
+          <a:bodyPr wrap="square" rtlCol="0" anchor="ctr"/>
+          <a:lstStyle/>
+          <a:p>
+            <a:pPr algn="r" indent="0" marL="0">
+              <a:buNone/>
+            </a:pPr>
+            <a:r>
+              <a:rPr lang="en-US" sz="1200" dirty="0">
+                <a:solidFill>
+                  <a:srgbClr val="999999"/>
+                </a:solidFill>
+                <a:latin typeface="Noto Sans CJK KR" pitchFamily="34" charset="0"/>
+                <a:ea typeface="Noto Sans CJK KR" pitchFamily="34" charset="-122"/>
+                <a:cs typeface="Noto Sans CJK KR" pitchFamily="34" charset="-120"/>
+              </a:rPr>
+              <a:t>15</a:t>
+            </a:r>
+            <a:endParaRPr lang="en-US" sz="1200" dirty="0"/>
+          </a:p>
+        </p:txBody>
+      </p:sp>
+    </p:spTree>
+  </p:cSld>
+  <p:clrMapOvr>
+    <a:masterClrMapping/>
+  </p:clrMapOvr>
+</p:sld>
+</file>
+
+<file path=ppt/slides/slide16.xml><?xml version="1.0" encoding="utf-8"?>
+<p:sld xmlns:a="http://schemas.openxmlformats.org/drawingml/2006/main" xmlns:p="http://schemas.openxmlformats.org/presentationml/2006/main" xmlns:r="http://schemas.openxmlformats.org/officeDocument/2006/relationships">
+  <p:cSld>
+    <p:spTree>
+      <p:nvGrpSpPr>
+        <p:cNvPr id="1" name=""/>
+        <p:cNvGrpSpPr/>
+        <p:nvPr/>
+      </p:nvGrpSpPr>
+      <p:grpSpPr/>
+      <p:sp>
+        <p:nvSpPr>
+          <p:cNvPr id="2" name="Text 0"/>
+          <p:cNvSpPr/>
+          <p:nvPr/>
+        </p:nvSpPr>
+        <p:spPr>
+          <a:xfrm>
+            <a:off x="548640" y="274320"/>
+            <a:ext cx="8046720" cy="777240"/>
+          </a:xfrm>
+          <a:prstGeom prst="rect">
+            <a:avLst/>
+          </a:prstGeom>
+          <a:noFill/>
+          <a:ln/>
+        </p:spPr>
+        <p:txBody>
+          <a:bodyPr wrap="square" lIns="0" tIns="0" rIns="0" bIns="0" rtlCol="0" anchor="ctr"/>
+          <a:lstStyle/>
+          <a:p>
+            <a:pPr indent="0" marL="0">
+              <a:buNone/>
+            </a:pPr>
+            <a:r>
+              <a:rPr lang="en-US" sz="3600" b="1" dirty="0">
+                <a:solidFill>
+                  <a:srgbClr val="111111"/>
+                </a:solidFill>
+                <a:latin typeface="Noto Sans CJK KR" pitchFamily="34" charset="0"/>
+                <a:ea typeface="Noto Sans CJK KR" pitchFamily="34" charset="-122"/>
+                <a:cs typeface="Noto Sans CJK KR" pitchFamily="34" charset="-120"/>
+              </a:rPr>
+              <a:t>Master 전체 구조</a:t>
+            </a:r>
+            <a:endParaRPr lang="en-US" sz="3600" dirty="0"/>
+          </a:p>
+        </p:txBody>
+      </p:sp>
+      <p:sp>
+        <p:nvSpPr>
+          <p:cNvPr id="3" name="Text 1"/>
+          <p:cNvSpPr/>
+          <p:nvPr/>
+        </p:nvSpPr>
+        <p:spPr>
+          <a:xfrm>
+            <a:off x="548640" y="1188720"/>
+            <a:ext cx="8046720" cy="594360"/>
+          </a:xfrm>
+          <a:prstGeom prst="rect">
+            <a:avLst/>
+          </a:prstGeom>
+          <a:noFill/>
+          <a:ln/>
+        </p:spPr>
+        <p:txBody>
+          <a:bodyPr wrap="square" rtlCol="0" anchor="t"/>
+          <a:lstStyle/>
+          <a:p>
+            <a:pPr marL="342900" indent="-342900">
+              <a:spcAft>
+                <a:spcPts val="600"/>
+              </a:spcAft>
+              <a:buSzPct val="100000"/>
+              <a:buChar char="•"/>
+            </a:pPr>
+            <a:r>
+              <a:rPr lang="en-US" sz="1700" dirty="0">
+                <a:solidFill>
+                  <a:srgbClr val="222222"/>
+                </a:solidFill>
+                <a:latin typeface="Noto Sans CJK KR" pitchFamily="34" charset="0"/>
+                <a:ea typeface="Noto Sans CJK KR" pitchFamily="34" charset="-122"/>
+                <a:cs typeface="Noto Sans CJK KR" pitchFamily="34" charset="-120"/>
+              </a:rPr>
+              <a:t>테스트 장치 · PS · PL(Master IP 포함) · GPIO 네 영역으로 구성</a:t>
+            </a:r>
+            <a:endParaRPr lang="en-US" sz="1700" dirty="0"/>
+          </a:p>
+          <a:p>
+            <a:pPr marL="342900" indent="-342900">
+              <a:spcAft>
+                <a:spcPts val="600"/>
+              </a:spcAft>
+              <a:buSzPct val="100000"/>
+              <a:buChar char="•"/>
+            </a:pPr>
+            <a:r>
+              <a:rPr lang="en-US" sz="1700" dirty="0">
+                <a:solidFill>
+                  <a:srgbClr val="222222"/>
+                </a:solidFill>
+                <a:latin typeface="Noto Sans CJK KR" pitchFamily="34" charset="0"/>
+                <a:ea typeface="Noto Sans CJK KR" pitchFamily="34" charset="-122"/>
+                <a:cs typeface="Noto Sans CJK KR" pitchFamily="34" charset="-120"/>
+              </a:rPr>
+              <a:t>GPIO를 통해 Slave와 TX/RX 시리얼로 연결 — 이후 슬라이드에서 블록을 하나씩 확대</a:t>
+            </a:r>
+            <a:endParaRPr lang="en-US" sz="1700" dirty="0"/>
+          </a:p>
+        </p:txBody>
+      </p:sp>
+      <p:pic>
+        <p:nvPicPr>
+          <p:cNvPr id="4" name="Image 0" descr="/home/user/SoC_Design_and_Programming/diagrams/section3/zoom/master_overview.png">    </p:cNvPr>
+          <p:cNvPicPr>
+            <a:picLocks noChangeAspect="1"/>
+          </p:cNvPicPr>
+          <p:nvPr/>
+        </p:nvPicPr>
+        <p:blipFill>
+          <a:blip r:embed="rId2"/>
+          <a:srcRect l="0" r="0" t="0" b="0"/>
+          <a:stretch/>
+        </p:blipFill>
+        <p:spPr>
+          <a:xfrm>
+            <a:off x="548640" y="2061599"/>
+            <a:ext cx="8046720" cy="2186162"/>
+          </a:xfrm>
+          <a:prstGeom prst="rect">
+            <a:avLst/>
+          </a:prstGeom>
+        </p:spPr>
+      </p:pic>
+      <p:sp>
+        <p:nvSpPr>
+          <p:cNvPr id="5" name="Text 2"/>
+          <p:cNvSpPr/>
+          <p:nvPr/>
+        </p:nvSpPr>
+        <p:spPr>
+          <a:xfrm>
+            <a:off x="8503920" y="4754880"/>
+            <a:ext cx="457200" cy="274320"/>
+          </a:xfrm>
+          <a:prstGeom prst="rect">
+            <a:avLst/>
+          </a:prstGeom>
+          <a:noFill/>
+          <a:ln/>
+        </p:spPr>
+        <p:txBody>
+          <a:bodyPr wrap="square" rtlCol="0" anchor="ctr"/>
+          <a:lstStyle/>
+          <a:p>
+            <a:pPr algn="r" indent="0" marL="0">
+              <a:buNone/>
+            </a:pPr>
+            <a:r>
+              <a:rPr lang="en-US" sz="1200" dirty="0">
+                <a:solidFill>
+                  <a:srgbClr val="999999"/>
+                </a:solidFill>
+                <a:latin typeface="Noto Sans CJK KR" pitchFamily="34" charset="0"/>
+                <a:ea typeface="Noto Sans CJK KR" pitchFamily="34" charset="-122"/>
+                <a:cs typeface="Noto Sans CJK KR" pitchFamily="34" charset="-120"/>
+              </a:rPr>
+              <a:t>16</a:t>
+            </a:r>
+            <a:endParaRPr lang="en-US" sz="1200" dirty="0"/>
+          </a:p>
+        </p:txBody>
+      </p:sp>
+    </p:spTree>
+  </p:cSld>
+  <p:clrMapOvr>
+    <a:masterClrMapping/>
+  </p:clrMapOvr>
+</p:sld>
+</file>
+
+<file path=ppt/slides/slide17.xml><?xml version="1.0" encoding="utf-8"?>
+<p:sld xmlns:a="http://schemas.openxmlformats.org/drawingml/2006/main" xmlns:p="http://schemas.openxmlformats.org/presentationml/2006/main" xmlns:r="http://schemas.openxmlformats.org/officeDocument/2006/relationships">
+  <p:cSld>
+    <p:spTree>
+      <p:nvGrpSpPr>
+        <p:cNvPr id="1" name=""/>
+        <p:cNvGrpSpPr/>
+        <p:nvPr/>
+      </p:nvGrpSpPr>
+      <p:grpSpPr/>
+      <p:sp>
+        <p:nvSpPr>
+          <p:cNvPr id="2" name="Text 0"/>
+          <p:cNvSpPr/>
+          <p:nvPr/>
+        </p:nvSpPr>
+        <p:spPr>
+          <a:xfrm>
+            <a:off x="548640" y="274320"/>
+            <a:ext cx="8046720" cy="777240"/>
+          </a:xfrm>
+          <a:prstGeom prst="rect">
+            <a:avLst/>
+          </a:prstGeom>
+          <a:noFill/>
+          <a:ln/>
+        </p:spPr>
+        <p:txBody>
+          <a:bodyPr wrap="square" lIns="0" tIns="0" rIns="0" bIns="0" rtlCol="0" anchor="ctr"/>
+          <a:lstStyle/>
+          <a:p>
+            <a:pPr indent="0" marL="0">
+              <a:buNone/>
+            </a:pPr>
+            <a:r>
+              <a:rPr lang="en-US" sz="3600" b="1" dirty="0">
+                <a:solidFill>
+                  <a:srgbClr val="111111"/>
+                </a:solidFill>
+                <a:latin typeface="Noto Sans CJK KR" pitchFamily="34" charset="0"/>
+                <a:ea typeface="Noto Sans CJK KR" pitchFamily="34" charset="-122"/>
+                <a:cs typeface="Noto Sans CJK KR" pitchFamily="34" charset="-120"/>
+              </a:rPr>
+              <a:t>Master - GPIO 확대</a:t>
+            </a:r>
+            <a:endParaRPr lang="en-US" sz="3600" dirty="0"/>
+          </a:p>
+        </p:txBody>
+      </p:sp>
+      <p:sp>
+        <p:nvSpPr>
+          <p:cNvPr id="3" name="Text 1"/>
+          <p:cNvSpPr/>
+          <p:nvPr/>
+        </p:nvSpPr>
+        <p:spPr>
+          <a:xfrm>
+            <a:off x="548640" y="1234440"/>
+            <a:ext cx="4023360" cy="2971800"/>
+          </a:xfrm>
+          <a:prstGeom prst="rect">
+            <a:avLst/>
+          </a:prstGeom>
+          <a:noFill/>
+          <a:ln/>
+        </p:spPr>
+        <p:txBody>
+          <a:bodyPr wrap="square" rtlCol="0" anchor="t"/>
+          <a:lstStyle/>
+          <a:p>
+            <a:pPr marL="342900" indent="-342900">
+              <a:spcAft>
+                <a:spcPts val="1000"/>
+              </a:spcAft>
+              <a:buSzPct val="100000"/>
+              <a:buChar char="•"/>
+            </a:pPr>
+            <a:r>
+              <a:rPr lang="en-US" sz="1800" dirty="0">
+                <a:solidFill>
+                  <a:srgbClr val="222222"/>
+                </a:solidFill>
+                <a:latin typeface="Noto Sans CJK KR" pitchFamily="34" charset="0"/>
+                <a:ea typeface="Noto Sans CJK KR" pitchFamily="34" charset="-122"/>
+                <a:cs typeface="Noto Sans CJK KR" pitchFamily="34" charset="-120"/>
+              </a:rPr>
+              <a:t>GND / RX 포트 / TX 포트로 구성</a:t>
+            </a:r>
+            <a:endParaRPr lang="en-US" sz="1800" dirty="0"/>
+          </a:p>
+          <a:p>
+            <a:pPr marL="342900" indent="-342900">
+              <a:spcAft>
+                <a:spcPts val="1000"/>
+              </a:spcAft>
+              <a:buSzPct val="100000"/>
+              <a:buChar char="•"/>
+            </a:pPr>
+            <a:r>
+              <a:rPr lang="en-US" sz="1800" dirty="0">
+                <a:solidFill>
+                  <a:srgbClr val="222222"/>
+                </a:solidFill>
+                <a:latin typeface="Noto Sans CJK KR" pitchFamily="34" charset="0"/>
+                <a:ea typeface="Noto Sans CJK KR" pitchFamily="34" charset="-122"/>
+                <a:cs typeface="Noto Sans CJK KR" pitchFamily="34" charset="-120"/>
+              </a:rPr>
+              <a:t>TX·RX는 PL(Master IP)과 Slave 사이를 잇는 물리 연결 — 외부 장치-PS-PL 경로와는 분리된 통신 채널</a:t>
+            </a:r>
+            <a:endParaRPr lang="en-US" sz="1800" dirty="0"/>
+          </a:p>
+        </p:txBody>
+      </p:sp>
+      <p:pic>
+        <p:nvPicPr>
+          <p:cNvPr id="4" name="Image 0" descr="/home/user/SoC_Design_and_Programming/diagrams/section3/zoom/m_gpio.png">    </p:cNvPr>
+          <p:cNvPicPr>
+            <a:picLocks noChangeAspect="1"/>
+          </p:cNvPicPr>
+          <p:nvPr/>
+        </p:nvPicPr>
+        <p:blipFill>
+          <a:blip r:embed="rId2"/>
+          <a:srcRect l="0" r="0" t="0" b="0"/>
+          <a:stretch/>
+        </p:blipFill>
+        <p:spPr>
+          <a:xfrm>
+            <a:off x="4846320" y="1916974"/>
+            <a:ext cx="3749040" cy="1606731"/>
+          </a:xfrm>
+          <a:prstGeom prst="rect">
+            <a:avLst/>
+          </a:prstGeom>
+        </p:spPr>
+      </p:pic>
+      <p:sp>
+        <p:nvSpPr>
+          <p:cNvPr id="5" name="Text 2"/>
+          <p:cNvSpPr/>
+          <p:nvPr/>
+        </p:nvSpPr>
+        <p:spPr>
+          <a:xfrm>
+            <a:off x="8503920" y="4754880"/>
+            <a:ext cx="457200" cy="274320"/>
+          </a:xfrm>
+          <a:prstGeom prst="rect">
+            <a:avLst/>
+          </a:prstGeom>
+          <a:noFill/>
+          <a:ln/>
+        </p:spPr>
+        <p:txBody>
+          <a:bodyPr wrap="square" rtlCol="0" anchor="ctr"/>
+          <a:lstStyle/>
+          <a:p>
+            <a:pPr algn="r" indent="0" marL="0">
+              <a:buNone/>
+            </a:pPr>
+            <a:r>
+              <a:rPr lang="en-US" sz="1200" dirty="0">
+                <a:solidFill>
+                  <a:srgbClr val="999999"/>
+                </a:solidFill>
+                <a:latin typeface="Noto Sans CJK KR" pitchFamily="34" charset="0"/>
+                <a:ea typeface="Noto Sans CJK KR" pitchFamily="34" charset="-122"/>
+                <a:cs typeface="Noto Sans CJK KR" pitchFamily="34" charset="-120"/>
+              </a:rPr>
+              <a:t>17</a:t>
+            </a:r>
+            <a:endParaRPr lang="en-US" sz="1200" dirty="0"/>
+          </a:p>
+        </p:txBody>
+      </p:sp>
+    </p:spTree>
+  </p:cSld>
+  <p:clrMapOvr>
+    <a:masterClrMapping/>
+  </p:clrMapOvr>
+</p:sld>
+</file>
+
+<file path=ppt/slides/slide18.xml><?xml version="1.0" encoding="utf-8"?>
+<p:sld xmlns:a="http://schemas.openxmlformats.org/drawingml/2006/main" xmlns:p="http://schemas.openxmlformats.org/presentationml/2006/main" xmlns:r="http://schemas.openxmlformats.org/officeDocument/2006/relationships">
+  <p:cSld>
+    <p:spTree>
+      <p:nvGrpSpPr>
+        <p:cNvPr id="1" name=""/>
+        <p:cNvGrpSpPr/>
+        <p:nvPr/>
+      </p:nvGrpSpPr>
+      <p:grpSpPr/>
+      <p:sp>
+        <p:nvSpPr>
+          <p:cNvPr id="2" name="Text 0"/>
+          <p:cNvSpPr/>
+          <p:nvPr/>
+        </p:nvSpPr>
+        <p:spPr>
+          <a:xfrm>
+            <a:off x="548640" y="274320"/>
+            <a:ext cx="8046720" cy="777240"/>
+          </a:xfrm>
+          <a:prstGeom prst="rect">
+            <a:avLst/>
+          </a:prstGeom>
+          <a:noFill/>
+          <a:ln/>
+        </p:spPr>
+        <p:txBody>
+          <a:bodyPr wrap="square" lIns="0" tIns="0" rIns="0" bIns="0" rtlCol="0" anchor="ctr"/>
+          <a:lstStyle/>
+          <a:p>
+            <a:pPr indent="0" marL="0">
+              <a:buNone/>
+            </a:pPr>
+            <a:r>
+              <a:rPr lang="en-US" sz="3600" b="1" dirty="0">
+                <a:solidFill>
+                  <a:srgbClr val="111111"/>
+                </a:solidFill>
+                <a:latin typeface="Noto Sans CJK KR" pitchFamily="34" charset="0"/>
+                <a:ea typeface="Noto Sans CJK KR" pitchFamily="34" charset="-122"/>
+                <a:cs typeface="Noto Sans CJK KR" pitchFamily="34" charset="-120"/>
+              </a:rPr>
+              <a:t>Master - PS 확대</a:t>
+            </a:r>
+            <a:endParaRPr lang="en-US" sz="3600" dirty="0"/>
+          </a:p>
+        </p:txBody>
+      </p:sp>
+      <p:sp>
+        <p:nvSpPr>
+          <p:cNvPr id="3" name="Text 1"/>
+          <p:cNvSpPr/>
+          <p:nvPr/>
+        </p:nvSpPr>
+        <p:spPr>
+          <a:xfrm>
+            <a:off x="548640" y="1188720"/>
+            <a:ext cx="8046720" cy="594360"/>
+          </a:xfrm>
+          <a:prstGeom prst="rect">
+            <a:avLst/>
+          </a:prstGeom>
+          <a:noFill/>
+          <a:ln/>
+        </p:spPr>
+        <p:txBody>
+          <a:bodyPr wrap="square" rtlCol="0" anchor="t"/>
+          <a:lstStyle/>
+          <a:p>
+            <a:pPr marL="342900" indent="-342900">
+              <a:spcAft>
+                <a:spcPts val="600"/>
+              </a:spcAft>
+              <a:buSzPct val="100000"/>
+              <a:buChar char="•"/>
+            </a:pPr>
+            <a:r>
+              <a:rPr lang="en-US" sz="1700" dirty="0">
+                <a:solidFill>
+                  <a:srgbClr val="222222"/>
+                </a:solidFill>
+                <a:latin typeface="Noto Sans CJK KR" pitchFamily="34" charset="0"/>
+                <a:ea typeface="Noto Sans CJK KR" pitchFamily="34" charset="-122"/>
+                <a:cs typeface="Noto Sans CJK KR" pitchFamily="34" charset="-120"/>
+              </a:rPr>
+              <a:t>외부 테스트 장치에서 초깃값을 입력받아 Master를 초기 구동</a:t>
+            </a:r>
+            <a:endParaRPr lang="en-US" sz="1700" dirty="0"/>
+          </a:p>
+          <a:p>
+            <a:pPr marL="342900" indent="-342900">
+              <a:spcAft>
+                <a:spcPts val="600"/>
+              </a:spcAft>
+              <a:buSzPct val="100000"/>
+              <a:buChar char="•"/>
+            </a:pPr>
+            <a:r>
+              <a:rPr lang="en-US" sz="1700" dirty="0">
+                <a:solidFill>
+                  <a:srgbClr val="222222"/>
+                </a:solidFill>
+                <a:latin typeface="Noto Sans CJK KR" pitchFamily="34" charset="0"/>
+                <a:ea typeface="Noto Sans CJK KR" pitchFamily="34" charset="-122"/>
+                <a:cs typeface="Noto Sans CJK KR" pitchFamily="34" charset="-120"/>
+              </a:rPr>
+              <a:t>구동 중인 Master 값을 레지스터로 읽고, Master가 발생시키는 인터럽트를 수신</a:t>
+            </a:r>
+            <a:endParaRPr lang="en-US" sz="1700" dirty="0"/>
+          </a:p>
+        </p:txBody>
+      </p:sp>
+      <p:pic>
+        <p:nvPicPr>
+          <p:cNvPr id="4" name="Image 0" descr="/home/user/SoC_Design_and_Programming/diagrams/section3/zoom/m_ps.png">    </p:cNvPr>
+          <p:cNvPicPr>
+            <a:picLocks noChangeAspect="1"/>
+          </p:cNvPicPr>
+          <p:nvPr/>
+        </p:nvPicPr>
+        <p:blipFill>
+          <a:blip r:embed="rId2"/>
+          <a:srcRect l="0" r="0" t="0" b="0"/>
+          <a:stretch/>
+        </p:blipFill>
+        <p:spPr>
+          <a:xfrm>
+            <a:off x="1103179" y="1783080"/>
+            <a:ext cx="6937641" cy="2743200"/>
+          </a:xfrm>
+          <a:prstGeom prst="rect">
+            <a:avLst/>
+          </a:prstGeom>
+        </p:spPr>
+      </p:pic>
+      <p:sp>
+        <p:nvSpPr>
+          <p:cNvPr id="5" name="Text 2"/>
+          <p:cNvSpPr/>
+          <p:nvPr/>
+        </p:nvSpPr>
+        <p:spPr>
+          <a:xfrm>
+            <a:off x="8503920" y="4754880"/>
+            <a:ext cx="457200" cy="274320"/>
+          </a:xfrm>
+          <a:prstGeom prst="rect">
+            <a:avLst/>
+          </a:prstGeom>
+          <a:noFill/>
+          <a:ln/>
+        </p:spPr>
+        <p:txBody>
+          <a:bodyPr wrap="square" rtlCol="0" anchor="ctr"/>
+          <a:lstStyle/>
+          <a:p>
+            <a:pPr algn="r" indent="0" marL="0">
+              <a:buNone/>
+            </a:pPr>
+            <a:r>
+              <a:rPr lang="en-US" sz="1200" dirty="0">
+                <a:solidFill>
+                  <a:srgbClr val="999999"/>
+                </a:solidFill>
+                <a:latin typeface="Noto Sans CJK KR" pitchFamily="34" charset="0"/>
+                <a:ea typeface="Noto Sans CJK KR" pitchFamily="34" charset="-122"/>
+                <a:cs typeface="Noto Sans CJK KR" pitchFamily="34" charset="-120"/>
+              </a:rPr>
+              <a:t>18</a:t>
+            </a:r>
+            <a:endParaRPr lang="en-US" sz="1200" dirty="0"/>
+          </a:p>
+        </p:txBody>
+      </p:sp>
+    </p:spTree>
+  </p:cSld>
+  <p:clrMapOvr>
+    <a:masterClrMapping/>
+  </p:clrMapOvr>
+</p:sld>
+</file>
+
+<file path=ppt/slides/slide19.xml><?xml version="1.0" encoding="utf-8"?>
+<p:sld xmlns:a="http://schemas.openxmlformats.org/drawingml/2006/main" xmlns:p="http://schemas.openxmlformats.org/presentationml/2006/main" xmlns:r="http://schemas.openxmlformats.org/officeDocument/2006/relationships">
+  <p:cSld>
+    <p:spTree>
+      <p:nvGrpSpPr>
+        <p:cNvPr id="1" name=""/>
+        <p:cNvGrpSpPr/>
+        <p:nvPr/>
+      </p:nvGrpSpPr>
+      <p:grpSpPr/>
+      <p:sp>
+        <p:nvSpPr>
+          <p:cNvPr id="2" name="Text 0"/>
+          <p:cNvSpPr/>
+          <p:nvPr/>
+        </p:nvSpPr>
+        <p:spPr>
+          <a:xfrm>
+            <a:off x="548640" y="274320"/>
+            <a:ext cx="8046720" cy="777240"/>
+          </a:xfrm>
+          <a:prstGeom prst="rect">
+            <a:avLst/>
+          </a:prstGeom>
+          <a:noFill/>
+          <a:ln/>
+        </p:spPr>
+        <p:txBody>
+          <a:bodyPr wrap="square" lIns="0" tIns="0" rIns="0" bIns="0" rtlCol="0" anchor="ctr"/>
+          <a:lstStyle/>
+          <a:p>
+            <a:pPr indent="0" marL="0">
+              <a:buNone/>
+            </a:pPr>
+            <a:r>
+              <a:rPr lang="en-US" sz="3600" b="1" dirty="0">
+                <a:solidFill>
+                  <a:srgbClr val="111111"/>
+                </a:solidFill>
+                <a:latin typeface="Noto Sans CJK KR" pitchFamily="34" charset="0"/>
+                <a:ea typeface="Noto Sans CJK KR" pitchFamily="34" charset="-122"/>
+                <a:cs typeface="Noto Sans CJK KR" pitchFamily="34" charset="-120"/>
+              </a:rPr>
+              <a:t>Master - PL 확대</a:t>
+            </a:r>
+            <a:endParaRPr lang="en-US" sz="3600" dirty="0"/>
+          </a:p>
+        </p:txBody>
+      </p:sp>
+      <p:sp>
+        <p:nvSpPr>
+          <p:cNvPr id="3" name="Text 1"/>
+          <p:cNvSpPr/>
+          <p:nvPr/>
+        </p:nvSpPr>
+        <p:spPr>
+          <a:xfrm>
+            <a:off x="548640" y="1234440"/>
+            <a:ext cx="4023360" cy="2971800"/>
+          </a:xfrm>
+          <a:prstGeom prst="rect">
+            <a:avLst/>
+          </a:prstGeom>
+          <a:noFill/>
+          <a:ln/>
+        </p:spPr>
+        <p:txBody>
+          <a:bodyPr wrap="square" rtlCol="0" anchor="t"/>
+          <a:lstStyle/>
+          <a:p>
+            <a:pPr marL="342900" indent="-342900">
+              <a:spcAft>
+                <a:spcPts val="1000"/>
+              </a:spcAft>
+              <a:buSzPct val="100000"/>
+              <a:buChar char="•"/>
+            </a:pPr>
+            <a:r>
+              <a:rPr lang="en-US" sz="1800" dirty="0">
+                <a:solidFill>
+                  <a:srgbClr val="222222"/>
+                </a:solidFill>
+                <a:latin typeface="Noto Sans CJK KR" pitchFamily="34" charset="0"/>
+                <a:ea typeface="Noto Sans CJK KR" pitchFamily="34" charset="-122"/>
+                <a:cs typeface="Noto Sans CJK KR" pitchFamily="34" charset="-120"/>
+              </a:rPr>
+              <a:t>LED · 푸시버튼 · DIP 스위치 · 7-seg와 Master IP로 보드 자체의 입출력 구성</a:t>
+            </a:r>
+            <a:endParaRPr lang="en-US" sz="1800" dirty="0"/>
+          </a:p>
+          <a:p>
+            <a:pPr marL="342900" indent="-342900">
+              <a:spcAft>
+                <a:spcPts val="1000"/>
+              </a:spcAft>
+              <a:buSzPct val="100000"/>
+              <a:buChar char="•"/>
+            </a:pPr>
+            <a:r>
+              <a:rPr lang="en-US" sz="1800" dirty="0">
+                <a:solidFill>
+                  <a:srgbClr val="222222"/>
+                </a:solidFill>
+                <a:latin typeface="Noto Sans CJK KR" pitchFamily="34" charset="0"/>
+                <a:ea typeface="Noto Sans CJK KR" pitchFamily="34" charset="-122"/>
+                <a:cs typeface="Noto Sans CJK KR" pitchFamily="34" charset="-120"/>
+              </a:rPr>
+              <a:t>LED는 RX/TX 이진 신호를 그대로 받아 통신 상태를 표시</a:t>
+            </a:r>
+            <a:endParaRPr lang="en-US" sz="1800" dirty="0"/>
+          </a:p>
+          <a:p>
+            <a:pPr marL="342900" indent="-342900">
+              <a:spcAft>
+                <a:spcPts val="1000"/>
+              </a:spcAft>
+              <a:buSzPct val="100000"/>
+              <a:buChar char="•"/>
+            </a:pPr>
+            <a:r>
+              <a:rPr lang="en-US" sz="1800" dirty="0">
+                <a:solidFill>
+                  <a:srgbClr val="222222"/>
+                </a:solidFill>
+                <a:latin typeface="Noto Sans CJK KR" pitchFamily="34" charset="0"/>
+                <a:ea typeface="Noto Sans CJK KR" pitchFamily="34" charset="-122"/>
+                <a:cs typeface="Noto Sans CJK KR" pitchFamily="34" charset="-120"/>
+              </a:rPr>
+              <a:t>DIP 스위치·7-seg는 슬롯별 통신 상태와 수신 데이터를 출력 — Master IP가 이들을 조율</a:t>
+            </a:r>
+            <a:endParaRPr lang="en-US" sz="1800" dirty="0"/>
+          </a:p>
+        </p:txBody>
+      </p:sp>
+      <p:pic>
+        <p:nvPicPr>
+          <p:cNvPr id="4" name="Image 0" descr="/home/user/SoC_Design_and_Programming/diagrams/section3/zoom/m_pl.png">    </p:cNvPr>
+          <p:cNvPicPr>
+            <a:picLocks noChangeAspect="1"/>
+          </p:cNvPicPr>
+          <p:nvPr/>
+        </p:nvPicPr>
+        <p:blipFill>
+          <a:blip r:embed="rId2"/>
+          <a:srcRect l="0" r="0" t="0" b="0"/>
+          <a:stretch/>
+        </p:blipFill>
+        <p:spPr>
+          <a:xfrm>
+            <a:off x="4846320" y="1653968"/>
+            <a:ext cx="3749040" cy="2132745"/>
+          </a:xfrm>
+          <a:prstGeom prst="rect">
+            <a:avLst/>
+          </a:prstGeom>
+        </p:spPr>
+      </p:pic>
+      <p:sp>
+        <p:nvSpPr>
+          <p:cNvPr id="5" name="Text 2"/>
+          <p:cNvSpPr/>
+          <p:nvPr/>
+        </p:nvSpPr>
+        <p:spPr>
+          <a:xfrm>
+            <a:off x="8503920" y="4754880"/>
+            <a:ext cx="457200" cy="274320"/>
+          </a:xfrm>
+          <a:prstGeom prst="rect">
+            <a:avLst/>
+          </a:prstGeom>
+          <a:noFill/>
+          <a:ln/>
+        </p:spPr>
+        <p:txBody>
+          <a:bodyPr wrap="square" rtlCol="0" anchor="ctr"/>
+          <a:lstStyle/>
+          <a:p>
+            <a:pPr algn="r" indent="0" marL="0">
+              <a:buNone/>
+            </a:pPr>
+            <a:r>
+              <a:rPr lang="en-US" sz="1200" dirty="0">
+                <a:solidFill>
+                  <a:srgbClr val="999999"/>
+                </a:solidFill>
+                <a:latin typeface="Noto Sans CJK KR" pitchFamily="34" charset="0"/>
+                <a:ea typeface="Noto Sans CJK KR" pitchFamily="34" charset="-122"/>
+                <a:cs typeface="Noto Sans CJK KR" pitchFamily="34" charset="-120"/>
+              </a:rPr>
+              <a:t>19</a:t>
+            </a:r>
+            <a:endParaRPr lang="en-US" sz="1200" dirty="0"/>
+          </a:p>
+        </p:txBody>
+      </p:sp>
+    </p:spTree>
+  </p:cSld>
+  <p:clrMapOvr>
+    <a:masterClrMapping/>
+  </p:clrMapOvr>
+</p:sld>
+</file>
+
+<file path=ppt/slides/slide2.xml><?xml version="1.0" encoding="utf-8"?>
 <p:sld xmlns:a="http://schemas.openxmlformats.org/drawingml/2006/main" xmlns:r="http://schemas.openxmlformats.org/officeDocument/2006/relationships" xmlns:p="http://schemas.openxmlformats.org/presentationml/2006/main">
-  <p:cSld>
+  <p:cSld name="Slide 2">
     <p:spTree>
       <p:nvGrpSpPr>
         <p:cNvPr id="1" name=""/>
@@ -1134,7 +3673,7 @@
           <a:bodyPr wrap="square" lIns="0" tIns="0" rIns="0" bIns="0" rtlCol="0" anchor="ctr"/>
           <a:lstStyle/>
           <a:p>
-            <a:pPr marL="0" indent="0">
+            <a:pPr indent="0" marL="0">
               <a:buNone/>
             </a:pPr>
             <a:r>
@@ -1146,937 +3685,7 @@
                 <a:ea typeface="Noto Sans CJK KR" pitchFamily="34" charset="-122"/>
                 <a:cs typeface="Noto Sans CJK KR" pitchFamily="34" charset="-120"/>
               </a:rPr>
-              <a:t>DLL - Slave 프레임 구조</a:t>
-            </a:r>
-            <a:endParaRPr lang="en-US" sz="3600" dirty="0"/>
-          </a:p>
-        </p:txBody>
-      </p:sp>
-      <p:sp>
-        <p:nvSpPr>
-          <p:cNvPr id="3" name="Text 1"/>
-          <p:cNvSpPr/>
-          <p:nvPr/>
-        </p:nvSpPr>
-        <p:spPr>
-          <a:xfrm>
-            <a:off x="548640" y="1234440"/>
-            <a:ext cx="8046720" cy="1874520"/>
-          </a:xfrm>
-          <a:prstGeom prst="rect">
-            <a:avLst/>
-          </a:prstGeom>
-          <a:noFill/>
-          <a:ln/>
-        </p:spPr>
-        <p:txBody>
-          <a:bodyPr wrap="square" rtlCol="0" anchor="t"/>
-          <a:lstStyle/>
-          <a:p>
-            <a:pPr marL="342900" indent="-342900">
-              <a:spcAft>
-                <a:spcPts val="800"/>
-              </a:spcAft>
-              <a:buSzPct val="100000"/>
-              <a:buChar char="•"/>
-            </a:pPr>
-            <a:r>
-              <a:rPr lang="en-US" sz="1900" dirty="0">
-                <a:solidFill>
-                  <a:srgbClr val="222222"/>
-                </a:solidFill>
-                <a:latin typeface="Noto Sans CJK KR" pitchFamily="34" charset="0"/>
-                <a:ea typeface="Noto Sans CJK KR" pitchFamily="34" charset="-122"/>
-                <a:cs typeface="Noto Sans CJK KR" pitchFamily="34" charset="-120"/>
-              </a:rPr>
-              <a:t>필드 구성 (총 50비트)</a:t>
-            </a:r>
-            <a:endParaRPr lang="en-US" sz="1900" dirty="0"/>
-          </a:p>
-          <a:p>
-            <a:pPr marL="685800" lvl="1" indent="-342900">
-              <a:spcAft>
-                <a:spcPts val="600"/>
-              </a:spcAft>
-              <a:buSzPct val="100000"/>
-              <a:buChar char="•"/>
-            </a:pPr>
-            <a:r>
-              <a:rPr lang="en-US" sz="1600" dirty="0">
-                <a:solidFill>
-                  <a:srgbClr val="444444"/>
-                </a:solidFill>
-                <a:latin typeface="Noto Sans CJK KR" pitchFamily="34" charset="0"/>
-                <a:ea typeface="Noto Sans CJK KR" pitchFamily="34" charset="-122"/>
-                <a:cs typeface="Noto Sans CJK KR" pitchFamily="34" charset="-120"/>
-              </a:rPr>
-              <a:t>preamble(8, 0xAA) + slot_id(3) + payload(32) + hamming parity(7)</a:t>
-            </a:r>
-            <a:endParaRPr lang="en-US" sz="1900" dirty="0"/>
-          </a:p>
-          <a:p>
-            <a:pPr marL="342900" indent="-342900">
-              <a:spcAft>
-                <a:spcPts val="800"/>
-              </a:spcAft>
-              <a:buSzPct val="100000"/>
-              <a:buChar char="•"/>
-            </a:pPr>
-            <a:r>
-              <a:rPr lang="en-US" sz="1900" dirty="0">
-                <a:solidFill>
-                  <a:srgbClr val="222222"/>
-                </a:solidFill>
-                <a:latin typeface="Noto Sans CJK KR" pitchFamily="34" charset="0"/>
-                <a:ea typeface="Noto Sans CJK KR" pitchFamily="34" charset="-122"/>
-                <a:cs typeface="Noto Sans CJK KR" pitchFamily="34" charset="-120"/>
-              </a:rPr>
-              <a:t>에러 검출/정정</a:t>
-            </a:r>
-            <a:endParaRPr lang="en-US" sz="1900" dirty="0"/>
-          </a:p>
-          <a:p>
-            <a:pPr marL="685800" lvl="1" indent="-342900">
-              <a:spcAft>
-                <a:spcPts val="600"/>
-              </a:spcAft>
-              <a:buSzPct val="100000"/>
-              <a:buChar char="•"/>
-            </a:pPr>
-            <a:r>
-              <a:rPr lang="en-US" sz="1600" dirty="0">
-                <a:solidFill>
-                  <a:srgbClr val="444444"/>
-                </a:solidFill>
-                <a:latin typeface="Noto Sans CJK KR" pitchFamily="34" charset="0"/>
-                <a:ea typeface="Noto Sans CJK KR" pitchFamily="34" charset="-122"/>
-                <a:cs typeface="Noto Sans CJK KR" pitchFamily="34" charset="-120"/>
-              </a:rPr>
-              <a:t>SEC-DED 방식 — 1비트 에러는 검출 후 정정, 2비트 에러는 검출만 가능</a:t>
-            </a:r>
-            <a:endParaRPr lang="en-US" sz="1900" dirty="0"/>
-          </a:p>
-          <a:p>
-            <a:pPr marL="342900" indent="-342900">
-              <a:spcAft>
-                <a:spcPts val="800"/>
-              </a:spcAft>
-              <a:buSzPct val="100000"/>
-              <a:buChar char="•"/>
-            </a:pPr>
-            <a:r>
-              <a:rPr lang="en-US" sz="1900" dirty="0">
-                <a:solidFill>
-                  <a:srgbClr val="222222"/>
-                </a:solidFill>
-                <a:latin typeface="Noto Sans CJK KR" pitchFamily="34" charset="0"/>
-                <a:ea typeface="Noto Sans CJK KR" pitchFamily="34" charset="-122"/>
-                <a:cs typeface="Noto Sans CJK KR" pitchFamily="34" charset="-120"/>
-              </a:rPr>
-              <a:t>slot_id의 의미</a:t>
-            </a:r>
-            <a:endParaRPr lang="en-US" sz="1900" dirty="0"/>
-          </a:p>
-          <a:p>
-            <a:pPr marL="685800" lvl="1" indent="-342900">
-              <a:buSzPct val="100000"/>
-              <a:buChar char="•"/>
-            </a:pPr>
-            <a:r>
-              <a:rPr lang="en-US" sz="1600" dirty="0">
-                <a:solidFill>
-                  <a:srgbClr val="444444"/>
-                </a:solidFill>
-                <a:latin typeface="Noto Sans CJK KR" pitchFamily="34" charset="0"/>
-                <a:ea typeface="Noto Sans CJK KR" pitchFamily="34" charset="-122"/>
-                <a:cs typeface="Noto Sans CJK KR" pitchFamily="34" charset="-120"/>
-              </a:rPr>
-              <a:t>Slave 고유 식별자가 아니라 TDMA 슬롯 번호로 운용됨</a:t>
-            </a:r>
-            <a:endParaRPr lang="en-US" sz="1900" dirty="0"/>
-          </a:p>
-        </p:txBody>
-      </p:sp>
-      <p:pic>
-        <p:nvPicPr>
-          <p:cNvPr id="4" name="Image 0" descr="/home/user/SoC_Design_and_Programming/diagrams/slave_frame.png"/>
-          <p:cNvPicPr>
-            <a:picLocks noChangeAspect="1"/>
-          </p:cNvPicPr>
-          <p:nvPr/>
-        </p:nvPicPr>
-        <p:blipFill>
-          <a:blip r:embed="rId2"/>
-          <a:srcRect/>
-          <a:stretch/>
-        </p:blipFill>
-        <p:spPr>
-          <a:xfrm>
-            <a:off x="548640" y="3246120"/>
-            <a:ext cx="8046720" cy="563270"/>
-          </a:xfrm>
-          <a:prstGeom prst="rect">
-            <a:avLst/>
-          </a:prstGeom>
-        </p:spPr>
-      </p:pic>
-      <p:sp>
-        <p:nvSpPr>
-          <p:cNvPr id="5" name="Text 2"/>
-          <p:cNvSpPr/>
-          <p:nvPr/>
-        </p:nvSpPr>
-        <p:spPr>
-          <a:xfrm>
-            <a:off x="548640" y="3900830"/>
-            <a:ext cx="8046720" cy="228600"/>
-          </a:xfrm>
-          <a:prstGeom prst="rect">
-            <a:avLst/>
-          </a:prstGeom>
-          <a:noFill/>
-          <a:ln/>
-        </p:spPr>
-        <p:txBody>
-          <a:bodyPr wrap="square" rtlCol="0" anchor="ctr"/>
-          <a:lstStyle/>
-          <a:p>
-            <a:pPr marL="0" indent="0" algn="ctr">
-              <a:buNone/>
-            </a:pPr>
-            <a:r>
-              <a:rPr lang="en-US" sz="900" dirty="0">
-                <a:solidFill>
-                  <a:srgbClr val="999999"/>
-                </a:solidFill>
-                <a:latin typeface="Noto Sans CJK KR" pitchFamily="34" charset="0"/>
-                <a:ea typeface="Noto Sans CJK KR" pitchFamily="34" charset="-122"/>
-                <a:cs typeface="Noto Sans CJK KR" pitchFamily="34" charset="-120"/>
-              </a:rPr>
-              <a:t>Slave 프레임 비트필드 (전송 순서: preamble → slot_id → payload → hamming)</a:t>
-            </a:r>
-            <a:endParaRPr lang="en-US" sz="900" dirty="0"/>
-          </a:p>
-        </p:txBody>
-      </p:sp>
-      <p:sp>
-        <p:nvSpPr>
-          <p:cNvPr id="6" name="Text 3"/>
-          <p:cNvSpPr/>
-          <p:nvPr/>
-        </p:nvSpPr>
-        <p:spPr>
-          <a:xfrm>
-            <a:off x="8503920" y="4754880"/>
-            <a:ext cx="457200" cy="274320"/>
-          </a:xfrm>
-          <a:prstGeom prst="rect">
-            <a:avLst/>
-          </a:prstGeom>
-          <a:noFill/>
-          <a:ln/>
-        </p:spPr>
-        <p:txBody>
-          <a:bodyPr wrap="square" rtlCol="0" anchor="ctr"/>
-          <a:lstStyle/>
-          <a:p>
-            <a:pPr marL="0" indent="0" algn="r">
-              <a:buNone/>
-            </a:pPr>
-            <a:r>
-              <a:rPr lang="en-US" sz="1200" dirty="0">
-                <a:solidFill>
-                  <a:srgbClr val="999999"/>
-                </a:solidFill>
-                <a:latin typeface="Noto Sans CJK KR" pitchFamily="34" charset="0"/>
-                <a:ea typeface="Noto Sans CJK KR" pitchFamily="34" charset="-122"/>
-                <a:cs typeface="Noto Sans CJK KR" pitchFamily="34" charset="-120"/>
-              </a:rPr>
-              <a:t>10</a:t>
-            </a:r>
-            <a:endParaRPr lang="en-US" sz="1200" dirty="0"/>
-          </a:p>
-        </p:txBody>
-      </p:sp>
-    </p:spTree>
-  </p:cSld>
-  <p:clrMapOvr>
-    <a:masterClrMapping/>
-  </p:clrMapOvr>
-</p:sld>
-</file>
-
-<file path=ppt/slides/slide11.xml><?xml version="1.0" encoding="utf-8"?>
-<p:sld xmlns:a="http://schemas.openxmlformats.org/drawingml/2006/main" xmlns:r="http://schemas.openxmlformats.org/officeDocument/2006/relationships" xmlns:p="http://schemas.openxmlformats.org/presentationml/2006/main">
-  <p:cSld>
-    <p:spTree>
-      <p:nvGrpSpPr>
-        <p:cNvPr id="1" name=""/>
-        <p:cNvGrpSpPr/>
-        <p:nvPr/>
-      </p:nvGrpSpPr>
-      <p:grpSpPr>
-        <a:xfrm>
-          <a:off x="0" y="0"/>
-          <a:ext cx="0" cy="0"/>
-          <a:chOff x="0" y="0"/>
-          <a:chExt cx="0" cy="0"/>
-        </a:xfrm>
-      </p:grpSpPr>
-      <p:sp>
-        <p:nvSpPr>
-          <p:cNvPr id="2" name="Text 0"/>
-          <p:cNvSpPr/>
-          <p:nvPr/>
-        </p:nvSpPr>
-        <p:spPr>
-          <a:xfrm>
-            <a:off x="548640" y="274320"/>
-            <a:ext cx="8046720" cy="777240"/>
-          </a:xfrm>
-          <a:prstGeom prst="rect">
-            <a:avLst/>
-          </a:prstGeom>
-          <a:noFill/>
-          <a:ln/>
-        </p:spPr>
-        <p:txBody>
-          <a:bodyPr wrap="square" lIns="0" tIns="0" rIns="0" bIns="0" rtlCol="0" anchor="ctr"/>
-          <a:lstStyle/>
-          <a:p>
-            <a:pPr marL="0" indent="0">
-              <a:buNone/>
-            </a:pPr>
-            <a:r>
-              <a:rPr lang="en-US" sz="3600" b="1" dirty="0">
-                <a:solidFill>
-                  <a:srgbClr val="111111"/>
-                </a:solidFill>
-                <a:latin typeface="Noto Sans CJK KR" pitchFamily="34" charset="0"/>
-                <a:ea typeface="Noto Sans CJK KR" pitchFamily="34" charset="-122"/>
-                <a:cs typeface="Noto Sans CJK KR" pitchFamily="34" charset="-120"/>
-              </a:rPr>
-              <a:t>DLL - Master 프레임 구조</a:t>
-            </a:r>
-            <a:endParaRPr lang="en-US" sz="3600" dirty="0"/>
-          </a:p>
-        </p:txBody>
-      </p:sp>
-      <p:sp>
-        <p:nvSpPr>
-          <p:cNvPr id="3" name="Text 1"/>
-          <p:cNvSpPr/>
-          <p:nvPr/>
-        </p:nvSpPr>
-        <p:spPr>
-          <a:xfrm>
-            <a:off x="548640" y="1234440"/>
-            <a:ext cx="8046720" cy="2057400"/>
-          </a:xfrm>
-          <a:prstGeom prst="rect">
-            <a:avLst/>
-          </a:prstGeom>
-          <a:noFill/>
-          <a:ln/>
-        </p:spPr>
-        <p:txBody>
-          <a:bodyPr wrap="square" rtlCol="0" anchor="t"/>
-          <a:lstStyle/>
-          <a:p>
-            <a:pPr marL="342900" indent="-342900">
-              <a:spcAft>
-                <a:spcPts val="800"/>
-              </a:spcAft>
-              <a:buSzPct val="100000"/>
-              <a:buChar char="•"/>
-            </a:pPr>
-            <a:r>
-              <a:rPr lang="en-US" sz="1900" dirty="0">
-                <a:solidFill>
-                  <a:srgbClr val="222222"/>
-                </a:solidFill>
-                <a:latin typeface="Noto Sans CJK KR" pitchFamily="34" charset="0"/>
-                <a:ea typeface="Noto Sans CJK KR" pitchFamily="34" charset="-122"/>
-                <a:cs typeface="Noto Sans CJK KR" pitchFamily="34" charset="-120"/>
-              </a:rPr>
-              <a:t>필드 구성</a:t>
-            </a:r>
-            <a:endParaRPr lang="en-US" sz="1900" dirty="0"/>
-          </a:p>
-          <a:p>
-            <a:pPr marL="685800" lvl="1" indent="-342900">
-              <a:spcAft>
-                <a:spcPts val="600"/>
-              </a:spcAft>
-              <a:buSzPct val="100000"/>
-              <a:buChar char="•"/>
-            </a:pPr>
-            <a:r>
-              <a:rPr lang="en-US" sz="1600" dirty="0">
-                <a:solidFill>
-                  <a:srgbClr val="444444"/>
-                </a:solidFill>
-                <a:latin typeface="Noto Sans CJK KR" pitchFamily="34" charset="0"/>
-                <a:ea typeface="Noto Sans CJK KR" pitchFamily="34" charset="-122"/>
-                <a:cs typeface="Noto Sans CJK KR" pitchFamily="34" charset="-120"/>
-              </a:rPr>
-              <a:t>preamble(8) + halt_cmd(8) + guard_ticks(10) + reserved(17) + hamming parity(7)</a:t>
-            </a:r>
-            <a:endParaRPr lang="en-US" sz="1900" dirty="0"/>
-          </a:p>
-          <a:p>
-            <a:pPr marL="342900" indent="-342900">
-              <a:spcAft>
-                <a:spcPts val="800"/>
-              </a:spcAft>
-              <a:buSzPct val="100000"/>
-              <a:buChar char="•"/>
-            </a:pPr>
-            <a:r>
-              <a:rPr lang="en-US" sz="1900" dirty="0">
-                <a:solidFill>
-                  <a:srgbClr val="222222"/>
-                </a:solidFill>
-                <a:latin typeface="Noto Sans CJK KR" pitchFamily="34" charset="0"/>
-                <a:ea typeface="Noto Sans CJK KR" pitchFamily="34" charset="-122"/>
-                <a:cs typeface="Noto Sans CJK KR" pitchFamily="34" charset="-120"/>
-              </a:rPr>
-              <a:t>halt_cmd</a:t>
-            </a:r>
-            <a:endParaRPr lang="en-US" sz="1900" dirty="0"/>
-          </a:p>
-          <a:p>
-            <a:pPr marL="685800" lvl="1" indent="-342900">
-              <a:spcAft>
-                <a:spcPts val="600"/>
-              </a:spcAft>
-              <a:buSzPct val="100000"/>
-              <a:buChar char="•"/>
-            </a:pPr>
-            <a:r>
-              <a:rPr lang="en-US" sz="1600" dirty="0">
-                <a:solidFill>
-                  <a:srgbClr val="444444"/>
-                </a:solidFill>
-                <a:latin typeface="Noto Sans CJK KR" pitchFamily="34" charset="0"/>
-                <a:ea typeface="Noto Sans CJK KR" pitchFamily="34" charset="-122"/>
-                <a:cs typeface="Noto Sans CJK KR" pitchFamily="34" charset="-120"/>
-              </a:rPr>
-              <a:t>Slave별 1비트 마스크 — err_cnt가 임계치(FAULT_TH) 초과 시 해당 비트 set, 고장 Slave 중단 명령</a:t>
-            </a:r>
-            <a:endParaRPr lang="en-US" sz="1900" dirty="0"/>
-          </a:p>
-          <a:p>
-            <a:pPr marL="342900" indent="-342900">
-              <a:spcAft>
-                <a:spcPts val="800"/>
-              </a:spcAft>
-              <a:buSzPct val="100000"/>
-              <a:buChar char="•"/>
-            </a:pPr>
-            <a:r>
-              <a:rPr lang="en-US" sz="1900" dirty="0">
-                <a:solidFill>
-                  <a:srgbClr val="222222"/>
-                </a:solidFill>
-                <a:latin typeface="Noto Sans CJK KR" pitchFamily="34" charset="0"/>
-                <a:ea typeface="Noto Sans CJK KR" pitchFamily="34" charset="-122"/>
-                <a:cs typeface="Noto Sans CJK KR" pitchFamily="34" charset="-120"/>
-              </a:rPr>
-              <a:t>에러 검출/정정</a:t>
-            </a:r>
-            <a:endParaRPr lang="en-US" sz="1900" dirty="0"/>
-          </a:p>
-          <a:p>
-            <a:pPr marL="685800" lvl="1" indent="-342900">
-              <a:buSzPct val="100000"/>
-              <a:buChar char="•"/>
-            </a:pPr>
-            <a:r>
-              <a:rPr lang="en-US" sz="1600" dirty="0">
-                <a:solidFill>
-                  <a:srgbClr val="444444"/>
-                </a:solidFill>
-                <a:latin typeface="Noto Sans CJK KR" pitchFamily="34" charset="0"/>
-                <a:ea typeface="Noto Sans CJK KR" pitchFamily="34" charset="-122"/>
-                <a:cs typeface="Noto Sans CJK KR" pitchFamily="34" charset="-120"/>
-              </a:rPr>
-              <a:t>Slave 프레임과 동일한 SEC-DED 방식 적용</a:t>
-            </a:r>
-            <a:endParaRPr lang="en-US" sz="1900" dirty="0"/>
-          </a:p>
-        </p:txBody>
-      </p:sp>
-      <p:pic>
-        <p:nvPicPr>
-          <p:cNvPr id="4" name="Image 0" descr="/home/user/SoC_Design_and_Programming/diagrams/master_frame.png"/>
-          <p:cNvPicPr>
-            <a:picLocks noChangeAspect="1"/>
-          </p:cNvPicPr>
-          <p:nvPr/>
-        </p:nvPicPr>
-        <p:blipFill>
-          <a:blip r:embed="rId2"/>
-          <a:srcRect/>
-          <a:stretch/>
-        </p:blipFill>
-        <p:spPr>
-          <a:xfrm>
-            <a:off x="548640" y="3383280"/>
-            <a:ext cx="8046720" cy="563270"/>
-          </a:xfrm>
-          <a:prstGeom prst="rect">
-            <a:avLst/>
-          </a:prstGeom>
-        </p:spPr>
-      </p:pic>
-      <p:sp>
-        <p:nvSpPr>
-          <p:cNvPr id="5" name="Text 2"/>
-          <p:cNvSpPr/>
-          <p:nvPr/>
-        </p:nvSpPr>
-        <p:spPr>
-          <a:xfrm>
-            <a:off x="548640" y="4037990"/>
-            <a:ext cx="8046720" cy="228600"/>
-          </a:xfrm>
-          <a:prstGeom prst="rect">
-            <a:avLst/>
-          </a:prstGeom>
-          <a:noFill/>
-          <a:ln/>
-        </p:spPr>
-        <p:txBody>
-          <a:bodyPr wrap="square" rtlCol="0" anchor="ctr"/>
-          <a:lstStyle/>
-          <a:p>
-            <a:pPr marL="0" indent="0" algn="ctr">
-              <a:buNone/>
-            </a:pPr>
-            <a:r>
-              <a:rPr lang="en-US" sz="900" dirty="0">
-                <a:solidFill>
-                  <a:srgbClr val="999999"/>
-                </a:solidFill>
-                <a:latin typeface="Noto Sans CJK KR" pitchFamily="34" charset="0"/>
-                <a:ea typeface="Noto Sans CJK KR" pitchFamily="34" charset="-122"/>
-                <a:cs typeface="Noto Sans CJK KR" pitchFamily="34" charset="-120"/>
-              </a:rPr>
-              <a:t>Master 프레임 비트필드 (전송 순서: preamble → halt_cmd → guard_ticks → reserved → hamming)</a:t>
-            </a:r>
-            <a:endParaRPr lang="en-US" sz="900" dirty="0"/>
-          </a:p>
-        </p:txBody>
-      </p:sp>
-      <p:sp>
-        <p:nvSpPr>
-          <p:cNvPr id="6" name="Text 3"/>
-          <p:cNvSpPr/>
-          <p:nvPr/>
-        </p:nvSpPr>
-        <p:spPr>
-          <a:xfrm>
-            <a:off x="8503920" y="4754880"/>
-            <a:ext cx="457200" cy="274320"/>
-          </a:xfrm>
-          <a:prstGeom prst="rect">
-            <a:avLst/>
-          </a:prstGeom>
-          <a:noFill/>
-          <a:ln/>
-        </p:spPr>
-        <p:txBody>
-          <a:bodyPr wrap="square" rtlCol="0" anchor="ctr"/>
-          <a:lstStyle/>
-          <a:p>
-            <a:pPr marL="0" indent="0" algn="r">
-              <a:buNone/>
-            </a:pPr>
-            <a:r>
-              <a:rPr lang="en-US" sz="1200" dirty="0">
-                <a:solidFill>
-                  <a:srgbClr val="999999"/>
-                </a:solidFill>
-                <a:latin typeface="Noto Sans CJK KR" pitchFamily="34" charset="0"/>
-                <a:ea typeface="Noto Sans CJK KR" pitchFamily="34" charset="-122"/>
-                <a:cs typeface="Noto Sans CJK KR" pitchFamily="34" charset="-120"/>
-              </a:rPr>
-              <a:t>11</a:t>
-            </a:r>
-            <a:endParaRPr lang="en-US" sz="1200" dirty="0"/>
-          </a:p>
-        </p:txBody>
-      </p:sp>
-    </p:spTree>
-  </p:cSld>
-  <p:clrMapOvr>
-    <a:masterClrMapping/>
-  </p:clrMapOvr>
-</p:sld>
-</file>
-
-<file path=ppt/slides/slide12.xml><?xml version="1.0" encoding="utf-8"?>
-<p:sld xmlns:a="http://schemas.openxmlformats.org/drawingml/2006/main" xmlns:r="http://schemas.openxmlformats.org/officeDocument/2006/relationships" xmlns:p="http://schemas.openxmlformats.org/presentationml/2006/main">
-  <p:cSld>
-    <p:spTree>
-      <p:nvGrpSpPr>
-        <p:cNvPr id="1" name=""/>
-        <p:cNvGrpSpPr/>
-        <p:nvPr/>
-      </p:nvGrpSpPr>
-      <p:grpSpPr>
-        <a:xfrm>
-          <a:off x="0" y="0"/>
-          <a:ext cx="0" cy="0"/>
-          <a:chOff x="0" y="0"/>
-          <a:chExt cx="0" cy="0"/>
-        </a:xfrm>
-      </p:grpSpPr>
-      <p:sp>
-        <p:nvSpPr>
-          <p:cNvPr id="2" name="Text 0"/>
-          <p:cNvSpPr/>
-          <p:nvPr/>
-        </p:nvSpPr>
-        <p:spPr>
-          <a:xfrm>
-            <a:off x="548640" y="274320"/>
-            <a:ext cx="8046720" cy="777240"/>
-          </a:xfrm>
-          <a:prstGeom prst="rect">
-            <a:avLst/>
-          </a:prstGeom>
-          <a:noFill/>
-          <a:ln/>
-        </p:spPr>
-        <p:txBody>
-          <a:bodyPr wrap="square" lIns="0" tIns="0" rIns="0" bIns="0" rtlCol="0" anchor="ctr"/>
-          <a:lstStyle/>
-          <a:p>
-            <a:pPr marL="0" indent="0">
-              <a:buNone/>
-            </a:pPr>
-            <a:r>
-              <a:rPr lang="en-US" sz="3600" b="1" dirty="0">
-                <a:solidFill>
-                  <a:srgbClr val="111111"/>
-                </a:solidFill>
-                <a:latin typeface="Noto Sans CJK KR" pitchFamily="34" charset="0"/>
-                <a:ea typeface="Noto Sans CJK KR" pitchFamily="34" charset="-122"/>
-                <a:cs typeface="Noto Sans CJK KR" pitchFamily="34" charset="-120"/>
-              </a:rPr>
-              <a:t>DLL - MAC: 동기화와 타임슬롯</a:t>
-            </a:r>
-            <a:endParaRPr lang="en-US" sz="3600" dirty="0"/>
-          </a:p>
-        </p:txBody>
-      </p:sp>
-      <p:sp>
-        <p:nvSpPr>
-          <p:cNvPr id="3" name="Text 1"/>
-          <p:cNvSpPr/>
-          <p:nvPr/>
-        </p:nvSpPr>
-        <p:spPr>
-          <a:xfrm>
-            <a:off x="548640" y="1234440"/>
-            <a:ext cx="8046720" cy="1371600"/>
-          </a:xfrm>
-          <a:prstGeom prst="rect">
-            <a:avLst/>
-          </a:prstGeom>
-          <a:noFill/>
-          <a:ln/>
-        </p:spPr>
-        <p:txBody>
-          <a:bodyPr wrap="square" rtlCol="0" anchor="t"/>
-          <a:lstStyle/>
-          <a:p>
-            <a:pPr marL="342900" indent="-342900">
-              <a:spcAft>
-                <a:spcPts val="600"/>
-              </a:spcAft>
-              <a:buSzPct val="100000"/>
-              <a:buChar char="•"/>
-            </a:pPr>
-            <a:r>
-              <a:rPr lang="en-US" sz="1800" dirty="0">
-                <a:solidFill>
-                  <a:srgbClr val="222222"/>
-                </a:solidFill>
-                <a:latin typeface="Noto Sans CJK KR" pitchFamily="34" charset="0"/>
-                <a:ea typeface="Noto Sans CJK KR" pitchFamily="34" charset="-122"/>
-                <a:cs typeface="Noto Sans CJK KR" pitchFamily="34" charset="-120"/>
-              </a:rPr>
-              <a:t>Sync 기준점</a:t>
-            </a:r>
-            <a:endParaRPr lang="en-US" sz="1800" dirty="0"/>
-          </a:p>
-          <a:p>
-            <a:pPr marL="685800" lvl="1" indent="-342900">
-              <a:spcAft>
-                <a:spcPts val="400"/>
-              </a:spcAft>
-              <a:buSzPct val="100000"/>
-              <a:buChar char="•"/>
-            </a:pPr>
-            <a:r>
-              <a:rPr lang="en-US" sz="1500" dirty="0">
-                <a:solidFill>
-                  <a:srgbClr val="444444"/>
-                </a:solidFill>
-                <a:latin typeface="Noto Sans CJK KR" pitchFamily="34" charset="0"/>
-                <a:ea typeface="Noto Sans CJK KR" pitchFamily="34" charset="-122"/>
-                <a:cs typeface="Noto Sans CJK KR" pitchFamily="34" charset="-120"/>
-              </a:rPr>
-              <a:t>Master가 매 사이클 마지막 슬롯에서 전송한 sync를 다음 사이클 슬롯 계산 기준점으로 사용</a:t>
-            </a:r>
-            <a:endParaRPr lang="en-US" sz="1800" dirty="0"/>
-          </a:p>
-          <a:p>
-            <a:pPr marL="342900" indent="-342900">
-              <a:spcAft>
-                <a:spcPts val="600"/>
-              </a:spcAft>
-              <a:buSzPct val="100000"/>
-              <a:buChar char="•"/>
-            </a:pPr>
-            <a:r>
-              <a:rPr lang="en-US" sz="1800" dirty="0">
-                <a:solidFill>
-                  <a:srgbClr val="222222"/>
-                </a:solidFill>
-                <a:latin typeface="Noto Sans CJK KR" pitchFamily="34" charset="0"/>
-                <a:ea typeface="Noto Sans CJK KR" pitchFamily="34" charset="-122"/>
-                <a:cs typeface="Noto Sans CJK KR" pitchFamily="34" charset="-120"/>
-              </a:rPr>
-              <a:t>슬롯 내부 구조</a:t>
-            </a:r>
-            <a:endParaRPr lang="en-US" sz="1800" dirty="0"/>
-          </a:p>
-          <a:p>
-            <a:pPr marL="685800" lvl="1" indent="-342900">
-              <a:spcAft>
-                <a:spcPts val="400"/>
-              </a:spcAft>
-              <a:buSzPct val="100000"/>
-              <a:buChar char="•"/>
-            </a:pPr>
-            <a:r>
-              <a:rPr lang="en-US" sz="1500" dirty="0">
-                <a:solidFill>
-                  <a:srgbClr val="444444"/>
-                </a:solidFill>
-                <a:latin typeface="Noto Sans CJK KR" pitchFamily="34" charset="0"/>
-                <a:ea typeface="Noto Sans CJK KR" pitchFamily="34" charset="-122"/>
-                <a:cs typeface="Noto Sans CJK KR" pitchFamily="34" charset="-120"/>
-              </a:rPr>
-              <a:t>½ guard tick 대기 → 데이터 전송 → ½ guard tick 대기</a:t>
-            </a:r>
-            <a:endParaRPr lang="en-US" sz="1800" dirty="0"/>
-          </a:p>
-          <a:p>
-            <a:pPr marL="342900" indent="-342900">
-              <a:spcAft>
-                <a:spcPts val="600"/>
-              </a:spcAft>
-              <a:buSzPct val="100000"/>
-              <a:buChar char="•"/>
-            </a:pPr>
-            <a:r>
-              <a:rPr lang="en-US" sz="1800" dirty="0">
-                <a:solidFill>
-                  <a:srgbClr val="222222"/>
-                </a:solidFill>
-                <a:latin typeface="Noto Sans CJK KR" pitchFamily="34" charset="0"/>
-                <a:ea typeface="Noto Sans CJK KR" pitchFamily="34" charset="-122"/>
-                <a:cs typeface="Noto Sans CJK KR" pitchFamily="34" charset="-120"/>
-              </a:rPr>
-              <a:t>Guard Tick의 역할</a:t>
-            </a:r>
-            <a:endParaRPr lang="en-US" sz="1800" dirty="0"/>
-          </a:p>
-          <a:p>
-            <a:pPr marL="685800" lvl="1" indent="-342900">
-              <a:buSzPct val="100000"/>
-              <a:buChar char="•"/>
-            </a:pPr>
-            <a:r>
-              <a:rPr lang="en-US" sz="1500" dirty="0">
-                <a:solidFill>
-                  <a:srgbClr val="444444"/>
-                </a:solidFill>
-                <a:latin typeface="Noto Sans CJK KR" pitchFamily="34" charset="0"/>
-                <a:ea typeface="Noto Sans CJK KR" pitchFamily="34" charset="-122"/>
-                <a:cs typeface="Noto Sans CJK KR" pitchFamily="34" charset="-120"/>
-              </a:rPr>
-              <a:t>인접 슬롯의 절반씩이 경계에서 맞물려 슬롯 침범 방지</a:t>
-            </a:r>
-            <a:endParaRPr lang="en-US" sz="1800" dirty="0"/>
-          </a:p>
-        </p:txBody>
-      </p:sp>
-      <p:pic>
-        <p:nvPicPr>
-          <p:cNvPr id="4" name="Image 0" descr="/home/user/SoC_Design_and_Programming/diagrams/slot_timeline.png"/>
-          <p:cNvPicPr>
-            <a:picLocks noChangeAspect="1"/>
-          </p:cNvPicPr>
-          <p:nvPr/>
-        </p:nvPicPr>
-        <p:blipFill>
-          <a:blip r:embed="rId2"/>
-          <a:srcRect/>
-          <a:stretch/>
-        </p:blipFill>
-        <p:spPr>
-          <a:xfrm>
-            <a:off x="2567189" y="3520943"/>
-            <a:ext cx="4009622" cy="1304150"/>
-          </a:xfrm>
-          <a:prstGeom prst="rect">
-            <a:avLst/>
-          </a:prstGeom>
-        </p:spPr>
-      </p:pic>
-      <p:sp>
-        <p:nvSpPr>
-          <p:cNvPr id="5" name="Text 2"/>
-          <p:cNvSpPr/>
-          <p:nvPr/>
-        </p:nvSpPr>
-        <p:spPr>
-          <a:xfrm>
-            <a:off x="1371600" y="4916533"/>
-            <a:ext cx="6400800" cy="228600"/>
-          </a:xfrm>
-          <a:prstGeom prst="rect">
-            <a:avLst/>
-          </a:prstGeom>
-          <a:noFill/>
-          <a:ln/>
-        </p:spPr>
-        <p:txBody>
-          <a:bodyPr wrap="square" rtlCol="0" anchor="ctr"/>
-          <a:lstStyle/>
-          <a:p>
-            <a:pPr marL="0" indent="0" algn="ctr">
-              <a:buNone/>
-            </a:pPr>
-            <a:r>
-              <a:rPr lang="en-US" sz="900" dirty="0">
-                <a:solidFill>
-                  <a:srgbClr val="999999"/>
-                </a:solidFill>
-                <a:latin typeface="Noto Sans CJK KR" pitchFamily="34" charset="0"/>
-                <a:ea typeface="Noto Sans CJK KR" pitchFamily="34" charset="-122"/>
-                <a:cs typeface="Noto Sans CJK KR" pitchFamily="34" charset="-120"/>
-              </a:rPr>
-              <a:t>Sync → [½G · 데이터 · ½G] × (Slot 0...N) → Sync</a:t>
-            </a:r>
-            <a:endParaRPr lang="en-US" sz="900" dirty="0"/>
-          </a:p>
-        </p:txBody>
-      </p:sp>
-      <p:sp>
-        <p:nvSpPr>
-          <p:cNvPr id="6" name="Text 3"/>
-          <p:cNvSpPr/>
-          <p:nvPr/>
-        </p:nvSpPr>
-        <p:spPr>
-          <a:xfrm>
-            <a:off x="8503920" y="4754880"/>
-            <a:ext cx="457200" cy="274320"/>
-          </a:xfrm>
-          <a:prstGeom prst="rect">
-            <a:avLst/>
-          </a:prstGeom>
-          <a:noFill/>
-          <a:ln/>
-        </p:spPr>
-        <p:txBody>
-          <a:bodyPr wrap="square" rtlCol="0" anchor="ctr"/>
-          <a:lstStyle/>
-          <a:p>
-            <a:pPr marL="0" indent="0" algn="r">
-              <a:buNone/>
-            </a:pPr>
-            <a:r>
-              <a:rPr lang="en-US" sz="1200" dirty="0">
-                <a:solidFill>
-                  <a:srgbClr val="999999"/>
-                </a:solidFill>
-                <a:latin typeface="Noto Sans CJK KR" pitchFamily="34" charset="0"/>
-                <a:ea typeface="Noto Sans CJK KR" pitchFamily="34" charset="-122"/>
-                <a:cs typeface="Noto Sans CJK KR" pitchFamily="34" charset="-120"/>
-              </a:rPr>
-              <a:t>12</a:t>
-            </a:r>
-            <a:endParaRPr lang="en-US" sz="1200" dirty="0"/>
-          </a:p>
-        </p:txBody>
-      </p:sp>
-    </p:spTree>
-  </p:cSld>
-  <p:clrMapOvr>
-    <a:masterClrMapping/>
-  </p:clrMapOvr>
-</p:sld>
-</file>
-
-<file path=ppt/slides/slide13.xml><?xml version="1.0" encoding="utf-8"?>
-<p:sld xmlns:a="http://schemas.openxmlformats.org/drawingml/2006/main" xmlns:r="http://schemas.openxmlformats.org/officeDocument/2006/relationships" xmlns:p="http://schemas.openxmlformats.org/presentationml/2006/main">
-  <p:cSld>
-    <p:spTree>
-      <p:nvGrpSpPr>
-        <p:cNvPr id="1" name=""/>
-        <p:cNvGrpSpPr/>
-        <p:nvPr/>
-      </p:nvGrpSpPr>
-      <p:grpSpPr>
-        <a:xfrm>
-          <a:off x="0" y="0"/>
-          <a:ext cx="0" cy="0"/>
-          <a:chOff x="0" y="0"/>
-          <a:chExt cx="0" cy="0"/>
-        </a:xfrm>
-      </p:grpSpPr>
-      <p:sp>
-        <p:nvSpPr>
-          <p:cNvPr id="2" name="Text 0"/>
-          <p:cNvSpPr/>
-          <p:nvPr/>
-        </p:nvSpPr>
-        <p:spPr>
-          <a:xfrm>
-            <a:off x="548640" y="274320"/>
-            <a:ext cx="8046720" cy="777240"/>
-          </a:xfrm>
-          <a:prstGeom prst="rect">
-            <a:avLst/>
-          </a:prstGeom>
-          <a:noFill/>
-          <a:ln/>
-        </p:spPr>
-        <p:txBody>
-          <a:bodyPr wrap="square" lIns="0" tIns="0" rIns="0" bIns="0" rtlCol="0" anchor="ctr"/>
-          <a:lstStyle/>
-          <a:p>
-            <a:pPr marL="0" indent="0">
-              <a:buNone/>
-            </a:pPr>
-            <a:r>
-              <a:rPr lang="en-US" sz="3600" b="1" dirty="0">
-                <a:solidFill>
-                  <a:srgbClr val="111111"/>
-                </a:solidFill>
-                <a:latin typeface="Noto Sans CJK KR" pitchFamily="34" charset="0"/>
-                <a:ea typeface="Noto Sans CJK KR" pitchFamily="34" charset="-122"/>
-                <a:cs typeface="Noto Sans CJK KR" pitchFamily="34" charset="-120"/>
-              </a:rPr>
-              <a:t>DLL - 클럭 동기</a:t>
+              <a:t>왜 결정론적 통신이 필요한가</a:t>
             </a:r>
             <a:endParaRPr lang="en-US" sz="3600" dirty="0"/>
           </a:p>
@@ -2119,12 +3728,12 @@
                 <a:ea typeface="Noto Sans CJK KR" pitchFamily="34" charset="-122"/>
                 <a:cs typeface="Noto Sans CJK KR" pitchFamily="34" charset="-120"/>
               </a:rPr>
-              <a:t>Master·Slave는 클럭을 공유하지 않음</a:t>
+              <a:t>RT·안전-critical 통신 시스템의 요구사항</a:t>
             </a:r>
             <a:endParaRPr lang="en-US" sz="2000" dirty="0"/>
           </a:p>
           <a:p>
-            <a:pPr marL="685800" lvl="1" indent="-342900">
+            <a:pPr lvl="1" marL="685800" indent="-342900">
               <a:spcAft>
                 <a:spcPts val="800"/>
               </a:spcAft>
@@ -2140,7 +3749,28 @@
                 <a:ea typeface="Noto Sans CJK KR" pitchFamily="34" charset="-122"/>
                 <a:cs typeface="Noto Sans CJK KR" pitchFamily="34" charset="-120"/>
               </a:rPr>
-              <a:t>클럭 오차가 통신에 치명적인 방해 요인 — guard tick만으로는 누적 오차를 막을 수 없음</a:t>
+              <a:t>예측 가능성(Predictability) — 시스템의 시간적 동작이 사전에 보장되어야 함</a:t>
+            </a:r>
+            <a:endParaRPr lang="en-US" sz="2000" dirty="0"/>
+          </a:p>
+          <a:p>
+            <a:pPr lvl="1" marL="685800" indent="-342900">
+              <a:spcAft>
+                <a:spcPts val="800"/>
+              </a:spcAft>
+              <a:buSzPct val="100000"/>
+              <a:buChar char="•"/>
+            </a:pPr>
+            <a:r>
+              <a:rPr lang="en-US" sz="1700" dirty="0">
+                <a:solidFill>
+                  <a:srgbClr val="444444"/>
+                </a:solidFill>
+                <a:latin typeface="Noto Sans CJK KR" pitchFamily="34" charset="0"/>
+                <a:ea typeface="Noto Sans CJK KR" pitchFamily="34" charset="-122"/>
+                <a:cs typeface="Noto Sans CJK KR" pitchFamily="34" charset="-120"/>
+              </a:rPr>
+              <a:t>결정성(Determinism) — 메시지 수신 시점이 미리 알려져 있어야 함</a:t>
             </a:r>
             <a:endParaRPr lang="en-US" sz="2000" dirty="0"/>
           </a:p>
@@ -2161,12 +3791,12 @@
                 <a:ea typeface="Noto Sans CJK KR" pitchFamily="34" charset="-122"/>
                 <a:cs typeface="Noto Sans CJK KR" pitchFamily="34" charset="-120"/>
               </a:rPr>
-              <a:t>분주 클럭으로 동일 타이밍 가정</a:t>
+              <a:t>사건 기반(Event-Triggered) 통신의 한계</a:t>
             </a:r>
             <a:endParaRPr lang="en-US" sz="2000" dirty="0"/>
           </a:p>
           <a:p>
-            <a:pPr marL="685800" lvl="1" indent="-342900">
+            <a:pPr lvl="1" marL="685800" indent="-342900">
               <a:spcAft>
                 <a:spcPts val="800"/>
               </a:spcAft>
@@ -2182,197 +3812,12 @@
                 <a:ea typeface="Noto Sans CJK KR" pitchFamily="34" charset="-122"/>
                 <a:cs typeface="Noto Sans CJK KR" pitchFamily="34" charset="-120"/>
               </a:rPr>
-              <a:t>DIV 값을 AXI 레지스터로 설정, Master·Slave 양쪽에 동일한 DIV 값을 쓴다고 가정 — 분주 클럭은 메인 클럭 / (DIV + 1)</a:t>
+              <a:t>충돌과 재전송으로 지연이 랜덤하게 변동 → 예측 불가</a:t>
             </a:r>
             <a:endParaRPr lang="en-US" sz="2000" dirty="0"/>
           </a:p>
           <a:p>
-            <a:pPr marL="342900" indent="-342900">
-              <a:spcAft>
-                <a:spcPts val="1200"/>
-              </a:spcAft>
-              <a:buSzPct val="100000"/>
-              <a:buChar char="•"/>
-            </a:pPr>
-            <a:r>
-              <a:rPr lang="en-US" sz="2000" dirty="0">
-                <a:solidFill>
-                  <a:srgbClr val="222222"/>
-                </a:solidFill>
-                <a:latin typeface="Noto Sans CJK KR" pitchFamily="34" charset="0"/>
-                <a:ea typeface="Noto Sans CJK KR" pitchFamily="34" charset="-122"/>
-                <a:cs typeface="Noto Sans CJK KR" pitchFamily="34" charset="-120"/>
-              </a:rPr>
-              <a:t>샘플링 방식</a:t>
-            </a:r>
-            <a:endParaRPr lang="en-US" sz="2000" dirty="0"/>
-          </a:p>
-          <a:p>
-            <a:pPr marL="685800" lvl="1" indent="-342900">
-              <a:buSzPct val="100000"/>
-              <a:buChar char="•"/>
-            </a:pPr>
-            <a:r>
-              <a:rPr lang="en-US" sz="1700" dirty="0">
-                <a:solidFill>
-                  <a:srgbClr val="444444"/>
-                </a:solidFill>
-                <a:latin typeface="Noto Sans CJK KR" pitchFamily="34" charset="0"/>
-                <a:ea typeface="Noto Sans CJK KR" pitchFamily="34" charset="-122"/>
-                <a:cs typeface="Noto Sans CJK KR" pitchFamily="34" charset="-120"/>
-              </a:rPr>
-              <a:t>수신 샘플링은 비트 구간의 중간 지점에서 1회만 수행</a:t>
-            </a:r>
-            <a:endParaRPr lang="en-US" sz="2000" dirty="0"/>
-          </a:p>
-        </p:txBody>
-      </p:sp>
-      <p:sp>
-        <p:nvSpPr>
-          <p:cNvPr id="4" name="Text 2"/>
-          <p:cNvSpPr/>
-          <p:nvPr/>
-        </p:nvSpPr>
-        <p:spPr>
-          <a:xfrm>
-            <a:off x="8503920" y="4754880"/>
-            <a:ext cx="457200" cy="274320"/>
-          </a:xfrm>
-          <a:prstGeom prst="rect">
-            <a:avLst/>
-          </a:prstGeom>
-          <a:noFill/>
-          <a:ln/>
-        </p:spPr>
-        <p:txBody>
-          <a:bodyPr wrap="square" rtlCol="0" anchor="ctr"/>
-          <a:lstStyle/>
-          <a:p>
-            <a:pPr marL="0" indent="0" algn="r">
-              <a:buNone/>
-            </a:pPr>
-            <a:r>
-              <a:rPr lang="en-US" sz="1200" dirty="0">
-                <a:solidFill>
-                  <a:srgbClr val="999999"/>
-                </a:solidFill>
-                <a:latin typeface="Noto Sans CJK KR" pitchFamily="34" charset="0"/>
-                <a:ea typeface="Noto Sans CJK KR" pitchFamily="34" charset="-122"/>
-                <a:cs typeface="Noto Sans CJK KR" pitchFamily="34" charset="-120"/>
-              </a:rPr>
-              <a:t>13</a:t>
-            </a:r>
-            <a:endParaRPr lang="en-US" sz="1200" dirty="0"/>
-          </a:p>
-        </p:txBody>
-      </p:sp>
-    </p:spTree>
-  </p:cSld>
-  <p:clrMapOvr>
-    <a:masterClrMapping/>
-  </p:clrMapOvr>
-</p:sld>
-</file>
-
-<file path=ppt/slides/slide14.xml><?xml version="1.0" encoding="utf-8"?>
-<p:sld xmlns:a="http://schemas.openxmlformats.org/drawingml/2006/main" xmlns:r="http://schemas.openxmlformats.org/officeDocument/2006/relationships" xmlns:p="http://schemas.openxmlformats.org/presentationml/2006/main">
-  <p:cSld>
-    <p:spTree>
-      <p:nvGrpSpPr>
-        <p:cNvPr id="1" name=""/>
-        <p:cNvGrpSpPr/>
-        <p:nvPr/>
-      </p:nvGrpSpPr>
-      <p:grpSpPr>
-        <a:xfrm>
-          <a:off x="0" y="0"/>
-          <a:ext cx="0" cy="0"/>
-          <a:chOff x="0" y="0"/>
-          <a:chExt cx="0" cy="0"/>
-        </a:xfrm>
-      </p:grpSpPr>
-      <p:sp>
-        <p:nvSpPr>
-          <p:cNvPr id="2" name="Text 0"/>
-          <p:cNvSpPr/>
-          <p:nvPr/>
-        </p:nvSpPr>
-        <p:spPr>
-          <a:xfrm>
-            <a:off x="548640" y="274320"/>
-            <a:ext cx="8046720" cy="777240"/>
-          </a:xfrm>
-          <a:prstGeom prst="rect">
-            <a:avLst/>
-          </a:prstGeom>
-          <a:noFill/>
-          <a:ln/>
-        </p:spPr>
-        <p:txBody>
-          <a:bodyPr wrap="square" lIns="0" tIns="0" rIns="0" bIns="0" rtlCol="0" anchor="ctr"/>
-          <a:lstStyle/>
-          <a:p>
-            <a:pPr marL="0" indent="0">
-              <a:buNone/>
-            </a:pPr>
-            <a:r>
-              <a:rPr lang="en-US" sz="3600" b="1" dirty="0">
-                <a:solidFill>
-                  <a:srgbClr val="111111"/>
-                </a:solidFill>
-                <a:latin typeface="Noto Sans CJK KR" pitchFamily="34" charset="0"/>
-                <a:ea typeface="Noto Sans CJK KR" pitchFamily="34" charset="-122"/>
-                <a:cs typeface="Noto Sans CJK KR" pitchFamily="34" charset="-120"/>
-              </a:rPr>
-              <a:t>DLL - Flow Control</a:t>
-            </a:r>
-            <a:endParaRPr lang="en-US" sz="3600" dirty="0"/>
-          </a:p>
-        </p:txBody>
-      </p:sp>
-      <p:sp>
-        <p:nvSpPr>
-          <p:cNvPr id="3" name="Text 1"/>
-          <p:cNvSpPr/>
-          <p:nvPr/>
-        </p:nvSpPr>
-        <p:spPr>
-          <a:xfrm>
-            <a:off x="548640" y="1234440"/>
-            <a:ext cx="4023360" cy="2971800"/>
-          </a:xfrm>
-          <a:prstGeom prst="rect">
-            <a:avLst/>
-          </a:prstGeom>
-          <a:noFill/>
-          <a:ln/>
-        </p:spPr>
-        <p:txBody>
-          <a:bodyPr wrap="square" rtlCol="0" anchor="t"/>
-          <a:lstStyle/>
-          <a:p>
-            <a:pPr marL="342900" indent="-342900">
-              <a:spcAft>
-                <a:spcPts val="1200"/>
-              </a:spcAft>
-              <a:buSzPct val="100000"/>
-              <a:buChar char="•"/>
-            </a:pPr>
-            <a:r>
-              <a:rPr lang="en-US" sz="2000" dirty="0">
-                <a:solidFill>
-                  <a:srgbClr val="222222"/>
-                </a:solidFill>
-                <a:latin typeface="Noto Sans CJK KR" pitchFamily="34" charset="0"/>
-                <a:ea typeface="Noto Sans CJK KR" pitchFamily="34" charset="-122"/>
-                <a:cs typeface="Noto Sans CJK KR" pitchFamily="34" charset="-120"/>
-              </a:rPr>
-              <a:t>1비트 에러</a:t>
-            </a:r>
-            <a:endParaRPr lang="en-US" sz="2000" dirty="0"/>
-          </a:p>
-          <a:p>
-            <a:pPr marL="685800" lvl="1" indent="-342900">
+            <a:pPr lvl="1" marL="685800" indent="-342900">
               <a:spcAft>
                 <a:spcPts val="800"/>
               </a:spcAft>
@@ -2388,119 +3833,15 @@
                 <a:ea typeface="Noto Sans CJK KR" pitchFamily="34" charset="-122"/>
                 <a:cs typeface="Noto Sans CJK KR" pitchFamily="34" charset="-120"/>
               </a:rPr>
-              <a:t>Hamming으로 정정하여 정상 데이터로 사용</a:t>
+              <a:t>자동차·산업용 네트워크에서는 이 불확실성이 곧 안전 문제로 직결</a:t>
             </a:r>
             <a:endParaRPr lang="en-US" sz="2000" dirty="0"/>
           </a:p>
-          <a:p>
-            <a:pPr marL="342900" indent="-342900">
-              <a:spcAft>
-                <a:spcPts val="1200"/>
-              </a:spcAft>
-              <a:buSzPct val="100000"/>
-              <a:buChar char="•"/>
-            </a:pPr>
-            <a:r>
-              <a:rPr lang="en-US" sz="2000" dirty="0">
-                <a:solidFill>
-                  <a:srgbClr val="222222"/>
-                </a:solidFill>
-                <a:latin typeface="Noto Sans CJK KR" pitchFamily="34" charset="0"/>
-                <a:ea typeface="Noto Sans CJK KR" pitchFamily="34" charset="-122"/>
-                <a:cs typeface="Noto Sans CJK KR" pitchFamily="34" charset="-120"/>
-              </a:rPr>
-              <a:t>2비트 에러 (정정 불가)</a:t>
-            </a:r>
-            <a:endParaRPr lang="en-US" sz="2000" dirty="0"/>
-          </a:p>
-          <a:p>
-            <a:pPr marL="685800" lvl="1" indent="-342900">
-              <a:spcAft>
-                <a:spcPts val="800"/>
-              </a:spcAft>
-              <a:buSzPct val="100000"/>
-              <a:buChar char="•"/>
-            </a:pPr>
-            <a:r>
-              <a:rPr lang="en-US" sz="1700" dirty="0">
-                <a:solidFill>
-                  <a:srgbClr val="444444"/>
-                </a:solidFill>
-                <a:latin typeface="Noto Sans CJK KR" pitchFamily="34" charset="0"/>
-                <a:ea typeface="Noto Sans CJK KR" pitchFamily="34" charset="-122"/>
-                <a:cs typeface="Noto Sans CJK KR" pitchFamily="34" charset="-120"/>
-              </a:rPr>
-              <a:t>해당 프레임을 무효 처리하고 폐기, 이전 값 유지</a:t>
-            </a:r>
-            <a:endParaRPr lang="en-US" sz="2000" dirty="0"/>
-          </a:p>
-          <a:p>
-            <a:pPr marL="342900" indent="-342900">
-              <a:spcAft>
-                <a:spcPts val="1200"/>
-              </a:spcAft>
-              <a:buSzPct val="100000"/>
-              <a:buChar char="•"/>
-            </a:pPr>
-            <a:r>
-              <a:rPr lang="en-US" sz="2000" dirty="0">
-                <a:solidFill>
-                  <a:srgbClr val="222222"/>
-                </a:solidFill>
-                <a:latin typeface="Noto Sans CJK KR" pitchFamily="34" charset="0"/>
-                <a:ea typeface="Noto Sans CJK KR" pitchFamily="34" charset="-122"/>
-                <a:cs typeface="Noto Sans CJK KR" pitchFamily="34" charset="-120"/>
-              </a:rPr>
-              <a:t>Implicit Flow Control</a:t>
-            </a:r>
-            <a:endParaRPr lang="en-US" sz="2000" dirty="0"/>
-          </a:p>
-          <a:p>
-            <a:pPr marL="685800" lvl="1" indent="-342900">
-              <a:buSzPct val="100000"/>
-              <a:buChar char="•"/>
-            </a:pPr>
-            <a:r>
-              <a:rPr lang="en-US" sz="1700" dirty="0">
-                <a:solidFill>
-                  <a:srgbClr val="444444"/>
-                </a:solidFill>
-                <a:latin typeface="Noto Sans CJK KR" pitchFamily="34" charset="0"/>
-                <a:ea typeface="Noto Sans CJK KR" pitchFamily="34" charset="-122"/>
-                <a:cs typeface="Noto Sans CJK KR" pitchFamily="34" charset="-120"/>
-              </a:rPr>
-              <a:t>명시적 재전송 요청(ARQ/NACK) 없음 — 다음 TDMA 사이클의 갱신 데이터를 기다림</a:t>
-            </a:r>
-            <a:endParaRPr lang="en-US" sz="2000" dirty="0"/>
-          </a:p>
-        </p:txBody>
-      </p:sp>
-      <p:pic>
-        <p:nvPicPr>
-          <p:cNvPr id="4" name="Image 0" descr="/home/user/SoC_Design_and_Programming/diagrams/flow_control.png"/>
-          <p:cNvPicPr>
-            <a:picLocks noChangeAspect="1"/>
-          </p:cNvPicPr>
-          <p:nvPr/>
-        </p:nvPicPr>
-        <p:blipFill>
-          <a:blip r:embed="rId2"/>
-          <a:srcRect/>
-          <a:stretch/>
-        </p:blipFill>
-        <p:spPr>
-          <a:xfrm>
-            <a:off x="5029200" y="1371600"/>
-            <a:ext cx="3200400" cy="2319606"/>
-          </a:xfrm>
-          <a:prstGeom prst="rect">
-            <a:avLst/>
-          </a:prstGeom>
-        </p:spPr>
-      </p:pic>
-      <p:sp>
-        <p:nvSpPr>
-          <p:cNvPr id="5" name="Text 2"/>
+        </p:txBody>
+      </p:sp>
+      <p:sp>
+        <p:nvSpPr>
+          <p:cNvPr id="4" name="Text 2"/>
           <p:cNvSpPr/>
           <p:nvPr/>
         </p:nvSpPr>
@@ -2519,7 +3860,7 @@
           <a:bodyPr wrap="square" rtlCol="0" anchor="ctr"/>
           <a:lstStyle/>
           <a:p>
-            <a:pPr marL="0" indent="0" algn="r">
+            <a:pPr algn="r" indent="0" marL="0">
               <a:buNone/>
             </a:pPr>
             <a:r>
@@ -2531,1137 +3872,9 @@
                 <a:ea typeface="Noto Sans CJK KR" pitchFamily="34" charset="-122"/>
                 <a:cs typeface="Noto Sans CJK KR" pitchFamily="34" charset="-120"/>
               </a:rPr>
-              <a:t>14</a:t>
+              <a:t>4</a:t>
             </a:r>
             <a:endParaRPr lang="en-US" sz="1200" dirty="0"/>
-          </a:p>
-        </p:txBody>
-      </p:sp>
-    </p:spTree>
-  </p:cSld>
-  <p:clrMapOvr>
-    <a:masterClrMapping/>
-  </p:clrMapOvr>
-</p:sld>
-</file>
-
-<file path=ppt/slides/slide15.xml><?xml version="1.0" encoding="utf-8"?>
-<p:sld xmlns:a="http://schemas.openxmlformats.org/drawingml/2006/main" xmlns:r="http://schemas.openxmlformats.org/officeDocument/2006/relationships" xmlns:p="http://schemas.openxmlformats.org/presentationml/2006/main">
-  <p:cSld>
-    <p:bg>
-      <p:bgPr>
-        <a:solidFill>
-          <a:srgbClr val="F2F2F2"/>
-        </a:solidFill>
-        <a:effectLst/>
-      </p:bgPr>
-    </p:bg>
-    <p:spTree>
-      <p:nvGrpSpPr>
-        <p:cNvPr id="1" name=""/>
-        <p:cNvGrpSpPr/>
-        <p:nvPr/>
-      </p:nvGrpSpPr>
-      <p:grpSpPr>
-        <a:xfrm>
-          <a:off x="0" y="0"/>
-          <a:ext cx="0" cy="0"/>
-          <a:chOff x="0" y="0"/>
-          <a:chExt cx="0" cy="0"/>
-        </a:xfrm>
-      </p:grpSpPr>
-      <p:sp>
-        <p:nvSpPr>
-          <p:cNvPr id="2" name="Text 0"/>
-          <p:cNvSpPr/>
-          <p:nvPr/>
-        </p:nvSpPr>
-        <p:spPr>
-          <a:xfrm>
-            <a:off x="548640" y="1828800"/>
-            <a:ext cx="8046720" cy="1371600"/>
-          </a:xfrm>
-          <a:prstGeom prst="rect">
-            <a:avLst/>
-          </a:prstGeom>
-          <a:noFill/>
-          <a:ln/>
-        </p:spPr>
-        <p:txBody>
-          <a:bodyPr wrap="square" rtlCol="0" anchor="ctr"/>
-          <a:lstStyle/>
-          <a:p>
-            <a:pPr marL="0" indent="0" algn="l">
-              <a:buNone/>
-            </a:pPr>
-            <a:r>
-              <a:rPr lang="en-US" sz="4000" b="1" dirty="0">
-                <a:solidFill>
-                  <a:srgbClr val="111111"/>
-                </a:solidFill>
-                <a:latin typeface="Noto Sans CJK KR" pitchFamily="34" charset="0"/>
-                <a:ea typeface="Noto Sans CJK KR" pitchFamily="34" charset="-122"/>
-                <a:cs typeface="Noto Sans CJK KR" pitchFamily="34" charset="-120"/>
-              </a:rPr>
-              <a:t>3. Master / Slave 구현 사항</a:t>
-            </a:r>
-            <a:endParaRPr lang="en-US" sz="4000" dirty="0"/>
-          </a:p>
-        </p:txBody>
-      </p:sp>
-      <p:sp>
-        <p:nvSpPr>
-          <p:cNvPr id="3" name="Text 1"/>
-          <p:cNvSpPr/>
-          <p:nvPr/>
-        </p:nvSpPr>
-        <p:spPr>
-          <a:xfrm>
-            <a:off x="548640" y="3108960"/>
-            <a:ext cx="8046720" cy="457200"/>
-          </a:xfrm>
-          <a:prstGeom prst="rect">
-            <a:avLst/>
-          </a:prstGeom>
-          <a:noFill/>
-          <a:ln/>
-        </p:spPr>
-        <p:txBody>
-          <a:bodyPr wrap="square" rtlCol="0" anchor="ctr"/>
-          <a:lstStyle/>
-          <a:p>
-            <a:pPr marL="0" indent="0" algn="l">
-              <a:buNone/>
-            </a:pPr>
-            <a:r>
-              <a:rPr lang="en-US" sz="2000" dirty="0">
-                <a:solidFill>
-                  <a:srgbClr val="666666"/>
-                </a:solidFill>
-                <a:latin typeface="Noto Sans CJK KR" pitchFamily="34" charset="0"/>
-                <a:ea typeface="Noto Sans CJK KR" pitchFamily="34" charset="-122"/>
-                <a:cs typeface="Noto Sans CJK KR" pitchFamily="34" charset="-120"/>
-              </a:rPr>
-              <a:t>하드웨어 블록 구성부터 고장 처리 로직까지 구현 세부사항을 짚는다</a:t>
-            </a:r>
-            <a:endParaRPr lang="en-US" sz="2000" dirty="0"/>
-          </a:p>
-        </p:txBody>
-      </p:sp>
-      <p:sp>
-        <p:nvSpPr>
-          <p:cNvPr id="4" name="Text 2"/>
-          <p:cNvSpPr/>
-          <p:nvPr/>
-        </p:nvSpPr>
-        <p:spPr>
-          <a:xfrm>
-            <a:off x="8503920" y="4754880"/>
-            <a:ext cx="457200" cy="274320"/>
-          </a:xfrm>
-          <a:prstGeom prst="rect">
-            <a:avLst/>
-          </a:prstGeom>
-          <a:noFill/>
-          <a:ln/>
-        </p:spPr>
-        <p:txBody>
-          <a:bodyPr wrap="square" rtlCol="0" anchor="ctr"/>
-          <a:lstStyle/>
-          <a:p>
-            <a:pPr marL="0" indent="0" algn="r">
-              <a:buNone/>
-            </a:pPr>
-            <a:r>
-              <a:rPr lang="en-US" sz="1200" dirty="0">
-                <a:solidFill>
-                  <a:srgbClr val="999999"/>
-                </a:solidFill>
-                <a:latin typeface="Noto Sans CJK KR" pitchFamily="34" charset="0"/>
-                <a:ea typeface="Noto Sans CJK KR" pitchFamily="34" charset="-122"/>
-                <a:cs typeface="Noto Sans CJK KR" pitchFamily="34" charset="-120"/>
-              </a:rPr>
-              <a:t>15</a:t>
-            </a:r>
-            <a:endParaRPr lang="en-US" sz="1200" dirty="0"/>
-          </a:p>
-        </p:txBody>
-      </p:sp>
-    </p:spTree>
-  </p:cSld>
-  <p:clrMapOvr>
-    <a:masterClrMapping/>
-  </p:clrMapOvr>
-</p:sld>
-</file>
-
-<file path=ppt/slides/slide16.xml><?xml version="1.0" encoding="utf-8"?>
-<p:sld xmlns:a="http://schemas.openxmlformats.org/drawingml/2006/main" xmlns:r="http://schemas.openxmlformats.org/officeDocument/2006/relationships" xmlns:p="http://schemas.openxmlformats.org/presentationml/2006/main">
-  <p:cSld>
-    <p:spTree>
-      <p:nvGrpSpPr>
-        <p:cNvPr id="1" name=""/>
-        <p:cNvGrpSpPr/>
-        <p:nvPr/>
-      </p:nvGrpSpPr>
-      <p:grpSpPr>
-        <a:xfrm>
-          <a:off x="0" y="0"/>
-          <a:ext cx="0" cy="0"/>
-          <a:chOff x="0" y="0"/>
-          <a:chExt cx="0" cy="0"/>
-        </a:xfrm>
-      </p:grpSpPr>
-      <p:sp>
-        <p:nvSpPr>
-          <p:cNvPr id="2" name="Text 0"/>
-          <p:cNvSpPr/>
-          <p:nvPr/>
-        </p:nvSpPr>
-        <p:spPr>
-          <a:xfrm>
-            <a:off x="548640" y="274320"/>
-            <a:ext cx="8046720" cy="777240"/>
-          </a:xfrm>
-          <a:prstGeom prst="rect">
-            <a:avLst/>
-          </a:prstGeom>
-          <a:noFill/>
-          <a:ln/>
-        </p:spPr>
-        <p:txBody>
-          <a:bodyPr wrap="square" lIns="0" tIns="0" rIns="0" bIns="0" rtlCol="0" anchor="ctr"/>
-          <a:lstStyle/>
-          <a:p>
-            <a:pPr marL="0" indent="0">
-              <a:buNone/>
-            </a:pPr>
-            <a:r>
-              <a:rPr lang="en-US" sz="3600" b="1" dirty="0">
-                <a:solidFill>
-                  <a:srgbClr val="111111"/>
-                </a:solidFill>
-                <a:latin typeface="Noto Sans CJK KR" pitchFamily="34" charset="0"/>
-                <a:ea typeface="Noto Sans CJK KR" pitchFamily="34" charset="-122"/>
-                <a:cs typeface="Noto Sans CJK KR" pitchFamily="34" charset="-120"/>
-              </a:rPr>
-              <a:t>Master 전체 구조</a:t>
-            </a:r>
-            <a:endParaRPr lang="en-US" sz="3600" dirty="0"/>
-          </a:p>
-        </p:txBody>
-      </p:sp>
-      <p:sp>
-        <p:nvSpPr>
-          <p:cNvPr id="3" name="Text 1"/>
-          <p:cNvSpPr/>
-          <p:nvPr/>
-        </p:nvSpPr>
-        <p:spPr>
-          <a:xfrm>
-            <a:off x="548640" y="1188720"/>
-            <a:ext cx="8046720" cy="594360"/>
-          </a:xfrm>
-          <a:prstGeom prst="rect">
-            <a:avLst/>
-          </a:prstGeom>
-          <a:noFill/>
-          <a:ln/>
-        </p:spPr>
-        <p:txBody>
-          <a:bodyPr wrap="square" rtlCol="0" anchor="t"/>
-          <a:lstStyle/>
-          <a:p>
-            <a:pPr marL="342900" indent="-342900">
-              <a:spcAft>
-                <a:spcPts val="600"/>
-              </a:spcAft>
-              <a:buSzPct val="100000"/>
-              <a:buChar char="•"/>
-            </a:pPr>
-            <a:r>
-              <a:rPr lang="en-US" sz="1700" dirty="0">
-                <a:solidFill>
-                  <a:srgbClr val="222222"/>
-                </a:solidFill>
-                <a:latin typeface="Noto Sans CJK KR" pitchFamily="34" charset="0"/>
-                <a:ea typeface="Noto Sans CJK KR" pitchFamily="34" charset="-122"/>
-                <a:cs typeface="Noto Sans CJK KR" pitchFamily="34" charset="-120"/>
-              </a:rPr>
-              <a:t>테스트 장치 · PS · PL(Master IP 포함) · GPIO 네 영역으로 구성</a:t>
-            </a:r>
-            <a:endParaRPr lang="en-US" sz="1700" dirty="0"/>
-          </a:p>
-          <a:p>
-            <a:pPr marL="342900" indent="-342900">
-              <a:spcAft>
-                <a:spcPts val="600"/>
-              </a:spcAft>
-              <a:buSzPct val="100000"/>
-              <a:buChar char="•"/>
-            </a:pPr>
-            <a:r>
-              <a:rPr lang="en-US" sz="1700" dirty="0">
-                <a:solidFill>
-                  <a:srgbClr val="222222"/>
-                </a:solidFill>
-                <a:latin typeface="Noto Sans CJK KR" pitchFamily="34" charset="0"/>
-                <a:ea typeface="Noto Sans CJK KR" pitchFamily="34" charset="-122"/>
-                <a:cs typeface="Noto Sans CJK KR" pitchFamily="34" charset="-120"/>
-              </a:rPr>
-              <a:t>GPIO를 통해 Slave와 TX/RX 시리얼로 연결 — 이후 슬라이드에서 블록을 하나씩 확대</a:t>
-            </a:r>
-            <a:endParaRPr lang="en-US" sz="1700" dirty="0"/>
-          </a:p>
-        </p:txBody>
-      </p:sp>
-      <p:pic>
-        <p:nvPicPr>
-          <p:cNvPr id="4" name="Image 0" descr="/home/user/SoC_Design_and_Programming/diagrams/section3/zoom/master_overview.png"/>
-          <p:cNvPicPr>
-            <a:picLocks noChangeAspect="1"/>
-          </p:cNvPicPr>
-          <p:nvPr/>
-        </p:nvPicPr>
-        <p:blipFill>
-          <a:blip r:embed="rId2"/>
-          <a:srcRect/>
-          <a:stretch/>
-        </p:blipFill>
-        <p:spPr>
-          <a:xfrm>
-            <a:off x="548640" y="2267340"/>
-            <a:ext cx="8046720" cy="2186162"/>
-          </a:xfrm>
-          <a:prstGeom prst="rect">
-            <a:avLst/>
-          </a:prstGeom>
-        </p:spPr>
-      </p:pic>
-      <p:sp>
-        <p:nvSpPr>
-          <p:cNvPr id="5" name="Text 2"/>
-          <p:cNvSpPr/>
-          <p:nvPr/>
-        </p:nvSpPr>
-        <p:spPr>
-          <a:xfrm>
-            <a:off x="8503920" y="4754880"/>
-            <a:ext cx="457200" cy="274320"/>
-          </a:xfrm>
-          <a:prstGeom prst="rect">
-            <a:avLst/>
-          </a:prstGeom>
-          <a:noFill/>
-          <a:ln/>
-        </p:spPr>
-        <p:txBody>
-          <a:bodyPr wrap="square" rtlCol="0" anchor="ctr"/>
-          <a:lstStyle/>
-          <a:p>
-            <a:pPr marL="0" indent="0" algn="r">
-              <a:buNone/>
-            </a:pPr>
-            <a:r>
-              <a:rPr lang="en-US" sz="1200" dirty="0">
-                <a:solidFill>
-                  <a:srgbClr val="999999"/>
-                </a:solidFill>
-                <a:latin typeface="Noto Sans CJK KR" pitchFamily="34" charset="0"/>
-                <a:ea typeface="Noto Sans CJK KR" pitchFamily="34" charset="-122"/>
-                <a:cs typeface="Noto Sans CJK KR" pitchFamily="34" charset="-120"/>
-              </a:rPr>
-              <a:t>16</a:t>
-            </a:r>
-            <a:endParaRPr lang="en-US" sz="1200" dirty="0"/>
-          </a:p>
-        </p:txBody>
-      </p:sp>
-    </p:spTree>
-  </p:cSld>
-  <p:clrMapOvr>
-    <a:masterClrMapping/>
-  </p:clrMapOvr>
-</p:sld>
-</file>
-
-<file path=ppt/slides/slide17.xml><?xml version="1.0" encoding="utf-8"?>
-<p:sld xmlns:a="http://schemas.openxmlformats.org/drawingml/2006/main" xmlns:r="http://schemas.openxmlformats.org/officeDocument/2006/relationships" xmlns:p="http://schemas.openxmlformats.org/presentationml/2006/main">
-  <p:cSld>
-    <p:spTree>
-      <p:nvGrpSpPr>
-        <p:cNvPr id="1" name=""/>
-        <p:cNvGrpSpPr/>
-        <p:nvPr/>
-      </p:nvGrpSpPr>
-      <p:grpSpPr>
-        <a:xfrm>
-          <a:off x="0" y="0"/>
-          <a:ext cx="0" cy="0"/>
-          <a:chOff x="0" y="0"/>
-          <a:chExt cx="0" cy="0"/>
-        </a:xfrm>
-      </p:grpSpPr>
-      <p:sp>
-        <p:nvSpPr>
-          <p:cNvPr id="2" name="Text 0"/>
-          <p:cNvSpPr/>
-          <p:nvPr/>
-        </p:nvSpPr>
-        <p:spPr>
-          <a:xfrm>
-            <a:off x="548640" y="274320"/>
-            <a:ext cx="8046720" cy="777240"/>
-          </a:xfrm>
-          <a:prstGeom prst="rect">
-            <a:avLst/>
-          </a:prstGeom>
-          <a:noFill/>
-          <a:ln/>
-        </p:spPr>
-        <p:txBody>
-          <a:bodyPr wrap="square" lIns="0" tIns="0" rIns="0" bIns="0" rtlCol="0" anchor="ctr"/>
-          <a:lstStyle/>
-          <a:p>
-            <a:pPr marL="0" indent="0">
-              <a:buNone/>
-            </a:pPr>
-            <a:r>
-              <a:rPr lang="en-US" sz="3600" b="1" dirty="0">
-                <a:solidFill>
-                  <a:srgbClr val="111111"/>
-                </a:solidFill>
-                <a:latin typeface="Noto Sans CJK KR" pitchFamily="34" charset="0"/>
-                <a:ea typeface="Noto Sans CJK KR" pitchFamily="34" charset="-122"/>
-                <a:cs typeface="Noto Sans CJK KR" pitchFamily="34" charset="-120"/>
-              </a:rPr>
-              <a:t>Master - GPIO 확대</a:t>
-            </a:r>
-            <a:endParaRPr lang="en-US" sz="3600" dirty="0"/>
-          </a:p>
-        </p:txBody>
-      </p:sp>
-      <p:sp>
-        <p:nvSpPr>
-          <p:cNvPr id="3" name="Text 1"/>
-          <p:cNvSpPr/>
-          <p:nvPr/>
-        </p:nvSpPr>
-        <p:spPr>
-          <a:xfrm>
-            <a:off x="548640" y="1234440"/>
-            <a:ext cx="4023360" cy="2971800"/>
-          </a:xfrm>
-          <a:prstGeom prst="rect">
-            <a:avLst/>
-          </a:prstGeom>
-          <a:noFill/>
-          <a:ln/>
-        </p:spPr>
-        <p:txBody>
-          <a:bodyPr wrap="square" rtlCol="0" anchor="t"/>
-          <a:lstStyle/>
-          <a:p>
-            <a:pPr marL="342900" indent="-342900">
-              <a:spcAft>
-                <a:spcPts val="1000"/>
-              </a:spcAft>
-              <a:buSzPct val="100000"/>
-              <a:buChar char="•"/>
-            </a:pPr>
-            <a:r>
-              <a:rPr lang="en-US" sz="1800" dirty="0">
-                <a:solidFill>
-                  <a:srgbClr val="222222"/>
-                </a:solidFill>
-                <a:latin typeface="Noto Sans CJK KR" pitchFamily="34" charset="0"/>
-                <a:ea typeface="Noto Sans CJK KR" pitchFamily="34" charset="-122"/>
-                <a:cs typeface="Noto Sans CJK KR" pitchFamily="34" charset="-120"/>
-              </a:rPr>
-              <a:t>GND / RX 포트 / TX 포트로 구성</a:t>
-            </a:r>
-            <a:endParaRPr lang="en-US" sz="1800" dirty="0"/>
-          </a:p>
-          <a:p>
-            <a:pPr marL="342900" indent="-342900">
-              <a:spcAft>
-                <a:spcPts val="1000"/>
-              </a:spcAft>
-              <a:buSzPct val="100000"/>
-              <a:buChar char="•"/>
-            </a:pPr>
-            <a:r>
-              <a:rPr lang="en-US" sz="1800" dirty="0">
-                <a:solidFill>
-                  <a:srgbClr val="222222"/>
-                </a:solidFill>
-                <a:latin typeface="Noto Sans CJK KR" pitchFamily="34" charset="0"/>
-                <a:ea typeface="Noto Sans CJK KR" pitchFamily="34" charset="-122"/>
-                <a:cs typeface="Noto Sans CJK KR" pitchFamily="34" charset="-120"/>
-              </a:rPr>
-              <a:t>TX·RX는 PL(Master IP)과 Slave 사이를 잇는 물리 연결 — 외부 장치-PS-PL 경로와는 분리된 통신 채널</a:t>
-            </a:r>
-            <a:endParaRPr lang="en-US" sz="1800" dirty="0"/>
-          </a:p>
-        </p:txBody>
-      </p:sp>
-      <p:pic>
-        <p:nvPicPr>
-          <p:cNvPr id="4" name="Image 0" descr="/home/user/SoC_Design_and_Programming/diagrams/section3/zoom/m_gpio.png"/>
-          <p:cNvPicPr>
-            <a:picLocks noChangeAspect="1"/>
-          </p:cNvPicPr>
-          <p:nvPr/>
-        </p:nvPicPr>
-        <p:blipFill>
-          <a:blip r:embed="rId2"/>
-          <a:srcRect/>
-          <a:stretch/>
-        </p:blipFill>
-        <p:spPr>
-          <a:xfrm>
-            <a:off x="4846320" y="1916974"/>
-            <a:ext cx="3749040" cy="1606731"/>
-          </a:xfrm>
-          <a:prstGeom prst="rect">
-            <a:avLst/>
-          </a:prstGeom>
-        </p:spPr>
-      </p:pic>
-      <p:sp>
-        <p:nvSpPr>
-          <p:cNvPr id="5" name="Text 2"/>
-          <p:cNvSpPr/>
-          <p:nvPr/>
-        </p:nvSpPr>
-        <p:spPr>
-          <a:xfrm>
-            <a:off x="8503920" y="4754880"/>
-            <a:ext cx="457200" cy="274320"/>
-          </a:xfrm>
-          <a:prstGeom prst="rect">
-            <a:avLst/>
-          </a:prstGeom>
-          <a:noFill/>
-          <a:ln/>
-        </p:spPr>
-        <p:txBody>
-          <a:bodyPr wrap="square" rtlCol="0" anchor="ctr"/>
-          <a:lstStyle/>
-          <a:p>
-            <a:pPr marL="0" indent="0" algn="r">
-              <a:buNone/>
-            </a:pPr>
-            <a:r>
-              <a:rPr lang="en-US" sz="1200" dirty="0">
-                <a:solidFill>
-                  <a:srgbClr val="999999"/>
-                </a:solidFill>
-                <a:latin typeface="Noto Sans CJK KR" pitchFamily="34" charset="0"/>
-                <a:ea typeface="Noto Sans CJK KR" pitchFamily="34" charset="-122"/>
-                <a:cs typeface="Noto Sans CJK KR" pitchFamily="34" charset="-120"/>
-              </a:rPr>
-              <a:t>17</a:t>
-            </a:r>
-            <a:endParaRPr lang="en-US" sz="1200" dirty="0"/>
-          </a:p>
-        </p:txBody>
-      </p:sp>
-    </p:spTree>
-  </p:cSld>
-  <p:clrMapOvr>
-    <a:masterClrMapping/>
-  </p:clrMapOvr>
-</p:sld>
-</file>
-
-<file path=ppt/slides/slide18.xml><?xml version="1.0" encoding="utf-8"?>
-<p:sld xmlns:a="http://schemas.openxmlformats.org/drawingml/2006/main" xmlns:r="http://schemas.openxmlformats.org/officeDocument/2006/relationships" xmlns:p="http://schemas.openxmlformats.org/presentationml/2006/main">
-  <p:cSld>
-    <p:spTree>
-      <p:nvGrpSpPr>
-        <p:cNvPr id="1" name=""/>
-        <p:cNvGrpSpPr/>
-        <p:nvPr/>
-      </p:nvGrpSpPr>
-      <p:grpSpPr>
-        <a:xfrm>
-          <a:off x="0" y="0"/>
-          <a:ext cx="0" cy="0"/>
-          <a:chOff x="0" y="0"/>
-          <a:chExt cx="0" cy="0"/>
-        </a:xfrm>
-      </p:grpSpPr>
-      <p:sp>
-        <p:nvSpPr>
-          <p:cNvPr id="2" name="Text 0"/>
-          <p:cNvSpPr/>
-          <p:nvPr/>
-        </p:nvSpPr>
-        <p:spPr>
-          <a:xfrm>
-            <a:off x="548640" y="274320"/>
-            <a:ext cx="8046720" cy="777240"/>
-          </a:xfrm>
-          <a:prstGeom prst="rect">
-            <a:avLst/>
-          </a:prstGeom>
-          <a:noFill/>
-          <a:ln/>
-        </p:spPr>
-        <p:txBody>
-          <a:bodyPr wrap="square" lIns="0" tIns="0" rIns="0" bIns="0" rtlCol="0" anchor="ctr"/>
-          <a:lstStyle/>
-          <a:p>
-            <a:pPr marL="0" indent="0">
-              <a:buNone/>
-            </a:pPr>
-            <a:r>
-              <a:rPr lang="en-US" sz="3600" b="1" dirty="0">
-                <a:solidFill>
-                  <a:srgbClr val="111111"/>
-                </a:solidFill>
-                <a:latin typeface="Noto Sans CJK KR" pitchFamily="34" charset="0"/>
-                <a:ea typeface="Noto Sans CJK KR" pitchFamily="34" charset="-122"/>
-                <a:cs typeface="Noto Sans CJK KR" pitchFamily="34" charset="-120"/>
-              </a:rPr>
-              <a:t>Master - PS 확대</a:t>
-            </a:r>
-            <a:endParaRPr lang="en-US" sz="3600" dirty="0"/>
-          </a:p>
-        </p:txBody>
-      </p:sp>
-      <p:sp>
-        <p:nvSpPr>
-          <p:cNvPr id="3" name="Text 1"/>
-          <p:cNvSpPr/>
-          <p:nvPr/>
-        </p:nvSpPr>
-        <p:spPr>
-          <a:xfrm>
-            <a:off x="548640" y="1188720"/>
-            <a:ext cx="8046720" cy="594360"/>
-          </a:xfrm>
-          <a:prstGeom prst="rect">
-            <a:avLst/>
-          </a:prstGeom>
-          <a:noFill/>
-          <a:ln/>
-        </p:spPr>
-        <p:txBody>
-          <a:bodyPr wrap="square" rtlCol="0" anchor="t"/>
-          <a:lstStyle/>
-          <a:p>
-            <a:pPr marL="342900" indent="-342900">
-              <a:spcAft>
-                <a:spcPts val="600"/>
-              </a:spcAft>
-              <a:buSzPct val="100000"/>
-              <a:buChar char="•"/>
-            </a:pPr>
-            <a:r>
-              <a:rPr lang="en-US" sz="1700" dirty="0">
-                <a:solidFill>
-                  <a:srgbClr val="222222"/>
-                </a:solidFill>
-                <a:latin typeface="Noto Sans CJK KR" pitchFamily="34" charset="0"/>
-                <a:ea typeface="Noto Sans CJK KR" pitchFamily="34" charset="-122"/>
-                <a:cs typeface="Noto Sans CJK KR" pitchFamily="34" charset="-120"/>
-              </a:rPr>
-              <a:t>외부 테스트 장치에서 초깃값을 입력받아 Master를 초기 구동</a:t>
-            </a:r>
-            <a:endParaRPr lang="en-US" sz="1700" dirty="0"/>
-          </a:p>
-          <a:p>
-            <a:pPr marL="342900" indent="-342900">
-              <a:spcAft>
-                <a:spcPts val="600"/>
-              </a:spcAft>
-              <a:buSzPct val="100000"/>
-              <a:buChar char="•"/>
-            </a:pPr>
-            <a:r>
-              <a:rPr lang="en-US" sz="1700" dirty="0">
-                <a:solidFill>
-                  <a:srgbClr val="222222"/>
-                </a:solidFill>
-                <a:latin typeface="Noto Sans CJK KR" pitchFamily="34" charset="0"/>
-                <a:ea typeface="Noto Sans CJK KR" pitchFamily="34" charset="-122"/>
-                <a:cs typeface="Noto Sans CJK KR" pitchFamily="34" charset="-120"/>
-              </a:rPr>
-              <a:t>구동 중인 Master 값을 레지스터로 읽고, Master가 발생시키는 인터럽트를 수신</a:t>
-            </a:r>
-            <a:endParaRPr lang="en-US" sz="1700" dirty="0"/>
-          </a:p>
-        </p:txBody>
-      </p:sp>
-      <p:pic>
-        <p:nvPicPr>
-          <p:cNvPr id="4" name="Image 0" descr="/home/user/SoC_Design_and_Programming/diagrams/section3/zoom/m_ps.png"/>
-          <p:cNvPicPr>
-            <a:picLocks noChangeAspect="1"/>
-          </p:cNvPicPr>
-          <p:nvPr/>
-        </p:nvPicPr>
-        <p:blipFill>
-          <a:blip r:embed="rId2"/>
-          <a:srcRect/>
-          <a:stretch/>
-        </p:blipFill>
-        <p:spPr>
-          <a:xfrm>
-            <a:off x="1103179" y="2092173"/>
-            <a:ext cx="6937641" cy="2743200"/>
-          </a:xfrm>
-          <a:prstGeom prst="rect">
-            <a:avLst/>
-          </a:prstGeom>
-        </p:spPr>
-      </p:pic>
-      <p:sp>
-        <p:nvSpPr>
-          <p:cNvPr id="5" name="Text 2"/>
-          <p:cNvSpPr/>
-          <p:nvPr/>
-        </p:nvSpPr>
-        <p:spPr>
-          <a:xfrm>
-            <a:off x="8503920" y="4754880"/>
-            <a:ext cx="457200" cy="274320"/>
-          </a:xfrm>
-          <a:prstGeom prst="rect">
-            <a:avLst/>
-          </a:prstGeom>
-          <a:noFill/>
-          <a:ln/>
-        </p:spPr>
-        <p:txBody>
-          <a:bodyPr wrap="square" rtlCol="0" anchor="ctr"/>
-          <a:lstStyle/>
-          <a:p>
-            <a:pPr marL="0" indent="0" algn="r">
-              <a:buNone/>
-            </a:pPr>
-            <a:r>
-              <a:rPr lang="en-US" sz="1200" dirty="0">
-                <a:solidFill>
-                  <a:srgbClr val="999999"/>
-                </a:solidFill>
-                <a:latin typeface="Noto Sans CJK KR" pitchFamily="34" charset="0"/>
-                <a:ea typeface="Noto Sans CJK KR" pitchFamily="34" charset="-122"/>
-                <a:cs typeface="Noto Sans CJK KR" pitchFamily="34" charset="-120"/>
-              </a:rPr>
-              <a:t>18</a:t>
-            </a:r>
-            <a:endParaRPr lang="en-US" sz="1200" dirty="0"/>
-          </a:p>
-        </p:txBody>
-      </p:sp>
-    </p:spTree>
-  </p:cSld>
-  <p:clrMapOvr>
-    <a:masterClrMapping/>
-  </p:clrMapOvr>
-</p:sld>
-</file>
-
-<file path=ppt/slides/slide19.xml><?xml version="1.0" encoding="utf-8"?>
-<p:sld xmlns:a="http://schemas.openxmlformats.org/drawingml/2006/main" xmlns:r="http://schemas.openxmlformats.org/officeDocument/2006/relationships" xmlns:p="http://schemas.openxmlformats.org/presentationml/2006/main">
-  <p:cSld>
-    <p:spTree>
-      <p:nvGrpSpPr>
-        <p:cNvPr id="1" name=""/>
-        <p:cNvGrpSpPr/>
-        <p:nvPr/>
-      </p:nvGrpSpPr>
-      <p:grpSpPr>
-        <a:xfrm>
-          <a:off x="0" y="0"/>
-          <a:ext cx="0" cy="0"/>
-          <a:chOff x="0" y="0"/>
-          <a:chExt cx="0" cy="0"/>
-        </a:xfrm>
-      </p:grpSpPr>
-      <p:sp>
-        <p:nvSpPr>
-          <p:cNvPr id="2" name="Text 0"/>
-          <p:cNvSpPr/>
-          <p:nvPr/>
-        </p:nvSpPr>
-        <p:spPr>
-          <a:xfrm>
-            <a:off x="548640" y="274320"/>
-            <a:ext cx="8046720" cy="777240"/>
-          </a:xfrm>
-          <a:prstGeom prst="rect">
-            <a:avLst/>
-          </a:prstGeom>
-          <a:noFill/>
-          <a:ln/>
-        </p:spPr>
-        <p:txBody>
-          <a:bodyPr wrap="square" lIns="0" tIns="0" rIns="0" bIns="0" rtlCol="0" anchor="ctr"/>
-          <a:lstStyle/>
-          <a:p>
-            <a:pPr marL="0" indent="0">
-              <a:buNone/>
-            </a:pPr>
-            <a:r>
-              <a:rPr lang="en-US" sz="3600" b="1" dirty="0">
-                <a:solidFill>
-                  <a:srgbClr val="111111"/>
-                </a:solidFill>
-                <a:latin typeface="Noto Sans CJK KR" pitchFamily="34" charset="0"/>
-                <a:ea typeface="Noto Sans CJK KR" pitchFamily="34" charset="-122"/>
-                <a:cs typeface="Noto Sans CJK KR" pitchFamily="34" charset="-120"/>
-              </a:rPr>
-              <a:t>Master - PL 확대</a:t>
-            </a:r>
-            <a:endParaRPr lang="en-US" sz="3600" dirty="0"/>
-          </a:p>
-        </p:txBody>
-      </p:sp>
-      <p:sp>
-        <p:nvSpPr>
-          <p:cNvPr id="3" name="Text 1"/>
-          <p:cNvSpPr/>
-          <p:nvPr/>
-        </p:nvSpPr>
-        <p:spPr>
-          <a:xfrm>
-            <a:off x="548640" y="1234440"/>
-            <a:ext cx="4023360" cy="2971800"/>
-          </a:xfrm>
-          <a:prstGeom prst="rect">
-            <a:avLst/>
-          </a:prstGeom>
-          <a:noFill/>
-          <a:ln/>
-        </p:spPr>
-        <p:txBody>
-          <a:bodyPr wrap="square" rtlCol="0" anchor="t"/>
-          <a:lstStyle/>
-          <a:p>
-            <a:pPr marL="342900" indent="-342900">
-              <a:spcAft>
-                <a:spcPts val="1000"/>
-              </a:spcAft>
-              <a:buSzPct val="100000"/>
-              <a:buChar char="•"/>
-            </a:pPr>
-            <a:r>
-              <a:rPr lang="en-US" sz="1800" dirty="0">
-                <a:solidFill>
-                  <a:srgbClr val="222222"/>
-                </a:solidFill>
-                <a:latin typeface="Noto Sans CJK KR" pitchFamily="34" charset="0"/>
-                <a:ea typeface="Noto Sans CJK KR" pitchFamily="34" charset="-122"/>
-                <a:cs typeface="Noto Sans CJK KR" pitchFamily="34" charset="-120"/>
-              </a:rPr>
-              <a:t>LED · 푸시버튼 · DIP 스위치 · 7-seg와 Master IP로 보드 자체의 입출력 구성</a:t>
-            </a:r>
-            <a:endParaRPr lang="en-US" sz="1800" dirty="0"/>
-          </a:p>
-          <a:p>
-            <a:pPr marL="342900" indent="-342900">
-              <a:spcAft>
-                <a:spcPts val="1000"/>
-              </a:spcAft>
-              <a:buSzPct val="100000"/>
-              <a:buChar char="•"/>
-            </a:pPr>
-            <a:r>
-              <a:rPr lang="en-US" sz="1800" dirty="0">
-                <a:solidFill>
-                  <a:srgbClr val="222222"/>
-                </a:solidFill>
-                <a:latin typeface="Noto Sans CJK KR" pitchFamily="34" charset="0"/>
-                <a:ea typeface="Noto Sans CJK KR" pitchFamily="34" charset="-122"/>
-                <a:cs typeface="Noto Sans CJK KR" pitchFamily="34" charset="-120"/>
-              </a:rPr>
-              <a:t>LED는 RX/TX 이진 신호를 그대로 받아 통신 상태를 표시</a:t>
-            </a:r>
-            <a:endParaRPr lang="en-US" sz="1800" dirty="0"/>
-          </a:p>
-          <a:p>
-            <a:pPr marL="342900" indent="-342900">
-              <a:spcAft>
-                <a:spcPts val="1000"/>
-              </a:spcAft>
-              <a:buSzPct val="100000"/>
-              <a:buChar char="•"/>
-            </a:pPr>
-            <a:r>
-              <a:rPr lang="en-US" sz="1800" dirty="0">
-                <a:solidFill>
-                  <a:srgbClr val="222222"/>
-                </a:solidFill>
-                <a:latin typeface="Noto Sans CJK KR" pitchFamily="34" charset="0"/>
-                <a:ea typeface="Noto Sans CJK KR" pitchFamily="34" charset="-122"/>
-                <a:cs typeface="Noto Sans CJK KR" pitchFamily="34" charset="-120"/>
-              </a:rPr>
-              <a:t>DIP 스위치·7-seg는 슬롯별 통신 상태와 수신 데이터를 출력 — Master IP가 이들을 조율</a:t>
-            </a:r>
-            <a:endParaRPr lang="en-US" sz="1800" dirty="0"/>
-          </a:p>
-        </p:txBody>
-      </p:sp>
-      <p:pic>
-        <p:nvPicPr>
-          <p:cNvPr id="4" name="Image 0" descr="/home/user/SoC_Design_and_Programming/diagrams/section3/zoom/m_pl.png"/>
-          <p:cNvPicPr>
-            <a:picLocks noChangeAspect="1"/>
-          </p:cNvPicPr>
-          <p:nvPr/>
-        </p:nvPicPr>
-        <p:blipFill>
-          <a:blip r:embed="rId2"/>
-          <a:srcRect/>
-          <a:stretch/>
-        </p:blipFill>
-        <p:spPr>
-          <a:xfrm>
-            <a:off x="4846320" y="1653968"/>
-            <a:ext cx="3749040" cy="2132745"/>
-          </a:xfrm>
-          <a:prstGeom prst="rect">
-            <a:avLst/>
-          </a:prstGeom>
-        </p:spPr>
-      </p:pic>
-      <p:sp>
-        <p:nvSpPr>
-          <p:cNvPr id="5" name="Text 2"/>
-          <p:cNvSpPr/>
-          <p:nvPr/>
-        </p:nvSpPr>
-        <p:spPr>
-          <a:xfrm>
-            <a:off x="8503920" y="4754880"/>
-            <a:ext cx="457200" cy="274320"/>
-          </a:xfrm>
-          <a:prstGeom prst="rect">
-            <a:avLst/>
-          </a:prstGeom>
-          <a:noFill/>
-          <a:ln/>
-        </p:spPr>
-        <p:txBody>
-          <a:bodyPr wrap="square" rtlCol="0" anchor="ctr"/>
-          <a:lstStyle/>
-          <a:p>
-            <a:pPr marL="0" indent="0" algn="r">
-              <a:buNone/>
-            </a:pPr>
-            <a:r>
-              <a:rPr lang="en-US" sz="1200" dirty="0">
-                <a:solidFill>
-                  <a:srgbClr val="999999"/>
-                </a:solidFill>
-                <a:latin typeface="Noto Sans CJK KR" pitchFamily="34" charset="0"/>
-                <a:ea typeface="Noto Sans CJK KR" pitchFamily="34" charset="-122"/>
-                <a:cs typeface="Noto Sans CJK KR" pitchFamily="34" charset="-120"/>
-              </a:rPr>
-              <a:t>19</a:t>
-            </a:r>
-            <a:endParaRPr lang="en-US" sz="1200" dirty="0"/>
-          </a:p>
-        </p:txBody>
-      </p:sp>
-    </p:spTree>
-  </p:cSld>
-  <p:clrMapOvr>
-    <a:masterClrMapping/>
-  </p:clrMapOvr>
-</p:sld>
-</file>
-
-<file path=ppt/slides/slide2.xml><?xml version="1.0" encoding="utf-8"?>
-<p:sld xmlns:a="http://schemas.openxmlformats.org/drawingml/2006/main" xmlns:r="http://schemas.openxmlformats.org/officeDocument/2006/relationships" xmlns:p="http://schemas.openxmlformats.org/presentationml/2006/main">
-  <p:cSld>
-    <p:spTree>
-      <p:nvGrpSpPr>
-        <p:cNvPr id="1" name=""/>
-        <p:cNvGrpSpPr/>
-        <p:nvPr/>
-      </p:nvGrpSpPr>
-      <p:grpSpPr>
-        <a:xfrm>
-          <a:off x="0" y="0"/>
-          <a:ext cx="0" cy="0"/>
-          <a:chOff x="0" y="0"/>
-          <a:chExt cx="0" cy="0"/>
-        </a:xfrm>
-      </p:grpSpPr>
-      <p:sp>
-        <p:nvSpPr>
-          <p:cNvPr id="2" name="TextBox 1"/>
-          <p:cNvSpPr txBox="1"/>
-          <p:nvPr/>
-        </p:nvSpPr>
-        <p:spPr>
-          <a:xfrm>
-            <a:off x="548640" y="457200"/>
-            <a:ext cx="8046720" cy="774192"/>
-          </a:xfrm>
-          <a:prstGeom prst="rect">
-            <a:avLst/>
-          </a:prstGeom>
-          <a:noFill/>
-        </p:spPr>
-        <p:txBody>
-          <a:bodyPr wrap="none">
-            <a:spAutoFit/>
-          </a:bodyPr>
-          <a:lstStyle/>
-          <a:p>
-            <a:r>
-              <a:rPr sz="3600" b="1">
-                <a:solidFill>
-                  <a:srgbClr val="111111"/>
-                </a:solidFill>
-                <a:latin typeface="Noto Sans CJK KR"/>
-              </a:rPr>
-              <a:t>Contents</a:t>
-            </a:r>
-          </a:p>
-        </p:txBody>
-      </p:sp>
-      <p:sp>
-        <p:nvSpPr>
-          <p:cNvPr id="3" name="TextBox 2"/>
-          <p:cNvSpPr txBox="1"/>
-          <p:nvPr/>
-        </p:nvSpPr>
-        <p:spPr>
-          <a:xfrm>
-            <a:off x="548640" y="1645920"/>
-            <a:ext cx="8046720" cy="3200400"/>
-          </a:xfrm>
-          <a:prstGeom prst="rect">
-            <a:avLst/>
-          </a:prstGeom>
-          <a:noFill/>
-        </p:spPr>
-        <p:txBody>
-          <a:bodyPr wrap="square">
-            <a:spAutoFit/>
-          </a:bodyPr>
-          <a:lstStyle/>
-          <a:p>
-            <a:pPr>
-              <a:spcAft>
-                <a:spcPts val="2000"/>
-              </a:spcAft>
-            </a:pPr>
-            <a:r>
-              <a:rPr sz="2400">
-                <a:solidFill>
-                  <a:srgbClr val="222222"/>
-                </a:solidFill>
-                <a:latin typeface="Noto Sans CJK KR"/>
-              </a:rPr>
-              <a:t>1.  프로젝트 소개</a:t>
-            </a:r>
-          </a:p>
-          <a:p>
-            <a:pPr>
-              <a:spcAft>
-                <a:spcPts val="2000"/>
-              </a:spcAft>
-            </a:pPr>
-            <a:r>
-              <a:rPr sz="2400">
-                <a:solidFill>
-                  <a:srgbClr val="222222"/>
-                </a:solidFill>
-                <a:latin typeface="Noto Sans CJK KR"/>
-              </a:rPr>
-              <a:t>2.  TDMA PHY · Datalink · 프로토콜 정의</a:t>
-            </a:r>
-          </a:p>
-          <a:p>
-            <a:pPr>
-              <a:spcAft>
-                <a:spcPts val="2000"/>
-              </a:spcAft>
-            </a:pPr>
-            <a:r>
-              <a:rPr sz="2400">
-                <a:solidFill>
-                  <a:srgbClr val="222222"/>
-                </a:solidFill>
-                <a:latin typeface="Noto Sans CJK KR"/>
-              </a:rPr>
-              <a:t>3.  Master / Slave 구현 사항</a:t>
-            </a:r>
-          </a:p>
-          <a:p>
-            <a:pPr>
-              <a:spcAft>
-                <a:spcPts val="2000"/>
-              </a:spcAft>
-            </a:pPr>
-            <a:r>
-              <a:rPr sz="2400">
-                <a:solidFill>
-                  <a:srgbClr val="222222"/>
-                </a:solidFill>
-                <a:latin typeface="Noto Sans CJK KR"/>
-              </a:rPr>
-              <a:t>4.  TDMA 통신 시연</a:t>
-            </a:r>
-          </a:p>
-          <a:p>
-            <a:pPr>
-              <a:spcAft>
-                <a:spcPts val="2000"/>
-              </a:spcAft>
-            </a:pPr>
-            <a:r>
-              <a:rPr sz="2400">
-                <a:solidFill>
-                  <a:srgbClr val="222222"/>
-                </a:solidFill>
-                <a:latin typeface="Noto Sans CJK KR"/>
-              </a:rPr>
-              <a:t>5.  마무리</a:t>
-            </a:r>
-          </a:p>
-        </p:txBody>
-      </p:sp>
-      <p:sp>
-        <p:nvSpPr>
-          <p:cNvPr id="4" name="TextBox 3"/>
-          <p:cNvSpPr txBox="1"/>
-          <p:nvPr/>
-        </p:nvSpPr>
-        <p:spPr>
-          <a:xfrm>
-            <a:off x="8503920" y="4754880"/>
-            <a:ext cx="457200" cy="274320"/>
-          </a:xfrm>
-          <a:prstGeom prst="rect">
-            <a:avLst/>
-          </a:prstGeom>
-          <a:noFill/>
-        </p:spPr>
-        <p:txBody>
-          <a:bodyPr wrap="none">
-            <a:spAutoFit/>
-          </a:bodyPr>
-          <a:lstStyle/>
-          <a:p>
-            <a:pPr algn="r"/>
-            <a:r>
-              <a:rPr sz="1200">
-                <a:solidFill>
-                  <a:srgbClr val="999999"/>
-                </a:solidFill>
-                <a:latin typeface="Noto Sans CJK KR"/>
-              </a:rPr>
-              <a:t>2</a:t>
-            </a:r>
           </a:p>
         </p:txBody>
       </p:sp>
@@ -3674,7 +3887,7 @@
 </file>
 
 <file path=ppt/slides/slide20.xml><?xml version="1.0" encoding="utf-8"?>
-<p:sld xmlns:a="http://schemas.openxmlformats.org/drawingml/2006/main" xmlns:r="http://schemas.openxmlformats.org/officeDocument/2006/relationships" xmlns:p="http://schemas.openxmlformats.org/presentationml/2006/main">
+<p:sld xmlns:a="http://schemas.openxmlformats.org/drawingml/2006/main" xmlns:p="http://schemas.openxmlformats.org/presentationml/2006/main" xmlns:r="http://schemas.openxmlformats.org/officeDocument/2006/relationships">
   <p:cSld>
     <p:spTree>
       <p:nvGrpSpPr>
@@ -3682,14 +3895,7 @@
         <p:cNvGrpSpPr/>
         <p:nvPr/>
       </p:nvGrpSpPr>
-      <p:grpSpPr>
-        <a:xfrm>
-          <a:off x="0" y="0"/>
-          <a:ext cx="0" cy="0"/>
-          <a:chOff x="0" y="0"/>
-          <a:chExt cx="0" cy="0"/>
-        </a:xfrm>
-      </p:grpSpPr>
+      <p:grpSpPr/>
       <p:sp>
         <p:nvSpPr>
           <p:cNvPr id="2" name="Text 0"/>
@@ -3711,7 +3917,7 @@
           <a:bodyPr wrap="square" lIns="0" tIns="0" rIns="0" bIns="0" rtlCol="0" anchor="ctr"/>
           <a:lstStyle/>
           <a:p>
-            <a:pPr marL="0" indent="0">
+            <a:pPr indent="0" marL="0">
               <a:buNone/>
             </a:pPr>
             <a:r>
@@ -3795,7 +4001,7 @@
       </p:sp>
       <p:pic>
         <p:nvPicPr>
-          <p:cNvPr id="4" name="Image 0" descr="/home/user/SoC_Design_and_Programming/diagrams/section3/zoom/m_masterip.png"/>
+          <p:cNvPr id="4" name="Image 0" descr="/home/user/SoC_Design_and_Programming/diagrams/section3/zoom/m_masterip.png">    </p:cNvPr>
           <p:cNvPicPr>
             <a:picLocks noChangeAspect="1"/>
           </p:cNvPicPr>
@@ -3803,13 +4009,13 @@
         </p:nvPicPr>
         <p:blipFill>
           <a:blip r:embed="rId2"/>
-          <a:srcRect/>
+          <a:srcRect l="0" r="0" t="0" b="0"/>
           <a:stretch/>
         </p:blipFill>
         <p:spPr>
           <a:xfrm>
-            <a:off x="548640" y="2622447"/>
-            <a:ext cx="8046720" cy="1837198"/>
+            <a:off x="548640" y="2128313"/>
+            <a:ext cx="8046720" cy="2052735"/>
           </a:xfrm>
           <a:prstGeom prst="rect">
             <a:avLst/>
@@ -3837,7 +4043,7 @@
           <a:bodyPr wrap="square" rtlCol="0" anchor="ctr"/>
           <a:lstStyle/>
           <a:p>
-            <a:pPr marL="0" indent="0" algn="r">
+            <a:pPr algn="r" indent="0" marL="0">
               <a:buNone/>
             </a:pPr>
             <a:r>
@@ -3864,7 +4070,7 @@
 </file>
 
 <file path=ppt/slides/slide21.xml><?xml version="1.0" encoding="utf-8"?>
-<p:sld xmlns:a="http://schemas.openxmlformats.org/drawingml/2006/main" xmlns:r="http://schemas.openxmlformats.org/officeDocument/2006/relationships" xmlns:p="http://schemas.openxmlformats.org/presentationml/2006/main">
+<p:sld xmlns:a="http://schemas.openxmlformats.org/drawingml/2006/main" xmlns:p="http://schemas.openxmlformats.org/presentationml/2006/main" xmlns:r="http://schemas.openxmlformats.org/officeDocument/2006/relationships">
   <p:cSld>
     <p:spTree>
       <p:nvGrpSpPr>
@@ -3872,14 +4078,7 @@
         <p:cNvGrpSpPr/>
         <p:nvPr/>
       </p:nvGrpSpPr>
-      <p:grpSpPr>
-        <a:xfrm>
-          <a:off x="0" y="0"/>
-          <a:ext cx="0" cy="0"/>
-          <a:chOff x="0" y="0"/>
-          <a:chExt cx="0" cy="0"/>
-        </a:xfrm>
-      </p:grpSpPr>
+      <p:grpSpPr/>
       <p:sp>
         <p:nvSpPr>
           <p:cNvPr id="2" name="Text 0"/>
@@ -3901,7 +4100,7 @@
           <a:bodyPr wrap="square" lIns="0" tIns="0" rIns="0" bIns="0" rtlCol="0" anchor="ctr"/>
           <a:lstStyle/>
           <a:p>
-            <a:pPr marL="0" indent="0">
+            <a:pPr indent="0" marL="0">
               <a:buNone/>
             </a:pPr>
             <a:r>
@@ -3985,7 +4184,7 @@
       </p:sp>
       <p:pic>
         <p:nvPicPr>
-          <p:cNvPr id="4" name="Image 0" descr="/home/user/SoC_Design_and_Programming/diagrams/section3/zoom/slave_overview.png"/>
+          <p:cNvPr id="4" name="Image 0" descr="/home/user/SoC_Design_and_Programming/diagrams/section3/zoom/slave_overview.png">    </p:cNvPr>
           <p:cNvPicPr>
             <a:picLocks noChangeAspect="1"/>
           </p:cNvPicPr>
@@ -3993,12 +4192,12 @@
         </p:nvPicPr>
         <p:blipFill>
           <a:blip r:embed="rId2"/>
-          <a:srcRect/>
+          <a:srcRect l="0" r="0" t="0" b="0"/>
           <a:stretch/>
         </p:blipFill>
         <p:spPr>
           <a:xfrm>
-            <a:off x="636404" y="1988821"/>
+            <a:off x="636404" y="1783080"/>
             <a:ext cx="7871192" cy="2743200"/>
           </a:xfrm>
           <a:prstGeom prst="rect">
@@ -4027,7 +4226,7 @@
           <a:bodyPr wrap="square" rtlCol="0" anchor="ctr"/>
           <a:lstStyle/>
           <a:p>
-            <a:pPr marL="0" indent="0" algn="r">
+            <a:pPr algn="r" indent="0" marL="0">
               <a:buNone/>
             </a:pPr>
             <a:r>
@@ -4054,7 +4253,7 @@
 </file>
 
 <file path=ppt/slides/slide22.xml><?xml version="1.0" encoding="utf-8"?>
-<p:sld xmlns:a="http://schemas.openxmlformats.org/drawingml/2006/main" xmlns:r="http://schemas.openxmlformats.org/officeDocument/2006/relationships" xmlns:p="http://schemas.openxmlformats.org/presentationml/2006/main">
+<p:sld xmlns:a="http://schemas.openxmlformats.org/drawingml/2006/main" xmlns:p="http://schemas.openxmlformats.org/presentationml/2006/main" xmlns:r="http://schemas.openxmlformats.org/officeDocument/2006/relationships">
   <p:cSld>
     <p:spTree>
       <p:nvGrpSpPr>
@@ -4062,14 +4261,7 @@
         <p:cNvGrpSpPr/>
         <p:nvPr/>
       </p:nvGrpSpPr>
-      <p:grpSpPr>
-        <a:xfrm>
-          <a:off x="0" y="0"/>
-          <a:ext cx="0" cy="0"/>
-          <a:chOff x="0" y="0"/>
-          <a:chExt cx="0" cy="0"/>
-        </a:xfrm>
-      </p:grpSpPr>
+      <p:grpSpPr/>
       <p:sp>
         <p:nvSpPr>
           <p:cNvPr id="2" name="Text 0"/>
@@ -4091,7 +4283,7 @@
           <a:bodyPr wrap="square" lIns="0" tIns="0" rIns="0" bIns="0" rtlCol="0" anchor="ctr"/>
           <a:lstStyle/>
           <a:p>
-            <a:pPr marL="0" indent="0">
+            <a:pPr indent="0" marL="0">
               <a:buNone/>
             </a:pPr>
             <a:r>
@@ -4175,7 +4367,7 @@
       </p:sp>
       <p:pic>
         <p:nvPicPr>
-          <p:cNvPr id="4" name="Image 0" descr="/home/user/SoC_Design_and_Programming/diagrams/section3/zoom/s_gpio.png"/>
+          <p:cNvPr id="4" name="Image 0" descr="/home/user/SoC_Design_and_Programming/diagrams/section3/zoom/s_gpio.png">    </p:cNvPr>
           <p:cNvPicPr>
             <a:picLocks noChangeAspect="1"/>
           </p:cNvPicPr>
@@ -4183,7 +4375,7 @@
         </p:nvPicPr>
         <p:blipFill>
           <a:blip r:embed="rId2"/>
-          <a:srcRect/>
+          <a:srcRect l="0" r="0" t="0" b="0"/>
           <a:stretch/>
         </p:blipFill>
         <p:spPr>
@@ -4217,7 +4409,7 @@
           <a:bodyPr wrap="square" rtlCol="0" anchor="ctr"/>
           <a:lstStyle/>
           <a:p>
-            <a:pPr marL="0" indent="0" algn="r">
+            <a:pPr algn="r" indent="0" marL="0">
               <a:buNone/>
             </a:pPr>
             <a:r>
@@ -4244,7 +4436,7 @@
 </file>
 
 <file path=ppt/slides/slide23.xml><?xml version="1.0" encoding="utf-8"?>
-<p:sld xmlns:a="http://schemas.openxmlformats.org/drawingml/2006/main" xmlns:r="http://schemas.openxmlformats.org/officeDocument/2006/relationships" xmlns:p="http://schemas.openxmlformats.org/presentationml/2006/main">
+<p:sld xmlns:a="http://schemas.openxmlformats.org/drawingml/2006/main" xmlns:p="http://schemas.openxmlformats.org/presentationml/2006/main" xmlns:r="http://schemas.openxmlformats.org/officeDocument/2006/relationships">
   <p:cSld>
     <p:spTree>
       <p:nvGrpSpPr>
@@ -4252,14 +4444,7 @@
         <p:cNvGrpSpPr/>
         <p:nvPr/>
       </p:nvGrpSpPr>
-      <p:grpSpPr>
-        <a:xfrm>
-          <a:off x="0" y="0"/>
-          <a:ext cx="0" cy="0"/>
-          <a:chOff x="0" y="0"/>
-          <a:chExt cx="0" cy="0"/>
-        </a:xfrm>
-      </p:grpSpPr>
+      <p:grpSpPr/>
       <p:sp>
         <p:nvSpPr>
           <p:cNvPr id="2" name="Text 0"/>
@@ -4281,7 +4466,7 @@
           <a:bodyPr wrap="square" lIns="0" tIns="0" rIns="0" bIns="0" rtlCol="0" anchor="ctr"/>
           <a:lstStyle/>
           <a:p>
-            <a:pPr marL="0" indent="0">
+            <a:pPr indent="0" marL="0">
               <a:buNone/>
             </a:pPr>
             <a:r>
@@ -4365,7 +4550,7 @@
       </p:sp>
       <p:pic>
         <p:nvPicPr>
-          <p:cNvPr id="4" name="Image 0" descr="/home/user/SoC_Design_and_Programming/diagrams/section3/zoom/s_pl.png"/>
+          <p:cNvPr id="4" name="Image 0" descr="/home/user/SoC_Design_and_Programming/diagrams/section3/zoom/s_pl.png">    </p:cNvPr>
           <p:cNvPicPr>
             <a:picLocks noChangeAspect="1"/>
           </p:cNvPicPr>
@@ -4373,7 +4558,7 @@
         </p:nvPicPr>
         <p:blipFill>
           <a:blip r:embed="rId2"/>
-          <a:srcRect/>
+          <a:srcRect l="0" r="0" t="0" b="0"/>
           <a:stretch/>
         </p:blipFill>
         <p:spPr>
@@ -4407,7 +4592,7 @@
           <a:bodyPr wrap="square" rtlCol="0" anchor="ctr"/>
           <a:lstStyle/>
           <a:p>
-            <a:pPr marL="0" indent="0" algn="r">
+            <a:pPr algn="r" indent="0" marL="0">
               <a:buNone/>
             </a:pPr>
             <a:r>
@@ -4434,7 +4619,7 @@
 </file>
 
 <file path=ppt/slides/slide24.xml><?xml version="1.0" encoding="utf-8"?>
-<p:sld xmlns:a="http://schemas.openxmlformats.org/drawingml/2006/main" xmlns:r="http://schemas.openxmlformats.org/officeDocument/2006/relationships" xmlns:p="http://schemas.openxmlformats.org/presentationml/2006/main">
+<p:sld xmlns:a="http://schemas.openxmlformats.org/drawingml/2006/main" xmlns:p="http://schemas.openxmlformats.org/presentationml/2006/main" xmlns:r="http://schemas.openxmlformats.org/officeDocument/2006/relationships">
   <p:cSld>
     <p:spTree>
       <p:nvGrpSpPr>
@@ -4442,14 +4627,7 @@
         <p:cNvGrpSpPr/>
         <p:nvPr/>
       </p:nvGrpSpPr>
-      <p:grpSpPr>
-        <a:xfrm>
-          <a:off x="0" y="0"/>
-          <a:ext cx="0" cy="0"/>
-          <a:chOff x="0" y="0"/>
-          <a:chExt cx="0" cy="0"/>
-        </a:xfrm>
-      </p:grpSpPr>
+      <p:grpSpPr/>
       <p:sp>
         <p:nvSpPr>
           <p:cNvPr id="2" name="Text 0"/>
@@ -4471,7 +4649,7 @@
           <a:bodyPr wrap="square" lIns="0" tIns="0" rIns="0" bIns="0" rtlCol="0" anchor="ctr"/>
           <a:lstStyle/>
           <a:p>
-            <a:pPr marL="0" indent="0">
+            <a:pPr indent="0" marL="0">
               <a:buNone/>
             </a:pPr>
             <a:r>
@@ -4555,7 +4733,7 @@
       </p:sp>
       <p:pic>
         <p:nvPicPr>
-          <p:cNvPr id="4" name="Image 0" descr="/home/user/SoC_Design_and_Programming/diagrams/section3/zoom/s_slaveip.png"/>
+          <p:cNvPr id="4" name="Image 0" descr="/home/user/SoC_Design_and_Programming/diagrams/section3/zoom/s_slaveip.png">    </p:cNvPr>
           <p:cNvPicPr>
             <a:picLocks noChangeAspect="1"/>
           </p:cNvPicPr>
@@ -4563,12 +4741,12 @@
         </p:nvPicPr>
         <p:blipFill>
           <a:blip r:embed="rId2"/>
-          <a:srcRect/>
+          <a:srcRect l="0" r="0" t="0" b="0"/>
           <a:stretch/>
         </p:blipFill>
         <p:spPr>
           <a:xfrm>
-            <a:off x="582055" y="2400300"/>
+            <a:off x="745187" y="1783080"/>
             <a:ext cx="7653626" cy="2743200"/>
           </a:xfrm>
           <a:prstGeom prst="rect">
@@ -4597,7 +4775,7 @@
           <a:bodyPr wrap="square" rtlCol="0" anchor="ctr"/>
           <a:lstStyle/>
           <a:p>
-            <a:pPr marL="0" indent="0" algn="r">
+            <a:pPr algn="r" indent="0" marL="0">
               <a:buNone/>
             </a:pPr>
             <a:r>
@@ -4624,7 +4802,7 @@
 </file>
 
 <file path=ppt/slides/slide25.xml><?xml version="1.0" encoding="utf-8"?>
-<p:sld xmlns:a="http://schemas.openxmlformats.org/drawingml/2006/main" xmlns:r="http://schemas.openxmlformats.org/officeDocument/2006/relationships" xmlns:p="http://schemas.openxmlformats.org/presentationml/2006/main">
+<p:sld xmlns:a="http://schemas.openxmlformats.org/drawingml/2006/main" xmlns:p="http://schemas.openxmlformats.org/presentationml/2006/main" xmlns:r="http://schemas.openxmlformats.org/officeDocument/2006/relationships">
   <p:cSld>
     <p:spTree>
       <p:nvGrpSpPr>
@@ -4632,14 +4810,7 @@
         <p:cNvGrpSpPr/>
         <p:nvPr/>
       </p:nvGrpSpPr>
-      <p:grpSpPr>
-        <a:xfrm>
-          <a:off x="0" y="0"/>
-          <a:ext cx="0" cy="0"/>
-          <a:chOff x="0" y="0"/>
-          <a:chExt cx="0" cy="0"/>
-        </a:xfrm>
-      </p:grpSpPr>
+      <p:grpSpPr/>
       <p:sp>
         <p:nvSpPr>
           <p:cNvPr id="2" name="Text 0"/>
@@ -4661,7 +4832,7 @@
           <a:bodyPr wrap="square" lIns="0" tIns="0" rIns="0" bIns="0" rtlCol="0" anchor="ctr"/>
           <a:lstStyle/>
           <a:p>
-            <a:pPr marL="0" indent="0">
+            <a:pPr indent="0" marL="0">
               <a:buNone/>
             </a:pPr>
             <a:r>
@@ -4806,7 +4977,7 @@
           <a:bodyPr wrap="square" rtlCol="0" anchor="ctr"/>
           <a:lstStyle/>
           <a:p>
-            <a:pPr marL="0" indent="0" algn="r">
+            <a:pPr algn="r" indent="0" marL="0">
               <a:buNone/>
             </a:pPr>
             <a:r>
@@ -4833,7 +5004,7 @@
 </file>
 
 <file path=ppt/slides/slide26.xml><?xml version="1.0" encoding="utf-8"?>
-<p:sld xmlns:a="http://schemas.openxmlformats.org/drawingml/2006/main" xmlns:r="http://schemas.openxmlformats.org/officeDocument/2006/relationships" xmlns:p="http://schemas.openxmlformats.org/presentationml/2006/main">
+<p:sld xmlns:a="http://schemas.openxmlformats.org/drawingml/2006/main" xmlns:p="http://schemas.openxmlformats.org/presentationml/2006/main" xmlns:r="http://schemas.openxmlformats.org/officeDocument/2006/relationships">
   <p:cSld>
     <p:spTree>
       <p:nvGrpSpPr>
@@ -4841,14 +5012,7 @@
         <p:cNvGrpSpPr/>
         <p:nvPr/>
       </p:nvGrpSpPr>
-      <p:grpSpPr>
-        <a:xfrm>
-          <a:off x="0" y="0"/>
-          <a:ext cx="0" cy="0"/>
-          <a:chOff x="0" y="0"/>
-          <a:chExt cx="0" cy="0"/>
-        </a:xfrm>
-      </p:grpSpPr>
+      <p:grpSpPr/>
       <p:sp>
         <p:nvSpPr>
           <p:cNvPr id="2" name="Text 0"/>
@@ -4870,7 +5034,7 @@
           <a:bodyPr wrap="square" lIns="0" tIns="0" rIns="0" bIns="0" rtlCol="0" anchor="ctr"/>
           <a:lstStyle/>
           <a:p>
-            <a:pPr marL="0" indent="0">
+            <a:pPr indent="0" marL="0">
               <a:buNone/>
             </a:pPr>
             <a:r>
@@ -4972,69 +5136,15 @@
             <a:tbl>
               <a:tblPr/>
               <a:tblGrid>
-                <a:gridCol w="894080">
-                  <a:extLst>
-                    <a:ext uri="{9D8B030D-6E8A-4147-A177-3AD203B41FA5}">
-                      <a16:colId xmlns:a16="http://schemas.microsoft.com/office/drawing/2014/main" val="20000"/>
-                    </a:ext>
-                  </a:extLst>
-                </a:gridCol>
-                <a:gridCol w="894080">
-                  <a:extLst>
-                    <a:ext uri="{9D8B030D-6E8A-4147-A177-3AD203B41FA5}">
-                      <a16:colId xmlns:a16="http://schemas.microsoft.com/office/drawing/2014/main" val="20001"/>
-                    </a:ext>
-                  </a:extLst>
-                </a:gridCol>
-                <a:gridCol w="894080">
-                  <a:extLst>
-                    <a:ext uri="{9D8B030D-6E8A-4147-A177-3AD203B41FA5}">
-                      <a16:colId xmlns:a16="http://schemas.microsoft.com/office/drawing/2014/main" val="20002"/>
-                    </a:ext>
-                  </a:extLst>
-                </a:gridCol>
-                <a:gridCol w="894080">
-                  <a:extLst>
-                    <a:ext uri="{9D8B030D-6E8A-4147-A177-3AD203B41FA5}">
-                      <a16:colId xmlns:a16="http://schemas.microsoft.com/office/drawing/2014/main" val="20003"/>
-                    </a:ext>
-                  </a:extLst>
-                </a:gridCol>
-                <a:gridCol w="894080">
-                  <a:extLst>
-                    <a:ext uri="{9D8B030D-6E8A-4147-A177-3AD203B41FA5}">
-                      <a16:colId xmlns:a16="http://schemas.microsoft.com/office/drawing/2014/main" val="20004"/>
-                    </a:ext>
-                  </a:extLst>
-                </a:gridCol>
-                <a:gridCol w="894080">
-                  <a:extLst>
-                    <a:ext uri="{9D8B030D-6E8A-4147-A177-3AD203B41FA5}">
-                      <a16:colId xmlns:a16="http://schemas.microsoft.com/office/drawing/2014/main" val="20005"/>
-                    </a:ext>
-                  </a:extLst>
-                </a:gridCol>
-                <a:gridCol w="894080">
-                  <a:extLst>
-                    <a:ext uri="{9D8B030D-6E8A-4147-A177-3AD203B41FA5}">
-                      <a16:colId xmlns:a16="http://schemas.microsoft.com/office/drawing/2014/main" val="20006"/>
-                    </a:ext>
-                  </a:extLst>
-                </a:gridCol>
-                <a:gridCol w="894080">
-                  <a:extLst>
-                    <a:ext uri="{9D8B030D-6E8A-4147-A177-3AD203B41FA5}">
-                      <a16:colId xmlns:a16="http://schemas.microsoft.com/office/drawing/2014/main" val="20007"/>
-                    </a:ext>
-                  </a:extLst>
-                </a:gridCol>
-                <a:gridCol w="894080">
-                  <a:extLst>
-                    <a:ext uri="{9D8B030D-6E8A-4147-A177-3AD203B41FA5}">
-                      <a16:colId xmlns:a16="http://schemas.microsoft.com/office/drawing/2014/main" val="20008"/>
-                    </a:ext>
-                  </a:extLst>
-                </a:gridCol>
+                <a:gridCol w="894080"/>
+                <a:gridCol w="894080"/>
+                <a:gridCol w="894080"/>
+                <a:gridCol w="894080"/>
+                <a:gridCol w="894080"/>
+                <a:gridCol w="894080"/>
+                <a:gridCol w="894080"/>
+                <a:gridCol w="894080"/>
+                <a:gridCol w="894080"/>
               </a:tblGrid>
               <a:tr h="457200">
                 <a:tc>
@@ -5042,7 +5152,7 @@
                     <a:bodyPr/>
                     <a:lstStyle/>
                     <a:p>
-                      <a:pPr marL="0" indent="0" algn="ctr">
+                      <a:pPr algn="ctr" indent="0" marL="0">
                         <a:buNone/>
                       </a:pPr>
                       <a:r>
@@ -5063,7 +5173,7 @@
                       </a:endParaRPr>
                     </a:p>
                   </a:txBody>
-                  <a:tcPr>
+                  <a:tcPr marL="91440" marR="91440" marT="45720" marB="45720">
                     <a:lnL w="6350" cap="flat" cmpd="sng" algn="ctr">
                       <a:solidFill>
                         <a:srgbClr val="CCCCCC"/>
@@ -5110,7 +5220,7 @@
                     <a:bodyPr/>
                     <a:lstStyle/>
                     <a:p>
-                      <a:pPr marL="0" indent="0" algn="ctr">
+                      <a:pPr algn="ctr" indent="0" marL="0">
                         <a:buNone/>
                       </a:pPr>
                       <a:r>
@@ -5131,7 +5241,7 @@
                       </a:endParaRPr>
                     </a:p>
                   </a:txBody>
-                  <a:tcPr>
+                  <a:tcPr marL="91440" marR="91440" marT="45720" marB="45720">
                     <a:lnL w="6350" cap="flat" cmpd="sng" algn="ctr">
                       <a:solidFill>
                         <a:srgbClr val="CCCCCC"/>
@@ -5178,7 +5288,7 @@
                     <a:bodyPr/>
                     <a:lstStyle/>
                     <a:p>
-                      <a:pPr marL="0" indent="0" algn="ctr">
+                      <a:pPr algn="ctr" indent="0" marL="0">
                         <a:buNone/>
                       </a:pPr>
                       <a:r>
@@ -5199,7 +5309,7 @@
                       </a:endParaRPr>
                     </a:p>
                   </a:txBody>
-                  <a:tcPr>
+                  <a:tcPr marL="91440" marR="91440" marT="45720" marB="45720">
                     <a:lnL w="6350" cap="flat" cmpd="sng" algn="ctr">
                       <a:solidFill>
                         <a:srgbClr val="CCCCCC"/>
@@ -5246,7 +5356,7 @@
                     <a:bodyPr/>
                     <a:lstStyle/>
                     <a:p>
-                      <a:pPr marL="0" indent="0" algn="ctr">
+                      <a:pPr algn="ctr" indent="0" marL="0">
                         <a:buNone/>
                       </a:pPr>
                       <a:r>
@@ -5267,7 +5377,7 @@
                       </a:endParaRPr>
                     </a:p>
                   </a:txBody>
-                  <a:tcPr>
+                  <a:tcPr marL="91440" marR="91440" marT="45720" marB="45720">
                     <a:lnL w="6350" cap="flat" cmpd="sng" algn="ctr">
                       <a:solidFill>
                         <a:srgbClr val="CCCCCC"/>
@@ -5314,7 +5424,7 @@
                     <a:bodyPr/>
                     <a:lstStyle/>
                     <a:p>
-                      <a:pPr marL="0" indent="0" algn="ctr">
+                      <a:pPr algn="ctr" indent="0" marL="0">
                         <a:buNone/>
                       </a:pPr>
                       <a:r>
@@ -5335,7 +5445,7 @@
                       </a:endParaRPr>
                     </a:p>
                   </a:txBody>
-                  <a:tcPr>
+                  <a:tcPr marL="91440" marR="91440" marT="45720" marB="45720">
                     <a:lnL w="6350" cap="flat" cmpd="sng" algn="ctr">
                       <a:solidFill>
                         <a:srgbClr val="CCCCCC"/>
@@ -5382,7 +5492,7 @@
                     <a:bodyPr/>
                     <a:lstStyle/>
                     <a:p>
-                      <a:pPr marL="0" indent="0" algn="ctr">
+                      <a:pPr algn="ctr" indent="0" marL="0">
                         <a:buNone/>
                       </a:pPr>
                       <a:r>
@@ -5403,7 +5513,7 @@
                       </a:endParaRPr>
                     </a:p>
                   </a:txBody>
-                  <a:tcPr>
+                  <a:tcPr marL="91440" marR="91440" marT="45720" marB="45720">
                     <a:lnL w="6350" cap="flat" cmpd="sng" algn="ctr">
                       <a:solidFill>
                         <a:srgbClr val="CCCCCC"/>
@@ -5450,7 +5560,7 @@
                     <a:bodyPr/>
                     <a:lstStyle/>
                     <a:p>
-                      <a:pPr marL="0" indent="0" algn="ctr">
+                      <a:pPr algn="ctr" indent="0" marL="0">
                         <a:buNone/>
                       </a:pPr>
                       <a:r>
@@ -5471,7 +5581,7 @@
                       </a:endParaRPr>
                     </a:p>
                   </a:txBody>
-                  <a:tcPr>
+                  <a:tcPr marL="91440" marR="91440" marT="45720" marB="45720">
                     <a:lnL w="6350" cap="flat" cmpd="sng" algn="ctr">
                       <a:solidFill>
                         <a:srgbClr val="CCCCCC"/>
@@ -5518,7 +5628,7 @@
                     <a:bodyPr/>
                     <a:lstStyle/>
                     <a:p>
-                      <a:pPr marL="0" indent="0" algn="ctr">
+                      <a:pPr algn="ctr" indent="0" marL="0">
                         <a:buNone/>
                       </a:pPr>
                       <a:r>
@@ -5539,7 +5649,7 @@
                       </a:endParaRPr>
                     </a:p>
                   </a:txBody>
-                  <a:tcPr>
+                  <a:tcPr marL="91440" marR="91440" marT="45720" marB="45720">
                     <a:lnL w="6350" cap="flat" cmpd="sng" algn="ctr">
                       <a:solidFill>
                         <a:srgbClr val="CCCCCC"/>
@@ -5586,7 +5696,7 @@
                     <a:bodyPr/>
                     <a:lstStyle/>
                     <a:p>
-                      <a:pPr marL="0" indent="0" algn="ctr">
+                      <a:pPr algn="ctr" indent="0" marL="0">
                         <a:buNone/>
                       </a:pPr>
                       <a:r>
@@ -5607,7 +5717,7 @@
                       </a:endParaRPr>
                     </a:p>
                   </a:txBody>
-                  <a:tcPr>
+                  <a:tcPr marL="91440" marR="91440" marT="45720" marB="45720">
                     <a:lnL w="6350" cap="flat" cmpd="sng" algn="ctr">
                       <a:solidFill>
                         <a:srgbClr val="CCCCCC"/>
@@ -5649,11 +5759,6 @@
                     </a:solidFill>
                   </a:tcPr>
                 </a:tc>
-                <a:extLst>
-                  <a:ext uri="{0D108BD9-81ED-4DB2-BD59-A6C34878D82A}">
-                    <a16:rowId xmlns:a16="http://schemas.microsoft.com/office/drawing/2014/main" val="10000"/>
-                  </a:ext>
-                </a:extLst>
               </a:tr>
               <a:tr h="457200">
                 <a:tc>
@@ -5661,7 +5766,7 @@
                     <a:bodyPr/>
                     <a:lstStyle/>
                     <a:p>
-                      <a:pPr marL="0" indent="0" algn="ctr">
+                      <a:pPr algn="ctr" indent="0" marL="0">
                         <a:buNone/>
                       </a:pPr>
                       <a:r>
@@ -5682,7 +5787,7 @@
                       </a:endParaRPr>
                     </a:p>
                   </a:txBody>
-                  <a:tcPr>
+                  <a:tcPr marL="91440" marR="91440" marT="45720" marB="45720">
                     <a:lnL w="6350" cap="flat" cmpd="sng" algn="ctr">
                       <a:solidFill>
                         <a:srgbClr val="CCCCCC"/>
@@ -5726,7 +5831,7 @@
                     <a:bodyPr/>
                     <a:lstStyle/>
                     <a:p>
-                      <a:pPr marL="0" indent="0" algn="ctr">
+                      <a:pPr algn="ctr" indent="0" marL="0">
                         <a:buNone/>
                       </a:pPr>
                       <a:r>
@@ -5747,7 +5852,7 @@
                       </a:endParaRPr>
                     </a:p>
                   </a:txBody>
-                  <a:tcPr>
+                  <a:tcPr marL="91440" marR="91440" marT="45720" marB="45720">
                     <a:lnL w="6350" cap="flat" cmpd="sng" algn="ctr">
                       <a:solidFill>
                         <a:srgbClr val="CCCCCC"/>
@@ -5791,7 +5896,7 @@
                     <a:bodyPr/>
                     <a:lstStyle/>
                     <a:p>
-                      <a:pPr marL="0" indent="0" algn="ctr">
+                      <a:pPr algn="ctr" indent="0" marL="0">
                         <a:buNone/>
                       </a:pPr>
                       <a:r>
@@ -5812,7 +5917,7 @@
                       </a:endParaRPr>
                     </a:p>
                   </a:txBody>
-                  <a:tcPr>
+                  <a:tcPr marL="91440" marR="91440" marT="45720" marB="45720">
                     <a:lnL w="6350" cap="flat" cmpd="sng" algn="ctr">
                       <a:solidFill>
                         <a:srgbClr val="CCCCCC"/>
@@ -5856,7 +5961,7 @@
                     <a:bodyPr/>
                     <a:lstStyle/>
                     <a:p>
-                      <a:pPr marL="0" indent="0" algn="ctr">
+                      <a:pPr algn="ctr" indent="0" marL="0">
                         <a:buNone/>
                       </a:pPr>
                       <a:r>
@@ -5877,7 +5982,7 @@
                       </a:endParaRPr>
                     </a:p>
                   </a:txBody>
-                  <a:tcPr>
+                  <a:tcPr marL="91440" marR="91440" marT="45720" marB="45720">
                     <a:lnL w="6350" cap="flat" cmpd="sng" algn="ctr">
                       <a:solidFill>
                         <a:srgbClr val="CCCCCC"/>
@@ -5921,7 +6026,7 @@
                     <a:bodyPr/>
                     <a:lstStyle/>
                     <a:p>
-                      <a:pPr marL="0" indent="0" algn="ctr">
+                      <a:pPr algn="ctr" indent="0" marL="0">
                         <a:buNone/>
                       </a:pPr>
                       <a:r>
@@ -5942,7 +6047,7 @@
                       </a:endParaRPr>
                     </a:p>
                   </a:txBody>
-                  <a:tcPr>
+                  <a:tcPr marL="91440" marR="91440" marT="45720" marB="45720">
                     <a:lnL w="6350" cap="flat" cmpd="sng" algn="ctr">
                       <a:solidFill>
                         <a:srgbClr val="CCCCCC"/>
@@ -5986,7 +6091,7 @@
                     <a:bodyPr/>
                     <a:lstStyle/>
                     <a:p>
-                      <a:pPr marL="0" indent="0" algn="ctr">
+                      <a:pPr algn="ctr" indent="0" marL="0">
                         <a:buNone/>
                       </a:pPr>
                       <a:r>
@@ -6007,7 +6112,7 @@
                       </a:endParaRPr>
                     </a:p>
                   </a:txBody>
-                  <a:tcPr>
+                  <a:tcPr marL="91440" marR="91440" marT="45720" marB="45720">
                     <a:lnL w="6350" cap="flat" cmpd="sng" algn="ctr">
                       <a:solidFill>
                         <a:srgbClr val="CCCCCC"/>
@@ -6051,7 +6156,7 @@
                     <a:bodyPr/>
                     <a:lstStyle/>
                     <a:p>
-                      <a:pPr marL="0" indent="0" algn="ctr">
+                      <a:pPr algn="ctr" indent="0" marL="0">
                         <a:buNone/>
                       </a:pPr>
                       <a:r>
@@ -6072,7 +6177,7 @@
                       </a:endParaRPr>
                     </a:p>
                   </a:txBody>
-                  <a:tcPr>
+                  <a:tcPr marL="91440" marR="91440" marT="45720" marB="45720">
                     <a:lnL w="6350" cap="flat" cmpd="sng" algn="ctr">
                       <a:solidFill>
                         <a:srgbClr val="CCCCCC"/>
@@ -6116,7 +6221,7 @@
                     <a:bodyPr/>
                     <a:lstStyle/>
                     <a:p>
-                      <a:pPr marL="0" indent="0" algn="ctr">
+                      <a:pPr algn="ctr" indent="0" marL="0">
                         <a:buNone/>
                       </a:pPr>
                       <a:r>
@@ -6137,7 +6242,7 @@
                       </a:endParaRPr>
                     </a:p>
                   </a:txBody>
-                  <a:tcPr>
+                  <a:tcPr marL="91440" marR="91440" marT="45720" marB="45720">
                     <a:lnL w="6350" cap="flat" cmpd="sng" algn="ctr">
                       <a:solidFill>
                         <a:srgbClr val="CCCCCC"/>
@@ -6181,7 +6286,7 @@
                     <a:bodyPr/>
                     <a:lstStyle/>
                     <a:p>
-                      <a:pPr marL="0" indent="0" algn="ctr">
+                      <a:pPr algn="ctr" indent="0" marL="0">
                         <a:buNone/>
                       </a:pPr>
                       <a:r>
@@ -6202,7 +6307,7 @@
                       </a:endParaRPr>
                     </a:p>
                   </a:txBody>
-                  <a:tcPr>
+                  <a:tcPr marL="91440" marR="91440" marT="45720" marB="45720">
                     <a:lnL w="6350" cap="flat" cmpd="sng" algn="ctr">
                       <a:solidFill>
                         <a:srgbClr val="CCCCCC"/>
@@ -6241,11 +6346,6 @@
                     </a:lnB>
                   </a:tcPr>
                 </a:tc>
-                <a:extLst>
-                  <a:ext uri="{0D108BD9-81ED-4DB2-BD59-A6C34878D82A}">
-                    <a16:rowId xmlns:a16="http://schemas.microsoft.com/office/drawing/2014/main" val="10001"/>
-                  </a:ext>
-                </a:extLst>
               </a:tr>
             </a:tbl>
           </a:graphicData>
@@ -6272,7 +6372,7 @@
           <a:bodyPr wrap="square" rtlCol="0" anchor="ctr"/>
           <a:lstStyle/>
           <a:p>
-            <a:pPr marL="0" indent="0" algn="r">
+            <a:pPr algn="r" indent="0" marL="0">
               <a:buNone/>
             </a:pPr>
             <a:r>
@@ -6299,7 +6399,7 @@
 </file>
 
 <file path=ppt/slides/slide27.xml><?xml version="1.0" encoding="utf-8"?>
-<p:sld xmlns:a="http://schemas.openxmlformats.org/drawingml/2006/main" xmlns:r="http://schemas.openxmlformats.org/officeDocument/2006/relationships" xmlns:p="http://schemas.openxmlformats.org/presentationml/2006/main">
+<p:sld xmlns:a="http://schemas.openxmlformats.org/drawingml/2006/main" xmlns:p="http://schemas.openxmlformats.org/presentationml/2006/main" xmlns:r="http://schemas.openxmlformats.org/officeDocument/2006/relationships">
   <p:cSld>
     <p:spTree>
       <p:nvGrpSpPr>
@@ -6307,14 +6407,7 @@
         <p:cNvGrpSpPr/>
         <p:nvPr/>
       </p:nvGrpSpPr>
-      <p:grpSpPr>
-        <a:xfrm>
-          <a:off x="0" y="0"/>
-          <a:ext cx="0" cy="0"/>
-          <a:chOff x="0" y="0"/>
-          <a:chExt cx="0" cy="0"/>
-        </a:xfrm>
-      </p:grpSpPr>
+      <p:grpSpPr/>
       <p:sp>
         <p:nvSpPr>
           <p:cNvPr id="2" name="Text 0"/>
@@ -6336,7 +6429,7 @@
           <a:bodyPr wrap="square" lIns="0" tIns="0" rIns="0" bIns="0" rtlCol="0" anchor="ctr"/>
           <a:lstStyle/>
           <a:p>
-            <a:pPr marL="0" indent="0">
+            <a:pPr indent="0" marL="0">
               <a:buNone/>
             </a:pPr>
             <a:r>
@@ -6481,7 +6574,7 @@
           <a:bodyPr wrap="square" rtlCol="0" anchor="ctr"/>
           <a:lstStyle/>
           <a:p>
-            <a:pPr marL="0" indent="0" algn="r">
+            <a:pPr algn="r" indent="0" marL="0">
               <a:buNone/>
             </a:pPr>
             <a:r>
@@ -6508,7 +6601,7 @@
 </file>
 
 <file path=ppt/slides/slide28.xml><?xml version="1.0" encoding="utf-8"?>
-<p:sld xmlns:a="http://schemas.openxmlformats.org/drawingml/2006/main" xmlns:r="http://schemas.openxmlformats.org/officeDocument/2006/relationships" xmlns:p="http://schemas.openxmlformats.org/presentationml/2006/main">
+<p:sld xmlns:a="http://schemas.openxmlformats.org/drawingml/2006/main" xmlns:p="http://schemas.openxmlformats.org/presentationml/2006/main" xmlns:r="http://schemas.openxmlformats.org/officeDocument/2006/relationships">
   <p:cSld>
     <p:spTree>
       <p:nvGrpSpPr>
@@ -6516,14 +6609,7 @@
         <p:cNvGrpSpPr/>
         <p:nvPr/>
       </p:nvGrpSpPr>
-      <p:grpSpPr>
-        <a:xfrm>
-          <a:off x="0" y="0"/>
-          <a:ext cx="0" cy="0"/>
-          <a:chOff x="0" y="0"/>
-          <a:chExt cx="0" cy="0"/>
-        </a:xfrm>
-      </p:grpSpPr>
+      <p:grpSpPr/>
       <p:sp>
         <p:nvSpPr>
           <p:cNvPr id="2" name="Text 0"/>
@@ -6545,7 +6631,7 @@
           <a:bodyPr wrap="square" lIns="0" tIns="0" rIns="0" bIns="0" rtlCol="0" anchor="ctr"/>
           <a:lstStyle/>
           <a:p>
-            <a:pPr marL="0" indent="0">
+            <a:pPr indent="0" marL="0">
               <a:buNone/>
             </a:pPr>
             <a:r>
@@ -6671,7 +6757,7 @@
       </p:sp>
       <p:pic>
         <p:nvPicPr>
-          <p:cNvPr id="4" name="Image 0" descr="/home/user/SoC_Design_and_Programming/diagrams/section3/zoom/master_fault_flow.png"/>
+          <p:cNvPr id="4" name="Image 0" descr="/home/user/SoC_Design_and_Programming/diagrams/section3/zoom/master_fault_flow.png">    </p:cNvPr>
           <p:cNvPicPr>
             <a:picLocks noChangeAspect="1"/>
           </p:cNvPicPr>
@@ -6679,13 +6765,13 @@
         </p:nvPicPr>
         <p:blipFill>
           <a:blip r:embed="rId2"/>
-          <a:srcRect/>
+          <a:srcRect l="0" r="0" t="0" b="0"/>
           <a:stretch/>
         </p:blipFill>
         <p:spPr>
           <a:xfrm>
-            <a:off x="960418" y="2491740"/>
-            <a:ext cx="6999932" cy="2651760"/>
+            <a:off x="1383381" y="1920240"/>
+            <a:ext cx="6377239" cy="2651760"/>
           </a:xfrm>
           <a:prstGeom prst="rect">
             <a:avLst/>
@@ -6713,7 +6799,7 @@
           <a:bodyPr wrap="square" rtlCol="0" anchor="ctr"/>
           <a:lstStyle/>
           <a:p>
-            <a:pPr marL="0" indent="0" algn="r">
+            <a:pPr algn="r" indent="0" marL="0">
               <a:buNone/>
             </a:pPr>
             <a:r>
@@ -6740,7 +6826,7 @@
 </file>
 
 <file path=ppt/slides/slide29.xml><?xml version="1.0" encoding="utf-8"?>
-<p:sld xmlns:a="http://schemas.openxmlformats.org/drawingml/2006/main" xmlns:r="http://schemas.openxmlformats.org/officeDocument/2006/relationships" xmlns:p="http://schemas.openxmlformats.org/presentationml/2006/main">
+<p:sld xmlns:a="http://schemas.openxmlformats.org/drawingml/2006/main" xmlns:p="http://schemas.openxmlformats.org/presentationml/2006/main" xmlns:r="http://schemas.openxmlformats.org/officeDocument/2006/relationships">
   <p:cSld>
     <p:spTree>
       <p:nvGrpSpPr>
@@ -6748,14 +6834,7 @@
         <p:cNvGrpSpPr/>
         <p:nvPr/>
       </p:nvGrpSpPr>
-      <p:grpSpPr>
-        <a:xfrm>
-          <a:off x="0" y="0"/>
-          <a:ext cx="0" cy="0"/>
-          <a:chOff x="0" y="0"/>
-          <a:chExt cx="0" cy="0"/>
-        </a:xfrm>
-      </p:grpSpPr>
+      <p:grpSpPr/>
       <p:sp>
         <p:nvSpPr>
           <p:cNvPr id="2" name="Text 0"/>
@@ -6777,7 +6856,7 @@
           <a:bodyPr wrap="square" lIns="0" tIns="0" rIns="0" bIns="0" rtlCol="0" anchor="ctr"/>
           <a:lstStyle/>
           <a:p>
-            <a:pPr marL="0" indent="0">
+            <a:pPr indent="0" marL="0">
               <a:buNone/>
             </a:pPr>
             <a:r>
@@ -6901,7 +6980,7 @@
           <a:bodyPr wrap="square" rtlCol="0" anchor="ctr"/>
           <a:lstStyle/>
           <a:p>
-            <a:pPr marL="0" indent="0" algn="r">
+            <a:pPr algn="r" indent="0" marL="0">
               <a:buNone/>
             </a:pPr>
             <a:r>
@@ -6928,634 +7007,6 @@
 </file>
 
 <file path=ppt/slides/slide3.xml><?xml version="1.0" encoding="utf-8"?>
-<p:sld xmlns:a="http://schemas.openxmlformats.org/drawingml/2006/main" xmlns:r="http://schemas.openxmlformats.org/officeDocument/2006/relationships" xmlns:p="http://schemas.openxmlformats.org/presentationml/2006/main">
-  <p:cSld>
-    <p:bg>
-      <p:bgPr>
-        <a:solidFill>
-          <a:srgbClr val="F2F2F2"/>
-        </a:solidFill>
-        <a:effectLst/>
-      </p:bgPr>
-    </p:bg>
-    <p:spTree>
-      <p:nvGrpSpPr>
-        <p:cNvPr id="1" name=""/>
-        <p:cNvGrpSpPr/>
-        <p:nvPr/>
-      </p:nvGrpSpPr>
-      <p:grpSpPr>
-        <a:xfrm>
-          <a:off x="0" y="0"/>
-          <a:ext cx="0" cy="0"/>
-          <a:chOff x="0" y="0"/>
-          <a:chExt cx="0" cy="0"/>
-        </a:xfrm>
-      </p:grpSpPr>
-      <p:sp>
-        <p:nvSpPr>
-          <p:cNvPr id="2" name="TextBox 1"/>
-          <p:cNvSpPr txBox="1"/>
-          <p:nvPr/>
-        </p:nvSpPr>
-        <p:spPr>
-          <a:xfrm>
-            <a:off x="548640" y="1828800"/>
-            <a:ext cx="8046720" cy="1371600"/>
-          </a:xfrm>
-          <a:prstGeom prst="rect">
-            <a:avLst/>
-          </a:prstGeom>
-          <a:noFill/>
-        </p:spPr>
-        <p:txBody>
-          <a:bodyPr wrap="square">
-            <a:spAutoFit/>
-          </a:bodyPr>
-          <a:lstStyle/>
-          <a:p>
-            <a:pPr algn="l"/>
-            <a:r>
-              <a:rPr sz="4000" b="1">
-                <a:solidFill>
-                  <a:srgbClr val="111111"/>
-                </a:solidFill>
-                <a:latin typeface="Noto Sans CJK KR"/>
-              </a:rPr>
-              <a:t>1. 프로젝트 소개</a:t>
-            </a:r>
-          </a:p>
-        </p:txBody>
-      </p:sp>
-      <p:sp>
-        <p:nvSpPr>
-          <p:cNvPr id="3" name="TextBox 2"/>
-          <p:cNvSpPr txBox="1"/>
-          <p:nvPr/>
-        </p:nvSpPr>
-        <p:spPr>
-          <a:xfrm>
-            <a:off x="548640" y="3111120"/>
-            <a:ext cx="8046720" cy="457200"/>
-          </a:xfrm>
-          <a:prstGeom prst="rect">
-            <a:avLst/>
-          </a:prstGeom>
-          <a:noFill/>
-        </p:spPr>
-        <p:txBody>
-          <a:bodyPr wrap="square">
-            <a:spAutoFit/>
-          </a:bodyPr>
-          <a:lstStyle/>
-          <a:p>
-            <a:r>
-              <a:rPr sz="1800">
-                <a:solidFill>
-                  <a:srgbClr val="666666"/>
-                </a:solidFill>
-                <a:latin typeface="Noto Sans CJK KR"/>
-              </a:rPr>
-              <a:t>왜 시간을 나누어 전송해야 하는지, 프로젝트의 목표를 짚는다</a:t>
-            </a:r>
-          </a:p>
-        </p:txBody>
-      </p:sp>
-      <p:sp>
-        <p:nvSpPr>
-          <p:cNvPr id="4" name="TextBox 3"/>
-          <p:cNvSpPr txBox="1"/>
-          <p:nvPr/>
-        </p:nvSpPr>
-        <p:spPr>
-          <a:xfrm>
-            <a:off x="8503920" y="4754880"/>
-            <a:ext cx="457200" cy="274320"/>
-          </a:xfrm>
-          <a:prstGeom prst="rect">
-            <a:avLst/>
-          </a:prstGeom>
-          <a:noFill/>
-        </p:spPr>
-        <p:txBody>
-          <a:bodyPr wrap="none">
-            <a:spAutoFit/>
-          </a:bodyPr>
-          <a:lstStyle/>
-          <a:p>
-            <a:pPr algn="r"/>
-            <a:r>
-              <a:rPr sz="1200">
-                <a:solidFill>
-                  <a:srgbClr val="999999"/>
-                </a:solidFill>
-                <a:latin typeface="Noto Sans CJK KR"/>
-              </a:rPr>
-              <a:t>3</a:t>
-            </a:r>
-          </a:p>
-        </p:txBody>
-      </p:sp>
-    </p:spTree>
-  </p:cSld>
-  <p:clrMapOvr>
-    <a:masterClrMapping/>
-  </p:clrMapOvr>
-</p:sld>
-</file>
-
-<file path=ppt/slides/slide30.xml><?xml version="1.0" encoding="utf-8"?>
-<p:sld xmlns:a="http://schemas.openxmlformats.org/drawingml/2006/main" xmlns:r="http://schemas.openxmlformats.org/officeDocument/2006/relationships" xmlns:p="http://schemas.openxmlformats.org/presentationml/2006/main">
-  <p:cSld>
-    <p:bg>
-      <p:bgPr>
-        <a:solidFill>
-          <a:srgbClr val="F2F2F2"/>
-        </a:solidFill>
-        <a:effectLst/>
-      </p:bgPr>
-    </p:bg>
-    <p:spTree>
-      <p:nvGrpSpPr>
-        <p:cNvPr id="1" name=""/>
-        <p:cNvGrpSpPr/>
-        <p:nvPr/>
-      </p:nvGrpSpPr>
-      <p:grpSpPr>
-        <a:xfrm>
-          <a:off x="0" y="0"/>
-          <a:ext cx="0" cy="0"/>
-          <a:chOff x="0" y="0"/>
-          <a:chExt cx="0" cy="0"/>
-        </a:xfrm>
-      </p:grpSpPr>
-      <p:sp>
-        <p:nvSpPr>
-          <p:cNvPr id="2" name="TextBox 1"/>
-          <p:cNvSpPr txBox="1"/>
-          <p:nvPr/>
-        </p:nvSpPr>
-        <p:spPr>
-          <a:xfrm>
-            <a:off x="548640" y="1828800"/>
-            <a:ext cx="8046720" cy="1371600"/>
-          </a:xfrm>
-          <a:prstGeom prst="rect">
-            <a:avLst/>
-          </a:prstGeom>
-          <a:noFill/>
-        </p:spPr>
-        <p:txBody>
-          <a:bodyPr wrap="square">
-            <a:spAutoFit/>
-          </a:bodyPr>
-          <a:lstStyle/>
-          <a:p>
-            <a:pPr algn="l"/>
-            <a:r>
-              <a:rPr sz="4000" b="1">
-                <a:solidFill>
-                  <a:srgbClr val="111111"/>
-                </a:solidFill>
-                <a:latin typeface="Noto Sans CJK KR"/>
-              </a:rPr>
-              <a:t>4. TDMA 통신 시연</a:t>
-            </a:r>
-          </a:p>
-        </p:txBody>
-      </p:sp>
-      <p:sp>
-        <p:nvSpPr>
-          <p:cNvPr id="3" name="TextBox 2"/>
-          <p:cNvSpPr txBox="1"/>
-          <p:nvPr/>
-        </p:nvSpPr>
-        <p:spPr>
-          <a:xfrm>
-            <a:off x="548640" y="3111120"/>
-            <a:ext cx="8046720" cy="457200"/>
-          </a:xfrm>
-          <a:prstGeom prst="rect">
-            <a:avLst/>
-          </a:prstGeom>
-          <a:noFill/>
-        </p:spPr>
-        <p:txBody>
-          <a:bodyPr wrap="square">
-            <a:spAutoFit/>
-          </a:bodyPr>
-          <a:lstStyle/>
-          <a:p>
-            <a:r>
-              <a:rPr sz="1800">
-                <a:solidFill>
-                  <a:srgbClr val="666666"/>
-                </a:solidFill>
-                <a:latin typeface="Noto Sans CJK KR"/>
-              </a:rPr>
-              <a:t>실제 보드에서 TDMA 통신이 동작하는 과정을 시연한다</a:t>
-            </a:r>
-          </a:p>
-        </p:txBody>
-      </p:sp>
-      <p:sp>
-        <p:nvSpPr>
-          <p:cNvPr id="4" name="TextBox 3"/>
-          <p:cNvSpPr txBox="1"/>
-          <p:nvPr/>
-        </p:nvSpPr>
-        <p:spPr>
-          <a:xfrm>
-            <a:off x="8503920" y="4754880"/>
-            <a:ext cx="457200" cy="274320"/>
-          </a:xfrm>
-          <a:prstGeom prst="rect">
-            <a:avLst/>
-          </a:prstGeom>
-          <a:noFill/>
-        </p:spPr>
-        <p:txBody>
-          <a:bodyPr wrap="none">
-            <a:spAutoFit/>
-          </a:bodyPr>
-          <a:lstStyle/>
-          <a:p>
-            <a:pPr algn="r"/>
-            <a:r>
-              <a:rPr sz="1200">
-                <a:solidFill>
-                  <a:srgbClr val="999999"/>
-                </a:solidFill>
-                <a:latin typeface="Noto Sans CJK KR"/>
-              </a:rPr>
-              <a:t>30</a:t>
-            </a:r>
-          </a:p>
-        </p:txBody>
-      </p:sp>
-    </p:spTree>
-  </p:cSld>
-  <p:clrMapOvr>
-    <a:masterClrMapping/>
-  </p:clrMapOvr>
-</p:sld>
-</file>
-
-<file path=ppt/slides/slide31.xml><?xml version="1.0" encoding="utf-8"?>
-<p:sld xmlns:a="http://schemas.openxmlformats.org/drawingml/2006/main" xmlns:r="http://schemas.openxmlformats.org/officeDocument/2006/relationships" xmlns:p="http://schemas.openxmlformats.org/presentationml/2006/main">
-  <p:cSld>
-    <p:bg>
-      <p:bgPr>
-        <a:solidFill>
-          <a:srgbClr val="F2F2F2"/>
-        </a:solidFill>
-        <a:effectLst/>
-      </p:bgPr>
-    </p:bg>
-    <p:spTree>
-      <p:nvGrpSpPr>
-        <p:cNvPr id="1" name=""/>
-        <p:cNvGrpSpPr/>
-        <p:nvPr/>
-      </p:nvGrpSpPr>
-      <p:grpSpPr>
-        <a:xfrm>
-          <a:off x="0" y="0"/>
-          <a:ext cx="0" cy="0"/>
-          <a:chOff x="0" y="0"/>
-          <a:chExt cx="0" cy="0"/>
-        </a:xfrm>
-      </p:grpSpPr>
-      <p:sp>
-        <p:nvSpPr>
-          <p:cNvPr id="2" name="TextBox 1"/>
-          <p:cNvSpPr txBox="1"/>
-          <p:nvPr/>
-        </p:nvSpPr>
-        <p:spPr>
-          <a:xfrm>
-            <a:off x="548640" y="1828800"/>
-            <a:ext cx="8046720" cy="1371600"/>
-          </a:xfrm>
-          <a:prstGeom prst="rect">
-            <a:avLst/>
-          </a:prstGeom>
-          <a:noFill/>
-        </p:spPr>
-        <p:txBody>
-          <a:bodyPr wrap="square">
-            <a:spAutoFit/>
-          </a:bodyPr>
-          <a:lstStyle/>
-          <a:p>
-            <a:pPr algn="l"/>
-            <a:r>
-              <a:rPr sz="4000" b="1">
-                <a:solidFill>
-                  <a:srgbClr val="111111"/>
-                </a:solidFill>
-                <a:latin typeface="Noto Sans CJK KR"/>
-              </a:rPr>
-              <a:t>5. 마무리</a:t>
-            </a:r>
-          </a:p>
-        </p:txBody>
-      </p:sp>
-      <p:sp>
-        <p:nvSpPr>
-          <p:cNvPr id="3" name="TextBox 2"/>
-          <p:cNvSpPr txBox="1"/>
-          <p:nvPr/>
-        </p:nvSpPr>
-        <p:spPr>
-          <a:xfrm>
-            <a:off x="8503920" y="4754880"/>
-            <a:ext cx="457200" cy="274320"/>
-          </a:xfrm>
-          <a:prstGeom prst="rect">
-            <a:avLst/>
-          </a:prstGeom>
-          <a:noFill/>
-        </p:spPr>
-        <p:txBody>
-          <a:bodyPr wrap="none">
-            <a:spAutoFit/>
-          </a:bodyPr>
-          <a:lstStyle/>
-          <a:p>
-            <a:pPr algn="r"/>
-            <a:r>
-              <a:rPr sz="1200">
-                <a:solidFill>
-                  <a:srgbClr val="999999"/>
-                </a:solidFill>
-                <a:latin typeface="Noto Sans CJK KR"/>
-              </a:rPr>
-              <a:t>31</a:t>
-            </a:r>
-          </a:p>
-        </p:txBody>
-      </p:sp>
-    </p:spTree>
-  </p:cSld>
-  <p:clrMapOvr>
-    <a:masterClrMapping/>
-  </p:clrMapOvr>
-</p:sld>
-</file>
-
-<file path=ppt/slides/slide4.xml><?xml version="1.0" encoding="utf-8"?>
-<p:sld xmlns:a="http://schemas.openxmlformats.org/drawingml/2006/main" xmlns:r="http://schemas.openxmlformats.org/officeDocument/2006/relationships" xmlns:p="http://schemas.openxmlformats.org/presentationml/2006/main">
-  <p:cSld name="Slide 2">
-    <p:spTree>
-      <p:nvGrpSpPr>
-        <p:cNvPr id="1" name=""/>
-        <p:cNvGrpSpPr/>
-        <p:nvPr/>
-      </p:nvGrpSpPr>
-      <p:grpSpPr>
-        <a:xfrm>
-          <a:off x="0" y="0"/>
-          <a:ext cx="0" cy="0"/>
-          <a:chOff x="0" y="0"/>
-          <a:chExt cx="0" cy="0"/>
-        </a:xfrm>
-      </p:grpSpPr>
-      <p:sp>
-        <p:nvSpPr>
-          <p:cNvPr id="2" name="Text 0"/>
-          <p:cNvSpPr/>
-          <p:nvPr/>
-        </p:nvSpPr>
-        <p:spPr>
-          <a:xfrm>
-            <a:off x="548640" y="274320"/>
-            <a:ext cx="8046720" cy="777240"/>
-          </a:xfrm>
-          <a:prstGeom prst="rect">
-            <a:avLst/>
-          </a:prstGeom>
-          <a:noFill/>
-          <a:ln/>
-        </p:spPr>
-        <p:txBody>
-          <a:bodyPr wrap="square" lIns="0" tIns="0" rIns="0" bIns="0" rtlCol="0" anchor="ctr"/>
-          <a:lstStyle/>
-          <a:p>
-            <a:pPr marL="0" indent="0">
-              <a:buNone/>
-            </a:pPr>
-            <a:r>
-              <a:rPr lang="en-US" sz="3600" b="1" dirty="0">
-                <a:solidFill>
-                  <a:srgbClr val="111111"/>
-                </a:solidFill>
-                <a:latin typeface="Noto Sans CJK KR" pitchFamily="34" charset="0"/>
-                <a:ea typeface="Noto Sans CJK KR" pitchFamily="34" charset="-122"/>
-                <a:cs typeface="Noto Sans CJK KR" pitchFamily="34" charset="-120"/>
-              </a:rPr>
-              <a:t>왜 결정론적 통신이 필요한가</a:t>
-            </a:r>
-            <a:endParaRPr lang="en-US" sz="3600" dirty="0"/>
-          </a:p>
-        </p:txBody>
-      </p:sp>
-      <p:sp>
-        <p:nvSpPr>
-          <p:cNvPr id="3" name="Text 1"/>
-          <p:cNvSpPr/>
-          <p:nvPr/>
-        </p:nvSpPr>
-        <p:spPr>
-          <a:xfrm>
-            <a:off x="548640" y="1234440"/>
-            <a:ext cx="8046720" cy="2971800"/>
-          </a:xfrm>
-          <a:prstGeom prst="rect">
-            <a:avLst/>
-          </a:prstGeom>
-          <a:noFill/>
-          <a:ln/>
-        </p:spPr>
-        <p:txBody>
-          <a:bodyPr wrap="square" rtlCol="0" anchor="t"/>
-          <a:lstStyle/>
-          <a:p>
-            <a:pPr marL="342900" indent="-342900">
-              <a:spcAft>
-                <a:spcPts val="1200"/>
-              </a:spcAft>
-              <a:buSzPct val="100000"/>
-              <a:buChar char="•"/>
-            </a:pPr>
-            <a:r>
-              <a:rPr lang="en-US" sz="2000" dirty="0">
-                <a:solidFill>
-                  <a:srgbClr val="222222"/>
-                </a:solidFill>
-                <a:latin typeface="Noto Sans CJK KR" pitchFamily="34" charset="0"/>
-                <a:ea typeface="Noto Sans CJK KR" pitchFamily="34" charset="-122"/>
-                <a:cs typeface="Noto Sans CJK KR" pitchFamily="34" charset="-120"/>
-              </a:rPr>
-              <a:t>RT·안전-critical 통신 시스템의 요구사항</a:t>
-            </a:r>
-            <a:endParaRPr lang="en-US" sz="2000" dirty="0"/>
-          </a:p>
-          <a:p>
-            <a:pPr marL="685800" lvl="1" indent="-342900">
-              <a:spcAft>
-                <a:spcPts val="800"/>
-              </a:spcAft>
-              <a:buSzPct val="100000"/>
-              <a:buChar char="•"/>
-            </a:pPr>
-            <a:r>
-              <a:rPr lang="en-US" sz="1700" dirty="0">
-                <a:solidFill>
-                  <a:srgbClr val="444444"/>
-                </a:solidFill>
-                <a:latin typeface="Noto Sans CJK KR" pitchFamily="34" charset="0"/>
-                <a:ea typeface="Noto Sans CJK KR" pitchFamily="34" charset="-122"/>
-                <a:cs typeface="Noto Sans CJK KR" pitchFamily="34" charset="-120"/>
-              </a:rPr>
-              <a:t>예측 가능성(Predictability) — 시스템의 시간적 동작이 사전에 보장되어야 함</a:t>
-            </a:r>
-            <a:endParaRPr lang="en-US" sz="2000" dirty="0"/>
-          </a:p>
-          <a:p>
-            <a:pPr marL="685800" lvl="1" indent="-342900">
-              <a:spcAft>
-                <a:spcPts val="800"/>
-              </a:spcAft>
-              <a:buSzPct val="100000"/>
-              <a:buChar char="•"/>
-            </a:pPr>
-            <a:r>
-              <a:rPr lang="en-US" sz="1700" dirty="0">
-                <a:solidFill>
-                  <a:srgbClr val="444444"/>
-                </a:solidFill>
-                <a:latin typeface="Noto Sans CJK KR" pitchFamily="34" charset="0"/>
-                <a:ea typeface="Noto Sans CJK KR" pitchFamily="34" charset="-122"/>
-                <a:cs typeface="Noto Sans CJK KR" pitchFamily="34" charset="-120"/>
-              </a:rPr>
-              <a:t>결정성(Determinism) — 메시지 수신 시점이 미리 알려져 있어야 함</a:t>
-            </a:r>
-            <a:endParaRPr lang="en-US" sz="2000" dirty="0"/>
-          </a:p>
-          <a:p>
-            <a:pPr marL="342900" indent="-342900">
-              <a:spcAft>
-                <a:spcPts val="1200"/>
-              </a:spcAft>
-              <a:buSzPct val="100000"/>
-              <a:buChar char="•"/>
-            </a:pPr>
-            <a:r>
-              <a:rPr lang="en-US" sz="2000" dirty="0">
-                <a:solidFill>
-                  <a:srgbClr val="222222"/>
-                </a:solidFill>
-                <a:latin typeface="Noto Sans CJK KR" pitchFamily="34" charset="0"/>
-                <a:ea typeface="Noto Sans CJK KR" pitchFamily="34" charset="-122"/>
-                <a:cs typeface="Noto Sans CJK KR" pitchFamily="34" charset="-120"/>
-              </a:rPr>
-              <a:t>사건 기반(Event-Triggered) 통신의 한계</a:t>
-            </a:r>
-            <a:endParaRPr lang="en-US" sz="2000" dirty="0"/>
-          </a:p>
-          <a:p>
-            <a:pPr marL="685800" lvl="1" indent="-342900">
-              <a:spcAft>
-                <a:spcPts val="800"/>
-              </a:spcAft>
-              <a:buSzPct val="100000"/>
-              <a:buChar char="•"/>
-            </a:pPr>
-            <a:r>
-              <a:rPr lang="en-US" sz="1700" dirty="0">
-                <a:solidFill>
-                  <a:srgbClr val="444444"/>
-                </a:solidFill>
-                <a:latin typeface="Noto Sans CJK KR" pitchFamily="34" charset="0"/>
-                <a:ea typeface="Noto Sans CJK KR" pitchFamily="34" charset="-122"/>
-                <a:cs typeface="Noto Sans CJK KR" pitchFamily="34" charset="-120"/>
-              </a:rPr>
-              <a:t>충돌과 재전송으로 지연이 랜덤하게 변동 → 예측 불가</a:t>
-            </a:r>
-            <a:endParaRPr lang="en-US" sz="2000" dirty="0"/>
-          </a:p>
-          <a:p>
-            <a:pPr marL="685800" lvl="1" indent="-342900">
-              <a:spcAft>
-                <a:spcPts val="800"/>
-              </a:spcAft>
-              <a:buSzPct val="100000"/>
-              <a:buChar char="•"/>
-            </a:pPr>
-            <a:r>
-              <a:rPr lang="en-US" sz="1700" dirty="0">
-                <a:solidFill>
-                  <a:srgbClr val="444444"/>
-                </a:solidFill>
-                <a:latin typeface="Noto Sans CJK KR" pitchFamily="34" charset="0"/>
-                <a:ea typeface="Noto Sans CJK KR" pitchFamily="34" charset="-122"/>
-                <a:cs typeface="Noto Sans CJK KR" pitchFamily="34" charset="-120"/>
-              </a:rPr>
-              <a:t>자동차·산업용 네트워크에서는 이 불확실성이 곧 안전 문제로 직결</a:t>
-            </a:r>
-            <a:endParaRPr lang="en-US" sz="2000" dirty="0"/>
-          </a:p>
-        </p:txBody>
-      </p:sp>
-      <p:sp>
-        <p:nvSpPr>
-          <p:cNvPr id="4" name="Text 2"/>
-          <p:cNvSpPr/>
-          <p:nvPr/>
-        </p:nvSpPr>
-        <p:spPr>
-          <a:xfrm>
-            <a:off x="8503920" y="4754880"/>
-            <a:ext cx="457200" cy="274320"/>
-          </a:xfrm>
-          <a:prstGeom prst="rect">
-            <a:avLst/>
-          </a:prstGeom>
-          <a:noFill/>
-          <a:ln/>
-        </p:spPr>
-        <p:txBody>
-          <a:bodyPr wrap="square" rtlCol="0" anchor="ctr"/>
-          <a:lstStyle/>
-          <a:p>
-            <a:pPr marL="0" indent="0" algn="r">
-              <a:buNone/>
-            </a:pPr>
-            <a:r>
-              <a:rPr lang="en-US" sz="1200" dirty="0">
-                <a:solidFill>
-                  <a:srgbClr val="999999"/>
-                </a:solidFill>
-                <a:latin typeface="Noto Sans CJK KR" pitchFamily="34" charset="0"/>
-                <a:ea typeface="Noto Sans CJK KR" pitchFamily="34" charset="-122"/>
-                <a:cs typeface="Noto Sans CJK KR" pitchFamily="34" charset="-120"/>
-              </a:rPr>
-              <a:t>4</a:t>
-            </a:r>
-            <a:endParaRPr lang="en-US" sz="1200" dirty="0"/>
-          </a:p>
-        </p:txBody>
-      </p:sp>
-    </p:spTree>
-  </p:cSld>
-  <p:clrMapOvr>
-    <a:masterClrMapping/>
-  </p:clrMapOvr>
-</p:sld>
-</file>
-
-<file path=ppt/slides/slide5.xml><?xml version="1.0" encoding="utf-8"?>
 <p:sld xmlns:a="http://schemas.openxmlformats.org/drawingml/2006/main" xmlns:r="http://schemas.openxmlformats.org/officeDocument/2006/relationships" xmlns:p="http://schemas.openxmlformats.org/presentationml/2006/main">
   <p:cSld name="Slide 3">
     <p:spTree>
@@ -7593,7 +7044,7 @@
           <a:bodyPr wrap="square" lIns="0" tIns="0" rIns="0" bIns="0" rtlCol="0" anchor="ctr"/>
           <a:lstStyle/>
           <a:p>
-            <a:pPr marL="0" indent="0">
+            <a:pPr indent="0" marL="0">
               <a:buNone/>
             </a:pPr>
             <a:r>
@@ -7653,7 +7104,7 @@
             <a:endParaRPr lang="en-US" sz="2000" dirty="0"/>
           </a:p>
           <a:p>
-            <a:pPr marL="685800" lvl="1" indent="-342900">
+            <a:pPr lvl="1" marL="685800" indent="-342900">
               <a:spcAft>
                 <a:spcPts val="800"/>
               </a:spcAft>
@@ -7674,7 +7125,7 @@
             <a:endParaRPr lang="en-US" sz="2000" dirty="0"/>
           </a:p>
           <a:p>
-            <a:pPr marL="685800" lvl="1" indent="-342900">
+            <a:pPr lvl="1" marL="685800" indent="-342900">
               <a:spcAft>
                 <a:spcPts val="800"/>
               </a:spcAft>
@@ -7716,7 +7167,7 @@
             <a:endParaRPr lang="en-US" sz="2000" dirty="0"/>
           </a:p>
           <a:p>
-            <a:pPr marL="685800" lvl="1" indent="-342900">
+            <a:pPr lvl="1" marL="685800" indent="-342900">
               <a:spcAft>
                 <a:spcPts val="800"/>
               </a:spcAft>
@@ -7759,7 +7210,7 @@
           <a:bodyPr wrap="square" rtlCol="0" anchor="ctr"/>
           <a:lstStyle/>
           <a:p>
-            <a:pPr marL="0" indent="0" algn="r">
+            <a:pPr algn="r" indent="0" marL="0">
               <a:buNone/>
             </a:pPr>
             <a:r>
@@ -7785,7 +7236,233 @@
 </p:sld>
 </file>
 
-<file path=ppt/slides/slide6.xml><?xml version="1.0" encoding="utf-8"?>
+<file path=ppt/slides/slide30.xml><?xml version="1.0" encoding="utf-8"?>
+<p:sld xmlns:a="http://schemas.openxmlformats.org/drawingml/2006/main" xmlns:p="http://schemas.openxmlformats.org/presentationml/2006/main" xmlns:r="http://schemas.openxmlformats.org/officeDocument/2006/relationships">
+  <p:cSld>
+    <p:bg>
+      <p:bgPr>
+        <a:solidFill>
+          <a:srgbClr val="F2F2F2"/>
+        </a:solidFill>
+        <a:effectLst/>
+      </p:bgPr>
+    </p:bg>
+    <p:spTree>
+      <p:nvGrpSpPr>
+        <p:cNvPr id="1" name=""/>
+        <p:cNvGrpSpPr/>
+        <p:nvPr/>
+      </p:nvGrpSpPr>
+      <p:grpSpPr/>
+      <p:sp>
+        <p:nvSpPr>
+          <p:cNvPr id="2" name="TextBox 1"/>
+          <p:cNvSpPr txBox="1"/>
+          <p:nvPr/>
+        </p:nvSpPr>
+        <p:spPr>
+          <a:xfrm>
+            <a:off x="548640" y="1828800"/>
+            <a:ext cx="8046720" cy="1371600"/>
+          </a:xfrm>
+          <a:prstGeom prst="rect">
+            <a:avLst/>
+          </a:prstGeom>
+          <a:noFill/>
+        </p:spPr>
+        <p:txBody>
+          <a:bodyPr wrap="square">
+            <a:spAutoFit/>
+          </a:bodyPr>
+          <a:lstStyle/>
+          <a:p>
+            <a:pPr algn="l"/>
+            <a:r>
+              <a:rPr sz="4000" b="1">
+                <a:solidFill>
+                  <a:srgbClr val="111111"/>
+                </a:solidFill>
+                <a:latin typeface="Noto Sans CJK KR"/>
+              </a:rPr>
+              <a:t>4. TDMA 통신 시연</a:t>
+            </a:r>
+          </a:p>
+        </p:txBody>
+      </p:sp>
+      <p:sp>
+        <p:nvSpPr>
+          <p:cNvPr id="3" name="TextBox 2"/>
+          <p:cNvSpPr txBox="1"/>
+          <p:nvPr/>
+        </p:nvSpPr>
+        <p:spPr>
+          <a:xfrm>
+            <a:off x="548640" y="3111120"/>
+            <a:ext cx="8046720" cy="457200"/>
+          </a:xfrm>
+          <a:prstGeom prst="rect">
+            <a:avLst/>
+          </a:prstGeom>
+          <a:noFill/>
+        </p:spPr>
+        <p:txBody>
+          <a:bodyPr wrap="square">
+            <a:spAutoFit/>
+          </a:bodyPr>
+          <a:lstStyle/>
+          <a:p>
+            <a:r>
+              <a:rPr sz="1800">
+                <a:solidFill>
+                  <a:srgbClr val="666666"/>
+                </a:solidFill>
+                <a:latin typeface="Noto Sans CJK KR"/>
+              </a:rPr>
+              <a:t>실제 보드에서 TDMA 통신이 동작하는 과정을 시연한다</a:t>
+            </a:r>
+          </a:p>
+        </p:txBody>
+      </p:sp>
+      <p:sp>
+        <p:nvSpPr>
+          <p:cNvPr id="4" name="TextBox 3"/>
+          <p:cNvSpPr txBox="1"/>
+          <p:nvPr/>
+        </p:nvSpPr>
+        <p:spPr>
+          <a:xfrm>
+            <a:off x="8503920" y="4754880"/>
+            <a:ext cx="457200" cy="274320"/>
+          </a:xfrm>
+          <a:prstGeom prst="rect">
+            <a:avLst/>
+          </a:prstGeom>
+          <a:noFill/>
+        </p:spPr>
+        <p:txBody>
+          <a:bodyPr wrap="none">
+            <a:spAutoFit/>
+          </a:bodyPr>
+          <a:lstStyle/>
+          <a:p>
+            <a:pPr algn="r"/>
+            <a:r>
+              <a:rPr sz="1200">
+                <a:solidFill>
+                  <a:srgbClr val="999999"/>
+                </a:solidFill>
+                <a:latin typeface="Noto Sans CJK KR"/>
+              </a:rPr>
+              <a:t>30</a:t>
+            </a:r>
+          </a:p>
+        </p:txBody>
+      </p:sp>
+    </p:spTree>
+  </p:cSld>
+  <p:clrMapOvr>
+    <a:masterClrMapping/>
+  </p:clrMapOvr>
+</p:sld>
+</file>
+
+<file path=ppt/slides/slide31.xml><?xml version="1.0" encoding="utf-8"?>
+<p:sld xmlns:a="http://schemas.openxmlformats.org/drawingml/2006/main" xmlns:p="http://schemas.openxmlformats.org/presentationml/2006/main" xmlns:r="http://schemas.openxmlformats.org/officeDocument/2006/relationships">
+  <p:cSld>
+    <p:bg>
+      <p:bgPr>
+        <a:solidFill>
+          <a:srgbClr val="F2F2F2"/>
+        </a:solidFill>
+        <a:effectLst/>
+      </p:bgPr>
+    </p:bg>
+    <p:spTree>
+      <p:nvGrpSpPr>
+        <p:cNvPr id="1" name=""/>
+        <p:cNvGrpSpPr/>
+        <p:nvPr/>
+      </p:nvGrpSpPr>
+      <p:grpSpPr/>
+      <p:sp>
+        <p:nvSpPr>
+          <p:cNvPr id="2" name="TextBox 1"/>
+          <p:cNvSpPr txBox="1"/>
+          <p:nvPr/>
+        </p:nvSpPr>
+        <p:spPr>
+          <a:xfrm>
+            <a:off x="548640" y="1828800"/>
+            <a:ext cx="8046720" cy="1371600"/>
+          </a:xfrm>
+          <a:prstGeom prst="rect">
+            <a:avLst/>
+          </a:prstGeom>
+          <a:noFill/>
+        </p:spPr>
+        <p:txBody>
+          <a:bodyPr wrap="square">
+            <a:spAutoFit/>
+          </a:bodyPr>
+          <a:lstStyle/>
+          <a:p>
+            <a:pPr algn="l"/>
+            <a:r>
+              <a:rPr sz="4000" b="1">
+                <a:solidFill>
+                  <a:srgbClr val="111111"/>
+                </a:solidFill>
+                <a:latin typeface="Noto Sans CJK KR"/>
+              </a:rPr>
+              <a:t>5. 마무리</a:t>
+            </a:r>
+          </a:p>
+        </p:txBody>
+      </p:sp>
+      <p:sp>
+        <p:nvSpPr>
+          <p:cNvPr id="3" name="TextBox 2"/>
+          <p:cNvSpPr txBox="1"/>
+          <p:nvPr/>
+        </p:nvSpPr>
+        <p:spPr>
+          <a:xfrm>
+            <a:off x="8503920" y="4754880"/>
+            <a:ext cx="457200" cy="274320"/>
+          </a:xfrm>
+          <a:prstGeom prst="rect">
+            <a:avLst/>
+          </a:prstGeom>
+          <a:noFill/>
+        </p:spPr>
+        <p:txBody>
+          <a:bodyPr wrap="none">
+            <a:spAutoFit/>
+          </a:bodyPr>
+          <a:lstStyle/>
+          <a:p>
+            <a:pPr algn="r"/>
+            <a:r>
+              <a:rPr sz="1200">
+                <a:solidFill>
+                  <a:srgbClr val="999999"/>
+                </a:solidFill>
+                <a:latin typeface="Noto Sans CJK KR"/>
+              </a:rPr>
+              <a:t>31</a:t>
+            </a:r>
+          </a:p>
+        </p:txBody>
+      </p:sp>
+    </p:spTree>
+  </p:cSld>
+  <p:clrMapOvr>
+    <a:masterClrMapping/>
+  </p:clrMapOvr>
+</p:sld>
+</file>
+
+<file path=ppt/slides/slide4.xml><?xml version="1.0" encoding="utf-8"?>
 <p:sld xmlns:a="http://schemas.openxmlformats.org/drawingml/2006/main" xmlns:r="http://schemas.openxmlformats.org/officeDocument/2006/relationships" xmlns:p="http://schemas.openxmlformats.org/presentationml/2006/main">
   <p:cSld name="Slide 4">
     <p:spTree>
@@ -7823,7 +7500,7 @@
           <a:bodyPr wrap="square" lIns="0" tIns="0" rIns="0" bIns="0" rtlCol="0" anchor="ctr"/>
           <a:lstStyle/>
           <a:p>
-            <a:pPr marL="0" indent="0">
+            <a:pPr indent="0" marL="0">
               <a:buNone/>
             </a:pPr>
             <a:r>
@@ -7883,7 +7560,7 @@
             <a:endParaRPr lang="en-US" sz="2000" dirty="0"/>
           </a:p>
           <a:p>
-            <a:pPr marL="685800" lvl="1" indent="-342900">
+            <a:pPr lvl="1" marL="685800" indent="-342900">
               <a:spcAft>
                 <a:spcPts val="800"/>
               </a:spcAft>
@@ -7925,7 +7602,7 @@
             <a:endParaRPr lang="en-US" sz="2000" dirty="0"/>
           </a:p>
           <a:p>
-            <a:pPr marL="685800" lvl="1" indent="-342900">
+            <a:pPr lvl="1" marL="685800" indent="-342900">
               <a:spcAft>
                 <a:spcPts val="800"/>
               </a:spcAft>
@@ -7968,7 +7645,7 @@
           <a:bodyPr wrap="square" rtlCol="0" anchor="ctr"/>
           <a:lstStyle/>
           <a:p>
-            <a:pPr marL="0" indent="0" algn="r">
+            <a:pPr algn="r" indent="0" marL="0">
               <a:buNone/>
             </a:pPr>
             <a:r>
@@ -7994,8 +7671,198 @@
 </p:sld>
 </file>
 
-<file path=ppt/slides/slide7.xml><?xml version="1.0" encoding="utf-8"?>
-<p:sld xmlns:a="http://schemas.openxmlformats.org/drawingml/2006/main" xmlns:r="http://schemas.openxmlformats.org/officeDocument/2006/relationships" xmlns:p="http://schemas.openxmlformats.org/presentationml/2006/main">
+<file path=ppt/slides/slide5.xml><?xml version="1.0" encoding="utf-8"?>
+<p:sld xmlns:a="http://schemas.openxmlformats.org/drawingml/2006/main" xmlns:p="http://schemas.openxmlformats.org/presentationml/2006/main" xmlns:r="http://schemas.openxmlformats.org/officeDocument/2006/relationships">
+  <p:cSld>
+    <p:spTree>
+      <p:nvGrpSpPr>
+        <p:cNvPr id="1" name=""/>
+        <p:cNvGrpSpPr/>
+        <p:nvPr/>
+      </p:nvGrpSpPr>
+      <p:grpSpPr/>
+      <p:sp>
+        <p:nvSpPr>
+          <p:cNvPr id="2" name="TextBox 1"/>
+          <p:cNvSpPr txBox="1"/>
+          <p:nvPr/>
+        </p:nvSpPr>
+        <p:spPr>
+          <a:xfrm>
+            <a:off x="548640" y="457200"/>
+            <a:ext cx="8046720" cy="774192"/>
+          </a:xfrm>
+          <a:prstGeom prst="rect">
+            <a:avLst/>
+          </a:prstGeom>
+          <a:noFill/>
+        </p:spPr>
+        <p:txBody>
+          <a:bodyPr wrap="none">
+            <a:spAutoFit/>
+          </a:bodyPr>
+          <a:lstStyle/>
+          <a:p>
+            <a:r>
+              <a:rPr sz="3600" b="1">
+                <a:solidFill>
+                  <a:srgbClr val="111111"/>
+                </a:solidFill>
+                <a:latin typeface="Noto Sans CJK KR"/>
+              </a:rPr>
+              <a:t>Contents</a:t>
+            </a:r>
+          </a:p>
+        </p:txBody>
+      </p:sp>
+      <p:sp>
+        <p:nvSpPr>
+          <p:cNvPr id="3" name="TextBox 2"/>
+          <p:cNvSpPr txBox="1"/>
+          <p:nvPr/>
+        </p:nvSpPr>
+        <p:spPr>
+          <a:xfrm>
+            <a:off x="548640" y="1645920"/>
+            <a:ext cx="8046720" cy="3200400"/>
+          </a:xfrm>
+          <a:prstGeom prst="rect">
+            <a:avLst/>
+          </a:prstGeom>
+          <a:noFill/>
+        </p:spPr>
+        <p:txBody>
+          <a:bodyPr wrap="square">
+            <a:spAutoFit/>
+          </a:bodyPr>
+          <a:lstStyle/>
+          <a:p>
+            <a:pPr>
+              <a:spcAft>
+                <a:spcPts val="2000"/>
+              </a:spcAft>
+            </a:pPr>
+            <a:r>
+              <a:rPr sz="2400">
+                <a:solidFill>
+                  <a:srgbClr val="222222"/>
+                </a:solidFill>
+                <a:latin typeface="Noto Sans CJK KR"/>
+              </a:rPr>
+              <a:t>1.  프로젝트 소개</a:t>
+            </a:r>
+          </a:p>
+          <a:p>
+            <a:pPr>
+              <a:spcAft>
+                <a:spcPts val="2000"/>
+              </a:spcAft>
+            </a:pPr>
+            <a:r>
+              <a:rPr sz="2400">
+                <a:solidFill>
+                  <a:srgbClr val="222222"/>
+                </a:solidFill>
+                <a:latin typeface="Noto Sans CJK KR"/>
+              </a:rPr>
+              <a:t>2.  TDMA PHY · Datalink · 프로토콜 정의</a:t>
+            </a:r>
+          </a:p>
+          <a:p>
+            <a:pPr>
+              <a:spcAft>
+                <a:spcPts val="2000"/>
+              </a:spcAft>
+            </a:pPr>
+            <a:r>
+              <a:rPr sz="2400">
+                <a:solidFill>
+                  <a:srgbClr val="222222"/>
+                </a:solidFill>
+                <a:latin typeface="Noto Sans CJK KR"/>
+              </a:rPr>
+              <a:t>3.  Master / Slave 구현 사항</a:t>
+            </a:r>
+          </a:p>
+          <a:p>
+            <a:pPr>
+              <a:spcAft>
+                <a:spcPts val="2000"/>
+              </a:spcAft>
+            </a:pPr>
+            <a:r>
+              <a:rPr sz="2400">
+                <a:solidFill>
+                  <a:srgbClr val="222222"/>
+                </a:solidFill>
+                <a:latin typeface="Noto Sans CJK KR"/>
+              </a:rPr>
+              <a:t>4.  TDMA 통신 시연</a:t>
+            </a:r>
+          </a:p>
+          <a:p>
+            <a:pPr>
+              <a:spcAft>
+                <a:spcPts val="2000"/>
+              </a:spcAft>
+            </a:pPr>
+            <a:r>
+              <a:rPr sz="2400">
+                <a:solidFill>
+                  <a:srgbClr val="222222"/>
+                </a:solidFill>
+                <a:latin typeface="Noto Sans CJK KR"/>
+              </a:rPr>
+              <a:t>5.  마무리</a:t>
+            </a:r>
+          </a:p>
+        </p:txBody>
+      </p:sp>
+      <p:sp>
+        <p:nvSpPr>
+          <p:cNvPr id="4" name="TextBox 3"/>
+          <p:cNvSpPr txBox="1"/>
+          <p:nvPr/>
+        </p:nvSpPr>
+        <p:spPr>
+          <a:xfrm>
+            <a:off x="8503920" y="4754880"/>
+            <a:ext cx="457200" cy="274320"/>
+          </a:xfrm>
+          <a:prstGeom prst="rect">
+            <a:avLst/>
+          </a:prstGeom>
+          <a:noFill/>
+        </p:spPr>
+        <p:txBody>
+          <a:bodyPr wrap="none">
+            <a:spAutoFit/>
+          </a:bodyPr>
+          <a:lstStyle/>
+          <a:p>
+            <a:pPr algn="r"/>
+            <a:r>
+              <a:rPr sz="1200">
+                <a:solidFill>
+                  <a:srgbClr val="999999"/>
+                </a:solidFill>
+                <a:latin typeface="Noto Sans CJK KR"/>
+              </a:rPr>
+              <a:t>2</a:t>
+            </a:r>
+          </a:p>
+        </p:txBody>
+      </p:sp>
+    </p:spTree>
+  </p:cSld>
+  <p:clrMapOvr>
+    <a:masterClrMapping/>
+  </p:clrMapOvr>
+</p:sld>
+</file>
+
+<file path=ppt/slides/slide6.xml><?xml version="1.0" encoding="utf-8"?>
+<p:sld xmlns:a="http://schemas.openxmlformats.org/drawingml/2006/main" xmlns:p="http://schemas.openxmlformats.org/presentationml/2006/main" xmlns:r="http://schemas.openxmlformats.org/officeDocument/2006/relationships">
   <p:cSld>
     <p:bg>
       <p:bgPr>
@@ -8011,14 +7878,136 @@
         <p:cNvGrpSpPr/>
         <p:nvPr/>
       </p:nvGrpSpPr>
-      <p:grpSpPr>
-        <a:xfrm>
-          <a:off x="0" y="0"/>
-          <a:ext cx="0" cy="0"/>
-          <a:chOff x="0" y="0"/>
-          <a:chExt cx="0" cy="0"/>
-        </a:xfrm>
-      </p:grpSpPr>
+      <p:grpSpPr/>
+      <p:sp>
+        <p:nvSpPr>
+          <p:cNvPr id="2" name="TextBox 1"/>
+          <p:cNvSpPr txBox="1"/>
+          <p:nvPr/>
+        </p:nvSpPr>
+        <p:spPr>
+          <a:xfrm>
+            <a:off x="548640" y="1828800"/>
+            <a:ext cx="8046720" cy="1371600"/>
+          </a:xfrm>
+          <a:prstGeom prst="rect">
+            <a:avLst/>
+          </a:prstGeom>
+          <a:noFill/>
+        </p:spPr>
+        <p:txBody>
+          <a:bodyPr wrap="square">
+            <a:spAutoFit/>
+          </a:bodyPr>
+          <a:lstStyle/>
+          <a:p>
+            <a:pPr algn="l"/>
+            <a:r>
+              <a:rPr sz="4000" b="1">
+                <a:solidFill>
+                  <a:srgbClr val="111111"/>
+                </a:solidFill>
+                <a:latin typeface="Noto Sans CJK KR"/>
+              </a:rPr>
+              <a:t>1. 프로젝트 소개</a:t>
+            </a:r>
+          </a:p>
+        </p:txBody>
+      </p:sp>
+      <p:sp>
+        <p:nvSpPr>
+          <p:cNvPr id="3" name="TextBox 2"/>
+          <p:cNvSpPr txBox="1"/>
+          <p:nvPr/>
+        </p:nvSpPr>
+        <p:spPr>
+          <a:xfrm>
+            <a:off x="548640" y="3111120"/>
+            <a:ext cx="8046720" cy="457200"/>
+          </a:xfrm>
+          <a:prstGeom prst="rect">
+            <a:avLst/>
+          </a:prstGeom>
+          <a:noFill/>
+        </p:spPr>
+        <p:txBody>
+          <a:bodyPr wrap="square">
+            <a:spAutoFit/>
+          </a:bodyPr>
+          <a:lstStyle/>
+          <a:p>
+            <a:r>
+              <a:rPr sz="1800">
+                <a:solidFill>
+                  <a:srgbClr val="666666"/>
+                </a:solidFill>
+                <a:latin typeface="Noto Sans CJK KR"/>
+              </a:rPr>
+              <a:t>왜 시간을 나누어 전송해야 하는지, 프로젝트의 목표를 짚는다</a:t>
+            </a:r>
+          </a:p>
+        </p:txBody>
+      </p:sp>
+      <p:sp>
+        <p:nvSpPr>
+          <p:cNvPr id="4" name="TextBox 3"/>
+          <p:cNvSpPr txBox="1"/>
+          <p:nvPr/>
+        </p:nvSpPr>
+        <p:spPr>
+          <a:xfrm>
+            <a:off x="8503920" y="4754880"/>
+            <a:ext cx="457200" cy="274320"/>
+          </a:xfrm>
+          <a:prstGeom prst="rect">
+            <a:avLst/>
+          </a:prstGeom>
+          <a:noFill/>
+        </p:spPr>
+        <p:txBody>
+          <a:bodyPr wrap="none">
+            <a:spAutoFit/>
+          </a:bodyPr>
+          <a:lstStyle/>
+          <a:p>
+            <a:pPr algn="r"/>
+            <a:r>
+              <a:rPr sz="1200">
+                <a:solidFill>
+                  <a:srgbClr val="999999"/>
+                </a:solidFill>
+                <a:latin typeface="Noto Sans CJK KR"/>
+              </a:rPr>
+              <a:t>3</a:t>
+            </a:r>
+          </a:p>
+        </p:txBody>
+      </p:sp>
+    </p:spTree>
+  </p:cSld>
+  <p:clrMapOvr>
+    <a:masterClrMapping/>
+  </p:clrMapOvr>
+</p:sld>
+</file>
+
+<file path=ppt/slides/slide7.xml><?xml version="1.0" encoding="utf-8"?>
+<p:sld xmlns:a="http://schemas.openxmlformats.org/drawingml/2006/main" xmlns:p="http://schemas.openxmlformats.org/presentationml/2006/main" xmlns:r="http://schemas.openxmlformats.org/officeDocument/2006/relationships">
+  <p:cSld>
+    <p:bg>
+      <p:bgPr>
+        <a:solidFill>
+          <a:srgbClr val="F2F2F2"/>
+        </a:solidFill>
+      </p:bgPr>
+    </p:bg>
+    <p:spTree>
+      <p:nvGrpSpPr>
+        <p:cNvPr id="1" name=""/>
+        <p:cNvGrpSpPr/>
+        <p:nvPr/>
+      </p:nvGrpSpPr>
+      <p:grpSpPr/>
       <p:sp>
         <p:nvSpPr>
           <p:cNvPr id="2" name="Text 0"/>
@@ -8040,7 +8029,7 @@
           <a:bodyPr wrap="square" rtlCol="0" anchor="ctr"/>
           <a:lstStyle/>
           <a:p>
-            <a:pPr marL="0" indent="0" algn="l">
+            <a:pPr algn="l" indent="0" marL="0">
               <a:buNone/>
             </a:pPr>
             <a:r>
@@ -8079,7 +8068,7 @@
           <a:bodyPr wrap="square" rtlCol="0" anchor="ctr"/>
           <a:lstStyle/>
           <a:p>
-            <a:pPr marL="0" indent="0" algn="l">
+            <a:pPr algn="l" indent="0" marL="0">
               <a:buNone/>
             </a:pPr>
             <a:r>
@@ -8118,7 +8107,7 @@
           <a:bodyPr wrap="square" rtlCol="0" anchor="ctr"/>
           <a:lstStyle/>
           <a:p>
-            <a:pPr marL="0" indent="0" algn="r">
+            <a:pPr algn="r" indent="0" marL="0">
               <a:buNone/>
             </a:pPr>
             <a:r>
@@ -8145,7 +8134,7 @@
 </file>
 
 <file path=ppt/slides/slide8.xml><?xml version="1.0" encoding="utf-8"?>
-<p:sld xmlns:a="http://schemas.openxmlformats.org/drawingml/2006/main" xmlns:r="http://schemas.openxmlformats.org/officeDocument/2006/relationships" xmlns:p="http://schemas.openxmlformats.org/presentationml/2006/main">
+<p:sld xmlns:a="http://schemas.openxmlformats.org/drawingml/2006/main" xmlns:p="http://schemas.openxmlformats.org/presentationml/2006/main" xmlns:r="http://schemas.openxmlformats.org/officeDocument/2006/relationships">
   <p:cSld>
     <p:spTree>
       <p:nvGrpSpPr>
@@ -8153,14 +8142,7 @@
         <p:cNvGrpSpPr/>
         <p:nvPr/>
       </p:nvGrpSpPr>
-      <p:grpSpPr>
-        <a:xfrm>
-          <a:off x="0" y="0"/>
-          <a:ext cx="0" cy="0"/>
-          <a:chOff x="0" y="0"/>
-          <a:chExt cx="0" cy="0"/>
-        </a:xfrm>
-      </p:grpSpPr>
+      <p:grpSpPr/>
       <p:sp>
         <p:nvSpPr>
           <p:cNvPr id="2" name="Text 0"/>
@@ -8182,7 +8164,7 @@
           <a:bodyPr wrap="square" lIns="0" tIns="0" rIns="0" bIns="0" rtlCol="0" anchor="ctr"/>
           <a:lstStyle/>
           <a:p>
-            <a:pPr marL="0" indent="0">
+            <a:pPr indent="0" marL="0">
               <a:buNone/>
             </a:pPr>
             <a:r>
@@ -8242,7 +8224,7 @@
             <a:endParaRPr lang="en-US" sz="2000" dirty="0"/>
           </a:p>
           <a:p>
-            <a:pPr marL="685800" lvl="1" indent="-342900">
+            <a:pPr lvl="1" marL="685800" indent="-342900">
               <a:spcAft>
                 <a:spcPts val="800"/>
               </a:spcAft>
@@ -8284,7 +8266,7 @@
             <a:endParaRPr lang="en-US" sz="2000" dirty="0"/>
           </a:p>
           <a:p>
-            <a:pPr marL="685800" lvl="1" indent="-342900">
+            <a:pPr lvl="1" marL="685800" indent="-342900">
               <a:spcAft>
                 <a:spcPts val="800"/>
               </a:spcAft>
@@ -8345,7 +8327,7 @@
           <a:bodyPr wrap="square" rtlCol="0" anchor="ctr"/>
           <a:lstStyle/>
           <a:p>
-            <a:pPr marL="0" indent="0" algn="r">
+            <a:pPr algn="r" indent="0" marL="0">
               <a:buNone/>
             </a:pPr>
             <a:r>
@@ -8372,7 +8354,7 @@
 </file>
 
 <file path=ppt/slides/slide9.xml><?xml version="1.0" encoding="utf-8"?>
-<p:sld xmlns:a="http://schemas.openxmlformats.org/drawingml/2006/main" xmlns:r="http://schemas.openxmlformats.org/officeDocument/2006/relationships" xmlns:p="http://schemas.openxmlformats.org/presentationml/2006/main">
+<p:sld xmlns:a="http://schemas.openxmlformats.org/drawingml/2006/main" xmlns:p="http://schemas.openxmlformats.org/presentationml/2006/main" xmlns:r="http://schemas.openxmlformats.org/officeDocument/2006/relationships">
   <p:cSld>
     <p:spTree>
       <p:nvGrpSpPr>
@@ -8380,14 +8362,7 @@
         <p:cNvGrpSpPr/>
         <p:nvPr/>
       </p:nvGrpSpPr>
-      <p:grpSpPr>
-        <a:xfrm>
-          <a:off x="0" y="0"/>
-          <a:ext cx="0" cy="0"/>
-          <a:chOff x="0" y="0"/>
-          <a:chExt cx="0" cy="0"/>
-        </a:xfrm>
-      </p:grpSpPr>
+      <p:grpSpPr/>
       <p:sp>
         <p:nvSpPr>
           <p:cNvPr id="2" name="Text 0"/>
@@ -8409,7 +8384,7 @@
           <a:bodyPr wrap="square" lIns="0" tIns="0" rIns="0" bIns="0" rtlCol="0" anchor="ctr"/>
           <a:lstStyle/>
           <a:p>
-            <a:pPr marL="0" indent="0">
+            <a:pPr indent="0" marL="0">
               <a:buNone/>
             </a:pPr>
             <a:r>
@@ -8469,7 +8444,7 @@
             <a:endParaRPr lang="en-US" sz="1900" dirty="0"/>
           </a:p>
           <a:p>
-            <a:pPr marL="685800" lvl="1" indent="-342900">
+            <a:pPr lvl="1" marL="685800" indent="-342900">
               <a:spcAft>
                 <a:spcPts val="600"/>
               </a:spcAft>
@@ -8511,7 +8486,7 @@
             <a:endParaRPr lang="en-US" sz="1900" dirty="0"/>
           </a:p>
           <a:p>
-            <a:pPr marL="685800" lvl="1" indent="-342900">
+            <a:pPr lvl="1" marL="685800" indent="-342900">
               <a:spcAft>
                 <a:spcPts val="600"/>
               </a:spcAft>
@@ -8553,7 +8528,7 @@
             <a:endParaRPr lang="en-US" sz="1900" dirty="0"/>
           </a:p>
           <a:p>
-            <a:pPr marL="685800" lvl="1" indent="-342900">
+            <a:pPr lvl="1" marL="685800" indent="-342900">
               <a:buSzPct val="100000"/>
               <a:buChar char="•"/>
             </a:pPr>
@@ -8574,7 +8549,7 @@
       </p:sp>
       <p:pic>
         <p:nvPicPr>
-          <p:cNvPr id="4" name="Image 0" descr="/home/user/SoC_Design_and_Programming/diagrams/phy_wiring.png"/>
+          <p:cNvPr id="4" name="Image 0" descr="/home/user/SoC_Design_and_Programming/diagrams/phy_wiring.png">    </p:cNvPr>
           <p:cNvPicPr>
             <a:picLocks noChangeAspect="1"/>
           </p:cNvPicPr>
@@ -8582,7 +8557,7 @@
         </p:nvPicPr>
         <p:blipFill>
           <a:blip r:embed="rId2"/>
-          <a:srcRect/>
+          <a:srcRect l="0" r="0" t="0" b="0"/>
           <a:stretch/>
         </p:blipFill>
         <p:spPr>
@@ -8616,7 +8591,7 @@
           <a:bodyPr wrap="square" rtlCol="0" anchor="ctr"/>
           <a:lstStyle/>
           <a:p>
-            <a:pPr marL="0" indent="0" algn="ctr">
+            <a:pPr algn="ctr" indent="0" marL="0">
               <a:buNone/>
             </a:pPr>
             <a:r>
@@ -8655,7 +8630,7 @@
           <a:bodyPr wrap="square" rtlCol="0" anchor="ctr"/>
           <a:lstStyle/>
           <a:p>
-            <a:pPr marL="0" indent="0" algn="r">
+            <a:pPr algn="r" indent="0" marL="0">
               <a:buNone/>
             </a:pPr>
             <a:r>
@@ -8974,319 +8949,4 @@
     </a:ext>
   </a:extLst>
 </a:theme>
-</file>
-
-<file path=ppt/theme/theme2.xml><?xml version="1.0" encoding="utf-8"?>
-<a:theme xmlns:a="http://schemas.openxmlformats.org/drawingml/2006/main" name="Office 테마">
-  <a:themeElements>
-    <a:clrScheme name="Office">
-      <a:dk1>
-        <a:sysClr val="windowText" lastClr="000000"/>
-      </a:dk1>
-      <a:lt1>
-        <a:sysClr val="window" lastClr="FFFFFF"/>
-      </a:lt1>
-      <a:dk2>
-        <a:srgbClr val="0E2841"/>
-      </a:dk2>
-      <a:lt2>
-        <a:srgbClr val="E8E8E8"/>
-      </a:lt2>
-      <a:accent1>
-        <a:srgbClr val="156082"/>
-      </a:accent1>
-      <a:accent2>
-        <a:srgbClr val="E97132"/>
-      </a:accent2>
-      <a:accent3>
-        <a:srgbClr val="196B24"/>
-      </a:accent3>
-      <a:accent4>
-        <a:srgbClr val="0F9ED5"/>
-      </a:accent4>
-      <a:accent5>
-        <a:srgbClr val="A02B93"/>
-      </a:accent5>
-      <a:accent6>
-        <a:srgbClr val="4EA72E"/>
-      </a:accent6>
-      <a:hlink>
-        <a:srgbClr val="467886"/>
-      </a:hlink>
-      <a:folHlink>
-        <a:srgbClr val="96607D"/>
-      </a:folHlink>
-    </a:clrScheme>
-    <a:fontScheme name="Office">
-      <a:majorFont>
-        <a:latin typeface="맑은 고딕" panose="02110004020202020204"/>
-        <a:ea typeface=""/>
-        <a:cs typeface=""/>
-        <a:font script="Jpan" typeface="游ゴシック Light"/>
-        <a:font script="Hang" typeface="맑은 고딕"/>
-        <a:font script="Hans" typeface="等线 Light"/>
-        <a:font script="Hant" typeface="新細明體"/>
-        <a:font script="Arab" typeface="Times New Roman"/>
-        <a:font script="Hebr" typeface="Times New Roman"/>
-        <a:font script="Thai" typeface="Angsana New"/>
-        <a:font script="Ethi" typeface="Nyala"/>
-        <a:font script="Beng" typeface="Vrinda"/>
-        <a:font script="Gujr" typeface="Shruti"/>
-        <a:font script="Khmr" typeface="MoolBoran"/>
-        <a:font script="Knda" typeface="Tunga"/>
-        <a:font script="Guru" typeface="Raavi"/>
-        <a:font script="Cans" typeface="Euphemia"/>
-        <a:font script="Cher" typeface="Plantagenet Cherokee"/>
-        <a:font script="Yiii" typeface="Microsoft Yi Baiti"/>
-        <a:font script="Tibt" typeface="Microsoft Himalaya"/>
-        <a:font script="Thaa" typeface="MV Boli"/>
-        <a:font script="Deva" typeface="Mangal"/>
-        <a:font script="Telu" typeface="Gautami"/>
-        <a:font script="Taml" typeface="Latha"/>
-        <a:font script="Syrc" typeface="Estrangelo Edessa"/>
-        <a:font script="Orya" typeface="Kalinga"/>
-        <a:font script="Mlym" typeface="Kartika"/>
-        <a:font script="Laoo" typeface="DokChampa"/>
-        <a:font script="Sinh" typeface="Iskoola Pota"/>
-        <a:font script="Mong" typeface="Mongolian Baiti"/>
-        <a:font script="Viet" typeface="Times New Roman"/>
-        <a:font script="Uigh" typeface="Microsoft Uighur"/>
-        <a:font script="Geor" typeface="Sylfaen"/>
-        <a:font script="Armn" typeface="Arial"/>
-        <a:font script="Bugi" typeface="Leelawadee UI"/>
-        <a:font script="Bopo" typeface="Microsoft JhengHei"/>
-        <a:font script="Java" typeface="Javanese Text"/>
-        <a:font script="Lisu" typeface="Segoe UI"/>
-        <a:font script="Mymr" typeface="Myanmar Text"/>
-        <a:font script="Nkoo" typeface="Ebrima"/>
-        <a:font script="Olck" typeface="Nirmala UI"/>
-        <a:font script="Osma" typeface="Ebrima"/>
-        <a:font script="Phag" typeface="Phagspa"/>
-        <a:font script="Syrn" typeface="Estrangelo Edessa"/>
-        <a:font script="Syrj" typeface="Estrangelo Edessa"/>
-        <a:font script="Syre" typeface="Estrangelo Edessa"/>
-        <a:font script="Sora" typeface="Nirmala UI"/>
-        <a:font script="Tale" typeface="Microsoft Tai Le"/>
-        <a:font script="Talu" typeface="Microsoft New Tai Lue"/>
-        <a:font script="Tfng" typeface="Ebrima"/>
-      </a:majorFont>
-      <a:minorFont>
-        <a:latin typeface="맑은 고딕" panose="02110004020202020204"/>
-        <a:ea typeface=""/>
-        <a:cs typeface=""/>
-        <a:font script="Jpan" typeface="游ゴシック"/>
-        <a:font script="Hang" typeface="맑은 고딕"/>
-        <a:font script="Hans" typeface="等线"/>
-        <a:font script="Hant" typeface="新細明體"/>
-        <a:font script="Arab" typeface="Arial"/>
-        <a:font script="Hebr" typeface="Arial"/>
-        <a:font script="Thai" typeface="Cordia New"/>
-        <a:font script="Ethi" typeface="Nyala"/>
-        <a:font script="Beng" typeface="Vrinda"/>
-        <a:font script="Gujr" typeface="Shruti"/>
-        <a:font script="Khmr" typeface="DaunPenh"/>
-        <a:font script="Knda" typeface="Tunga"/>
-        <a:font script="Guru" typeface="Raavi"/>
-        <a:font script="Cans" typeface="Euphemia"/>
-        <a:font script="Cher" typeface="Plantagenet Cherokee"/>
-        <a:font script="Yiii" typeface="Microsoft Yi Baiti"/>
-        <a:font script="Tibt" typeface="Microsoft Himalaya"/>
-        <a:font script="Thaa" typeface="MV Boli"/>
-        <a:font script="Deva" typeface="Mangal"/>
-        <a:font script="Telu" typeface="Gautami"/>
-        <a:font script="Taml" typeface="Latha"/>
-        <a:font script="Syrc" typeface="Estrangelo Edessa"/>
-        <a:font script="Orya" typeface="Kalinga"/>
-        <a:font script="Mlym" typeface="Kartika"/>
-        <a:font script="Laoo" typeface="DokChampa"/>
-        <a:font script="Sinh" typeface="Iskoola Pota"/>
-        <a:font script="Mong" typeface="Mongolian Baiti"/>
-        <a:font script="Viet" typeface="Arial"/>
-        <a:font script="Uigh" typeface="Microsoft Uighur"/>
-        <a:font script="Geor" typeface="Sylfaen"/>
-        <a:font script="Armn" typeface="Arial"/>
-        <a:font script="Bugi" typeface="Leelawadee UI"/>
-        <a:font script="Bopo" typeface="Microsoft JhengHei"/>
-        <a:font script="Java" typeface="Javanese Text"/>
-        <a:font script="Lisu" typeface="Segoe UI"/>
-        <a:font script="Mymr" typeface="Myanmar Text"/>
-        <a:font script="Nkoo" typeface="Ebrima"/>
-        <a:font script="Olck" typeface="Nirmala UI"/>
-        <a:font script="Osma" typeface="Ebrima"/>
-        <a:font script="Phag" typeface="Phagspa"/>
-        <a:font script="Syrn" typeface="Estrangelo Edessa"/>
-        <a:font script="Syrj" typeface="Estrangelo Edessa"/>
-        <a:font script="Syre" typeface="Estrangelo Edessa"/>
-        <a:font script="Sora" typeface="Nirmala UI"/>
-        <a:font script="Tale" typeface="Microsoft Tai Le"/>
-        <a:font script="Talu" typeface="Microsoft New Tai Lue"/>
-        <a:font script="Tfng" typeface="Ebrima"/>
-      </a:minorFont>
-    </a:fontScheme>
-    <a:fmtScheme name="Office">
-      <a:fillStyleLst>
-        <a:solidFill>
-          <a:schemeClr val="phClr"/>
-        </a:solidFill>
-        <a:gradFill rotWithShape="1">
-          <a:gsLst>
-            <a:gs pos="0">
-              <a:schemeClr val="phClr">
-                <a:lumMod val="110000"/>
-                <a:satMod val="105000"/>
-                <a:tint val="67000"/>
-              </a:schemeClr>
-            </a:gs>
-            <a:gs pos="50000">
-              <a:schemeClr val="phClr">
-                <a:lumMod val="105000"/>
-                <a:satMod val="103000"/>
-                <a:tint val="73000"/>
-              </a:schemeClr>
-            </a:gs>
-            <a:gs pos="100000">
-              <a:schemeClr val="phClr">
-                <a:lumMod val="105000"/>
-                <a:satMod val="109000"/>
-                <a:tint val="81000"/>
-              </a:schemeClr>
-            </a:gs>
-          </a:gsLst>
-          <a:lin ang="5400000" scaled="0"/>
-        </a:gradFill>
-        <a:gradFill rotWithShape="1">
-          <a:gsLst>
-            <a:gs pos="0">
-              <a:schemeClr val="phClr">
-                <a:satMod val="103000"/>
-                <a:lumMod val="102000"/>
-                <a:tint val="94000"/>
-              </a:schemeClr>
-            </a:gs>
-            <a:gs pos="50000">
-              <a:schemeClr val="phClr">
-                <a:satMod val="110000"/>
-                <a:lumMod val="100000"/>
-                <a:shade val="100000"/>
-              </a:schemeClr>
-            </a:gs>
-            <a:gs pos="100000">
-              <a:schemeClr val="phClr">
-                <a:lumMod val="99000"/>
-                <a:satMod val="120000"/>
-                <a:shade val="78000"/>
-              </a:schemeClr>
-            </a:gs>
-          </a:gsLst>
-          <a:lin ang="5400000" scaled="0"/>
-        </a:gradFill>
-      </a:fillStyleLst>
-      <a:lnStyleLst>
-        <a:ln w="12700" cap="flat" cmpd="sng" algn="ctr">
-          <a:solidFill>
-            <a:schemeClr val="phClr"/>
-          </a:solidFill>
-          <a:prstDash val="solid"/>
-          <a:miter lim="800000"/>
-        </a:ln>
-        <a:ln w="19050" cap="flat" cmpd="sng" algn="ctr">
-          <a:solidFill>
-            <a:schemeClr val="phClr"/>
-          </a:solidFill>
-          <a:prstDash val="solid"/>
-          <a:miter lim="800000"/>
-        </a:ln>
-        <a:ln w="25400" cap="flat" cmpd="sng" algn="ctr">
-          <a:solidFill>
-            <a:schemeClr val="phClr"/>
-          </a:solidFill>
-          <a:prstDash val="solid"/>
-          <a:miter lim="800000"/>
-        </a:ln>
-      </a:lnStyleLst>
-      <a:effectStyleLst>
-        <a:effectStyle>
-          <a:effectLst/>
-        </a:effectStyle>
-        <a:effectStyle>
-          <a:effectLst/>
-        </a:effectStyle>
-        <a:effectStyle>
-          <a:effectLst>
-            <a:outerShdw blurRad="57150" dist="19050" dir="5400000" algn="ctr" rotWithShape="0">
-              <a:srgbClr val="000000">
-                <a:alpha val="63000"/>
-              </a:srgbClr>
-            </a:outerShdw>
-          </a:effectLst>
-        </a:effectStyle>
-      </a:effectStyleLst>
-      <a:bgFillStyleLst>
-        <a:solidFill>
-          <a:schemeClr val="phClr"/>
-        </a:solidFill>
-        <a:solidFill>
-          <a:schemeClr val="phClr">
-            <a:tint val="95000"/>
-            <a:satMod val="170000"/>
-          </a:schemeClr>
-        </a:solidFill>
-        <a:gradFill rotWithShape="1">
-          <a:gsLst>
-            <a:gs pos="0">
-              <a:schemeClr val="phClr">
-                <a:tint val="93000"/>
-                <a:satMod val="150000"/>
-                <a:shade val="98000"/>
-                <a:lumMod val="102000"/>
-              </a:schemeClr>
-            </a:gs>
-            <a:gs pos="50000">
-              <a:schemeClr val="phClr">
-                <a:tint val="98000"/>
-                <a:satMod val="130000"/>
-                <a:shade val="90000"/>
-                <a:lumMod val="103000"/>
-              </a:schemeClr>
-            </a:gs>
-            <a:gs pos="100000">
-              <a:schemeClr val="phClr">
-                <a:shade val="63000"/>
-                <a:satMod val="120000"/>
-              </a:schemeClr>
-            </a:gs>
-          </a:gsLst>
-          <a:lin ang="5400000" scaled="0"/>
-        </a:gradFill>
-      </a:bgFillStyleLst>
-    </a:fmtScheme>
-  </a:themeElements>
-  <a:objectDefaults>
-    <a:lnDef>
-      <a:spPr/>
-      <a:bodyPr/>
-      <a:lstStyle/>
-      <a:style>
-        <a:lnRef idx="2">
-          <a:schemeClr val="accent1"/>
-        </a:lnRef>
-        <a:fillRef idx="0">
-          <a:schemeClr val="accent1"/>
-        </a:fillRef>
-        <a:effectRef idx="1">
-          <a:schemeClr val="accent1"/>
-        </a:effectRef>
-        <a:fontRef idx="minor">
-          <a:schemeClr val="tx1"/>
-        </a:fontRef>
-      </a:style>
-    </a:lnDef>
-  </a:objectDefaults>
-  <a:extraClrSchemeLst/>
-  <a:extLst>
-    <a:ext uri="{05A4C25C-085E-4340-85A3-A5531E510DB2}">
-      <thm15:themeFamily xmlns:thm15="http://schemas.microsoft.com/office/thememl/2012/main" name="Office Theme" id="{2E142A2C-CD16-42D6-873A-C26D2A0506FA}" vid="{1BDDFF52-6CD6-40A5-AB3C-68EB2F1E4D0A}"/>
-    </a:ext>
-  </a:extLst>
-</a:theme>
 </file>
--- a/presentation_full(diagram change).pptx
+++ b/presentation_full(diagram change).pptx
@@ -4909,27 +4909,6 @@
                 <a:cs typeface="Noto Sans CJK KR" pitchFamily="34" charset="-120"/>
               </a:rPr>
               <a:t>각 슬롯은 자신의 타임슬롯에서 자신의 payload를 전송 (슬롯별 절대 타겟 틱을 기준으로 순회)</a:t>
-            </a:r>
-            <a:endParaRPr lang="en-US" sz="2000" dirty="0"/>
-          </a:p>
-          <a:p>
-            <a:pPr marL="342900" indent="-342900">
-              <a:spcAft>
-                <a:spcPts val="1200"/>
-              </a:spcAft>
-              <a:buSzPct val="100000"/>
-              <a:buChar char="•"/>
-            </a:pPr>
-            <a:r>
-              <a:rPr lang="en-US" sz="2000" dirty="0">
-                <a:solidFill>
-                  <a:srgbClr val="222222"/>
-                </a:solidFill>
-                <a:latin typeface="Noto Sans CJK KR" pitchFamily="34" charset="0"/>
-                <a:ea typeface="Noto Sans CJK KR" pitchFamily="34" charset="-122"/>
-                <a:cs typeface="Noto Sans CJK KR" pitchFamily="34" charset="-120"/>
-              </a:rPr>
-              <a:t>슬롯 0~5는 AXI 레지스터, 슬롯 6~7은 외부 PL 버스에서 payload를 가져옴</a:t>
             </a:r>
             <a:endParaRPr lang="en-US" sz="2000" dirty="0"/>
           </a:p>

--- a/presentation_full(diagram change).pptx
+++ b/presentation_full(diagram change).pptx
@@ -4,43 +4,43 @@
   <p:sldMasterIdLst>
     <p:sldMasterId id="2147483648" r:id="rId1"/>
   </p:sldMasterIdLst>
+  <p:notesMasterIdLst>
+    <p:notesMasterId r:id="rId33"/>
+  </p:notesMasterIdLst>
   <p:sldIdLst>
     <p:sldId id="256" r:id="rId2"/>
-    <p:sldId id="260" r:id="rId11"/>
-    <p:sldId id="261" r:id="rId12"/>
-    <p:sldId id="257" r:id="rId3"/>
-    <p:sldId id="258" r:id="rId4"/>
-    <p:sldId id="259" r:id="rId5"/>
-    <p:sldId id="262" r:id="rId13"/>
-    <p:sldId id="263" r:id="rId14"/>
-    <p:sldId id="264" r:id="rId15"/>
-    <p:sldId id="265" r:id="rId16"/>
-    <p:sldId id="266" r:id="rId17"/>
-    <p:sldId id="267" r:id="rId18"/>
-    <p:sldId id="268" r:id="rId19"/>
-    <p:sldId id="269" r:id="rId20"/>
-    <p:sldId id="270" r:id="rId21"/>
-    <p:sldId id="271" r:id="rId22"/>
-    <p:sldId id="272" r:id="rId23"/>
-    <p:sldId id="273" r:id="rId24"/>
-    <p:sldId id="274" r:id="rId25"/>
-    <p:sldId id="275" r:id="rId26"/>
-    <p:sldId id="276" r:id="rId27"/>
-    <p:sldId id="277" r:id="rId28"/>
-    <p:sldId id="278" r:id="rId29"/>
-    <p:sldId id="279" r:id="rId30"/>
-    <p:sldId id="280" r:id="rId31"/>
-    <p:sldId id="281" r:id="rId32"/>
-    <p:sldId id="282" r:id="rId33"/>
-    <p:sldId id="283" r:id="rId34"/>
-    <p:sldId id="284" r:id="rId35"/>
-    <p:sldId id="285" r:id="rId36"/>
-    <p:sldId id="286" r:id="rId37"/>
+    <p:sldId id="260" r:id="rId3"/>
+    <p:sldId id="261" r:id="rId4"/>
+    <p:sldId id="257" r:id="rId5"/>
+    <p:sldId id="258" r:id="rId6"/>
+    <p:sldId id="259" r:id="rId7"/>
+    <p:sldId id="262" r:id="rId8"/>
+    <p:sldId id="263" r:id="rId9"/>
+    <p:sldId id="264" r:id="rId10"/>
+    <p:sldId id="265" r:id="rId11"/>
+    <p:sldId id="266" r:id="rId12"/>
+    <p:sldId id="267" r:id="rId13"/>
+    <p:sldId id="268" r:id="rId14"/>
+    <p:sldId id="269" r:id="rId15"/>
+    <p:sldId id="270" r:id="rId16"/>
+    <p:sldId id="271" r:id="rId17"/>
+    <p:sldId id="272" r:id="rId18"/>
+    <p:sldId id="273" r:id="rId19"/>
+    <p:sldId id="274" r:id="rId20"/>
+    <p:sldId id="275" r:id="rId21"/>
+    <p:sldId id="276" r:id="rId22"/>
+    <p:sldId id="277" r:id="rId23"/>
+    <p:sldId id="278" r:id="rId24"/>
+    <p:sldId id="279" r:id="rId25"/>
+    <p:sldId id="280" r:id="rId26"/>
+    <p:sldId id="281" r:id="rId27"/>
+    <p:sldId id="282" r:id="rId28"/>
+    <p:sldId id="283" r:id="rId29"/>
+    <p:sldId id="284" r:id="rId30"/>
+    <p:sldId id="285" r:id="rId31"/>
+    <p:sldId id="286" r:id="rId32"/>
   </p:sldIdLst>
-  <p:notesMasterIdLst>
-    <p:notesMasterId r:id="rId6"/>
-  </p:notesMasterIdLst>
-  <p:sldSz cx="9144000" cy="5143500"/>
+  <p:sldSz cx="9144000" cy="5143500" type="screen16x9"/>
   <p:notesSz cx="5143500" cy="9144000"/>
   <p:defaultTextStyle>
     <a:lvl1pPr marL="0" algn="l" defTabSz="914400" rtl="0" eaLnBrk="1" latinLnBrk="0" hangingPunct="1">
@@ -134,6 +134,11 @@
       </a:defRPr>
     </a:lvl9pPr>
   </p:defaultTextStyle>
+  <p:extLst>
+    <p:ext uri="{EFAFB233-063F-42B5-8137-9DF3F51BA10A}">
+      <p15:sldGuideLst xmlns:p15="http://schemas.microsoft.com/office/powerpoint/2012/main"/>
+    </p:ext>
+  </p:extLst>
 </p:presentation>
 </file>
 
@@ -159,240 +164,16 @@
           <a:chExt cx="0" cy="0"/>
         </a:xfrm>
       </p:grpSpPr>
-      <p:sp>
-        <p:nvSpPr>
-          <p:cNvPr id="2" name="Header Placeholder 1"/>
-          <p:cNvSpPr>
-            <a:spLocks noGrp="1"/>
-          </p:cNvSpPr>
-          <p:nvPr>
-            <p:ph type="hdr" sz="quarter"/>
-          </p:nvPr>
-        </p:nvSpPr>
-        <p:spPr>
-          <a:xfrm>
-            <a:off x="0" y="0"/>
-            <a:ext cx="2971800" cy="458788"/>
-          </a:xfrm>
-          <a:prstGeom prst="rect">
-            <a:avLst/>
-          </a:prstGeom>
-        </p:spPr>
-        <p:txBody>
-          <a:bodyPr vert="horz" lIns="91440" tIns="45720" rIns="91440" bIns="45720" rtlCol="0"/>
-          <a:lstStyle>
-            <a:lvl1pPr algn="l">
-              <a:defRPr sz="1200"/>
-            </a:lvl1pPr>
-          </a:lstStyle>
-          <a:p>
-            <a:endParaRPr lang="en-US"/>
-          </a:p>
-        </p:txBody>
-      </p:sp>
-      <p:sp>
-        <p:nvSpPr>
-          <p:cNvPr id="3" name="Date Placeholder 2"/>
-          <p:cNvSpPr>
-            <a:spLocks noGrp="1"/>
-          </p:cNvSpPr>
-          <p:nvPr>
-            <p:ph type="dt" idx="1"/>
-          </p:nvPr>
-        </p:nvSpPr>
-        <p:spPr>
-          <a:xfrm>
-            <a:off x="3884613" y="0"/>
-            <a:ext cx="2971800" cy="458788"/>
-          </a:xfrm>
-          <a:prstGeom prst="rect">
-            <a:avLst/>
-          </a:prstGeom>
-        </p:spPr>
-        <p:txBody>
-          <a:bodyPr vert="horz" lIns="91440" tIns="45720" rIns="91440" bIns="45720" rtlCol="0"/>
-          <a:lstStyle>
-            <a:lvl1pPr algn="r">
-              <a:defRPr sz="1200"/>
-            </a:lvl1pPr>
-          </a:lstStyle>
-          <a:p>
-            <a:fld id="{5282F153-3F37-0F45-9E97-73ACFA13230C}" type="datetimeFigureOut">
-              <a:rPr lang="en-US"/>
-              <a:t>7/23/19</a:t>
-            </a:fld>
-            <a:endParaRPr lang="en-US"/>
-          </a:p>
-        </p:txBody>
-      </p:sp>
-      <p:sp>
-        <p:nvSpPr>
-          <p:cNvPr id="4" name="Slide Image Placeholder 3"/>
-          <p:cNvSpPr>
-            <a:spLocks noGrp="1" noRot="1" noChangeAspect="1"/>
-          </p:cNvSpPr>
-          <p:nvPr>
-            <p:ph type="sldImg" idx="2"/>
-          </p:nvPr>
-        </p:nvSpPr>
-        <p:spPr>
-          <a:xfrm>
-            <a:off x="685800" y="1143000"/>
-            <a:ext cx="5486400" cy="3086100"/>
-          </a:xfrm>
-          <a:prstGeom prst="rect">
-            <a:avLst/>
-          </a:prstGeom>
-          <a:noFill/>
-          <a:ln w="12700">
-            <a:solidFill>
-              <a:prstClr val="black"/>
-            </a:solidFill>
-          </a:ln>
-        </p:spPr>
-        <p:txBody>
-          <a:bodyPr vert="horz" lIns="91440" tIns="45720" rIns="91440" bIns="45720" rtlCol="0" anchor="ctr"/>
-          <a:lstStyle/>
-          <a:p>
-            <a:endParaRPr lang="en-US"/>
-          </a:p>
-        </p:txBody>
-      </p:sp>
-      <p:sp>
-        <p:nvSpPr>
-          <p:cNvPr id="5" name="Notes Placeholder 4"/>
-          <p:cNvSpPr>
-            <a:spLocks noGrp="1"/>
-          </p:cNvSpPr>
-          <p:nvPr>
-            <p:ph type="body" sz="quarter" idx="3"/>
-          </p:nvPr>
-        </p:nvSpPr>
-        <p:spPr>
-          <a:xfrm>
-            <a:off x="685800" y="4400550"/>
-            <a:ext cx="5486400" cy="3600450"/>
-          </a:xfrm>
-          <a:prstGeom prst="rect">
-            <a:avLst/>
-          </a:prstGeom>
-        </p:spPr>
-        <p:txBody>
-          <a:bodyPr vert="horz" lIns="91440" tIns="45720" rIns="91440" bIns="45720" rtlCol="0"/>
-          <a:lstStyle/>
-          <a:p>
-            <a:pPr lvl="0"/>
-            <a:r>
-              <a:rPr lang="en-US"/>
-              <a:t>Click to edit Master text styles</a:t>
-            </a:r>
-          </a:p>
-          <a:p>
-            <a:pPr lvl="1"/>
-            <a:r>
-              <a:rPr lang="en-US"/>
-              <a:t>Second level</a:t>
-            </a:r>
-          </a:p>
-          <a:p>
-            <a:pPr lvl="2"/>
-            <a:r>
-              <a:rPr lang="en-US"/>
-              <a:t>Third level</a:t>
-            </a:r>
-          </a:p>
-          <a:p>
-            <a:pPr lvl="3"/>
-            <a:r>
-              <a:rPr lang="en-US"/>
-              <a:t>Fourth level</a:t>
-            </a:r>
-          </a:p>
-          <a:p>
-            <a:pPr lvl="4"/>
-            <a:r>
-              <a:rPr lang="en-US"/>
-              <a:t>Fifth level</a:t>
-            </a:r>
-          </a:p>
-        </p:txBody>
-      </p:sp>
-      <p:sp>
-        <p:nvSpPr>
-          <p:cNvPr id="6" name="Footer Placeholder 5"/>
-          <p:cNvSpPr>
-            <a:spLocks noGrp="1"/>
-          </p:cNvSpPr>
-          <p:nvPr>
-            <p:ph type="ftr" sz="quarter" idx="4"/>
-          </p:nvPr>
-        </p:nvSpPr>
-        <p:spPr>
-          <a:xfrm>
-            <a:off x="0" y="8685213"/>
-            <a:ext cx="2971800" cy="458787"/>
-          </a:xfrm>
-          <a:prstGeom prst="rect">
-            <a:avLst/>
-          </a:prstGeom>
-        </p:spPr>
-        <p:txBody>
-          <a:bodyPr vert="horz" lIns="91440" tIns="45720" rIns="91440" bIns="45720" rtlCol="0" anchor="b"/>
-          <a:lstStyle>
-            <a:lvl1pPr algn="l">
-              <a:defRPr sz="1200"/>
-            </a:lvl1pPr>
-          </a:lstStyle>
-          <a:p>
-            <a:endParaRPr lang="en-US"/>
-          </a:p>
-        </p:txBody>
-      </p:sp>
-      <p:sp>
-        <p:nvSpPr>
-          <p:cNvPr id="7" name="Slide Number Placeholder 6"/>
-          <p:cNvSpPr>
-            <a:spLocks noGrp="1"/>
-          </p:cNvSpPr>
-          <p:nvPr>
-            <p:ph type="sldNum" sz="quarter" idx="5"/>
-          </p:nvPr>
-        </p:nvSpPr>
-        <p:spPr>
-          <a:xfrm>
-            <a:off x="3884613" y="8685213"/>
-            <a:ext cx="2971800" cy="458787"/>
-          </a:xfrm>
-          <a:prstGeom prst="rect">
-            <a:avLst/>
-          </a:prstGeom>
-        </p:spPr>
-        <p:txBody>
-          <a:bodyPr vert="horz" lIns="91440" tIns="45720" rIns="91440" bIns="45720" rtlCol="0" anchor="b"/>
-          <a:lstStyle>
-            <a:lvl1pPr algn="r">
-              <a:defRPr sz="1200"/>
-            </a:lvl1pPr>
-          </a:lstStyle>
-          <a:p>
-            <a:fld id="{CE5E9CC1-C706-0F49-92D6-E571CC5EEA8F}" type="slidenum">
-              <a:rPr lang="en-US"/>
-              <a:t>‹#›</a:t>
-            </a:fld>
-            <a:endParaRPr lang="en-US"/>
-          </a:p>
-        </p:txBody>
-      </p:sp>
     </p:spTree>
     <p:extLst>
       <p:ext uri="{BB962C8B-B14F-4D97-AF65-F5344CB8AC3E}">
-        <p14:creationId xmlns:p14="http://schemas.microsoft.com/office/powerpoint/2010/main" val="1024086991"/>
+        <p14:creationId xmlns:p14="http://schemas.microsoft.com/office/powerpoint/2010/main" val="1261329883"/>
       </p:ext>
     </p:extLst>
   </p:cSld>
   <p:clrMap bg1="lt1" tx1="dk1" bg2="lt2" tx2="dk2" accent1="accent1" accent2="accent2" accent3="accent3" accent4="accent4" accent5="accent5" accent6="accent6" hlink="hlink" folHlink="folHlink"/>
   <p:notesStyle>
-    <a:lvl1pPr marL="0" algn="l" defTabSz="914400" rtl="0" eaLnBrk="1" latinLnBrk="0" hangingPunct="1">
+    <a:lvl1pPr marL="0" algn="l" defTabSz="914400" rtl="0" eaLnBrk="1" latinLnBrk="1" hangingPunct="1">
       <a:defRPr sz="1200" kern="1200">
         <a:solidFill>
           <a:schemeClr val="tx1"/>
@@ -402,7 +183,7 @@
         <a:cs typeface="+mn-cs"/>
       </a:defRPr>
     </a:lvl1pPr>
-    <a:lvl2pPr marL="457200" algn="l" defTabSz="914400" rtl="0" eaLnBrk="1" latinLnBrk="0" hangingPunct="1">
+    <a:lvl2pPr marL="457200" algn="l" defTabSz="914400" rtl="0" eaLnBrk="1" latinLnBrk="1" hangingPunct="1">
       <a:defRPr sz="1200" kern="1200">
         <a:solidFill>
           <a:schemeClr val="tx1"/>
@@ -412,7 +193,7 @@
         <a:cs typeface="+mn-cs"/>
       </a:defRPr>
     </a:lvl2pPr>
-    <a:lvl3pPr marL="914400" algn="l" defTabSz="914400" rtl="0" eaLnBrk="1" latinLnBrk="0" hangingPunct="1">
+    <a:lvl3pPr marL="914400" algn="l" defTabSz="914400" rtl="0" eaLnBrk="1" latinLnBrk="1" hangingPunct="1">
       <a:defRPr sz="1200" kern="1200">
         <a:solidFill>
           <a:schemeClr val="tx1"/>
@@ -422,7 +203,7 @@
         <a:cs typeface="+mn-cs"/>
       </a:defRPr>
     </a:lvl3pPr>
-    <a:lvl4pPr marL="1371600" algn="l" defTabSz="914400" rtl="0" eaLnBrk="1" latinLnBrk="0" hangingPunct="1">
+    <a:lvl4pPr marL="1371600" algn="l" defTabSz="914400" rtl="0" eaLnBrk="1" latinLnBrk="1" hangingPunct="1">
       <a:defRPr sz="1200" kern="1200">
         <a:solidFill>
           <a:schemeClr val="tx1"/>
@@ -432,7 +213,7 @@
         <a:cs typeface="+mn-cs"/>
       </a:defRPr>
     </a:lvl4pPr>
-    <a:lvl5pPr marL="1828800" algn="l" defTabSz="914400" rtl="0" eaLnBrk="1" latinLnBrk="0" hangingPunct="1">
+    <a:lvl5pPr marL="1828800" algn="l" defTabSz="914400" rtl="0" eaLnBrk="1" latinLnBrk="1" hangingPunct="1">
       <a:defRPr sz="1200" kern="1200">
         <a:solidFill>
           <a:schemeClr val="tx1"/>
@@ -442,7 +223,7 @@
         <a:cs typeface="+mn-cs"/>
       </a:defRPr>
     </a:lvl5pPr>
-    <a:lvl6pPr marL="2286000" algn="l" defTabSz="914400" rtl="0" eaLnBrk="1" latinLnBrk="0" hangingPunct="1">
+    <a:lvl6pPr marL="2286000" algn="l" defTabSz="914400" rtl="0" eaLnBrk="1" latinLnBrk="1" hangingPunct="1">
       <a:defRPr sz="1200" kern="1200">
         <a:solidFill>
           <a:schemeClr val="tx1"/>
@@ -452,7 +233,7 @@
         <a:cs typeface="+mn-cs"/>
       </a:defRPr>
     </a:lvl6pPr>
-    <a:lvl7pPr marL="2743200" algn="l" defTabSz="914400" rtl="0" eaLnBrk="1" latinLnBrk="0" hangingPunct="1">
+    <a:lvl7pPr marL="2743200" algn="l" defTabSz="914400" rtl="0" eaLnBrk="1" latinLnBrk="1" hangingPunct="1">
       <a:defRPr sz="1200" kern="1200">
         <a:solidFill>
           <a:schemeClr val="tx1"/>
@@ -462,7 +243,7 @@
         <a:cs typeface="+mn-cs"/>
       </a:defRPr>
     </a:lvl7pPr>
-    <a:lvl8pPr marL="3200400" algn="l" defTabSz="914400" rtl="0" eaLnBrk="1" latinLnBrk="0" hangingPunct="1">
+    <a:lvl8pPr marL="3200400" algn="l" defTabSz="914400" rtl="0" eaLnBrk="1" latinLnBrk="1" hangingPunct="1">
       <a:defRPr sz="1200" kern="1200">
         <a:solidFill>
           <a:schemeClr val="tx1"/>
@@ -472,7 +253,7 @@
         <a:cs typeface="+mn-cs"/>
       </a:defRPr>
     </a:lvl8pPr>
-    <a:lvl9pPr marL="3657600" algn="l" defTabSz="914400" rtl="0" eaLnBrk="1" latinLnBrk="0" hangingPunct="1">
+    <a:lvl9pPr marL="3657600" algn="l" defTabSz="914400" rtl="0" eaLnBrk="1" latinLnBrk="1" hangingPunct="1">
       <a:defRPr sz="1200" kern="1200">
         <a:solidFill>
           <a:schemeClr val="tx1"/>
@@ -530,10 +311,6 @@
           <a:bodyPr/>
           <a:lstStyle/>
           <a:p>
-            <a:r>
-              <a:rPr lang="en-US" dirty="0"/>
-              <a:t/>
-            </a:r>
             <a:endParaRPr lang="en-US" dirty="0"/>
           </a:p>
         </p:txBody>
@@ -618,10 +395,6 @@
           <a:bodyPr/>
           <a:lstStyle/>
           <a:p>
-            <a:r>
-              <a:rPr lang="en-US" dirty="0"/>
-              <a:t/>
-            </a:r>
             <a:endParaRPr lang="en-US" dirty="0"/>
           </a:p>
         </p:txBody>
@@ -643,7 +416,7 @@
           <a:p>
             <a:fld id="{F7021451-1387-4CA6-816F-3879F97B5CBC}" type="slidenum">
               <a:rPr lang="en-US"/>
-              <a:t>2</a:t>
+              <a:t>4</a:t>
             </a:fld>
             <a:endParaRPr lang="en-US"/>
           </a:p>
@@ -706,10 +479,6 @@
           <a:bodyPr/>
           <a:lstStyle/>
           <a:p>
-            <a:r>
-              <a:rPr lang="en-US" dirty="0"/>
-              <a:t/>
-            </a:r>
             <a:endParaRPr lang="en-US" dirty="0"/>
           </a:p>
         </p:txBody>
@@ -731,7 +500,7 @@
           <a:p>
             <a:fld id="{F7021451-1387-4CA6-816F-3879F97B5CBC}" type="slidenum">
               <a:rPr lang="en-US"/>
-              <a:t>3</a:t>
+              <a:t>5</a:t>
             </a:fld>
             <a:endParaRPr lang="en-US"/>
           </a:p>
@@ -794,10 +563,6 @@
           <a:bodyPr/>
           <a:lstStyle/>
           <a:p>
-            <a:r>
-              <a:rPr lang="en-US" dirty="0"/>
-              <a:t/>
-            </a:r>
             <a:endParaRPr lang="en-US" dirty="0"/>
           </a:p>
         </p:txBody>
@@ -819,7 +584,7 @@
           <a:p>
             <a:fld id="{F7021451-1387-4CA6-816F-3879F97B5CBC}" type="slidenum">
               <a:rPr lang="en-US"/>
-              <a:t>4</a:t>
+              <a:t>6</a:t>
             </a:fld>
             <a:endParaRPr lang="en-US"/>
           </a:p>
@@ -871,6 +636,11 @@
 <file path=ppt/slideMasters/slideMaster1.xml><?xml version="1.0" encoding="utf-8"?>
 <p:sldMaster xmlns:a="http://schemas.openxmlformats.org/drawingml/2006/main" xmlns:r="http://schemas.openxmlformats.org/officeDocument/2006/relationships" xmlns:p="http://schemas.openxmlformats.org/presentationml/2006/main">
   <p:cSld>
+    <p:bg>
+      <p:bgRef idx="1001">
+        <a:schemeClr val="bg1"/>
+      </p:bgRef>
+    </p:bg>
     <p:spTree>
       <p:nvGrpSpPr>
         <p:cNvPr id="1" name=""/>
@@ -1183,7 +953,7 @@
           <a:bodyPr wrap="square" rtlCol="0" anchor="t"/>
           <a:lstStyle/>
           <a:p>
-            <a:pPr algn="l" indent="0" marL="0">
+            <a:pPr marL="0" indent="0" algn="l">
               <a:buNone/>
             </a:pPr>
             <a:r>
@@ -1222,7 +992,7 @@
           <a:bodyPr wrap="square" rtlCol="0" anchor="ctr"/>
           <a:lstStyle/>
           <a:p>
-            <a:pPr algn="l" indent="0" marL="0">
+            <a:pPr marL="0" indent="0" algn="l">
               <a:buNone/>
             </a:pPr>
             <a:r>
@@ -1261,7 +1031,7 @@
           <a:bodyPr wrap="square" rtlCol="0" anchor="ctr"/>
           <a:lstStyle/>
           <a:p>
-            <a:pPr algn="l" indent="0" marL="0">
+            <a:pPr marL="0" indent="0" algn="l">
               <a:buNone/>
             </a:pPr>
             <a:r>
@@ -1300,7 +1070,7 @@
           <a:bodyPr wrap="square" rtlCol="0" anchor="ctr"/>
           <a:lstStyle/>
           <a:p>
-            <a:pPr algn="r" indent="0" marL="0">
+            <a:pPr marL="0" indent="0" algn="r">
               <a:buNone/>
             </a:pPr>
             <a:r>
@@ -1327,2317 +1097,8 @@
 </file>
 
 <file path=ppt/slides/slide10.xml><?xml version="1.0" encoding="utf-8"?>
-<p:sld xmlns:a="http://schemas.openxmlformats.org/drawingml/2006/main" xmlns:p="http://schemas.openxmlformats.org/presentationml/2006/main" xmlns:r="http://schemas.openxmlformats.org/officeDocument/2006/relationships">
+<p:sld xmlns:a="http://schemas.openxmlformats.org/drawingml/2006/main" xmlns:r="http://schemas.openxmlformats.org/officeDocument/2006/relationships" xmlns:p="http://schemas.openxmlformats.org/presentationml/2006/main">
   <p:cSld>
-    <p:spTree>
-      <p:nvGrpSpPr>
-        <p:cNvPr id="1" name=""/>
-        <p:cNvGrpSpPr/>
-        <p:nvPr/>
-      </p:nvGrpSpPr>
-      <p:grpSpPr/>
-      <p:sp>
-        <p:nvSpPr>
-          <p:cNvPr id="2" name="Text 0"/>
-          <p:cNvSpPr/>
-          <p:nvPr/>
-        </p:nvSpPr>
-        <p:spPr>
-          <a:xfrm>
-            <a:off x="548640" y="274320"/>
-            <a:ext cx="8046720" cy="777240"/>
-          </a:xfrm>
-          <a:prstGeom prst="rect">
-            <a:avLst/>
-          </a:prstGeom>
-          <a:noFill/>
-          <a:ln/>
-        </p:spPr>
-        <p:txBody>
-          <a:bodyPr wrap="square" lIns="0" tIns="0" rIns="0" bIns="0" rtlCol="0" anchor="ctr"/>
-          <a:lstStyle/>
-          <a:p>
-            <a:pPr indent="0" marL="0">
-              <a:buNone/>
-            </a:pPr>
-            <a:r>
-              <a:rPr lang="en-US" sz="3600" b="1" dirty="0">
-                <a:solidFill>
-                  <a:srgbClr val="111111"/>
-                </a:solidFill>
-                <a:latin typeface="Noto Sans CJK KR" pitchFamily="34" charset="0"/>
-                <a:ea typeface="Noto Sans CJK KR" pitchFamily="34" charset="-122"/>
-                <a:cs typeface="Noto Sans CJK KR" pitchFamily="34" charset="-120"/>
-              </a:rPr>
-              <a:t>DLL - Slave 프레임 구조</a:t>
-            </a:r>
-            <a:endParaRPr lang="en-US" sz="3600" dirty="0"/>
-          </a:p>
-        </p:txBody>
-      </p:sp>
-      <p:sp>
-        <p:nvSpPr>
-          <p:cNvPr id="3" name="Text 1"/>
-          <p:cNvSpPr/>
-          <p:nvPr/>
-        </p:nvSpPr>
-        <p:spPr>
-          <a:xfrm>
-            <a:off x="548640" y="1234440"/>
-            <a:ext cx="8046720" cy="1874520"/>
-          </a:xfrm>
-          <a:prstGeom prst="rect">
-            <a:avLst/>
-          </a:prstGeom>
-          <a:noFill/>
-          <a:ln/>
-        </p:spPr>
-        <p:txBody>
-          <a:bodyPr wrap="square" rtlCol="0" anchor="t"/>
-          <a:lstStyle/>
-          <a:p>
-            <a:pPr marL="342900" indent="-342900">
-              <a:spcAft>
-                <a:spcPts val="800"/>
-              </a:spcAft>
-              <a:buSzPct val="100000"/>
-              <a:buChar char="•"/>
-            </a:pPr>
-            <a:r>
-              <a:rPr lang="en-US" sz="1900" dirty="0">
-                <a:solidFill>
-                  <a:srgbClr val="222222"/>
-                </a:solidFill>
-                <a:latin typeface="Noto Sans CJK KR" pitchFamily="34" charset="0"/>
-                <a:ea typeface="Noto Sans CJK KR" pitchFamily="34" charset="-122"/>
-                <a:cs typeface="Noto Sans CJK KR" pitchFamily="34" charset="-120"/>
-              </a:rPr>
-              <a:t>필드 구성 (총 50비트)</a:t>
-            </a:r>
-            <a:endParaRPr lang="en-US" sz="1900" dirty="0"/>
-          </a:p>
-          <a:p>
-            <a:pPr lvl="1" marL="685800" indent="-342900">
-              <a:spcAft>
-                <a:spcPts val="600"/>
-              </a:spcAft>
-              <a:buSzPct val="100000"/>
-              <a:buChar char="•"/>
-            </a:pPr>
-            <a:r>
-              <a:rPr lang="en-US" sz="1600" dirty="0">
-                <a:solidFill>
-                  <a:srgbClr val="444444"/>
-                </a:solidFill>
-                <a:latin typeface="Noto Sans CJK KR" pitchFamily="34" charset="0"/>
-                <a:ea typeface="Noto Sans CJK KR" pitchFamily="34" charset="-122"/>
-                <a:cs typeface="Noto Sans CJK KR" pitchFamily="34" charset="-120"/>
-              </a:rPr>
-              <a:t>preamble(8, 0xAA) + slot_id(3) + payload(32) + hamming parity(7)</a:t>
-            </a:r>
-            <a:endParaRPr lang="en-US" sz="1900" dirty="0"/>
-          </a:p>
-          <a:p>
-            <a:pPr marL="342900" indent="-342900">
-              <a:spcAft>
-                <a:spcPts val="800"/>
-              </a:spcAft>
-              <a:buSzPct val="100000"/>
-              <a:buChar char="•"/>
-            </a:pPr>
-            <a:r>
-              <a:rPr lang="en-US" sz="1900" dirty="0">
-                <a:solidFill>
-                  <a:srgbClr val="222222"/>
-                </a:solidFill>
-                <a:latin typeface="Noto Sans CJK KR" pitchFamily="34" charset="0"/>
-                <a:ea typeface="Noto Sans CJK KR" pitchFamily="34" charset="-122"/>
-                <a:cs typeface="Noto Sans CJK KR" pitchFamily="34" charset="-120"/>
-              </a:rPr>
-              <a:t>에러 검출/정정</a:t>
-            </a:r>
-            <a:endParaRPr lang="en-US" sz="1900" dirty="0"/>
-          </a:p>
-          <a:p>
-            <a:pPr lvl="1" marL="685800" indent="-342900">
-              <a:spcAft>
-                <a:spcPts val="600"/>
-              </a:spcAft>
-              <a:buSzPct val="100000"/>
-              <a:buChar char="•"/>
-            </a:pPr>
-            <a:r>
-              <a:rPr lang="en-US" sz="1600" dirty="0">
-                <a:solidFill>
-                  <a:srgbClr val="444444"/>
-                </a:solidFill>
-                <a:latin typeface="Noto Sans CJK KR" pitchFamily="34" charset="0"/>
-                <a:ea typeface="Noto Sans CJK KR" pitchFamily="34" charset="-122"/>
-                <a:cs typeface="Noto Sans CJK KR" pitchFamily="34" charset="-120"/>
-              </a:rPr>
-              <a:t>SEC-DED 방식 — 1비트 에러는 검출 후 정정, 2비트 에러는 검출만 가능</a:t>
-            </a:r>
-            <a:endParaRPr lang="en-US" sz="1900" dirty="0"/>
-          </a:p>
-          <a:p>
-            <a:pPr marL="342900" indent="-342900">
-              <a:spcAft>
-                <a:spcPts val="800"/>
-              </a:spcAft>
-              <a:buSzPct val="100000"/>
-              <a:buChar char="•"/>
-            </a:pPr>
-            <a:r>
-              <a:rPr lang="en-US" sz="1900" dirty="0">
-                <a:solidFill>
-                  <a:srgbClr val="222222"/>
-                </a:solidFill>
-                <a:latin typeface="Noto Sans CJK KR" pitchFamily="34" charset="0"/>
-                <a:ea typeface="Noto Sans CJK KR" pitchFamily="34" charset="-122"/>
-                <a:cs typeface="Noto Sans CJK KR" pitchFamily="34" charset="-120"/>
-              </a:rPr>
-              <a:t>slot_id의 의미</a:t>
-            </a:r>
-            <a:endParaRPr lang="en-US" sz="1900" dirty="0"/>
-          </a:p>
-          <a:p>
-            <a:pPr lvl="1" marL="685800" indent="-342900">
-              <a:buSzPct val="100000"/>
-              <a:buChar char="•"/>
-            </a:pPr>
-            <a:r>
-              <a:rPr lang="en-US" sz="1600" dirty="0">
-                <a:solidFill>
-                  <a:srgbClr val="444444"/>
-                </a:solidFill>
-                <a:latin typeface="Noto Sans CJK KR" pitchFamily="34" charset="0"/>
-                <a:ea typeface="Noto Sans CJK KR" pitchFamily="34" charset="-122"/>
-                <a:cs typeface="Noto Sans CJK KR" pitchFamily="34" charset="-120"/>
-              </a:rPr>
-              <a:t>Slave 고유 식별자가 아니라 TDMA 슬롯 번호로 운용됨</a:t>
-            </a:r>
-            <a:endParaRPr lang="en-US" sz="1900" dirty="0"/>
-          </a:p>
-        </p:txBody>
-      </p:sp>
-      <p:pic>
-        <p:nvPicPr>
-          <p:cNvPr id="4" name="Image 0" descr="/home/user/SoC_Design_and_Programming/diagrams/slave_frame.png">    </p:cNvPr>
-          <p:cNvPicPr>
-            <a:picLocks noChangeAspect="1"/>
-          </p:cNvPicPr>
-          <p:nvPr/>
-        </p:nvPicPr>
-        <p:blipFill>
-          <a:blip r:embed="rId2"/>
-          <a:srcRect l="0" r="0" t="0" b="0"/>
-          <a:stretch/>
-        </p:blipFill>
-        <p:spPr>
-          <a:xfrm>
-            <a:off x="548640" y="3246120"/>
-            <a:ext cx="8046720" cy="563270"/>
-          </a:xfrm>
-          <a:prstGeom prst="rect">
-            <a:avLst/>
-          </a:prstGeom>
-        </p:spPr>
-      </p:pic>
-      <p:sp>
-        <p:nvSpPr>
-          <p:cNvPr id="5" name="Text 2"/>
-          <p:cNvSpPr/>
-          <p:nvPr/>
-        </p:nvSpPr>
-        <p:spPr>
-          <a:xfrm>
-            <a:off x="548640" y="3900830"/>
-            <a:ext cx="8046720" cy="228600"/>
-          </a:xfrm>
-          <a:prstGeom prst="rect">
-            <a:avLst/>
-          </a:prstGeom>
-          <a:noFill/>
-          <a:ln/>
-        </p:spPr>
-        <p:txBody>
-          <a:bodyPr wrap="square" rtlCol="0" anchor="ctr"/>
-          <a:lstStyle/>
-          <a:p>
-            <a:pPr algn="ctr" indent="0" marL="0">
-              <a:buNone/>
-            </a:pPr>
-            <a:r>
-              <a:rPr lang="en-US" sz="900" dirty="0">
-                <a:solidFill>
-                  <a:srgbClr val="999999"/>
-                </a:solidFill>
-                <a:latin typeface="Noto Sans CJK KR" pitchFamily="34" charset="0"/>
-                <a:ea typeface="Noto Sans CJK KR" pitchFamily="34" charset="-122"/>
-                <a:cs typeface="Noto Sans CJK KR" pitchFamily="34" charset="-120"/>
-              </a:rPr>
-              <a:t>Slave 프레임 비트필드 (전송 순서: preamble → slot_id → payload → hamming)</a:t>
-            </a:r>
-            <a:endParaRPr lang="en-US" sz="900" dirty="0"/>
-          </a:p>
-        </p:txBody>
-      </p:sp>
-      <p:sp>
-        <p:nvSpPr>
-          <p:cNvPr id="6" name="Text 3"/>
-          <p:cNvSpPr/>
-          <p:nvPr/>
-        </p:nvSpPr>
-        <p:spPr>
-          <a:xfrm>
-            <a:off x="8503920" y="4754880"/>
-            <a:ext cx="457200" cy="274320"/>
-          </a:xfrm>
-          <a:prstGeom prst="rect">
-            <a:avLst/>
-          </a:prstGeom>
-          <a:noFill/>
-          <a:ln/>
-        </p:spPr>
-        <p:txBody>
-          <a:bodyPr wrap="square" rtlCol="0" anchor="ctr"/>
-          <a:lstStyle/>
-          <a:p>
-            <a:pPr algn="r" indent="0" marL="0">
-              <a:buNone/>
-            </a:pPr>
-            <a:r>
-              <a:rPr lang="en-US" sz="1200" dirty="0">
-                <a:solidFill>
-                  <a:srgbClr val="999999"/>
-                </a:solidFill>
-                <a:latin typeface="Noto Sans CJK KR" pitchFamily="34" charset="0"/>
-                <a:ea typeface="Noto Sans CJK KR" pitchFamily="34" charset="-122"/>
-                <a:cs typeface="Noto Sans CJK KR" pitchFamily="34" charset="-120"/>
-              </a:rPr>
-              <a:t>10</a:t>
-            </a:r>
-            <a:endParaRPr lang="en-US" sz="1200" dirty="0"/>
-          </a:p>
-        </p:txBody>
-      </p:sp>
-    </p:spTree>
-  </p:cSld>
-  <p:clrMapOvr>
-    <a:masterClrMapping/>
-  </p:clrMapOvr>
-</p:sld>
-</file>
-
-<file path=ppt/slides/slide11.xml><?xml version="1.0" encoding="utf-8"?>
-<p:sld xmlns:a="http://schemas.openxmlformats.org/drawingml/2006/main" xmlns:p="http://schemas.openxmlformats.org/presentationml/2006/main" xmlns:r="http://schemas.openxmlformats.org/officeDocument/2006/relationships">
-  <p:cSld>
-    <p:spTree>
-      <p:nvGrpSpPr>
-        <p:cNvPr id="1" name=""/>
-        <p:cNvGrpSpPr/>
-        <p:nvPr/>
-      </p:nvGrpSpPr>
-      <p:grpSpPr/>
-      <p:sp>
-        <p:nvSpPr>
-          <p:cNvPr id="2" name="Text 0"/>
-          <p:cNvSpPr/>
-          <p:nvPr/>
-        </p:nvSpPr>
-        <p:spPr>
-          <a:xfrm>
-            <a:off x="548640" y="274320"/>
-            <a:ext cx="8046720" cy="777240"/>
-          </a:xfrm>
-          <a:prstGeom prst="rect">
-            <a:avLst/>
-          </a:prstGeom>
-          <a:noFill/>
-          <a:ln/>
-        </p:spPr>
-        <p:txBody>
-          <a:bodyPr wrap="square" lIns="0" tIns="0" rIns="0" bIns="0" rtlCol="0" anchor="ctr"/>
-          <a:lstStyle/>
-          <a:p>
-            <a:pPr indent="0" marL="0">
-              <a:buNone/>
-            </a:pPr>
-            <a:r>
-              <a:rPr lang="en-US" sz="3600" b="1" dirty="0">
-                <a:solidFill>
-                  <a:srgbClr val="111111"/>
-                </a:solidFill>
-                <a:latin typeface="Noto Sans CJK KR" pitchFamily="34" charset="0"/>
-                <a:ea typeface="Noto Sans CJK KR" pitchFamily="34" charset="-122"/>
-                <a:cs typeface="Noto Sans CJK KR" pitchFamily="34" charset="-120"/>
-              </a:rPr>
-              <a:t>DLL - Master 프레임 구조</a:t>
-            </a:r>
-            <a:endParaRPr lang="en-US" sz="3600" dirty="0"/>
-          </a:p>
-        </p:txBody>
-      </p:sp>
-      <p:sp>
-        <p:nvSpPr>
-          <p:cNvPr id="3" name="Text 1"/>
-          <p:cNvSpPr/>
-          <p:nvPr/>
-        </p:nvSpPr>
-        <p:spPr>
-          <a:xfrm>
-            <a:off x="548640" y="1234440"/>
-            <a:ext cx="8046720" cy="2057400"/>
-          </a:xfrm>
-          <a:prstGeom prst="rect">
-            <a:avLst/>
-          </a:prstGeom>
-          <a:noFill/>
-          <a:ln/>
-        </p:spPr>
-        <p:txBody>
-          <a:bodyPr wrap="square" rtlCol="0" anchor="t"/>
-          <a:lstStyle/>
-          <a:p>
-            <a:pPr marL="342900" indent="-342900">
-              <a:spcAft>
-                <a:spcPts val="800"/>
-              </a:spcAft>
-              <a:buSzPct val="100000"/>
-              <a:buChar char="•"/>
-            </a:pPr>
-            <a:r>
-              <a:rPr lang="en-US" sz="1900" dirty="0">
-                <a:solidFill>
-                  <a:srgbClr val="222222"/>
-                </a:solidFill>
-                <a:latin typeface="Noto Sans CJK KR" pitchFamily="34" charset="0"/>
-                <a:ea typeface="Noto Sans CJK KR" pitchFamily="34" charset="-122"/>
-                <a:cs typeface="Noto Sans CJK KR" pitchFamily="34" charset="-120"/>
-              </a:rPr>
-              <a:t>필드 구성</a:t>
-            </a:r>
-            <a:endParaRPr lang="en-US" sz="1900" dirty="0"/>
-          </a:p>
-          <a:p>
-            <a:pPr lvl="1" marL="685800" indent="-342900">
-              <a:spcAft>
-                <a:spcPts val="600"/>
-              </a:spcAft>
-              <a:buSzPct val="100000"/>
-              <a:buChar char="•"/>
-            </a:pPr>
-            <a:r>
-              <a:rPr lang="en-US" sz="1600" dirty="0">
-                <a:solidFill>
-                  <a:srgbClr val="444444"/>
-                </a:solidFill>
-                <a:latin typeface="Noto Sans CJK KR" pitchFamily="34" charset="0"/>
-                <a:ea typeface="Noto Sans CJK KR" pitchFamily="34" charset="-122"/>
-                <a:cs typeface="Noto Sans CJK KR" pitchFamily="34" charset="-120"/>
-              </a:rPr>
-              <a:t>preamble(8) + halt_cmd(8) + guard_ticks(10) + reserved(17) + hamming parity(7)</a:t>
-            </a:r>
-            <a:endParaRPr lang="en-US" sz="1900" dirty="0"/>
-          </a:p>
-          <a:p>
-            <a:pPr marL="342900" indent="-342900">
-              <a:spcAft>
-                <a:spcPts val="800"/>
-              </a:spcAft>
-              <a:buSzPct val="100000"/>
-              <a:buChar char="•"/>
-            </a:pPr>
-            <a:r>
-              <a:rPr lang="en-US" sz="1900" dirty="0">
-                <a:solidFill>
-                  <a:srgbClr val="222222"/>
-                </a:solidFill>
-                <a:latin typeface="Noto Sans CJK KR" pitchFamily="34" charset="0"/>
-                <a:ea typeface="Noto Sans CJK KR" pitchFamily="34" charset="-122"/>
-                <a:cs typeface="Noto Sans CJK KR" pitchFamily="34" charset="-120"/>
-              </a:rPr>
-              <a:t>halt_cmd</a:t>
-            </a:r>
-            <a:endParaRPr lang="en-US" sz="1900" dirty="0"/>
-          </a:p>
-          <a:p>
-            <a:pPr lvl="1" marL="685800" indent="-342900">
-              <a:spcAft>
-                <a:spcPts val="600"/>
-              </a:spcAft>
-              <a:buSzPct val="100000"/>
-              <a:buChar char="•"/>
-            </a:pPr>
-            <a:r>
-              <a:rPr lang="en-US" sz="1600" dirty="0">
-                <a:solidFill>
-                  <a:srgbClr val="444444"/>
-                </a:solidFill>
-                <a:latin typeface="Noto Sans CJK KR" pitchFamily="34" charset="0"/>
-                <a:ea typeface="Noto Sans CJK KR" pitchFamily="34" charset="-122"/>
-                <a:cs typeface="Noto Sans CJK KR" pitchFamily="34" charset="-120"/>
-              </a:rPr>
-              <a:t>Slave별 1비트 마스크 — err_cnt가 임계치(FAULT_TH) 초과 시 해당 비트 set, 고장 Slave 중단 명령</a:t>
-            </a:r>
-            <a:endParaRPr lang="en-US" sz="1900" dirty="0"/>
-          </a:p>
-          <a:p>
-            <a:pPr marL="342900" indent="-342900">
-              <a:spcAft>
-                <a:spcPts val="800"/>
-              </a:spcAft>
-              <a:buSzPct val="100000"/>
-              <a:buChar char="•"/>
-            </a:pPr>
-            <a:r>
-              <a:rPr lang="en-US" sz="1900" dirty="0">
-                <a:solidFill>
-                  <a:srgbClr val="222222"/>
-                </a:solidFill>
-                <a:latin typeface="Noto Sans CJK KR" pitchFamily="34" charset="0"/>
-                <a:ea typeface="Noto Sans CJK KR" pitchFamily="34" charset="-122"/>
-                <a:cs typeface="Noto Sans CJK KR" pitchFamily="34" charset="-120"/>
-              </a:rPr>
-              <a:t>에러 검출/정정</a:t>
-            </a:r>
-            <a:endParaRPr lang="en-US" sz="1900" dirty="0"/>
-          </a:p>
-          <a:p>
-            <a:pPr lvl="1" marL="685800" indent="-342900">
-              <a:buSzPct val="100000"/>
-              <a:buChar char="•"/>
-            </a:pPr>
-            <a:r>
-              <a:rPr lang="en-US" sz="1600" dirty="0">
-                <a:solidFill>
-                  <a:srgbClr val="444444"/>
-                </a:solidFill>
-                <a:latin typeface="Noto Sans CJK KR" pitchFamily="34" charset="0"/>
-                <a:ea typeface="Noto Sans CJK KR" pitchFamily="34" charset="-122"/>
-                <a:cs typeface="Noto Sans CJK KR" pitchFamily="34" charset="-120"/>
-              </a:rPr>
-              <a:t>Slave 프레임과 동일한 SEC-DED 방식 적용</a:t>
-            </a:r>
-            <a:endParaRPr lang="en-US" sz="1900" dirty="0"/>
-          </a:p>
-        </p:txBody>
-      </p:sp>
-      <p:pic>
-        <p:nvPicPr>
-          <p:cNvPr id="4" name="Image 0" descr="/home/user/SoC_Design_and_Programming/diagrams/master_frame.png">    </p:cNvPr>
-          <p:cNvPicPr>
-            <a:picLocks noChangeAspect="1"/>
-          </p:cNvPicPr>
-          <p:nvPr/>
-        </p:nvPicPr>
-        <p:blipFill>
-          <a:blip r:embed="rId2"/>
-          <a:srcRect l="0" r="0" t="0" b="0"/>
-          <a:stretch/>
-        </p:blipFill>
-        <p:spPr>
-          <a:xfrm>
-            <a:off x="548640" y="3383280"/>
-            <a:ext cx="8046720" cy="563270"/>
-          </a:xfrm>
-          <a:prstGeom prst="rect">
-            <a:avLst/>
-          </a:prstGeom>
-        </p:spPr>
-      </p:pic>
-      <p:sp>
-        <p:nvSpPr>
-          <p:cNvPr id="5" name="Text 2"/>
-          <p:cNvSpPr/>
-          <p:nvPr/>
-        </p:nvSpPr>
-        <p:spPr>
-          <a:xfrm>
-            <a:off x="548640" y="4037990"/>
-            <a:ext cx="8046720" cy="228600"/>
-          </a:xfrm>
-          <a:prstGeom prst="rect">
-            <a:avLst/>
-          </a:prstGeom>
-          <a:noFill/>
-          <a:ln/>
-        </p:spPr>
-        <p:txBody>
-          <a:bodyPr wrap="square" rtlCol="0" anchor="ctr"/>
-          <a:lstStyle/>
-          <a:p>
-            <a:pPr algn="ctr" indent="0" marL="0">
-              <a:buNone/>
-            </a:pPr>
-            <a:r>
-              <a:rPr lang="en-US" sz="900" dirty="0">
-                <a:solidFill>
-                  <a:srgbClr val="999999"/>
-                </a:solidFill>
-                <a:latin typeface="Noto Sans CJK KR" pitchFamily="34" charset="0"/>
-                <a:ea typeface="Noto Sans CJK KR" pitchFamily="34" charset="-122"/>
-                <a:cs typeface="Noto Sans CJK KR" pitchFamily="34" charset="-120"/>
-              </a:rPr>
-              <a:t>Master 프레임 비트필드 (전송 순서: preamble → halt_cmd → guard_ticks → reserved → hamming)</a:t>
-            </a:r>
-            <a:endParaRPr lang="en-US" sz="900" dirty="0"/>
-          </a:p>
-        </p:txBody>
-      </p:sp>
-      <p:sp>
-        <p:nvSpPr>
-          <p:cNvPr id="6" name="Text 3"/>
-          <p:cNvSpPr/>
-          <p:nvPr/>
-        </p:nvSpPr>
-        <p:spPr>
-          <a:xfrm>
-            <a:off x="8503920" y="4754880"/>
-            <a:ext cx="457200" cy="274320"/>
-          </a:xfrm>
-          <a:prstGeom prst="rect">
-            <a:avLst/>
-          </a:prstGeom>
-          <a:noFill/>
-          <a:ln/>
-        </p:spPr>
-        <p:txBody>
-          <a:bodyPr wrap="square" rtlCol="0" anchor="ctr"/>
-          <a:lstStyle/>
-          <a:p>
-            <a:pPr algn="r" indent="0" marL="0">
-              <a:buNone/>
-            </a:pPr>
-            <a:r>
-              <a:rPr lang="en-US" sz="1200" dirty="0">
-                <a:solidFill>
-                  <a:srgbClr val="999999"/>
-                </a:solidFill>
-                <a:latin typeface="Noto Sans CJK KR" pitchFamily="34" charset="0"/>
-                <a:ea typeface="Noto Sans CJK KR" pitchFamily="34" charset="-122"/>
-                <a:cs typeface="Noto Sans CJK KR" pitchFamily="34" charset="-120"/>
-              </a:rPr>
-              <a:t>11</a:t>
-            </a:r>
-            <a:endParaRPr lang="en-US" sz="1200" dirty="0"/>
-          </a:p>
-        </p:txBody>
-      </p:sp>
-    </p:spTree>
-  </p:cSld>
-  <p:clrMapOvr>
-    <a:masterClrMapping/>
-  </p:clrMapOvr>
-</p:sld>
-</file>
-
-<file path=ppt/slides/slide12.xml><?xml version="1.0" encoding="utf-8"?>
-<p:sld xmlns:a="http://schemas.openxmlformats.org/drawingml/2006/main" xmlns:p="http://schemas.openxmlformats.org/presentationml/2006/main" xmlns:r="http://schemas.openxmlformats.org/officeDocument/2006/relationships">
-  <p:cSld>
-    <p:spTree>
-      <p:nvGrpSpPr>
-        <p:cNvPr id="1" name=""/>
-        <p:cNvGrpSpPr/>
-        <p:nvPr/>
-      </p:nvGrpSpPr>
-      <p:grpSpPr/>
-      <p:sp>
-        <p:nvSpPr>
-          <p:cNvPr id="2" name="Text 0"/>
-          <p:cNvSpPr/>
-          <p:nvPr/>
-        </p:nvSpPr>
-        <p:spPr>
-          <a:xfrm>
-            <a:off x="548640" y="274320"/>
-            <a:ext cx="8046720" cy="777240"/>
-          </a:xfrm>
-          <a:prstGeom prst="rect">
-            <a:avLst/>
-          </a:prstGeom>
-          <a:noFill/>
-          <a:ln/>
-        </p:spPr>
-        <p:txBody>
-          <a:bodyPr wrap="square" lIns="0" tIns="0" rIns="0" bIns="0" rtlCol="0" anchor="ctr"/>
-          <a:lstStyle/>
-          <a:p>
-            <a:pPr indent="0" marL="0">
-              <a:buNone/>
-            </a:pPr>
-            <a:r>
-              <a:rPr lang="en-US" sz="3600" b="1" dirty="0">
-                <a:solidFill>
-                  <a:srgbClr val="111111"/>
-                </a:solidFill>
-                <a:latin typeface="Noto Sans CJK KR" pitchFamily="34" charset="0"/>
-                <a:ea typeface="Noto Sans CJK KR" pitchFamily="34" charset="-122"/>
-                <a:cs typeface="Noto Sans CJK KR" pitchFamily="34" charset="-120"/>
-              </a:rPr>
-              <a:t>DLL - MAC: 동기화와 타임슬롯</a:t>
-            </a:r>
-            <a:endParaRPr lang="en-US" sz="3600" dirty="0"/>
-          </a:p>
-        </p:txBody>
-      </p:sp>
-      <p:sp>
-        <p:nvSpPr>
-          <p:cNvPr id="3" name="Text 1"/>
-          <p:cNvSpPr/>
-          <p:nvPr/>
-        </p:nvSpPr>
-        <p:spPr>
-          <a:xfrm>
-            <a:off x="548640" y="1234440"/>
-            <a:ext cx="8046720" cy="1371600"/>
-          </a:xfrm>
-          <a:prstGeom prst="rect">
-            <a:avLst/>
-          </a:prstGeom>
-          <a:noFill/>
-          <a:ln/>
-        </p:spPr>
-        <p:txBody>
-          <a:bodyPr wrap="square" rtlCol="0" anchor="t"/>
-          <a:lstStyle/>
-          <a:p>
-            <a:pPr marL="342900" indent="-342900">
-              <a:spcAft>
-                <a:spcPts val="600"/>
-              </a:spcAft>
-              <a:buSzPct val="100000"/>
-              <a:buChar char="•"/>
-            </a:pPr>
-            <a:r>
-              <a:rPr lang="en-US" sz="1800" dirty="0">
-                <a:solidFill>
-                  <a:srgbClr val="222222"/>
-                </a:solidFill>
-                <a:latin typeface="Noto Sans CJK KR" pitchFamily="34" charset="0"/>
-                <a:ea typeface="Noto Sans CJK KR" pitchFamily="34" charset="-122"/>
-                <a:cs typeface="Noto Sans CJK KR" pitchFamily="34" charset="-120"/>
-              </a:rPr>
-              <a:t>Sync 기준점</a:t>
-            </a:r>
-            <a:endParaRPr lang="en-US" sz="1800" dirty="0"/>
-          </a:p>
-          <a:p>
-            <a:pPr lvl="1" marL="685800" indent="-342900">
-              <a:spcAft>
-                <a:spcPts val="400"/>
-              </a:spcAft>
-              <a:buSzPct val="100000"/>
-              <a:buChar char="•"/>
-            </a:pPr>
-            <a:r>
-              <a:rPr lang="en-US" sz="1500" dirty="0">
-                <a:solidFill>
-                  <a:srgbClr val="444444"/>
-                </a:solidFill>
-                <a:latin typeface="Noto Sans CJK KR" pitchFamily="34" charset="0"/>
-                <a:ea typeface="Noto Sans CJK KR" pitchFamily="34" charset="-122"/>
-                <a:cs typeface="Noto Sans CJK KR" pitchFamily="34" charset="-120"/>
-              </a:rPr>
-              <a:t>Master가 매 사이클 마지막 슬롯에서 전송한 sync를 다음 사이클 슬롯 계산 기준점으로 사용</a:t>
-            </a:r>
-            <a:endParaRPr lang="en-US" sz="1800" dirty="0"/>
-          </a:p>
-          <a:p>
-            <a:pPr marL="342900" indent="-342900">
-              <a:spcAft>
-                <a:spcPts val="600"/>
-              </a:spcAft>
-              <a:buSzPct val="100000"/>
-              <a:buChar char="•"/>
-            </a:pPr>
-            <a:r>
-              <a:rPr lang="en-US" sz="1800" dirty="0">
-                <a:solidFill>
-                  <a:srgbClr val="222222"/>
-                </a:solidFill>
-                <a:latin typeface="Noto Sans CJK KR" pitchFamily="34" charset="0"/>
-                <a:ea typeface="Noto Sans CJK KR" pitchFamily="34" charset="-122"/>
-                <a:cs typeface="Noto Sans CJK KR" pitchFamily="34" charset="-120"/>
-              </a:rPr>
-              <a:t>슬롯 내부 구조</a:t>
-            </a:r>
-            <a:endParaRPr lang="en-US" sz="1800" dirty="0"/>
-          </a:p>
-          <a:p>
-            <a:pPr lvl="1" marL="685800" indent="-342900">
-              <a:spcAft>
-                <a:spcPts val="400"/>
-              </a:spcAft>
-              <a:buSzPct val="100000"/>
-              <a:buChar char="•"/>
-            </a:pPr>
-            <a:r>
-              <a:rPr lang="en-US" sz="1500" dirty="0">
-                <a:solidFill>
-                  <a:srgbClr val="444444"/>
-                </a:solidFill>
-                <a:latin typeface="Noto Sans CJK KR" pitchFamily="34" charset="0"/>
-                <a:ea typeface="Noto Sans CJK KR" pitchFamily="34" charset="-122"/>
-                <a:cs typeface="Noto Sans CJK KR" pitchFamily="34" charset="-120"/>
-              </a:rPr>
-              <a:t>½ guard tick 대기 → 데이터 전송 → ½ guard tick 대기</a:t>
-            </a:r>
-            <a:endParaRPr lang="en-US" sz="1800" dirty="0"/>
-          </a:p>
-          <a:p>
-            <a:pPr marL="342900" indent="-342900">
-              <a:spcAft>
-                <a:spcPts val="600"/>
-              </a:spcAft>
-              <a:buSzPct val="100000"/>
-              <a:buChar char="•"/>
-            </a:pPr>
-            <a:r>
-              <a:rPr lang="en-US" sz="1800" dirty="0">
-                <a:solidFill>
-                  <a:srgbClr val="222222"/>
-                </a:solidFill>
-                <a:latin typeface="Noto Sans CJK KR" pitchFamily="34" charset="0"/>
-                <a:ea typeface="Noto Sans CJK KR" pitchFamily="34" charset="-122"/>
-                <a:cs typeface="Noto Sans CJK KR" pitchFamily="34" charset="-120"/>
-              </a:rPr>
-              <a:t>Guard Tick의 역할</a:t>
-            </a:r>
-            <a:endParaRPr lang="en-US" sz="1800" dirty="0"/>
-          </a:p>
-          <a:p>
-            <a:pPr lvl="1" marL="685800" indent="-342900">
-              <a:buSzPct val="100000"/>
-              <a:buChar char="•"/>
-            </a:pPr>
-            <a:r>
-              <a:rPr lang="en-US" sz="1500" dirty="0">
-                <a:solidFill>
-                  <a:srgbClr val="444444"/>
-                </a:solidFill>
-                <a:latin typeface="Noto Sans CJK KR" pitchFamily="34" charset="0"/>
-                <a:ea typeface="Noto Sans CJK KR" pitchFamily="34" charset="-122"/>
-                <a:cs typeface="Noto Sans CJK KR" pitchFamily="34" charset="-120"/>
-              </a:rPr>
-              <a:t>인접 슬롯의 절반씩이 경계에서 맞물려 슬롯 침범 방지</a:t>
-            </a:r>
-            <a:endParaRPr lang="en-US" sz="1800" dirty="0"/>
-          </a:p>
-        </p:txBody>
-      </p:sp>
-      <p:pic>
-        <p:nvPicPr>
-          <p:cNvPr id="4" name="Image 0" descr="/home/user/SoC_Design_and_Programming/diagrams/slot_timeline.png">    </p:cNvPr>
-          <p:cNvPicPr>
-            <a:picLocks noChangeAspect="1"/>
-          </p:cNvPicPr>
-          <p:nvPr/>
-        </p:nvPicPr>
-        <p:blipFill>
-          <a:blip r:embed="rId2"/>
-          <a:srcRect l="0" r="0" t="0" b="0"/>
-          <a:stretch/>
-        </p:blipFill>
-        <p:spPr>
-          <a:xfrm>
-            <a:off x="1371600" y="2743200"/>
-            <a:ext cx="6400800" cy="2081893"/>
-          </a:xfrm>
-          <a:prstGeom prst="rect">
-            <a:avLst/>
-          </a:prstGeom>
-        </p:spPr>
-      </p:pic>
-      <p:sp>
-        <p:nvSpPr>
-          <p:cNvPr id="5" name="Text 2"/>
-          <p:cNvSpPr/>
-          <p:nvPr/>
-        </p:nvSpPr>
-        <p:spPr>
-          <a:xfrm>
-            <a:off x="1371600" y="4916533"/>
-            <a:ext cx="6400800" cy="228600"/>
-          </a:xfrm>
-          <a:prstGeom prst="rect">
-            <a:avLst/>
-          </a:prstGeom>
-          <a:noFill/>
-          <a:ln/>
-        </p:spPr>
-        <p:txBody>
-          <a:bodyPr wrap="square" rtlCol="0" anchor="ctr"/>
-          <a:lstStyle/>
-          <a:p>
-            <a:pPr algn="ctr" indent="0" marL="0">
-              <a:buNone/>
-            </a:pPr>
-            <a:r>
-              <a:rPr lang="en-US" sz="900" dirty="0">
-                <a:solidFill>
-                  <a:srgbClr val="999999"/>
-                </a:solidFill>
-                <a:latin typeface="Noto Sans CJK KR" pitchFamily="34" charset="0"/>
-                <a:ea typeface="Noto Sans CJK KR" pitchFamily="34" charset="-122"/>
-                <a:cs typeface="Noto Sans CJK KR" pitchFamily="34" charset="-120"/>
-              </a:rPr>
-              <a:t>Sync → [½G · 데이터 · ½G] × (Slot 0...N) → Sync</a:t>
-            </a:r>
-            <a:endParaRPr lang="en-US" sz="900" dirty="0"/>
-          </a:p>
-        </p:txBody>
-      </p:sp>
-      <p:sp>
-        <p:nvSpPr>
-          <p:cNvPr id="6" name="Text 3"/>
-          <p:cNvSpPr/>
-          <p:nvPr/>
-        </p:nvSpPr>
-        <p:spPr>
-          <a:xfrm>
-            <a:off x="8503920" y="4754880"/>
-            <a:ext cx="457200" cy="274320"/>
-          </a:xfrm>
-          <a:prstGeom prst="rect">
-            <a:avLst/>
-          </a:prstGeom>
-          <a:noFill/>
-          <a:ln/>
-        </p:spPr>
-        <p:txBody>
-          <a:bodyPr wrap="square" rtlCol="0" anchor="ctr"/>
-          <a:lstStyle/>
-          <a:p>
-            <a:pPr algn="r" indent="0" marL="0">
-              <a:buNone/>
-            </a:pPr>
-            <a:r>
-              <a:rPr lang="en-US" sz="1200" dirty="0">
-                <a:solidFill>
-                  <a:srgbClr val="999999"/>
-                </a:solidFill>
-                <a:latin typeface="Noto Sans CJK KR" pitchFamily="34" charset="0"/>
-                <a:ea typeface="Noto Sans CJK KR" pitchFamily="34" charset="-122"/>
-                <a:cs typeface="Noto Sans CJK KR" pitchFamily="34" charset="-120"/>
-              </a:rPr>
-              <a:t>12</a:t>
-            </a:r>
-            <a:endParaRPr lang="en-US" sz="1200" dirty="0"/>
-          </a:p>
-        </p:txBody>
-      </p:sp>
-    </p:spTree>
-  </p:cSld>
-  <p:clrMapOvr>
-    <a:masterClrMapping/>
-  </p:clrMapOvr>
-</p:sld>
-</file>
-
-<file path=ppt/slides/slide13.xml><?xml version="1.0" encoding="utf-8"?>
-<p:sld xmlns:a="http://schemas.openxmlformats.org/drawingml/2006/main" xmlns:p="http://schemas.openxmlformats.org/presentationml/2006/main" xmlns:r="http://schemas.openxmlformats.org/officeDocument/2006/relationships">
-  <p:cSld>
-    <p:spTree>
-      <p:nvGrpSpPr>
-        <p:cNvPr id="1" name=""/>
-        <p:cNvGrpSpPr/>
-        <p:nvPr/>
-      </p:nvGrpSpPr>
-      <p:grpSpPr/>
-      <p:sp>
-        <p:nvSpPr>
-          <p:cNvPr id="2" name="Text 0"/>
-          <p:cNvSpPr/>
-          <p:nvPr/>
-        </p:nvSpPr>
-        <p:spPr>
-          <a:xfrm>
-            <a:off x="548640" y="274320"/>
-            <a:ext cx="8046720" cy="777240"/>
-          </a:xfrm>
-          <a:prstGeom prst="rect">
-            <a:avLst/>
-          </a:prstGeom>
-          <a:noFill/>
-          <a:ln/>
-        </p:spPr>
-        <p:txBody>
-          <a:bodyPr wrap="square" lIns="0" tIns="0" rIns="0" bIns="0" rtlCol="0" anchor="ctr"/>
-          <a:lstStyle/>
-          <a:p>
-            <a:pPr indent="0" marL="0">
-              <a:buNone/>
-            </a:pPr>
-            <a:r>
-              <a:rPr lang="en-US" sz="3600" b="1" dirty="0">
-                <a:solidFill>
-                  <a:srgbClr val="111111"/>
-                </a:solidFill>
-                <a:latin typeface="Noto Sans CJK KR" pitchFamily="34" charset="0"/>
-                <a:ea typeface="Noto Sans CJK KR" pitchFamily="34" charset="-122"/>
-                <a:cs typeface="Noto Sans CJK KR" pitchFamily="34" charset="-120"/>
-              </a:rPr>
-              <a:t>DLL - 클럭 동기</a:t>
-            </a:r>
-            <a:endParaRPr lang="en-US" sz="3600" dirty="0"/>
-          </a:p>
-        </p:txBody>
-      </p:sp>
-      <p:sp>
-        <p:nvSpPr>
-          <p:cNvPr id="3" name="Text 1"/>
-          <p:cNvSpPr/>
-          <p:nvPr/>
-        </p:nvSpPr>
-        <p:spPr>
-          <a:xfrm>
-            <a:off x="548640" y="1234440"/>
-            <a:ext cx="8046720" cy="2971800"/>
-          </a:xfrm>
-          <a:prstGeom prst="rect">
-            <a:avLst/>
-          </a:prstGeom>
-          <a:noFill/>
-          <a:ln/>
-        </p:spPr>
-        <p:txBody>
-          <a:bodyPr wrap="square" rtlCol="0" anchor="t"/>
-          <a:lstStyle/>
-          <a:p>
-            <a:pPr marL="342900" indent="-342900">
-              <a:spcAft>
-                <a:spcPts val="1200"/>
-              </a:spcAft>
-              <a:buSzPct val="100000"/>
-              <a:buChar char="•"/>
-            </a:pPr>
-            <a:r>
-              <a:rPr lang="en-US" sz="2000" dirty="0">
-                <a:solidFill>
-                  <a:srgbClr val="222222"/>
-                </a:solidFill>
-                <a:latin typeface="Noto Sans CJK KR" pitchFamily="34" charset="0"/>
-                <a:ea typeface="Noto Sans CJK KR" pitchFamily="34" charset="-122"/>
-                <a:cs typeface="Noto Sans CJK KR" pitchFamily="34" charset="-120"/>
-              </a:rPr>
-              <a:t>Master·Slave는 클럭을 공유하지 않음</a:t>
-            </a:r>
-            <a:endParaRPr lang="en-US" sz="2000" dirty="0"/>
-          </a:p>
-          <a:p>
-            <a:pPr lvl="1" marL="685800" indent="-342900">
-              <a:spcAft>
-                <a:spcPts val="800"/>
-              </a:spcAft>
-              <a:buSzPct val="100000"/>
-              <a:buChar char="•"/>
-            </a:pPr>
-            <a:r>
-              <a:rPr lang="en-US" sz="1700" dirty="0">
-                <a:solidFill>
-                  <a:srgbClr val="444444"/>
-                </a:solidFill>
-                <a:latin typeface="Noto Sans CJK KR" pitchFamily="34" charset="0"/>
-                <a:ea typeface="Noto Sans CJK KR" pitchFamily="34" charset="-122"/>
-                <a:cs typeface="Noto Sans CJK KR" pitchFamily="34" charset="-120"/>
-              </a:rPr>
-              <a:t>클럭 오차가 통신에 치명적인 방해 요인 — guard tick만으로는 누적 오차를 막을 수 없음</a:t>
-            </a:r>
-            <a:endParaRPr lang="en-US" sz="2000" dirty="0"/>
-          </a:p>
-          <a:p>
-            <a:pPr marL="342900" indent="-342900">
-              <a:spcAft>
-                <a:spcPts val="1200"/>
-              </a:spcAft>
-              <a:buSzPct val="100000"/>
-              <a:buChar char="•"/>
-            </a:pPr>
-            <a:r>
-              <a:rPr lang="en-US" sz="2000" dirty="0">
-                <a:solidFill>
-                  <a:srgbClr val="222222"/>
-                </a:solidFill>
-                <a:latin typeface="Noto Sans CJK KR" pitchFamily="34" charset="0"/>
-                <a:ea typeface="Noto Sans CJK KR" pitchFamily="34" charset="-122"/>
-                <a:cs typeface="Noto Sans CJK KR" pitchFamily="34" charset="-120"/>
-              </a:rPr>
-              <a:t>분주 클럭으로 동일 타이밍 가정</a:t>
-            </a:r>
-            <a:endParaRPr lang="en-US" sz="2000" dirty="0"/>
-          </a:p>
-          <a:p>
-            <a:pPr lvl="1" marL="685800" indent="-342900">
-              <a:spcAft>
-                <a:spcPts val="800"/>
-              </a:spcAft>
-              <a:buSzPct val="100000"/>
-              <a:buChar char="•"/>
-            </a:pPr>
-            <a:r>
-              <a:rPr lang="en-US" sz="1700" dirty="0">
-                <a:solidFill>
-                  <a:srgbClr val="444444"/>
-                </a:solidFill>
-                <a:latin typeface="Noto Sans CJK KR" pitchFamily="34" charset="0"/>
-                <a:ea typeface="Noto Sans CJK KR" pitchFamily="34" charset="-122"/>
-                <a:cs typeface="Noto Sans CJK KR" pitchFamily="34" charset="-120"/>
-              </a:rPr>
-              <a:t>DIV 값을 AXI 레지스터로 설정, Master·Slave 양쪽에 동일한 DIV 값을 쓴다고 가정 — 분주 클럭은 메인 클럭 / (DIV + 1)</a:t>
-            </a:r>
-            <a:endParaRPr lang="en-US" sz="2000" dirty="0"/>
-          </a:p>
-          <a:p>
-            <a:pPr marL="342900" indent="-342900">
-              <a:spcAft>
-                <a:spcPts val="1200"/>
-              </a:spcAft>
-              <a:buSzPct val="100000"/>
-              <a:buChar char="•"/>
-            </a:pPr>
-            <a:r>
-              <a:rPr lang="en-US" sz="2000" dirty="0">
-                <a:solidFill>
-                  <a:srgbClr val="222222"/>
-                </a:solidFill>
-                <a:latin typeface="Noto Sans CJK KR" pitchFamily="34" charset="0"/>
-                <a:ea typeface="Noto Sans CJK KR" pitchFamily="34" charset="-122"/>
-                <a:cs typeface="Noto Sans CJK KR" pitchFamily="34" charset="-120"/>
-              </a:rPr>
-              <a:t>샘플링 방식</a:t>
-            </a:r>
-            <a:endParaRPr lang="en-US" sz="2000" dirty="0"/>
-          </a:p>
-          <a:p>
-            <a:pPr lvl="1" marL="685800" indent="-342900">
-              <a:buSzPct val="100000"/>
-              <a:buChar char="•"/>
-            </a:pPr>
-            <a:r>
-              <a:rPr lang="en-US" sz="1700" dirty="0">
-                <a:solidFill>
-                  <a:srgbClr val="444444"/>
-                </a:solidFill>
-                <a:latin typeface="Noto Sans CJK KR" pitchFamily="34" charset="0"/>
-                <a:ea typeface="Noto Sans CJK KR" pitchFamily="34" charset="-122"/>
-                <a:cs typeface="Noto Sans CJK KR" pitchFamily="34" charset="-120"/>
-              </a:rPr>
-              <a:t>수신 샘플링은 비트 구간의 중간 지점에서 1회만 수행</a:t>
-            </a:r>
-            <a:endParaRPr lang="en-US" sz="2000" dirty="0"/>
-          </a:p>
-        </p:txBody>
-      </p:sp>
-      <p:sp>
-        <p:nvSpPr>
-          <p:cNvPr id="4" name="Text 2"/>
-          <p:cNvSpPr/>
-          <p:nvPr/>
-        </p:nvSpPr>
-        <p:spPr>
-          <a:xfrm>
-            <a:off x="8503920" y="4754880"/>
-            <a:ext cx="457200" cy="274320"/>
-          </a:xfrm>
-          <a:prstGeom prst="rect">
-            <a:avLst/>
-          </a:prstGeom>
-          <a:noFill/>
-          <a:ln/>
-        </p:spPr>
-        <p:txBody>
-          <a:bodyPr wrap="square" rtlCol="0" anchor="ctr"/>
-          <a:lstStyle/>
-          <a:p>
-            <a:pPr algn="r" indent="0" marL="0">
-              <a:buNone/>
-            </a:pPr>
-            <a:r>
-              <a:rPr lang="en-US" sz="1200" dirty="0">
-                <a:solidFill>
-                  <a:srgbClr val="999999"/>
-                </a:solidFill>
-                <a:latin typeface="Noto Sans CJK KR" pitchFamily="34" charset="0"/>
-                <a:ea typeface="Noto Sans CJK KR" pitchFamily="34" charset="-122"/>
-                <a:cs typeface="Noto Sans CJK KR" pitchFamily="34" charset="-120"/>
-              </a:rPr>
-              <a:t>13</a:t>
-            </a:r>
-            <a:endParaRPr lang="en-US" sz="1200" dirty="0"/>
-          </a:p>
-        </p:txBody>
-      </p:sp>
-    </p:spTree>
-  </p:cSld>
-  <p:clrMapOvr>
-    <a:masterClrMapping/>
-  </p:clrMapOvr>
-</p:sld>
-</file>
-
-<file path=ppt/slides/slide14.xml><?xml version="1.0" encoding="utf-8"?>
-<p:sld xmlns:a="http://schemas.openxmlformats.org/drawingml/2006/main" xmlns:p="http://schemas.openxmlformats.org/presentationml/2006/main" xmlns:r="http://schemas.openxmlformats.org/officeDocument/2006/relationships">
-  <p:cSld>
-    <p:spTree>
-      <p:nvGrpSpPr>
-        <p:cNvPr id="1" name=""/>
-        <p:cNvGrpSpPr/>
-        <p:nvPr/>
-      </p:nvGrpSpPr>
-      <p:grpSpPr/>
-      <p:sp>
-        <p:nvSpPr>
-          <p:cNvPr id="2" name="Text 0"/>
-          <p:cNvSpPr/>
-          <p:nvPr/>
-        </p:nvSpPr>
-        <p:spPr>
-          <a:xfrm>
-            <a:off x="548640" y="274320"/>
-            <a:ext cx="8046720" cy="777240"/>
-          </a:xfrm>
-          <a:prstGeom prst="rect">
-            <a:avLst/>
-          </a:prstGeom>
-          <a:noFill/>
-          <a:ln/>
-        </p:spPr>
-        <p:txBody>
-          <a:bodyPr wrap="square" lIns="0" tIns="0" rIns="0" bIns="0" rtlCol="0" anchor="ctr"/>
-          <a:lstStyle/>
-          <a:p>
-            <a:pPr indent="0" marL="0">
-              <a:buNone/>
-            </a:pPr>
-            <a:r>
-              <a:rPr lang="en-US" sz="3600" b="1" dirty="0">
-                <a:solidFill>
-                  <a:srgbClr val="111111"/>
-                </a:solidFill>
-                <a:latin typeface="Noto Sans CJK KR" pitchFamily="34" charset="0"/>
-                <a:ea typeface="Noto Sans CJK KR" pitchFamily="34" charset="-122"/>
-                <a:cs typeface="Noto Sans CJK KR" pitchFamily="34" charset="-120"/>
-              </a:rPr>
-              <a:t>DLL - Flow Control</a:t>
-            </a:r>
-            <a:endParaRPr lang="en-US" sz="3600" dirty="0"/>
-          </a:p>
-        </p:txBody>
-      </p:sp>
-      <p:sp>
-        <p:nvSpPr>
-          <p:cNvPr id="3" name="Text 1"/>
-          <p:cNvSpPr/>
-          <p:nvPr/>
-        </p:nvSpPr>
-        <p:spPr>
-          <a:xfrm>
-            <a:off x="548640" y="1234440"/>
-            <a:ext cx="4023360" cy="2971800"/>
-          </a:xfrm>
-          <a:prstGeom prst="rect">
-            <a:avLst/>
-          </a:prstGeom>
-          <a:noFill/>
-          <a:ln/>
-        </p:spPr>
-        <p:txBody>
-          <a:bodyPr wrap="square" rtlCol="0" anchor="t"/>
-          <a:lstStyle/>
-          <a:p>
-            <a:pPr marL="342900" indent="-342900">
-              <a:spcAft>
-                <a:spcPts val="1200"/>
-              </a:spcAft>
-              <a:buSzPct val="100000"/>
-              <a:buChar char="•"/>
-            </a:pPr>
-            <a:r>
-              <a:rPr lang="en-US" sz="2000" dirty="0">
-                <a:solidFill>
-                  <a:srgbClr val="222222"/>
-                </a:solidFill>
-                <a:latin typeface="Noto Sans CJK KR" pitchFamily="34" charset="0"/>
-                <a:ea typeface="Noto Sans CJK KR" pitchFamily="34" charset="-122"/>
-                <a:cs typeface="Noto Sans CJK KR" pitchFamily="34" charset="-120"/>
-              </a:rPr>
-              <a:t>1비트 에러</a:t>
-            </a:r>
-            <a:endParaRPr lang="en-US" sz="2000" dirty="0"/>
-          </a:p>
-          <a:p>
-            <a:pPr lvl="1" marL="685800" indent="-342900">
-              <a:spcAft>
-                <a:spcPts val="800"/>
-              </a:spcAft>
-              <a:buSzPct val="100000"/>
-              <a:buChar char="•"/>
-            </a:pPr>
-            <a:r>
-              <a:rPr lang="en-US" sz="1700" dirty="0">
-                <a:solidFill>
-                  <a:srgbClr val="444444"/>
-                </a:solidFill>
-                <a:latin typeface="Noto Sans CJK KR" pitchFamily="34" charset="0"/>
-                <a:ea typeface="Noto Sans CJK KR" pitchFamily="34" charset="-122"/>
-                <a:cs typeface="Noto Sans CJK KR" pitchFamily="34" charset="-120"/>
-              </a:rPr>
-              <a:t>Hamming으로 정정하여 정상 데이터로 사용</a:t>
-            </a:r>
-            <a:endParaRPr lang="en-US" sz="2000" dirty="0"/>
-          </a:p>
-          <a:p>
-            <a:pPr marL="342900" indent="-342900">
-              <a:spcAft>
-                <a:spcPts val="1200"/>
-              </a:spcAft>
-              <a:buSzPct val="100000"/>
-              <a:buChar char="•"/>
-            </a:pPr>
-            <a:r>
-              <a:rPr lang="en-US" sz="2000" dirty="0">
-                <a:solidFill>
-                  <a:srgbClr val="222222"/>
-                </a:solidFill>
-                <a:latin typeface="Noto Sans CJK KR" pitchFamily="34" charset="0"/>
-                <a:ea typeface="Noto Sans CJK KR" pitchFamily="34" charset="-122"/>
-                <a:cs typeface="Noto Sans CJK KR" pitchFamily="34" charset="-120"/>
-              </a:rPr>
-              <a:t>2비트 에러 (정정 불가)</a:t>
-            </a:r>
-            <a:endParaRPr lang="en-US" sz="2000" dirty="0"/>
-          </a:p>
-          <a:p>
-            <a:pPr lvl="1" marL="685800" indent="-342900">
-              <a:spcAft>
-                <a:spcPts val="800"/>
-              </a:spcAft>
-              <a:buSzPct val="100000"/>
-              <a:buChar char="•"/>
-            </a:pPr>
-            <a:r>
-              <a:rPr lang="en-US" sz="1700" dirty="0">
-                <a:solidFill>
-                  <a:srgbClr val="444444"/>
-                </a:solidFill>
-                <a:latin typeface="Noto Sans CJK KR" pitchFamily="34" charset="0"/>
-                <a:ea typeface="Noto Sans CJK KR" pitchFamily="34" charset="-122"/>
-                <a:cs typeface="Noto Sans CJK KR" pitchFamily="34" charset="-120"/>
-              </a:rPr>
-              <a:t>해당 프레임을 무효 처리하고 폐기, 이전 값 유지</a:t>
-            </a:r>
-            <a:endParaRPr lang="en-US" sz="2000" dirty="0"/>
-          </a:p>
-          <a:p>
-            <a:pPr marL="342900" indent="-342900">
-              <a:spcAft>
-                <a:spcPts val="1200"/>
-              </a:spcAft>
-              <a:buSzPct val="100000"/>
-              <a:buChar char="•"/>
-            </a:pPr>
-            <a:r>
-              <a:rPr lang="en-US" sz="2000" dirty="0">
-                <a:solidFill>
-                  <a:srgbClr val="222222"/>
-                </a:solidFill>
-                <a:latin typeface="Noto Sans CJK KR" pitchFamily="34" charset="0"/>
-                <a:ea typeface="Noto Sans CJK KR" pitchFamily="34" charset="-122"/>
-                <a:cs typeface="Noto Sans CJK KR" pitchFamily="34" charset="-120"/>
-              </a:rPr>
-              <a:t>Implicit Flow Control</a:t>
-            </a:r>
-            <a:endParaRPr lang="en-US" sz="2000" dirty="0"/>
-          </a:p>
-          <a:p>
-            <a:pPr lvl="1" marL="685800" indent="-342900">
-              <a:buSzPct val="100000"/>
-              <a:buChar char="•"/>
-            </a:pPr>
-            <a:r>
-              <a:rPr lang="en-US" sz="1700" dirty="0">
-                <a:solidFill>
-                  <a:srgbClr val="444444"/>
-                </a:solidFill>
-                <a:latin typeface="Noto Sans CJK KR" pitchFamily="34" charset="0"/>
-                <a:ea typeface="Noto Sans CJK KR" pitchFamily="34" charset="-122"/>
-                <a:cs typeface="Noto Sans CJK KR" pitchFamily="34" charset="-120"/>
-              </a:rPr>
-              <a:t>명시적 재전송 요청(ARQ/NACK) 없음 — 다음 TDMA 사이클의 갱신 데이터를 기다림</a:t>
-            </a:r>
-            <a:endParaRPr lang="en-US" sz="2000" dirty="0"/>
-          </a:p>
-        </p:txBody>
-      </p:sp>
-      <p:pic>
-        <p:nvPicPr>
-          <p:cNvPr id="4" name="Image 0" descr="/home/user/SoC_Design_and_Programming/diagrams/flow_control.png">    </p:cNvPr>
-          <p:cNvPicPr>
-            <a:picLocks noChangeAspect="1"/>
-          </p:cNvPicPr>
-          <p:nvPr/>
-        </p:nvPicPr>
-        <p:blipFill>
-          <a:blip r:embed="rId2"/>
-          <a:srcRect l="0" r="0" t="0" b="0"/>
-          <a:stretch/>
-        </p:blipFill>
-        <p:spPr>
-          <a:xfrm>
-            <a:off x="5029200" y="1371600"/>
-            <a:ext cx="3200400" cy="2319606"/>
-          </a:xfrm>
-          <a:prstGeom prst="rect">
-            <a:avLst/>
-          </a:prstGeom>
-        </p:spPr>
-      </p:pic>
-      <p:sp>
-        <p:nvSpPr>
-          <p:cNvPr id="5" name="Text 2"/>
-          <p:cNvSpPr/>
-          <p:nvPr/>
-        </p:nvSpPr>
-        <p:spPr>
-          <a:xfrm>
-            <a:off x="8503920" y="4754880"/>
-            <a:ext cx="457200" cy="274320"/>
-          </a:xfrm>
-          <a:prstGeom prst="rect">
-            <a:avLst/>
-          </a:prstGeom>
-          <a:noFill/>
-          <a:ln/>
-        </p:spPr>
-        <p:txBody>
-          <a:bodyPr wrap="square" rtlCol="0" anchor="ctr"/>
-          <a:lstStyle/>
-          <a:p>
-            <a:pPr algn="r" indent="0" marL="0">
-              <a:buNone/>
-            </a:pPr>
-            <a:r>
-              <a:rPr lang="en-US" sz="1200" dirty="0">
-                <a:solidFill>
-                  <a:srgbClr val="999999"/>
-                </a:solidFill>
-                <a:latin typeface="Noto Sans CJK KR" pitchFamily="34" charset="0"/>
-                <a:ea typeface="Noto Sans CJK KR" pitchFamily="34" charset="-122"/>
-                <a:cs typeface="Noto Sans CJK KR" pitchFamily="34" charset="-120"/>
-              </a:rPr>
-              <a:t>14</a:t>
-            </a:r>
-            <a:endParaRPr lang="en-US" sz="1200" dirty="0"/>
-          </a:p>
-        </p:txBody>
-      </p:sp>
-    </p:spTree>
-  </p:cSld>
-  <p:clrMapOvr>
-    <a:masterClrMapping/>
-  </p:clrMapOvr>
-</p:sld>
-</file>
-
-<file path=ppt/slides/slide15.xml><?xml version="1.0" encoding="utf-8"?>
-<p:sld xmlns:a="http://schemas.openxmlformats.org/drawingml/2006/main" xmlns:p="http://schemas.openxmlformats.org/presentationml/2006/main" xmlns:r="http://schemas.openxmlformats.org/officeDocument/2006/relationships">
-  <p:cSld>
-    <p:bg>
-      <p:bgPr>
-        <a:solidFill>
-          <a:srgbClr val="F2F2F2"/>
-        </a:solidFill>
-      </p:bgPr>
-    </p:bg>
-    <p:spTree>
-      <p:nvGrpSpPr>
-        <p:cNvPr id="1" name=""/>
-        <p:cNvGrpSpPr/>
-        <p:nvPr/>
-      </p:nvGrpSpPr>
-      <p:grpSpPr/>
-      <p:sp>
-        <p:nvSpPr>
-          <p:cNvPr id="2" name="Text 0"/>
-          <p:cNvSpPr/>
-          <p:nvPr/>
-        </p:nvSpPr>
-        <p:spPr>
-          <a:xfrm>
-            <a:off x="548640" y="1828800"/>
-            <a:ext cx="8046720" cy="1371600"/>
-          </a:xfrm>
-          <a:prstGeom prst="rect">
-            <a:avLst/>
-          </a:prstGeom>
-          <a:noFill/>
-          <a:ln/>
-        </p:spPr>
-        <p:txBody>
-          <a:bodyPr wrap="square" rtlCol="0" anchor="ctr"/>
-          <a:lstStyle/>
-          <a:p>
-            <a:pPr algn="l" indent="0" marL="0">
-              <a:buNone/>
-            </a:pPr>
-            <a:r>
-              <a:rPr lang="en-US" sz="4000" b="1" dirty="0">
-                <a:solidFill>
-                  <a:srgbClr val="111111"/>
-                </a:solidFill>
-                <a:latin typeface="Noto Sans CJK KR" pitchFamily="34" charset="0"/>
-                <a:ea typeface="Noto Sans CJK KR" pitchFamily="34" charset="-122"/>
-                <a:cs typeface="Noto Sans CJK KR" pitchFamily="34" charset="-120"/>
-              </a:rPr>
-              <a:t>3. Master / Slave 구현 사항</a:t>
-            </a:r>
-            <a:endParaRPr lang="en-US" sz="4000" dirty="0"/>
-          </a:p>
-        </p:txBody>
-      </p:sp>
-      <p:sp>
-        <p:nvSpPr>
-          <p:cNvPr id="3" name="Text 1"/>
-          <p:cNvSpPr/>
-          <p:nvPr/>
-        </p:nvSpPr>
-        <p:spPr>
-          <a:xfrm>
-            <a:off x="548640" y="3108960"/>
-            <a:ext cx="8046720" cy="457200"/>
-          </a:xfrm>
-          <a:prstGeom prst="rect">
-            <a:avLst/>
-          </a:prstGeom>
-          <a:noFill/>
-          <a:ln/>
-        </p:spPr>
-        <p:txBody>
-          <a:bodyPr wrap="square" rtlCol="0" anchor="ctr"/>
-          <a:lstStyle/>
-          <a:p>
-            <a:pPr algn="l" indent="0" marL="0">
-              <a:buNone/>
-            </a:pPr>
-            <a:r>
-              <a:rPr lang="en-US" sz="2000" dirty="0">
-                <a:solidFill>
-                  <a:srgbClr val="666666"/>
-                </a:solidFill>
-                <a:latin typeface="Noto Sans CJK KR" pitchFamily="34" charset="0"/>
-                <a:ea typeface="Noto Sans CJK KR" pitchFamily="34" charset="-122"/>
-                <a:cs typeface="Noto Sans CJK KR" pitchFamily="34" charset="-120"/>
-              </a:rPr>
-              <a:t>하드웨어 블록 구성부터 고장 처리 로직까지 구현 세부사항을 짚는다</a:t>
-            </a:r>
-            <a:endParaRPr lang="en-US" sz="2000" dirty="0"/>
-          </a:p>
-        </p:txBody>
-      </p:sp>
-      <p:sp>
-        <p:nvSpPr>
-          <p:cNvPr id="4" name="Text 2"/>
-          <p:cNvSpPr/>
-          <p:nvPr/>
-        </p:nvSpPr>
-        <p:spPr>
-          <a:xfrm>
-            <a:off x="8503920" y="4754880"/>
-            <a:ext cx="457200" cy="274320"/>
-          </a:xfrm>
-          <a:prstGeom prst="rect">
-            <a:avLst/>
-          </a:prstGeom>
-          <a:noFill/>
-          <a:ln/>
-        </p:spPr>
-        <p:txBody>
-          <a:bodyPr wrap="square" rtlCol="0" anchor="ctr"/>
-          <a:lstStyle/>
-          <a:p>
-            <a:pPr algn="r" indent="0" marL="0">
-              <a:buNone/>
-            </a:pPr>
-            <a:r>
-              <a:rPr lang="en-US" sz="1200" dirty="0">
-                <a:solidFill>
-                  <a:srgbClr val="999999"/>
-                </a:solidFill>
-                <a:latin typeface="Noto Sans CJK KR" pitchFamily="34" charset="0"/>
-                <a:ea typeface="Noto Sans CJK KR" pitchFamily="34" charset="-122"/>
-                <a:cs typeface="Noto Sans CJK KR" pitchFamily="34" charset="-120"/>
-              </a:rPr>
-              <a:t>15</a:t>
-            </a:r>
-            <a:endParaRPr lang="en-US" sz="1200" dirty="0"/>
-          </a:p>
-        </p:txBody>
-      </p:sp>
-    </p:spTree>
-  </p:cSld>
-  <p:clrMapOvr>
-    <a:masterClrMapping/>
-  </p:clrMapOvr>
-</p:sld>
-</file>
-
-<file path=ppt/slides/slide16.xml><?xml version="1.0" encoding="utf-8"?>
-<p:sld xmlns:a="http://schemas.openxmlformats.org/drawingml/2006/main" xmlns:p="http://schemas.openxmlformats.org/presentationml/2006/main" xmlns:r="http://schemas.openxmlformats.org/officeDocument/2006/relationships">
-  <p:cSld>
-    <p:spTree>
-      <p:nvGrpSpPr>
-        <p:cNvPr id="1" name=""/>
-        <p:cNvGrpSpPr/>
-        <p:nvPr/>
-      </p:nvGrpSpPr>
-      <p:grpSpPr/>
-      <p:sp>
-        <p:nvSpPr>
-          <p:cNvPr id="2" name="Text 0"/>
-          <p:cNvSpPr/>
-          <p:nvPr/>
-        </p:nvSpPr>
-        <p:spPr>
-          <a:xfrm>
-            <a:off x="548640" y="274320"/>
-            <a:ext cx="8046720" cy="777240"/>
-          </a:xfrm>
-          <a:prstGeom prst="rect">
-            <a:avLst/>
-          </a:prstGeom>
-          <a:noFill/>
-          <a:ln/>
-        </p:spPr>
-        <p:txBody>
-          <a:bodyPr wrap="square" lIns="0" tIns="0" rIns="0" bIns="0" rtlCol="0" anchor="ctr"/>
-          <a:lstStyle/>
-          <a:p>
-            <a:pPr indent="0" marL="0">
-              <a:buNone/>
-            </a:pPr>
-            <a:r>
-              <a:rPr lang="en-US" sz="3600" b="1" dirty="0">
-                <a:solidFill>
-                  <a:srgbClr val="111111"/>
-                </a:solidFill>
-                <a:latin typeface="Noto Sans CJK KR" pitchFamily="34" charset="0"/>
-                <a:ea typeface="Noto Sans CJK KR" pitchFamily="34" charset="-122"/>
-                <a:cs typeface="Noto Sans CJK KR" pitchFamily="34" charset="-120"/>
-              </a:rPr>
-              <a:t>Master 전체 구조</a:t>
-            </a:r>
-            <a:endParaRPr lang="en-US" sz="3600" dirty="0"/>
-          </a:p>
-        </p:txBody>
-      </p:sp>
-      <p:sp>
-        <p:nvSpPr>
-          <p:cNvPr id="3" name="Text 1"/>
-          <p:cNvSpPr/>
-          <p:nvPr/>
-        </p:nvSpPr>
-        <p:spPr>
-          <a:xfrm>
-            <a:off x="548640" y="1188720"/>
-            <a:ext cx="8046720" cy="594360"/>
-          </a:xfrm>
-          <a:prstGeom prst="rect">
-            <a:avLst/>
-          </a:prstGeom>
-          <a:noFill/>
-          <a:ln/>
-        </p:spPr>
-        <p:txBody>
-          <a:bodyPr wrap="square" rtlCol="0" anchor="t"/>
-          <a:lstStyle/>
-          <a:p>
-            <a:pPr marL="342900" indent="-342900">
-              <a:spcAft>
-                <a:spcPts val="600"/>
-              </a:spcAft>
-              <a:buSzPct val="100000"/>
-              <a:buChar char="•"/>
-            </a:pPr>
-            <a:r>
-              <a:rPr lang="en-US" sz="1700" dirty="0">
-                <a:solidFill>
-                  <a:srgbClr val="222222"/>
-                </a:solidFill>
-                <a:latin typeface="Noto Sans CJK KR" pitchFamily="34" charset="0"/>
-                <a:ea typeface="Noto Sans CJK KR" pitchFamily="34" charset="-122"/>
-                <a:cs typeface="Noto Sans CJK KR" pitchFamily="34" charset="-120"/>
-              </a:rPr>
-              <a:t>테스트 장치 · PS · PL(Master IP 포함) · GPIO 네 영역으로 구성</a:t>
-            </a:r>
-            <a:endParaRPr lang="en-US" sz="1700" dirty="0"/>
-          </a:p>
-          <a:p>
-            <a:pPr marL="342900" indent="-342900">
-              <a:spcAft>
-                <a:spcPts val="600"/>
-              </a:spcAft>
-              <a:buSzPct val="100000"/>
-              <a:buChar char="•"/>
-            </a:pPr>
-            <a:r>
-              <a:rPr lang="en-US" sz="1700" dirty="0">
-                <a:solidFill>
-                  <a:srgbClr val="222222"/>
-                </a:solidFill>
-                <a:latin typeface="Noto Sans CJK KR" pitchFamily="34" charset="0"/>
-                <a:ea typeface="Noto Sans CJK KR" pitchFamily="34" charset="-122"/>
-                <a:cs typeface="Noto Sans CJK KR" pitchFamily="34" charset="-120"/>
-              </a:rPr>
-              <a:t>GPIO를 통해 Slave와 TX/RX 시리얼로 연결 — 이후 슬라이드에서 블록을 하나씩 확대</a:t>
-            </a:r>
-            <a:endParaRPr lang="en-US" sz="1700" dirty="0"/>
-          </a:p>
-        </p:txBody>
-      </p:sp>
-      <p:pic>
-        <p:nvPicPr>
-          <p:cNvPr id="4" name="Image 0" descr="/home/user/SoC_Design_and_Programming/diagrams/section3/zoom/master_overview.png">    </p:cNvPr>
-          <p:cNvPicPr>
-            <a:picLocks noChangeAspect="1"/>
-          </p:cNvPicPr>
-          <p:nvPr/>
-        </p:nvPicPr>
-        <p:blipFill>
-          <a:blip r:embed="rId2"/>
-          <a:srcRect l="0" r="0" t="0" b="0"/>
-          <a:stretch/>
-        </p:blipFill>
-        <p:spPr>
-          <a:xfrm>
-            <a:off x="548640" y="2061599"/>
-            <a:ext cx="8046720" cy="2186162"/>
-          </a:xfrm>
-          <a:prstGeom prst="rect">
-            <a:avLst/>
-          </a:prstGeom>
-        </p:spPr>
-      </p:pic>
-      <p:sp>
-        <p:nvSpPr>
-          <p:cNvPr id="5" name="Text 2"/>
-          <p:cNvSpPr/>
-          <p:nvPr/>
-        </p:nvSpPr>
-        <p:spPr>
-          <a:xfrm>
-            <a:off x="8503920" y="4754880"/>
-            <a:ext cx="457200" cy="274320"/>
-          </a:xfrm>
-          <a:prstGeom prst="rect">
-            <a:avLst/>
-          </a:prstGeom>
-          <a:noFill/>
-          <a:ln/>
-        </p:spPr>
-        <p:txBody>
-          <a:bodyPr wrap="square" rtlCol="0" anchor="ctr"/>
-          <a:lstStyle/>
-          <a:p>
-            <a:pPr algn="r" indent="0" marL="0">
-              <a:buNone/>
-            </a:pPr>
-            <a:r>
-              <a:rPr lang="en-US" sz="1200" dirty="0">
-                <a:solidFill>
-                  <a:srgbClr val="999999"/>
-                </a:solidFill>
-                <a:latin typeface="Noto Sans CJK KR" pitchFamily="34" charset="0"/>
-                <a:ea typeface="Noto Sans CJK KR" pitchFamily="34" charset="-122"/>
-                <a:cs typeface="Noto Sans CJK KR" pitchFamily="34" charset="-120"/>
-              </a:rPr>
-              <a:t>16</a:t>
-            </a:r>
-            <a:endParaRPr lang="en-US" sz="1200" dirty="0"/>
-          </a:p>
-        </p:txBody>
-      </p:sp>
-    </p:spTree>
-  </p:cSld>
-  <p:clrMapOvr>
-    <a:masterClrMapping/>
-  </p:clrMapOvr>
-</p:sld>
-</file>
-
-<file path=ppt/slides/slide17.xml><?xml version="1.0" encoding="utf-8"?>
-<p:sld xmlns:a="http://schemas.openxmlformats.org/drawingml/2006/main" xmlns:p="http://schemas.openxmlformats.org/presentationml/2006/main" xmlns:r="http://schemas.openxmlformats.org/officeDocument/2006/relationships">
-  <p:cSld>
-    <p:spTree>
-      <p:nvGrpSpPr>
-        <p:cNvPr id="1" name=""/>
-        <p:cNvGrpSpPr/>
-        <p:nvPr/>
-      </p:nvGrpSpPr>
-      <p:grpSpPr/>
-      <p:sp>
-        <p:nvSpPr>
-          <p:cNvPr id="2" name="Text 0"/>
-          <p:cNvSpPr/>
-          <p:nvPr/>
-        </p:nvSpPr>
-        <p:spPr>
-          <a:xfrm>
-            <a:off x="548640" y="274320"/>
-            <a:ext cx="8046720" cy="777240"/>
-          </a:xfrm>
-          <a:prstGeom prst="rect">
-            <a:avLst/>
-          </a:prstGeom>
-          <a:noFill/>
-          <a:ln/>
-        </p:spPr>
-        <p:txBody>
-          <a:bodyPr wrap="square" lIns="0" tIns="0" rIns="0" bIns="0" rtlCol="0" anchor="ctr"/>
-          <a:lstStyle/>
-          <a:p>
-            <a:pPr indent="0" marL="0">
-              <a:buNone/>
-            </a:pPr>
-            <a:r>
-              <a:rPr lang="en-US" sz="3600" b="1" dirty="0">
-                <a:solidFill>
-                  <a:srgbClr val="111111"/>
-                </a:solidFill>
-                <a:latin typeface="Noto Sans CJK KR" pitchFamily="34" charset="0"/>
-                <a:ea typeface="Noto Sans CJK KR" pitchFamily="34" charset="-122"/>
-                <a:cs typeface="Noto Sans CJK KR" pitchFamily="34" charset="-120"/>
-              </a:rPr>
-              <a:t>Master - GPIO 확대</a:t>
-            </a:r>
-            <a:endParaRPr lang="en-US" sz="3600" dirty="0"/>
-          </a:p>
-        </p:txBody>
-      </p:sp>
-      <p:sp>
-        <p:nvSpPr>
-          <p:cNvPr id="3" name="Text 1"/>
-          <p:cNvSpPr/>
-          <p:nvPr/>
-        </p:nvSpPr>
-        <p:spPr>
-          <a:xfrm>
-            <a:off x="548640" y="1234440"/>
-            <a:ext cx="4023360" cy="2971800"/>
-          </a:xfrm>
-          <a:prstGeom prst="rect">
-            <a:avLst/>
-          </a:prstGeom>
-          <a:noFill/>
-          <a:ln/>
-        </p:spPr>
-        <p:txBody>
-          <a:bodyPr wrap="square" rtlCol="0" anchor="t"/>
-          <a:lstStyle/>
-          <a:p>
-            <a:pPr marL="342900" indent="-342900">
-              <a:spcAft>
-                <a:spcPts val="1000"/>
-              </a:spcAft>
-              <a:buSzPct val="100000"/>
-              <a:buChar char="•"/>
-            </a:pPr>
-            <a:r>
-              <a:rPr lang="en-US" sz="1800" dirty="0">
-                <a:solidFill>
-                  <a:srgbClr val="222222"/>
-                </a:solidFill>
-                <a:latin typeface="Noto Sans CJK KR" pitchFamily="34" charset="0"/>
-                <a:ea typeface="Noto Sans CJK KR" pitchFamily="34" charset="-122"/>
-                <a:cs typeface="Noto Sans CJK KR" pitchFamily="34" charset="-120"/>
-              </a:rPr>
-              <a:t>GND / RX 포트 / TX 포트로 구성</a:t>
-            </a:r>
-            <a:endParaRPr lang="en-US" sz="1800" dirty="0"/>
-          </a:p>
-          <a:p>
-            <a:pPr marL="342900" indent="-342900">
-              <a:spcAft>
-                <a:spcPts val="1000"/>
-              </a:spcAft>
-              <a:buSzPct val="100000"/>
-              <a:buChar char="•"/>
-            </a:pPr>
-            <a:r>
-              <a:rPr lang="en-US" sz="1800" dirty="0">
-                <a:solidFill>
-                  <a:srgbClr val="222222"/>
-                </a:solidFill>
-                <a:latin typeface="Noto Sans CJK KR" pitchFamily="34" charset="0"/>
-                <a:ea typeface="Noto Sans CJK KR" pitchFamily="34" charset="-122"/>
-                <a:cs typeface="Noto Sans CJK KR" pitchFamily="34" charset="-120"/>
-              </a:rPr>
-              <a:t>TX·RX는 PL(Master IP)과 Slave 사이를 잇는 물리 연결 — 외부 장치-PS-PL 경로와는 분리된 통신 채널</a:t>
-            </a:r>
-            <a:endParaRPr lang="en-US" sz="1800" dirty="0"/>
-          </a:p>
-        </p:txBody>
-      </p:sp>
-      <p:pic>
-        <p:nvPicPr>
-          <p:cNvPr id="4" name="Image 0" descr="/home/user/SoC_Design_and_Programming/diagrams/section3/zoom/m_gpio.png">    </p:cNvPr>
-          <p:cNvPicPr>
-            <a:picLocks noChangeAspect="1"/>
-          </p:cNvPicPr>
-          <p:nvPr/>
-        </p:nvPicPr>
-        <p:blipFill>
-          <a:blip r:embed="rId2"/>
-          <a:srcRect l="0" r="0" t="0" b="0"/>
-          <a:stretch/>
-        </p:blipFill>
-        <p:spPr>
-          <a:xfrm>
-            <a:off x="4846320" y="1916974"/>
-            <a:ext cx="3749040" cy="1606731"/>
-          </a:xfrm>
-          <a:prstGeom prst="rect">
-            <a:avLst/>
-          </a:prstGeom>
-        </p:spPr>
-      </p:pic>
-      <p:sp>
-        <p:nvSpPr>
-          <p:cNvPr id="5" name="Text 2"/>
-          <p:cNvSpPr/>
-          <p:nvPr/>
-        </p:nvSpPr>
-        <p:spPr>
-          <a:xfrm>
-            <a:off x="8503920" y="4754880"/>
-            <a:ext cx="457200" cy="274320"/>
-          </a:xfrm>
-          <a:prstGeom prst="rect">
-            <a:avLst/>
-          </a:prstGeom>
-          <a:noFill/>
-          <a:ln/>
-        </p:spPr>
-        <p:txBody>
-          <a:bodyPr wrap="square" rtlCol="0" anchor="ctr"/>
-          <a:lstStyle/>
-          <a:p>
-            <a:pPr algn="r" indent="0" marL="0">
-              <a:buNone/>
-            </a:pPr>
-            <a:r>
-              <a:rPr lang="en-US" sz="1200" dirty="0">
-                <a:solidFill>
-                  <a:srgbClr val="999999"/>
-                </a:solidFill>
-                <a:latin typeface="Noto Sans CJK KR" pitchFamily="34" charset="0"/>
-                <a:ea typeface="Noto Sans CJK KR" pitchFamily="34" charset="-122"/>
-                <a:cs typeface="Noto Sans CJK KR" pitchFamily="34" charset="-120"/>
-              </a:rPr>
-              <a:t>17</a:t>
-            </a:r>
-            <a:endParaRPr lang="en-US" sz="1200" dirty="0"/>
-          </a:p>
-        </p:txBody>
-      </p:sp>
-    </p:spTree>
-  </p:cSld>
-  <p:clrMapOvr>
-    <a:masterClrMapping/>
-  </p:clrMapOvr>
-</p:sld>
-</file>
-
-<file path=ppt/slides/slide18.xml><?xml version="1.0" encoding="utf-8"?>
-<p:sld xmlns:a="http://schemas.openxmlformats.org/drawingml/2006/main" xmlns:p="http://schemas.openxmlformats.org/presentationml/2006/main" xmlns:r="http://schemas.openxmlformats.org/officeDocument/2006/relationships">
-  <p:cSld>
-    <p:spTree>
-      <p:nvGrpSpPr>
-        <p:cNvPr id="1" name=""/>
-        <p:cNvGrpSpPr/>
-        <p:nvPr/>
-      </p:nvGrpSpPr>
-      <p:grpSpPr/>
-      <p:sp>
-        <p:nvSpPr>
-          <p:cNvPr id="2" name="Text 0"/>
-          <p:cNvSpPr/>
-          <p:nvPr/>
-        </p:nvSpPr>
-        <p:spPr>
-          <a:xfrm>
-            <a:off x="548640" y="274320"/>
-            <a:ext cx="8046720" cy="777240"/>
-          </a:xfrm>
-          <a:prstGeom prst="rect">
-            <a:avLst/>
-          </a:prstGeom>
-          <a:noFill/>
-          <a:ln/>
-        </p:spPr>
-        <p:txBody>
-          <a:bodyPr wrap="square" lIns="0" tIns="0" rIns="0" bIns="0" rtlCol="0" anchor="ctr"/>
-          <a:lstStyle/>
-          <a:p>
-            <a:pPr indent="0" marL="0">
-              <a:buNone/>
-            </a:pPr>
-            <a:r>
-              <a:rPr lang="en-US" sz="3600" b="1" dirty="0">
-                <a:solidFill>
-                  <a:srgbClr val="111111"/>
-                </a:solidFill>
-                <a:latin typeface="Noto Sans CJK KR" pitchFamily="34" charset="0"/>
-                <a:ea typeface="Noto Sans CJK KR" pitchFamily="34" charset="-122"/>
-                <a:cs typeface="Noto Sans CJK KR" pitchFamily="34" charset="-120"/>
-              </a:rPr>
-              <a:t>Master - PS 확대</a:t>
-            </a:r>
-            <a:endParaRPr lang="en-US" sz="3600" dirty="0"/>
-          </a:p>
-        </p:txBody>
-      </p:sp>
-      <p:sp>
-        <p:nvSpPr>
-          <p:cNvPr id="3" name="Text 1"/>
-          <p:cNvSpPr/>
-          <p:nvPr/>
-        </p:nvSpPr>
-        <p:spPr>
-          <a:xfrm>
-            <a:off x="548640" y="1188720"/>
-            <a:ext cx="8046720" cy="594360"/>
-          </a:xfrm>
-          <a:prstGeom prst="rect">
-            <a:avLst/>
-          </a:prstGeom>
-          <a:noFill/>
-          <a:ln/>
-        </p:spPr>
-        <p:txBody>
-          <a:bodyPr wrap="square" rtlCol="0" anchor="t"/>
-          <a:lstStyle/>
-          <a:p>
-            <a:pPr marL="342900" indent="-342900">
-              <a:spcAft>
-                <a:spcPts val="600"/>
-              </a:spcAft>
-              <a:buSzPct val="100000"/>
-              <a:buChar char="•"/>
-            </a:pPr>
-            <a:r>
-              <a:rPr lang="en-US" sz="1700" dirty="0">
-                <a:solidFill>
-                  <a:srgbClr val="222222"/>
-                </a:solidFill>
-                <a:latin typeface="Noto Sans CJK KR" pitchFamily="34" charset="0"/>
-                <a:ea typeface="Noto Sans CJK KR" pitchFamily="34" charset="-122"/>
-                <a:cs typeface="Noto Sans CJK KR" pitchFamily="34" charset="-120"/>
-              </a:rPr>
-              <a:t>외부 테스트 장치에서 초깃값을 입력받아 Master를 초기 구동</a:t>
-            </a:r>
-            <a:endParaRPr lang="en-US" sz="1700" dirty="0"/>
-          </a:p>
-          <a:p>
-            <a:pPr marL="342900" indent="-342900">
-              <a:spcAft>
-                <a:spcPts val="600"/>
-              </a:spcAft>
-              <a:buSzPct val="100000"/>
-              <a:buChar char="•"/>
-            </a:pPr>
-            <a:r>
-              <a:rPr lang="en-US" sz="1700" dirty="0">
-                <a:solidFill>
-                  <a:srgbClr val="222222"/>
-                </a:solidFill>
-                <a:latin typeface="Noto Sans CJK KR" pitchFamily="34" charset="0"/>
-                <a:ea typeface="Noto Sans CJK KR" pitchFamily="34" charset="-122"/>
-                <a:cs typeface="Noto Sans CJK KR" pitchFamily="34" charset="-120"/>
-              </a:rPr>
-              <a:t>구동 중인 Master 값을 레지스터로 읽고, Master가 발생시키는 인터럽트를 수신</a:t>
-            </a:r>
-            <a:endParaRPr lang="en-US" sz="1700" dirty="0"/>
-          </a:p>
-        </p:txBody>
-      </p:sp>
-      <p:pic>
-        <p:nvPicPr>
-          <p:cNvPr id="4" name="Image 0" descr="/home/user/SoC_Design_and_Programming/diagrams/section3/zoom/m_ps.png">    </p:cNvPr>
-          <p:cNvPicPr>
-            <a:picLocks noChangeAspect="1"/>
-          </p:cNvPicPr>
-          <p:nvPr/>
-        </p:nvPicPr>
-        <p:blipFill>
-          <a:blip r:embed="rId2"/>
-          <a:srcRect l="0" r="0" t="0" b="0"/>
-          <a:stretch/>
-        </p:blipFill>
-        <p:spPr>
-          <a:xfrm>
-            <a:off x="1103179" y="1783080"/>
-            <a:ext cx="6937641" cy="2743200"/>
-          </a:xfrm>
-          <a:prstGeom prst="rect">
-            <a:avLst/>
-          </a:prstGeom>
-        </p:spPr>
-      </p:pic>
-      <p:sp>
-        <p:nvSpPr>
-          <p:cNvPr id="5" name="Text 2"/>
-          <p:cNvSpPr/>
-          <p:nvPr/>
-        </p:nvSpPr>
-        <p:spPr>
-          <a:xfrm>
-            <a:off x="8503920" y="4754880"/>
-            <a:ext cx="457200" cy="274320"/>
-          </a:xfrm>
-          <a:prstGeom prst="rect">
-            <a:avLst/>
-          </a:prstGeom>
-          <a:noFill/>
-          <a:ln/>
-        </p:spPr>
-        <p:txBody>
-          <a:bodyPr wrap="square" rtlCol="0" anchor="ctr"/>
-          <a:lstStyle/>
-          <a:p>
-            <a:pPr algn="r" indent="0" marL="0">
-              <a:buNone/>
-            </a:pPr>
-            <a:r>
-              <a:rPr lang="en-US" sz="1200" dirty="0">
-                <a:solidFill>
-                  <a:srgbClr val="999999"/>
-                </a:solidFill>
-                <a:latin typeface="Noto Sans CJK KR" pitchFamily="34" charset="0"/>
-                <a:ea typeface="Noto Sans CJK KR" pitchFamily="34" charset="-122"/>
-                <a:cs typeface="Noto Sans CJK KR" pitchFamily="34" charset="-120"/>
-              </a:rPr>
-              <a:t>18</a:t>
-            </a:r>
-            <a:endParaRPr lang="en-US" sz="1200" dirty="0"/>
-          </a:p>
-        </p:txBody>
-      </p:sp>
-    </p:spTree>
-  </p:cSld>
-  <p:clrMapOvr>
-    <a:masterClrMapping/>
-  </p:clrMapOvr>
-</p:sld>
-</file>
-
-<file path=ppt/slides/slide19.xml><?xml version="1.0" encoding="utf-8"?>
-<p:sld xmlns:a="http://schemas.openxmlformats.org/drawingml/2006/main" xmlns:p="http://schemas.openxmlformats.org/presentationml/2006/main" xmlns:r="http://schemas.openxmlformats.org/officeDocument/2006/relationships">
-  <p:cSld>
-    <p:spTree>
-      <p:nvGrpSpPr>
-        <p:cNvPr id="1" name=""/>
-        <p:cNvGrpSpPr/>
-        <p:nvPr/>
-      </p:nvGrpSpPr>
-      <p:grpSpPr/>
-      <p:sp>
-        <p:nvSpPr>
-          <p:cNvPr id="2" name="Text 0"/>
-          <p:cNvSpPr/>
-          <p:nvPr/>
-        </p:nvSpPr>
-        <p:spPr>
-          <a:xfrm>
-            <a:off x="548640" y="274320"/>
-            <a:ext cx="8046720" cy="777240"/>
-          </a:xfrm>
-          <a:prstGeom prst="rect">
-            <a:avLst/>
-          </a:prstGeom>
-          <a:noFill/>
-          <a:ln/>
-        </p:spPr>
-        <p:txBody>
-          <a:bodyPr wrap="square" lIns="0" tIns="0" rIns="0" bIns="0" rtlCol="0" anchor="ctr"/>
-          <a:lstStyle/>
-          <a:p>
-            <a:pPr indent="0" marL="0">
-              <a:buNone/>
-            </a:pPr>
-            <a:r>
-              <a:rPr lang="en-US" sz="3600" b="1" dirty="0">
-                <a:solidFill>
-                  <a:srgbClr val="111111"/>
-                </a:solidFill>
-                <a:latin typeface="Noto Sans CJK KR" pitchFamily="34" charset="0"/>
-                <a:ea typeface="Noto Sans CJK KR" pitchFamily="34" charset="-122"/>
-                <a:cs typeface="Noto Sans CJK KR" pitchFamily="34" charset="-120"/>
-              </a:rPr>
-              <a:t>Master - PL 확대</a:t>
-            </a:r>
-            <a:endParaRPr lang="en-US" sz="3600" dirty="0"/>
-          </a:p>
-        </p:txBody>
-      </p:sp>
-      <p:sp>
-        <p:nvSpPr>
-          <p:cNvPr id="3" name="Text 1"/>
-          <p:cNvSpPr/>
-          <p:nvPr/>
-        </p:nvSpPr>
-        <p:spPr>
-          <a:xfrm>
-            <a:off x="548640" y="1234440"/>
-            <a:ext cx="4023360" cy="2971800"/>
-          </a:xfrm>
-          <a:prstGeom prst="rect">
-            <a:avLst/>
-          </a:prstGeom>
-          <a:noFill/>
-          <a:ln/>
-        </p:spPr>
-        <p:txBody>
-          <a:bodyPr wrap="square" rtlCol="0" anchor="t"/>
-          <a:lstStyle/>
-          <a:p>
-            <a:pPr marL="342900" indent="-342900">
-              <a:spcAft>
-                <a:spcPts val="1000"/>
-              </a:spcAft>
-              <a:buSzPct val="100000"/>
-              <a:buChar char="•"/>
-            </a:pPr>
-            <a:r>
-              <a:rPr lang="en-US" sz="1800" dirty="0">
-                <a:solidFill>
-                  <a:srgbClr val="222222"/>
-                </a:solidFill>
-                <a:latin typeface="Noto Sans CJK KR" pitchFamily="34" charset="0"/>
-                <a:ea typeface="Noto Sans CJK KR" pitchFamily="34" charset="-122"/>
-                <a:cs typeface="Noto Sans CJK KR" pitchFamily="34" charset="-120"/>
-              </a:rPr>
-              <a:t>LED · 푸시버튼 · DIP 스위치 · 7-seg와 Master IP로 보드 자체의 입출력 구성</a:t>
-            </a:r>
-            <a:endParaRPr lang="en-US" sz="1800" dirty="0"/>
-          </a:p>
-          <a:p>
-            <a:pPr marL="342900" indent="-342900">
-              <a:spcAft>
-                <a:spcPts val="1000"/>
-              </a:spcAft>
-              <a:buSzPct val="100000"/>
-              <a:buChar char="•"/>
-            </a:pPr>
-            <a:r>
-              <a:rPr lang="en-US" sz="1800" dirty="0">
-                <a:solidFill>
-                  <a:srgbClr val="222222"/>
-                </a:solidFill>
-                <a:latin typeface="Noto Sans CJK KR" pitchFamily="34" charset="0"/>
-                <a:ea typeface="Noto Sans CJK KR" pitchFamily="34" charset="-122"/>
-                <a:cs typeface="Noto Sans CJK KR" pitchFamily="34" charset="-120"/>
-              </a:rPr>
-              <a:t>LED는 RX/TX 이진 신호를 그대로 받아 통신 상태를 표시</a:t>
-            </a:r>
-            <a:endParaRPr lang="en-US" sz="1800" dirty="0"/>
-          </a:p>
-          <a:p>
-            <a:pPr marL="342900" indent="-342900">
-              <a:spcAft>
-                <a:spcPts val="1000"/>
-              </a:spcAft>
-              <a:buSzPct val="100000"/>
-              <a:buChar char="•"/>
-            </a:pPr>
-            <a:r>
-              <a:rPr lang="en-US" sz="1800" dirty="0">
-                <a:solidFill>
-                  <a:srgbClr val="222222"/>
-                </a:solidFill>
-                <a:latin typeface="Noto Sans CJK KR" pitchFamily="34" charset="0"/>
-                <a:ea typeface="Noto Sans CJK KR" pitchFamily="34" charset="-122"/>
-                <a:cs typeface="Noto Sans CJK KR" pitchFamily="34" charset="-120"/>
-              </a:rPr>
-              <a:t>DIP 스위치·7-seg는 슬롯별 통신 상태와 수신 데이터를 출력 — Master IP가 이들을 조율</a:t>
-            </a:r>
-            <a:endParaRPr lang="en-US" sz="1800" dirty="0"/>
-          </a:p>
-        </p:txBody>
-      </p:sp>
-      <p:pic>
-        <p:nvPicPr>
-          <p:cNvPr id="4" name="Image 0" descr="/home/user/SoC_Design_and_Programming/diagrams/section3/zoom/m_pl.png">    </p:cNvPr>
-          <p:cNvPicPr>
-            <a:picLocks noChangeAspect="1"/>
-          </p:cNvPicPr>
-          <p:nvPr/>
-        </p:nvPicPr>
-        <p:blipFill>
-          <a:blip r:embed="rId2"/>
-          <a:srcRect l="0" r="0" t="0" b="0"/>
-          <a:stretch/>
-        </p:blipFill>
-        <p:spPr>
-          <a:xfrm>
-            <a:off x="4846320" y="1653968"/>
-            <a:ext cx="3749040" cy="2132745"/>
-          </a:xfrm>
-          <a:prstGeom prst="rect">
-            <a:avLst/>
-          </a:prstGeom>
-        </p:spPr>
-      </p:pic>
-      <p:sp>
-        <p:nvSpPr>
-          <p:cNvPr id="5" name="Text 2"/>
-          <p:cNvSpPr/>
-          <p:nvPr/>
-        </p:nvSpPr>
-        <p:spPr>
-          <a:xfrm>
-            <a:off x="8503920" y="4754880"/>
-            <a:ext cx="457200" cy="274320"/>
-          </a:xfrm>
-          <a:prstGeom prst="rect">
-            <a:avLst/>
-          </a:prstGeom>
-          <a:noFill/>
-          <a:ln/>
-        </p:spPr>
-        <p:txBody>
-          <a:bodyPr wrap="square" rtlCol="0" anchor="ctr"/>
-          <a:lstStyle/>
-          <a:p>
-            <a:pPr algn="r" indent="0" marL="0">
-              <a:buNone/>
-            </a:pPr>
-            <a:r>
-              <a:rPr lang="en-US" sz="1200" dirty="0">
-                <a:solidFill>
-                  <a:srgbClr val="999999"/>
-                </a:solidFill>
-                <a:latin typeface="Noto Sans CJK KR" pitchFamily="34" charset="0"/>
-                <a:ea typeface="Noto Sans CJK KR" pitchFamily="34" charset="-122"/>
-                <a:cs typeface="Noto Sans CJK KR" pitchFamily="34" charset="-120"/>
-              </a:rPr>
-              <a:t>19</a:t>
-            </a:r>
-            <a:endParaRPr lang="en-US" sz="1200" dirty="0"/>
-          </a:p>
-        </p:txBody>
-      </p:sp>
-    </p:spTree>
-  </p:cSld>
-  <p:clrMapOvr>
-    <a:masterClrMapping/>
-  </p:clrMapOvr>
-</p:sld>
-</file>
-
-<file path=ppt/slides/slide2.xml><?xml version="1.0" encoding="utf-8"?>
-<p:sld xmlns:a="http://schemas.openxmlformats.org/drawingml/2006/main" xmlns:r="http://schemas.openxmlformats.org/officeDocument/2006/relationships" xmlns:p="http://schemas.openxmlformats.org/presentationml/2006/main">
-  <p:cSld name="Slide 2">
     <p:spTree>
       <p:nvGrpSpPr>
         <p:cNvPr id="1" name=""/>
@@ -3673,7 +1134,7 @@
           <a:bodyPr wrap="square" lIns="0" tIns="0" rIns="0" bIns="0" rtlCol="0" anchor="ctr"/>
           <a:lstStyle/>
           <a:p>
-            <a:pPr indent="0" marL="0">
+            <a:pPr marL="0" indent="0">
               <a:buNone/>
             </a:pPr>
             <a:r>
@@ -3685,7 +1146,937 @@
                 <a:ea typeface="Noto Sans CJK KR" pitchFamily="34" charset="-122"/>
                 <a:cs typeface="Noto Sans CJK KR" pitchFamily="34" charset="-120"/>
               </a:rPr>
-              <a:t>왜 결정론적 통신이 필요한가</a:t>
+              <a:t>DLL - Slave 프레임 구조</a:t>
+            </a:r>
+            <a:endParaRPr lang="en-US" sz="3600" dirty="0"/>
+          </a:p>
+        </p:txBody>
+      </p:sp>
+      <p:sp>
+        <p:nvSpPr>
+          <p:cNvPr id="3" name="Text 1"/>
+          <p:cNvSpPr/>
+          <p:nvPr/>
+        </p:nvSpPr>
+        <p:spPr>
+          <a:xfrm>
+            <a:off x="548640" y="1234440"/>
+            <a:ext cx="8046720" cy="1874520"/>
+          </a:xfrm>
+          <a:prstGeom prst="rect">
+            <a:avLst/>
+          </a:prstGeom>
+          <a:noFill/>
+          <a:ln/>
+        </p:spPr>
+        <p:txBody>
+          <a:bodyPr wrap="square" rtlCol="0" anchor="t"/>
+          <a:lstStyle/>
+          <a:p>
+            <a:pPr marL="342900" indent="-342900">
+              <a:spcAft>
+                <a:spcPts val="800"/>
+              </a:spcAft>
+              <a:buSzPct val="100000"/>
+              <a:buChar char="•"/>
+            </a:pPr>
+            <a:r>
+              <a:rPr lang="en-US" sz="1900" dirty="0">
+                <a:solidFill>
+                  <a:srgbClr val="222222"/>
+                </a:solidFill>
+                <a:latin typeface="Noto Sans CJK KR" pitchFamily="34" charset="0"/>
+                <a:ea typeface="Noto Sans CJK KR" pitchFamily="34" charset="-122"/>
+                <a:cs typeface="Noto Sans CJK KR" pitchFamily="34" charset="-120"/>
+              </a:rPr>
+              <a:t>필드 구성 (총 50비트)</a:t>
+            </a:r>
+            <a:endParaRPr lang="en-US" sz="1900" dirty="0"/>
+          </a:p>
+          <a:p>
+            <a:pPr marL="685800" lvl="1" indent="-342900">
+              <a:spcAft>
+                <a:spcPts val="600"/>
+              </a:spcAft>
+              <a:buSzPct val="100000"/>
+              <a:buChar char="•"/>
+            </a:pPr>
+            <a:r>
+              <a:rPr lang="en-US" sz="1600" dirty="0">
+                <a:solidFill>
+                  <a:srgbClr val="444444"/>
+                </a:solidFill>
+                <a:latin typeface="Noto Sans CJK KR" pitchFamily="34" charset="0"/>
+                <a:ea typeface="Noto Sans CJK KR" pitchFamily="34" charset="-122"/>
+                <a:cs typeface="Noto Sans CJK KR" pitchFamily="34" charset="-120"/>
+              </a:rPr>
+              <a:t>preamble(8, 0xAA) + slot_id(3) + payload(32) + hamming parity(7)</a:t>
+            </a:r>
+            <a:endParaRPr lang="en-US" sz="1900" dirty="0"/>
+          </a:p>
+          <a:p>
+            <a:pPr marL="342900" indent="-342900">
+              <a:spcAft>
+                <a:spcPts val="800"/>
+              </a:spcAft>
+              <a:buSzPct val="100000"/>
+              <a:buChar char="•"/>
+            </a:pPr>
+            <a:r>
+              <a:rPr lang="en-US" sz="1900" dirty="0">
+                <a:solidFill>
+                  <a:srgbClr val="222222"/>
+                </a:solidFill>
+                <a:latin typeface="Noto Sans CJK KR" pitchFamily="34" charset="0"/>
+                <a:ea typeface="Noto Sans CJK KR" pitchFamily="34" charset="-122"/>
+                <a:cs typeface="Noto Sans CJK KR" pitchFamily="34" charset="-120"/>
+              </a:rPr>
+              <a:t>에러 검출/정정</a:t>
+            </a:r>
+            <a:endParaRPr lang="en-US" sz="1900" dirty="0"/>
+          </a:p>
+          <a:p>
+            <a:pPr marL="685800" lvl="1" indent="-342900">
+              <a:spcAft>
+                <a:spcPts val="600"/>
+              </a:spcAft>
+              <a:buSzPct val="100000"/>
+              <a:buChar char="•"/>
+            </a:pPr>
+            <a:r>
+              <a:rPr lang="en-US" sz="1600" dirty="0">
+                <a:solidFill>
+                  <a:srgbClr val="444444"/>
+                </a:solidFill>
+                <a:latin typeface="Noto Sans CJK KR" pitchFamily="34" charset="0"/>
+                <a:ea typeface="Noto Sans CJK KR" pitchFamily="34" charset="-122"/>
+                <a:cs typeface="Noto Sans CJK KR" pitchFamily="34" charset="-120"/>
+              </a:rPr>
+              <a:t>SEC-DED 방식 — 1비트 에러는 검출 후 정정, 2비트 에러는 검출만 가능</a:t>
+            </a:r>
+            <a:endParaRPr lang="en-US" sz="1900" dirty="0"/>
+          </a:p>
+          <a:p>
+            <a:pPr marL="342900" indent="-342900">
+              <a:spcAft>
+                <a:spcPts val="800"/>
+              </a:spcAft>
+              <a:buSzPct val="100000"/>
+              <a:buChar char="•"/>
+            </a:pPr>
+            <a:r>
+              <a:rPr lang="en-US" sz="1900" dirty="0">
+                <a:solidFill>
+                  <a:srgbClr val="222222"/>
+                </a:solidFill>
+                <a:latin typeface="Noto Sans CJK KR" pitchFamily="34" charset="0"/>
+                <a:ea typeface="Noto Sans CJK KR" pitchFamily="34" charset="-122"/>
+                <a:cs typeface="Noto Sans CJK KR" pitchFamily="34" charset="-120"/>
+              </a:rPr>
+              <a:t>slot_id의 의미</a:t>
+            </a:r>
+            <a:endParaRPr lang="en-US" sz="1900" dirty="0"/>
+          </a:p>
+          <a:p>
+            <a:pPr marL="685800" lvl="1" indent="-342900">
+              <a:buSzPct val="100000"/>
+              <a:buChar char="•"/>
+            </a:pPr>
+            <a:r>
+              <a:rPr lang="en-US" sz="1600" dirty="0">
+                <a:solidFill>
+                  <a:srgbClr val="444444"/>
+                </a:solidFill>
+                <a:latin typeface="Noto Sans CJK KR" pitchFamily="34" charset="0"/>
+                <a:ea typeface="Noto Sans CJK KR" pitchFamily="34" charset="-122"/>
+                <a:cs typeface="Noto Sans CJK KR" pitchFamily="34" charset="-120"/>
+              </a:rPr>
+              <a:t>Slave 고유 식별자가 아니라 TDMA 슬롯 번호로 운용됨</a:t>
+            </a:r>
+            <a:endParaRPr lang="en-US" sz="1900" dirty="0"/>
+          </a:p>
+        </p:txBody>
+      </p:sp>
+      <p:pic>
+        <p:nvPicPr>
+          <p:cNvPr id="4" name="Image 0" descr="/home/user/SoC_Design_and_Programming/diagrams/slave_frame.png"/>
+          <p:cNvPicPr>
+            <a:picLocks noChangeAspect="1"/>
+          </p:cNvPicPr>
+          <p:nvPr/>
+        </p:nvPicPr>
+        <p:blipFill>
+          <a:blip r:embed="rId2"/>
+          <a:srcRect/>
+          <a:stretch/>
+        </p:blipFill>
+        <p:spPr>
+          <a:xfrm>
+            <a:off x="548640" y="3772716"/>
+            <a:ext cx="8046720" cy="563270"/>
+          </a:xfrm>
+          <a:prstGeom prst="rect">
+            <a:avLst/>
+          </a:prstGeom>
+        </p:spPr>
+      </p:pic>
+      <p:sp>
+        <p:nvSpPr>
+          <p:cNvPr id="5" name="Text 2"/>
+          <p:cNvSpPr/>
+          <p:nvPr/>
+        </p:nvSpPr>
+        <p:spPr>
+          <a:xfrm>
+            <a:off x="548640" y="4427426"/>
+            <a:ext cx="8046720" cy="228600"/>
+          </a:xfrm>
+          <a:prstGeom prst="rect">
+            <a:avLst/>
+          </a:prstGeom>
+          <a:noFill/>
+          <a:ln/>
+        </p:spPr>
+        <p:txBody>
+          <a:bodyPr wrap="square" rtlCol="0" anchor="ctr"/>
+          <a:lstStyle/>
+          <a:p>
+            <a:pPr marL="0" indent="0" algn="ctr">
+              <a:buNone/>
+            </a:pPr>
+            <a:r>
+              <a:rPr lang="en-US" sz="900" dirty="0">
+                <a:solidFill>
+                  <a:srgbClr val="999999"/>
+                </a:solidFill>
+                <a:latin typeface="Noto Sans CJK KR" pitchFamily="34" charset="0"/>
+                <a:ea typeface="Noto Sans CJK KR" pitchFamily="34" charset="-122"/>
+                <a:cs typeface="Noto Sans CJK KR" pitchFamily="34" charset="-120"/>
+              </a:rPr>
+              <a:t>Slave 프레임 비트필드 (전송 순서: preamble → slot_id → payload → hamming)</a:t>
+            </a:r>
+            <a:endParaRPr lang="en-US" sz="900" dirty="0"/>
+          </a:p>
+        </p:txBody>
+      </p:sp>
+      <p:sp>
+        <p:nvSpPr>
+          <p:cNvPr id="6" name="Text 3"/>
+          <p:cNvSpPr/>
+          <p:nvPr/>
+        </p:nvSpPr>
+        <p:spPr>
+          <a:xfrm>
+            <a:off x="8503920" y="4754880"/>
+            <a:ext cx="457200" cy="274320"/>
+          </a:xfrm>
+          <a:prstGeom prst="rect">
+            <a:avLst/>
+          </a:prstGeom>
+          <a:noFill/>
+          <a:ln/>
+        </p:spPr>
+        <p:txBody>
+          <a:bodyPr wrap="square" rtlCol="0" anchor="ctr"/>
+          <a:lstStyle/>
+          <a:p>
+            <a:pPr marL="0" indent="0" algn="r">
+              <a:buNone/>
+            </a:pPr>
+            <a:r>
+              <a:rPr lang="en-US" sz="1200" dirty="0">
+                <a:solidFill>
+                  <a:srgbClr val="999999"/>
+                </a:solidFill>
+                <a:latin typeface="Noto Sans CJK KR" pitchFamily="34" charset="0"/>
+                <a:ea typeface="Noto Sans CJK KR" pitchFamily="34" charset="-122"/>
+                <a:cs typeface="Noto Sans CJK KR" pitchFamily="34" charset="-120"/>
+              </a:rPr>
+              <a:t>10</a:t>
+            </a:r>
+            <a:endParaRPr lang="en-US" sz="1200" dirty="0"/>
+          </a:p>
+        </p:txBody>
+      </p:sp>
+    </p:spTree>
+  </p:cSld>
+  <p:clrMapOvr>
+    <a:masterClrMapping/>
+  </p:clrMapOvr>
+</p:sld>
+</file>
+
+<file path=ppt/slides/slide11.xml><?xml version="1.0" encoding="utf-8"?>
+<p:sld xmlns:a="http://schemas.openxmlformats.org/drawingml/2006/main" xmlns:r="http://schemas.openxmlformats.org/officeDocument/2006/relationships" xmlns:p="http://schemas.openxmlformats.org/presentationml/2006/main">
+  <p:cSld>
+    <p:spTree>
+      <p:nvGrpSpPr>
+        <p:cNvPr id="1" name=""/>
+        <p:cNvGrpSpPr/>
+        <p:nvPr/>
+      </p:nvGrpSpPr>
+      <p:grpSpPr>
+        <a:xfrm>
+          <a:off x="0" y="0"/>
+          <a:ext cx="0" cy="0"/>
+          <a:chOff x="0" y="0"/>
+          <a:chExt cx="0" cy="0"/>
+        </a:xfrm>
+      </p:grpSpPr>
+      <p:sp>
+        <p:nvSpPr>
+          <p:cNvPr id="2" name="Text 0"/>
+          <p:cNvSpPr/>
+          <p:nvPr/>
+        </p:nvSpPr>
+        <p:spPr>
+          <a:xfrm>
+            <a:off x="548640" y="274320"/>
+            <a:ext cx="8046720" cy="777240"/>
+          </a:xfrm>
+          <a:prstGeom prst="rect">
+            <a:avLst/>
+          </a:prstGeom>
+          <a:noFill/>
+          <a:ln/>
+        </p:spPr>
+        <p:txBody>
+          <a:bodyPr wrap="square" lIns="0" tIns="0" rIns="0" bIns="0" rtlCol="0" anchor="ctr"/>
+          <a:lstStyle/>
+          <a:p>
+            <a:pPr marL="0" indent="0">
+              <a:buNone/>
+            </a:pPr>
+            <a:r>
+              <a:rPr lang="en-US" sz="3600" b="1" dirty="0">
+                <a:solidFill>
+                  <a:srgbClr val="111111"/>
+                </a:solidFill>
+                <a:latin typeface="Noto Sans CJK KR" pitchFamily="34" charset="0"/>
+                <a:ea typeface="Noto Sans CJK KR" pitchFamily="34" charset="-122"/>
+                <a:cs typeface="Noto Sans CJK KR" pitchFamily="34" charset="-120"/>
+              </a:rPr>
+              <a:t>DLL - Master 프레임 구조</a:t>
+            </a:r>
+            <a:endParaRPr lang="en-US" sz="3600" dirty="0"/>
+          </a:p>
+        </p:txBody>
+      </p:sp>
+      <p:sp>
+        <p:nvSpPr>
+          <p:cNvPr id="3" name="Text 1"/>
+          <p:cNvSpPr/>
+          <p:nvPr/>
+        </p:nvSpPr>
+        <p:spPr>
+          <a:xfrm>
+            <a:off x="548640" y="1234440"/>
+            <a:ext cx="8046720" cy="2057400"/>
+          </a:xfrm>
+          <a:prstGeom prst="rect">
+            <a:avLst/>
+          </a:prstGeom>
+          <a:noFill/>
+          <a:ln/>
+        </p:spPr>
+        <p:txBody>
+          <a:bodyPr wrap="square" rtlCol="0" anchor="t"/>
+          <a:lstStyle/>
+          <a:p>
+            <a:pPr marL="342900" indent="-342900">
+              <a:spcAft>
+                <a:spcPts val="800"/>
+              </a:spcAft>
+              <a:buSzPct val="100000"/>
+              <a:buChar char="•"/>
+            </a:pPr>
+            <a:r>
+              <a:rPr lang="en-US" sz="1900" dirty="0">
+                <a:solidFill>
+                  <a:srgbClr val="222222"/>
+                </a:solidFill>
+                <a:latin typeface="Noto Sans CJK KR" pitchFamily="34" charset="0"/>
+                <a:ea typeface="Noto Sans CJK KR" pitchFamily="34" charset="-122"/>
+                <a:cs typeface="Noto Sans CJK KR" pitchFamily="34" charset="-120"/>
+              </a:rPr>
+              <a:t>필드 구성</a:t>
+            </a:r>
+            <a:endParaRPr lang="en-US" sz="1900" dirty="0"/>
+          </a:p>
+          <a:p>
+            <a:pPr marL="685800" lvl="1" indent="-342900">
+              <a:spcAft>
+                <a:spcPts val="600"/>
+              </a:spcAft>
+              <a:buSzPct val="100000"/>
+              <a:buChar char="•"/>
+            </a:pPr>
+            <a:r>
+              <a:rPr lang="en-US" sz="1600" dirty="0">
+                <a:solidFill>
+                  <a:srgbClr val="444444"/>
+                </a:solidFill>
+                <a:latin typeface="Noto Sans CJK KR" pitchFamily="34" charset="0"/>
+                <a:ea typeface="Noto Sans CJK KR" pitchFamily="34" charset="-122"/>
+                <a:cs typeface="Noto Sans CJK KR" pitchFamily="34" charset="-120"/>
+              </a:rPr>
+              <a:t>preamble(8) + halt_cmd(8) + guard_ticks(10) + reserved(17) + hamming parity(7)</a:t>
+            </a:r>
+            <a:endParaRPr lang="en-US" sz="1900" dirty="0"/>
+          </a:p>
+          <a:p>
+            <a:pPr marL="342900" indent="-342900">
+              <a:spcAft>
+                <a:spcPts val="800"/>
+              </a:spcAft>
+              <a:buSzPct val="100000"/>
+              <a:buChar char="•"/>
+            </a:pPr>
+            <a:r>
+              <a:rPr lang="en-US" sz="1900" dirty="0">
+                <a:solidFill>
+                  <a:srgbClr val="222222"/>
+                </a:solidFill>
+                <a:latin typeface="Noto Sans CJK KR" pitchFamily="34" charset="0"/>
+                <a:ea typeface="Noto Sans CJK KR" pitchFamily="34" charset="-122"/>
+                <a:cs typeface="Noto Sans CJK KR" pitchFamily="34" charset="-120"/>
+              </a:rPr>
+              <a:t>halt_cmd</a:t>
+            </a:r>
+            <a:endParaRPr lang="en-US" sz="1900" dirty="0"/>
+          </a:p>
+          <a:p>
+            <a:pPr marL="685800" lvl="1" indent="-342900">
+              <a:spcAft>
+                <a:spcPts val="600"/>
+              </a:spcAft>
+              <a:buSzPct val="100000"/>
+              <a:buChar char="•"/>
+            </a:pPr>
+            <a:r>
+              <a:rPr lang="en-US" sz="1600" dirty="0">
+                <a:solidFill>
+                  <a:srgbClr val="444444"/>
+                </a:solidFill>
+                <a:latin typeface="Noto Sans CJK KR" pitchFamily="34" charset="0"/>
+                <a:ea typeface="Noto Sans CJK KR" pitchFamily="34" charset="-122"/>
+                <a:cs typeface="Noto Sans CJK KR" pitchFamily="34" charset="-120"/>
+              </a:rPr>
+              <a:t>Slave별 1비트 마스크 — err_cnt가 임계치(FAULT_TH) 초과 시 해당 비트 set, 고장 Slave 중단 명령</a:t>
+            </a:r>
+            <a:endParaRPr lang="en-US" sz="1900" dirty="0"/>
+          </a:p>
+          <a:p>
+            <a:pPr marL="342900" indent="-342900">
+              <a:spcAft>
+                <a:spcPts val="800"/>
+              </a:spcAft>
+              <a:buSzPct val="100000"/>
+              <a:buChar char="•"/>
+            </a:pPr>
+            <a:r>
+              <a:rPr lang="en-US" sz="1900" dirty="0">
+                <a:solidFill>
+                  <a:srgbClr val="222222"/>
+                </a:solidFill>
+                <a:latin typeface="Noto Sans CJK KR" pitchFamily="34" charset="0"/>
+                <a:ea typeface="Noto Sans CJK KR" pitchFamily="34" charset="-122"/>
+                <a:cs typeface="Noto Sans CJK KR" pitchFamily="34" charset="-120"/>
+              </a:rPr>
+              <a:t>에러 검출/정정</a:t>
+            </a:r>
+            <a:endParaRPr lang="en-US" sz="1900" dirty="0"/>
+          </a:p>
+          <a:p>
+            <a:pPr marL="685800" lvl="1" indent="-342900">
+              <a:buSzPct val="100000"/>
+              <a:buChar char="•"/>
+            </a:pPr>
+            <a:r>
+              <a:rPr lang="en-US" sz="1600" dirty="0">
+                <a:solidFill>
+                  <a:srgbClr val="444444"/>
+                </a:solidFill>
+                <a:latin typeface="Noto Sans CJK KR" pitchFamily="34" charset="0"/>
+                <a:ea typeface="Noto Sans CJK KR" pitchFamily="34" charset="-122"/>
+                <a:cs typeface="Noto Sans CJK KR" pitchFamily="34" charset="-120"/>
+              </a:rPr>
+              <a:t>Slave 프레임과 동일한 SEC-DED 방식 적용</a:t>
+            </a:r>
+            <a:endParaRPr lang="en-US" sz="1900" dirty="0"/>
+          </a:p>
+        </p:txBody>
+      </p:sp>
+      <p:pic>
+        <p:nvPicPr>
+          <p:cNvPr id="4" name="Image 0" descr="/home/user/SoC_Design_and_Programming/diagrams/master_frame.png"/>
+          <p:cNvPicPr>
+            <a:picLocks noChangeAspect="1"/>
+          </p:cNvPicPr>
+          <p:nvPr/>
+        </p:nvPicPr>
+        <p:blipFill>
+          <a:blip r:embed="rId2"/>
+          <a:srcRect/>
+          <a:stretch/>
+        </p:blipFill>
+        <p:spPr>
+          <a:xfrm>
+            <a:off x="548640" y="3756355"/>
+            <a:ext cx="8046720" cy="563270"/>
+          </a:xfrm>
+          <a:prstGeom prst="rect">
+            <a:avLst/>
+          </a:prstGeom>
+        </p:spPr>
+      </p:pic>
+      <p:sp>
+        <p:nvSpPr>
+          <p:cNvPr id="5" name="Text 2"/>
+          <p:cNvSpPr/>
+          <p:nvPr/>
+        </p:nvSpPr>
+        <p:spPr>
+          <a:xfrm>
+            <a:off x="548640" y="4411065"/>
+            <a:ext cx="8046720" cy="228600"/>
+          </a:xfrm>
+          <a:prstGeom prst="rect">
+            <a:avLst/>
+          </a:prstGeom>
+          <a:noFill/>
+          <a:ln/>
+        </p:spPr>
+        <p:txBody>
+          <a:bodyPr wrap="square" rtlCol="0" anchor="ctr"/>
+          <a:lstStyle/>
+          <a:p>
+            <a:pPr marL="0" indent="0" algn="ctr">
+              <a:buNone/>
+            </a:pPr>
+            <a:r>
+              <a:rPr lang="en-US" sz="900" dirty="0">
+                <a:solidFill>
+                  <a:srgbClr val="999999"/>
+                </a:solidFill>
+                <a:latin typeface="Noto Sans CJK KR" pitchFamily="34" charset="0"/>
+                <a:ea typeface="Noto Sans CJK KR" pitchFamily="34" charset="-122"/>
+                <a:cs typeface="Noto Sans CJK KR" pitchFamily="34" charset="-120"/>
+              </a:rPr>
+              <a:t>Master 프레임 비트필드 (전송 순서: preamble → halt_cmd → guard_ticks → reserved → hamming)</a:t>
+            </a:r>
+            <a:endParaRPr lang="en-US" sz="900" dirty="0"/>
+          </a:p>
+        </p:txBody>
+      </p:sp>
+      <p:sp>
+        <p:nvSpPr>
+          <p:cNvPr id="6" name="Text 3"/>
+          <p:cNvSpPr/>
+          <p:nvPr/>
+        </p:nvSpPr>
+        <p:spPr>
+          <a:xfrm>
+            <a:off x="8503920" y="4754880"/>
+            <a:ext cx="457200" cy="274320"/>
+          </a:xfrm>
+          <a:prstGeom prst="rect">
+            <a:avLst/>
+          </a:prstGeom>
+          <a:noFill/>
+          <a:ln/>
+        </p:spPr>
+        <p:txBody>
+          <a:bodyPr wrap="square" rtlCol="0" anchor="ctr"/>
+          <a:lstStyle/>
+          <a:p>
+            <a:pPr marL="0" indent="0" algn="r">
+              <a:buNone/>
+            </a:pPr>
+            <a:r>
+              <a:rPr lang="en-US" sz="1200" dirty="0">
+                <a:solidFill>
+                  <a:srgbClr val="999999"/>
+                </a:solidFill>
+                <a:latin typeface="Noto Sans CJK KR" pitchFamily="34" charset="0"/>
+                <a:ea typeface="Noto Sans CJK KR" pitchFamily="34" charset="-122"/>
+                <a:cs typeface="Noto Sans CJK KR" pitchFamily="34" charset="-120"/>
+              </a:rPr>
+              <a:t>11</a:t>
+            </a:r>
+            <a:endParaRPr lang="en-US" sz="1200" dirty="0"/>
+          </a:p>
+        </p:txBody>
+      </p:sp>
+    </p:spTree>
+  </p:cSld>
+  <p:clrMapOvr>
+    <a:masterClrMapping/>
+  </p:clrMapOvr>
+</p:sld>
+</file>
+
+<file path=ppt/slides/slide12.xml><?xml version="1.0" encoding="utf-8"?>
+<p:sld xmlns:a="http://schemas.openxmlformats.org/drawingml/2006/main" xmlns:r="http://schemas.openxmlformats.org/officeDocument/2006/relationships" xmlns:p="http://schemas.openxmlformats.org/presentationml/2006/main">
+  <p:cSld>
+    <p:spTree>
+      <p:nvGrpSpPr>
+        <p:cNvPr id="1" name=""/>
+        <p:cNvGrpSpPr/>
+        <p:nvPr/>
+      </p:nvGrpSpPr>
+      <p:grpSpPr>
+        <a:xfrm>
+          <a:off x="0" y="0"/>
+          <a:ext cx="0" cy="0"/>
+          <a:chOff x="0" y="0"/>
+          <a:chExt cx="0" cy="0"/>
+        </a:xfrm>
+      </p:grpSpPr>
+      <p:sp>
+        <p:nvSpPr>
+          <p:cNvPr id="2" name="Text 0"/>
+          <p:cNvSpPr/>
+          <p:nvPr/>
+        </p:nvSpPr>
+        <p:spPr>
+          <a:xfrm>
+            <a:off x="548640" y="274320"/>
+            <a:ext cx="8046720" cy="777240"/>
+          </a:xfrm>
+          <a:prstGeom prst="rect">
+            <a:avLst/>
+          </a:prstGeom>
+          <a:noFill/>
+          <a:ln/>
+        </p:spPr>
+        <p:txBody>
+          <a:bodyPr wrap="square" lIns="0" tIns="0" rIns="0" bIns="0" rtlCol="0" anchor="ctr"/>
+          <a:lstStyle/>
+          <a:p>
+            <a:pPr marL="0" indent="0">
+              <a:buNone/>
+            </a:pPr>
+            <a:r>
+              <a:rPr lang="en-US" sz="3600" b="1" dirty="0">
+                <a:solidFill>
+                  <a:srgbClr val="111111"/>
+                </a:solidFill>
+                <a:latin typeface="Noto Sans CJK KR" pitchFamily="34" charset="0"/>
+                <a:ea typeface="Noto Sans CJK KR" pitchFamily="34" charset="-122"/>
+                <a:cs typeface="Noto Sans CJK KR" pitchFamily="34" charset="-120"/>
+              </a:rPr>
+              <a:t>DLL - MAC: 동기화와 타임슬롯</a:t>
+            </a:r>
+            <a:endParaRPr lang="en-US" sz="3600" dirty="0"/>
+          </a:p>
+        </p:txBody>
+      </p:sp>
+      <p:sp>
+        <p:nvSpPr>
+          <p:cNvPr id="3" name="Text 1"/>
+          <p:cNvSpPr/>
+          <p:nvPr/>
+        </p:nvSpPr>
+        <p:spPr>
+          <a:xfrm>
+            <a:off x="548640" y="1234440"/>
+            <a:ext cx="8046720" cy="1371600"/>
+          </a:xfrm>
+          <a:prstGeom prst="rect">
+            <a:avLst/>
+          </a:prstGeom>
+          <a:noFill/>
+          <a:ln/>
+        </p:spPr>
+        <p:txBody>
+          <a:bodyPr wrap="square" rtlCol="0" anchor="t"/>
+          <a:lstStyle/>
+          <a:p>
+            <a:pPr marL="342900" indent="-342900">
+              <a:spcAft>
+                <a:spcPts val="600"/>
+              </a:spcAft>
+              <a:buSzPct val="100000"/>
+              <a:buChar char="•"/>
+            </a:pPr>
+            <a:r>
+              <a:rPr lang="en-US" sz="1800" dirty="0">
+                <a:solidFill>
+                  <a:srgbClr val="222222"/>
+                </a:solidFill>
+                <a:latin typeface="Noto Sans CJK KR" pitchFamily="34" charset="0"/>
+                <a:ea typeface="Noto Sans CJK KR" pitchFamily="34" charset="-122"/>
+                <a:cs typeface="Noto Sans CJK KR" pitchFamily="34" charset="-120"/>
+              </a:rPr>
+              <a:t>Sync 기준점</a:t>
+            </a:r>
+            <a:endParaRPr lang="en-US" sz="1800" dirty="0"/>
+          </a:p>
+          <a:p>
+            <a:pPr marL="685800" lvl="1" indent="-342900">
+              <a:spcAft>
+                <a:spcPts val="400"/>
+              </a:spcAft>
+              <a:buSzPct val="100000"/>
+              <a:buChar char="•"/>
+            </a:pPr>
+            <a:r>
+              <a:rPr lang="en-US" sz="1500" dirty="0">
+                <a:solidFill>
+                  <a:srgbClr val="444444"/>
+                </a:solidFill>
+                <a:latin typeface="Noto Sans CJK KR" pitchFamily="34" charset="0"/>
+                <a:ea typeface="Noto Sans CJK KR" pitchFamily="34" charset="-122"/>
+                <a:cs typeface="Noto Sans CJK KR" pitchFamily="34" charset="-120"/>
+              </a:rPr>
+              <a:t>Master가 매 사이클 마지막 슬롯에서 전송한 sync를 다음 사이클 슬롯 계산 기준점으로 사용</a:t>
+            </a:r>
+            <a:endParaRPr lang="en-US" sz="1800" dirty="0"/>
+          </a:p>
+          <a:p>
+            <a:pPr marL="342900" indent="-342900">
+              <a:spcAft>
+                <a:spcPts val="600"/>
+              </a:spcAft>
+              <a:buSzPct val="100000"/>
+              <a:buChar char="•"/>
+            </a:pPr>
+            <a:r>
+              <a:rPr lang="en-US" sz="1800" dirty="0">
+                <a:solidFill>
+                  <a:srgbClr val="222222"/>
+                </a:solidFill>
+                <a:latin typeface="Noto Sans CJK KR" pitchFamily="34" charset="0"/>
+                <a:ea typeface="Noto Sans CJK KR" pitchFamily="34" charset="-122"/>
+                <a:cs typeface="Noto Sans CJK KR" pitchFamily="34" charset="-120"/>
+              </a:rPr>
+              <a:t>슬롯 내부 구조</a:t>
+            </a:r>
+            <a:endParaRPr lang="en-US" sz="1800" dirty="0"/>
+          </a:p>
+          <a:p>
+            <a:pPr marL="685800" lvl="1" indent="-342900">
+              <a:spcAft>
+                <a:spcPts val="400"/>
+              </a:spcAft>
+              <a:buSzPct val="100000"/>
+              <a:buChar char="•"/>
+            </a:pPr>
+            <a:r>
+              <a:rPr lang="en-US" sz="1500" dirty="0">
+                <a:solidFill>
+                  <a:srgbClr val="444444"/>
+                </a:solidFill>
+                <a:latin typeface="Noto Sans CJK KR" pitchFamily="34" charset="0"/>
+                <a:ea typeface="Noto Sans CJK KR" pitchFamily="34" charset="-122"/>
+                <a:cs typeface="Noto Sans CJK KR" pitchFamily="34" charset="-120"/>
+              </a:rPr>
+              <a:t>½ guard tick 대기 → 데이터 전송 → ½ guard tick 대기</a:t>
+            </a:r>
+            <a:endParaRPr lang="en-US" sz="1800" dirty="0"/>
+          </a:p>
+          <a:p>
+            <a:pPr marL="342900" indent="-342900">
+              <a:spcAft>
+                <a:spcPts val="600"/>
+              </a:spcAft>
+              <a:buSzPct val="100000"/>
+              <a:buChar char="•"/>
+            </a:pPr>
+            <a:r>
+              <a:rPr lang="en-US" sz="1800" dirty="0">
+                <a:solidFill>
+                  <a:srgbClr val="222222"/>
+                </a:solidFill>
+                <a:latin typeface="Noto Sans CJK KR" pitchFamily="34" charset="0"/>
+                <a:ea typeface="Noto Sans CJK KR" pitchFamily="34" charset="-122"/>
+                <a:cs typeface="Noto Sans CJK KR" pitchFamily="34" charset="-120"/>
+              </a:rPr>
+              <a:t>Guard Tick의 역할</a:t>
+            </a:r>
+            <a:endParaRPr lang="en-US" sz="1800" dirty="0"/>
+          </a:p>
+          <a:p>
+            <a:pPr marL="685800" lvl="1" indent="-342900">
+              <a:buSzPct val="100000"/>
+              <a:buChar char="•"/>
+            </a:pPr>
+            <a:r>
+              <a:rPr lang="en-US" sz="1500" dirty="0">
+                <a:solidFill>
+                  <a:srgbClr val="444444"/>
+                </a:solidFill>
+                <a:latin typeface="Noto Sans CJK KR" pitchFamily="34" charset="0"/>
+                <a:ea typeface="Noto Sans CJK KR" pitchFamily="34" charset="-122"/>
+                <a:cs typeface="Noto Sans CJK KR" pitchFamily="34" charset="-120"/>
+              </a:rPr>
+              <a:t>인접 슬롯의 절반씩이 경계에서 맞물려 슬롯 침범 방지</a:t>
+            </a:r>
+            <a:endParaRPr lang="en-US" sz="1800" dirty="0"/>
+          </a:p>
+        </p:txBody>
+      </p:sp>
+      <p:pic>
+        <p:nvPicPr>
+          <p:cNvPr id="4" name="Image 0" descr="/home/user/SoC_Design_and_Programming/diagrams/slot_timeline.png"/>
+          <p:cNvPicPr>
+            <a:picLocks noChangeAspect="1"/>
+          </p:cNvPicPr>
+          <p:nvPr/>
+        </p:nvPicPr>
+        <p:blipFill>
+          <a:blip r:embed="rId2"/>
+          <a:srcRect/>
+          <a:stretch/>
+        </p:blipFill>
+        <p:spPr>
+          <a:xfrm>
+            <a:off x="2434997" y="3434951"/>
+            <a:ext cx="4274005" cy="1390142"/>
+          </a:xfrm>
+          <a:prstGeom prst="rect">
+            <a:avLst/>
+          </a:prstGeom>
+        </p:spPr>
+      </p:pic>
+      <p:sp>
+        <p:nvSpPr>
+          <p:cNvPr id="5" name="Text 2"/>
+          <p:cNvSpPr/>
+          <p:nvPr/>
+        </p:nvSpPr>
+        <p:spPr>
+          <a:xfrm>
+            <a:off x="1371600" y="4916533"/>
+            <a:ext cx="6400800" cy="228600"/>
+          </a:xfrm>
+          <a:prstGeom prst="rect">
+            <a:avLst/>
+          </a:prstGeom>
+          <a:noFill/>
+          <a:ln/>
+        </p:spPr>
+        <p:txBody>
+          <a:bodyPr wrap="square" rtlCol="0" anchor="ctr"/>
+          <a:lstStyle/>
+          <a:p>
+            <a:pPr marL="0" indent="0" algn="ctr">
+              <a:buNone/>
+            </a:pPr>
+            <a:r>
+              <a:rPr lang="en-US" sz="900" dirty="0">
+                <a:solidFill>
+                  <a:srgbClr val="999999"/>
+                </a:solidFill>
+                <a:latin typeface="Noto Sans CJK KR" pitchFamily="34" charset="0"/>
+                <a:ea typeface="Noto Sans CJK KR" pitchFamily="34" charset="-122"/>
+                <a:cs typeface="Noto Sans CJK KR" pitchFamily="34" charset="-120"/>
+              </a:rPr>
+              <a:t>Sync → [½G · 데이터 · ½G] × (Slot 0...N) → Sync</a:t>
+            </a:r>
+            <a:endParaRPr lang="en-US" sz="900" dirty="0"/>
+          </a:p>
+        </p:txBody>
+      </p:sp>
+      <p:sp>
+        <p:nvSpPr>
+          <p:cNvPr id="6" name="Text 3"/>
+          <p:cNvSpPr/>
+          <p:nvPr/>
+        </p:nvSpPr>
+        <p:spPr>
+          <a:xfrm>
+            <a:off x="8503920" y="4754880"/>
+            <a:ext cx="457200" cy="274320"/>
+          </a:xfrm>
+          <a:prstGeom prst="rect">
+            <a:avLst/>
+          </a:prstGeom>
+          <a:noFill/>
+          <a:ln/>
+        </p:spPr>
+        <p:txBody>
+          <a:bodyPr wrap="square" rtlCol="0" anchor="ctr"/>
+          <a:lstStyle/>
+          <a:p>
+            <a:pPr marL="0" indent="0" algn="r">
+              <a:buNone/>
+            </a:pPr>
+            <a:r>
+              <a:rPr lang="en-US" sz="1200" dirty="0">
+                <a:solidFill>
+                  <a:srgbClr val="999999"/>
+                </a:solidFill>
+                <a:latin typeface="Noto Sans CJK KR" pitchFamily="34" charset="0"/>
+                <a:ea typeface="Noto Sans CJK KR" pitchFamily="34" charset="-122"/>
+                <a:cs typeface="Noto Sans CJK KR" pitchFamily="34" charset="-120"/>
+              </a:rPr>
+              <a:t>12</a:t>
+            </a:r>
+            <a:endParaRPr lang="en-US" sz="1200" dirty="0"/>
+          </a:p>
+        </p:txBody>
+      </p:sp>
+    </p:spTree>
+  </p:cSld>
+  <p:clrMapOvr>
+    <a:masterClrMapping/>
+  </p:clrMapOvr>
+</p:sld>
+</file>
+
+<file path=ppt/slides/slide13.xml><?xml version="1.0" encoding="utf-8"?>
+<p:sld xmlns:a="http://schemas.openxmlformats.org/drawingml/2006/main" xmlns:r="http://schemas.openxmlformats.org/officeDocument/2006/relationships" xmlns:p="http://schemas.openxmlformats.org/presentationml/2006/main">
+  <p:cSld>
+    <p:spTree>
+      <p:nvGrpSpPr>
+        <p:cNvPr id="1" name=""/>
+        <p:cNvGrpSpPr/>
+        <p:nvPr/>
+      </p:nvGrpSpPr>
+      <p:grpSpPr>
+        <a:xfrm>
+          <a:off x="0" y="0"/>
+          <a:ext cx="0" cy="0"/>
+          <a:chOff x="0" y="0"/>
+          <a:chExt cx="0" cy="0"/>
+        </a:xfrm>
+      </p:grpSpPr>
+      <p:sp>
+        <p:nvSpPr>
+          <p:cNvPr id="2" name="Text 0"/>
+          <p:cNvSpPr/>
+          <p:nvPr/>
+        </p:nvSpPr>
+        <p:spPr>
+          <a:xfrm>
+            <a:off x="548640" y="274320"/>
+            <a:ext cx="8046720" cy="777240"/>
+          </a:xfrm>
+          <a:prstGeom prst="rect">
+            <a:avLst/>
+          </a:prstGeom>
+          <a:noFill/>
+          <a:ln/>
+        </p:spPr>
+        <p:txBody>
+          <a:bodyPr wrap="square" lIns="0" tIns="0" rIns="0" bIns="0" rtlCol="0" anchor="ctr"/>
+          <a:lstStyle/>
+          <a:p>
+            <a:pPr marL="0" indent="0">
+              <a:buNone/>
+            </a:pPr>
+            <a:r>
+              <a:rPr lang="en-US" sz="3600" b="1" dirty="0">
+                <a:solidFill>
+                  <a:srgbClr val="111111"/>
+                </a:solidFill>
+                <a:latin typeface="Noto Sans CJK KR" pitchFamily="34" charset="0"/>
+                <a:ea typeface="Noto Sans CJK KR" pitchFamily="34" charset="-122"/>
+                <a:cs typeface="Noto Sans CJK KR" pitchFamily="34" charset="-120"/>
+              </a:rPr>
+              <a:t>DLL - 클럭 동기</a:t>
             </a:r>
             <a:endParaRPr lang="en-US" sz="3600" dirty="0"/>
           </a:p>
@@ -3728,12 +2119,12 @@
                 <a:ea typeface="Noto Sans CJK KR" pitchFamily="34" charset="-122"/>
                 <a:cs typeface="Noto Sans CJK KR" pitchFamily="34" charset="-120"/>
               </a:rPr>
-              <a:t>RT·안전-critical 통신 시스템의 요구사항</a:t>
+              <a:t>Master·Slave는 클럭을 공유하지 않음</a:t>
             </a:r>
             <a:endParaRPr lang="en-US" sz="2000" dirty="0"/>
           </a:p>
           <a:p>
-            <a:pPr lvl="1" marL="685800" indent="-342900">
+            <a:pPr marL="685800" lvl="1" indent="-342900">
               <a:spcAft>
                 <a:spcPts val="800"/>
               </a:spcAft>
@@ -3749,28 +2140,7 @@
                 <a:ea typeface="Noto Sans CJK KR" pitchFamily="34" charset="-122"/>
                 <a:cs typeface="Noto Sans CJK KR" pitchFamily="34" charset="-120"/>
               </a:rPr>
-              <a:t>예측 가능성(Predictability) — 시스템의 시간적 동작이 사전에 보장되어야 함</a:t>
-            </a:r>
-            <a:endParaRPr lang="en-US" sz="2000" dirty="0"/>
-          </a:p>
-          <a:p>
-            <a:pPr lvl="1" marL="685800" indent="-342900">
-              <a:spcAft>
-                <a:spcPts val="800"/>
-              </a:spcAft>
-              <a:buSzPct val="100000"/>
-              <a:buChar char="•"/>
-            </a:pPr>
-            <a:r>
-              <a:rPr lang="en-US" sz="1700" dirty="0">
-                <a:solidFill>
-                  <a:srgbClr val="444444"/>
-                </a:solidFill>
-                <a:latin typeface="Noto Sans CJK KR" pitchFamily="34" charset="0"/>
-                <a:ea typeface="Noto Sans CJK KR" pitchFamily="34" charset="-122"/>
-                <a:cs typeface="Noto Sans CJK KR" pitchFamily="34" charset="-120"/>
-              </a:rPr>
-              <a:t>결정성(Determinism) — 메시지 수신 시점이 미리 알려져 있어야 함</a:t>
+              <a:t>클럭 오차가 통신에 치명적인 방해 요인 — guard tick만으로는 누적 오차를 막을 수 없음</a:t>
             </a:r>
             <a:endParaRPr lang="en-US" sz="2000" dirty="0"/>
           </a:p>
@@ -3791,12 +2161,12 @@
                 <a:ea typeface="Noto Sans CJK KR" pitchFamily="34" charset="-122"/>
                 <a:cs typeface="Noto Sans CJK KR" pitchFamily="34" charset="-120"/>
               </a:rPr>
-              <a:t>사건 기반(Event-Triggered) 통신의 한계</a:t>
+              <a:t>분주 클럭으로 동일 타이밍 가정</a:t>
             </a:r>
             <a:endParaRPr lang="en-US" sz="2000" dirty="0"/>
           </a:p>
           <a:p>
-            <a:pPr lvl="1" marL="685800" indent="-342900">
+            <a:pPr marL="685800" lvl="1" indent="-342900">
               <a:spcAft>
                 <a:spcPts val="800"/>
               </a:spcAft>
@@ -3812,12 +2182,197 @@
                 <a:ea typeface="Noto Sans CJK KR" pitchFamily="34" charset="-122"/>
                 <a:cs typeface="Noto Sans CJK KR" pitchFamily="34" charset="-120"/>
               </a:rPr>
-              <a:t>충돌과 재전송으로 지연이 랜덤하게 변동 → 예측 불가</a:t>
+              <a:t>DIV 값을 AXI 레지스터로 설정, Master·Slave 양쪽에 동일한 DIV 값을 쓴다고 가정 — 분주 클럭은 메인 클럭 / (DIV + 1)</a:t>
             </a:r>
             <a:endParaRPr lang="en-US" sz="2000" dirty="0"/>
           </a:p>
           <a:p>
-            <a:pPr lvl="1" marL="685800" indent="-342900">
+            <a:pPr marL="342900" indent="-342900">
+              <a:spcAft>
+                <a:spcPts val="1200"/>
+              </a:spcAft>
+              <a:buSzPct val="100000"/>
+              <a:buChar char="•"/>
+            </a:pPr>
+            <a:r>
+              <a:rPr lang="en-US" sz="2000" dirty="0">
+                <a:solidFill>
+                  <a:srgbClr val="222222"/>
+                </a:solidFill>
+                <a:latin typeface="Noto Sans CJK KR" pitchFamily="34" charset="0"/>
+                <a:ea typeface="Noto Sans CJK KR" pitchFamily="34" charset="-122"/>
+                <a:cs typeface="Noto Sans CJK KR" pitchFamily="34" charset="-120"/>
+              </a:rPr>
+              <a:t>샘플링 방식</a:t>
+            </a:r>
+            <a:endParaRPr lang="en-US" sz="2000" dirty="0"/>
+          </a:p>
+          <a:p>
+            <a:pPr marL="685800" lvl="1" indent="-342900">
+              <a:buSzPct val="100000"/>
+              <a:buChar char="•"/>
+            </a:pPr>
+            <a:r>
+              <a:rPr lang="en-US" sz="1700" dirty="0">
+                <a:solidFill>
+                  <a:srgbClr val="444444"/>
+                </a:solidFill>
+                <a:latin typeface="Noto Sans CJK KR" pitchFamily="34" charset="0"/>
+                <a:ea typeface="Noto Sans CJK KR" pitchFamily="34" charset="-122"/>
+                <a:cs typeface="Noto Sans CJK KR" pitchFamily="34" charset="-120"/>
+              </a:rPr>
+              <a:t>수신 샘플링은 비트 구간의 중간 지점에서 1회만 수행</a:t>
+            </a:r>
+            <a:endParaRPr lang="en-US" sz="2000" dirty="0"/>
+          </a:p>
+        </p:txBody>
+      </p:sp>
+      <p:sp>
+        <p:nvSpPr>
+          <p:cNvPr id="4" name="Text 2"/>
+          <p:cNvSpPr/>
+          <p:nvPr/>
+        </p:nvSpPr>
+        <p:spPr>
+          <a:xfrm>
+            <a:off x="8503920" y="4754880"/>
+            <a:ext cx="457200" cy="274320"/>
+          </a:xfrm>
+          <a:prstGeom prst="rect">
+            <a:avLst/>
+          </a:prstGeom>
+          <a:noFill/>
+          <a:ln/>
+        </p:spPr>
+        <p:txBody>
+          <a:bodyPr wrap="square" rtlCol="0" anchor="ctr"/>
+          <a:lstStyle/>
+          <a:p>
+            <a:pPr marL="0" indent="0" algn="r">
+              <a:buNone/>
+            </a:pPr>
+            <a:r>
+              <a:rPr lang="en-US" sz="1200" dirty="0">
+                <a:solidFill>
+                  <a:srgbClr val="999999"/>
+                </a:solidFill>
+                <a:latin typeface="Noto Sans CJK KR" pitchFamily="34" charset="0"/>
+                <a:ea typeface="Noto Sans CJK KR" pitchFamily="34" charset="-122"/>
+                <a:cs typeface="Noto Sans CJK KR" pitchFamily="34" charset="-120"/>
+              </a:rPr>
+              <a:t>13</a:t>
+            </a:r>
+            <a:endParaRPr lang="en-US" sz="1200" dirty="0"/>
+          </a:p>
+        </p:txBody>
+      </p:sp>
+    </p:spTree>
+  </p:cSld>
+  <p:clrMapOvr>
+    <a:masterClrMapping/>
+  </p:clrMapOvr>
+</p:sld>
+</file>
+
+<file path=ppt/slides/slide14.xml><?xml version="1.0" encoding="utf-8"?>
+<p:sld xmlns:a="http://schemas.openxmlformats.org/drawingml/2006/main" xmlns:r="http://schemas.openxmlformats.org/officeDocument/2006/relationships" xmlns:p="http://schemas.openxmlformats.org/presentationml/2006/main">
+  <p:cSld>
+    <p:spTree>
+      <p:nvGrpSpPr>
+        <p:cNvPr id="1" name=""/>
+        <p:cNvGrpSpPr/>
+        <p:nvPr/>
+      </p:nvGrpSpPr>
+      <p:grpSpPr>
+        <a:xfrm>
+          <a:off x="0" y="0"/>
+          <a:ext cx="0" cy="0"/>
+          <a:chOff x="0" y="0"/>
+          <a:chExt cx="0" cy="0"/>
+        </a:xfrm>
+      </p:grpSpPr>
+      <p:sp>
+        <p:nvSpPr>
+          <p:cNvPr id="2" name="Text 0"/>
+          <p:cNvSpPr/>
+          <p:nvPr/>
+        </p:nvSpPr>
+        <p:spPr>
+          <a:xfrm>
+            <a:off x="548640" y="274320"/>
+            <a:ext cx="8046720" cy="777240"/>
+          </a:xfrm>
+          <a:prstGeom prst="rect">
+            <a:avLst/>
+          </a:prstGeom>
+          <a:noFill/>
+          <a:ln/>
+        </p:spPr>
+        <p:txBody>
+          <a:bodyPr wrap="square" lIns="0" tIns="0" rIns="0" bIns="0" rtlCol="0" anchor="ctr"/>
+          <a:lstStyle/>
+          <a:p>
+            <a:pPr marL="0" indent="0">
+              <a:buNone/>
+            </a:pPr>
+            <a:r>
+              <a:rPr lang="en-US" sz="3600" b="1" dirty="0">
+                <a:solidFill>
+                  <a:srgbClr val="111111"/>
+                </a:solidFill>
+                <a:latin typeface="Noto Sans CJK KR" pitchFamily="34" charset="0"/>
+                <a:ea typeface="Noto Sans CJK KR" pitchFamily="34" charset="-122"/>
+                <a:cs typeface="Noto Sans CJK KR" pitchFamily="34" charset="-120"/>
+              </a:rPr>
+              <a:t>DLL - Flow Control</a:t>
+            </a:r>
+            <a:endParaRPr lang="en-US" sz="3600" dirty="0"/>
+          </a:p>
+        </p:txBody>
+      </p:sp>
+      <p:sp>
+        <p:nvSpPr>
+          <p:cNvPr id="3" name="Text 1"/>
+          <p:cNvSpPr/>
+          <p:nvPr/>
+        </p:nvSpPr>
+        <p:spPr>
+          <a:xfrm>
+            <a:off x="548640" y="1234440"/>
+            <a:ext cx="4023360" cy="2971800"/>
+          </a:xfrm>
+          <a:prstGeom prst="rect">
+            <a:avLst/>
+          </a:prstGeom>
+          <a:noFill/>
+          <a:ln/>
+        </p:spPr>
+        <p:txBody>
+          <a:bodyPr wrap="square" rtlCol="0" anchor="t"/>
+          <a:lstStyle/>
+          <a:p>
+            <a:pPr marL="342900" indent="-342900">
+              <a:spcAft>
+                <a:spcPts val="1200"/>
+              </a:spcAft>
+              <a:buSzPct val="100000"/>
+              <a:buChar char="•"/>
+            </a:pPr>
+            <a:r>
+              <a:rPr lang="en-US" sz="2000" dirty="0">
+                <a:solidFill>
+                  <a:srgbClr val="222222"/>
+                </a:solidFill>
+                <a:latin typeface="Noto Sans CJK KR" pitchFamily="34" charset="0"/>
+                <a:ea typeface="Noto Sans CJK KR" pitchFamily="34" charset="-122"/>
+                <a:cs typeface="Noto Sans CJK KR" pitchFamily="34" charset="-120"/>
+              </a:rPr>
+              <a:t>1비트 에러</a:t>
+            </a:r>
+            <a:endParaRPr lang="en-US" sz="2000" dirty="0"/>
+          </a:p>
+          <a:p>
+            <a:pPr marL="685800" lvl="1" indent="-342900">
               <a:spcAft>
                 <a:spcPts val="800"/>
               </a:spcAft>
@@ -3833,7 +2388,261 @@
                 <a:ea typeface="Noto Sans CJK KR" pitchFamily="34" charset="-122"/>
                 <a:cs typeface="Noto Sans CJK KR" pitchFamily="34" charset="-120"/>
               </a:rPr>
-              <a:t>자동차·산업용 네트워크에서는 이 불확실성이 곧 안전 문제로 직결</a:t>
+              <a:t>Hamming으로 정정하여 정상 데이터로 사용</a:t>
+            </a:r>
+            <a:endParaRPr lang="en-US" sz="2000" dirty="0"/>
+          </a:p>
+          <a:p>
+            <a:pPr marL="342900" indent="-342900">
+              <a:spcAft>
+                <a:spcPts val="1200"/>
+              </a:spcAft>
+              <a:buSzPct val="100000"/>
+              <a:buChar char="•"/>
+            </a:pPr>
+            <a:r>
+              <a:rPr lang="en-US" sz="2000" dirty="0">
+                <a:solidFill>
+                  <a:srgbClr val="222222"/>
+                </a:solidFill>
+                <a:latin typeface="Noto Sans CJK KR" pitchFamily="34" charset="0"/>
+                <a:ea typeface="Noto Sans CJK KR" pitchFamily="34" charset="-122"/>
+                <a:cs typeface="Noto Sans CJK KR" pitchFamily="34" charset="-120"/>
+              </a:rPr>
+              <a:t>2비트 에러 (정정 불가)</a:t>
+            </a:r>
+            <a:endParaRPr lang="en-US" sz="2000" dirty="0"/>
+          </a:p>
+          <a:p>
+            <a:pPr marL="685800" lvl="1" indent="-342900">
+              <a:spcAft>
+                <a:spcPts val="800"/>
+              </a:spcAft>
+              <a:buSzPct val="100000"/>
+              <a:buChar char="•"/>
+            </a:pPr>
+            <a:r>
+              <a:rPr lang="en-US" sz="1700" dirty="0">
+                <a:solidFill>
+                  <a:srgbClr val="444444"/>
+                </a:solidFill>
+                <a:latin typeface="Noto Sans CJK KR" pitchFamily="34" charset="0"/>
+                <a:ea typeface="Noto Sans CJK KR" pitchFamily="34" charset="-122"/>
+                <a:cs typeface="Noto Sans CJK KR" pitchFamily="34" charset="-120"/>
+              </a:rPr>
+              <a:t>해당 프레임을 무효 처리하고 폐기, 이전 값 유지</a:t>
+            </a:r>
+            <a:endParaRPr lang="en-US" sz="2000" dirty="0"/>
+          </a:p>
+          <a:p>
+            <a:pPr marL="342900" indent="-342900">
+              <a:spcAft>
+                <a:spcPts val="1200"/>
+              </a:spcAft>
+              <a:buSzPct val="100000"/>
+              <a:buChar char="•"/>
+            </a:pPr>
+            <a:r>
+              <a:rPr lang="en-US" sz="2000" dirty="0">
+                <a:solidFill>
+                  <a:srgbClr val="222222"/>
+                </a:solidFill>
+                <a:latin typeface="Noto Sans CJK KR" pitchFamily="34" charset="0"/>
+                <a:ea typeface="Noto Sans CJK KR" pitchFamily="34" charset="-122"/>
+                <a:cs typeface="Noto Sans CJK KR" pitchFamily="34" charset="-120"/>
+              </a:rPr>
+              <a:t>Implicit Flow Control</a:t>
+            </a:r>
+            <a:endParaRPr lang="en-US" sz="2000" dirty="0"/>
+          </a:p>
+          <a:p>
+            <a:pPr marL="685800" lvl="1" indent="-342900">
+              <a:buSzPct val="100000"/>
+              <a:buChar char="•"/>
+            </a:pPr>
+            <a:r>
+              <a:rPr lang="en-US" sz="1700" dirty="0">
+                <a:solidFill>
+                  <a:srgbClr val="444444"/>
+                </a:solidFill>
+                <a:latin typeface="Noto Sans CJK KR" pitchFamily="34" charset="0"/>
+                <a:ea typeface="Noto Sans CJK KR" pitchFamily="34" charset="-122"/>
+                <a:cs typeface="Noto Sans CJK KR" pitchFamily="34" charset="-120"/>
+              </a:rPr>
+              <a:t>명시적 재전송 요청(ARQ/NACK) 없음 — 다음 TDMA 사이클의 갱신 데이터를 기다림</a:t>
+            </a:r>
+            <a:endParaRPr lang="en-US" sz="2000" dirty="0"/>
+          </a:p>
+        </p:txBody>
+      </p:sp>
+      <p:pic>
+        <p:nvPicPr>
+          <p:cNvPr id="4" name="Image 0" descr="/home/user/SoC_Design_and_Programming/diagrams/flow_control.png"/>
+          <p:cNvPicPr>
+            <a:picLocks noChangeAspect="1"/>
+          </p:cNvPicPr>
+          <p:nvPr/>
+        </p:nvPicPr>
+        <p:blipFill>
+          <a:blip r:embed="rId2"/>
+          <a:srcRect/>
+          <a:stretch/>
+        </p:blipFill>
+        <p:spPr>
+          <a:xfrm>
+            <a:off x="5029200" y="1371600"/>
+            <a:ext cx="3200400" cy="2319606"/>
+          </a:xfrm>
+          <a:prstGeom prst="rect">
+            <a:avLst/>
+          </a:prstGeom>
+        </p:spPr>
+      </p:pic>
+      <p:sp>
+        <p:nvSpPr>
+          <p:cNvPr id="5" name="Text 2"/>
+          <p:cNvSpPr/>
+          <p:nvPr/>
+        </p:nvSpPr>
+        <p:spPr>
+          <a:xfrm>
+            <a:off x="8503920" y="4754880"/>
+            <a:ext cx="457200" cy="274320"/>
+          </a:xfrm>
+          <a:prstGeom prst="rect">
+            <a:avLst/>
+          </a:prstGeom>
+          <a:noFill/>
+          <a:ln/>
+        </p:spPr>
+        <p:txBody>
+          <a:bodyPr wrap="square" rtlCol="0" anchor="ctr"/>
+          <a:lstStyle/>
+          <a:p>
+            <a:pPr marL="0" indent="0" algn="r">
+              <a:buNone/>
+            </a:pPr>
+            <a:r>
+              <a:rPr lang="en-US" sz="1200" dirty="0">
+                <a:solidFill>
+                  <a:srgbClr val="999999"/>
+                </a:solidFill>
+                <a:latin typeface="Noto Sans CJK KR" pitchFamily="34" charset="0"/>
+                <a:ea typeface="Noto Sans CJK KR" pitchFamily="34" charset="-122"/>
+                <a:cs typeface="Noto Sans CJK KR" pitchFamily="34" charset="-120"/>
+              </a:rPr>
+              <a:t>14</a:t>
+            </a:r>
+            <a:endParaRPr lang="en-US" sz="1200" dirty="0"/>
+          </a:p>
+        </p:txBody>
+      </p:sp>
+    </p:spTree>
+  </p:cSld>
+  <p:clrMapOvr>
+    <a:masterClrMapping/>
+  </p:clrMapOvr>
+</p:sld>
+</file>
+
+<file path=ppt/slides/slide15.xml><?xml version="1.0" encoding="utf-8"?>
+<p:sld xmlns:a="http://schemas.openxmlformats.org/drawingml/2006/main" xmlns:r="http://schemas.openxmlformats.org/officeDocument/2006/relationships" xmlns:p="http://schemas.openxmlformats.org/presentationml/2006/main">
+  <p:cSld>
+    <p:bg>
+      <p:bgPr>
+        <a:solidFill>
+          <a:srgbClr val="F2F2F2"/>
+        </a:solidFill>
+        <a:effectLst/>
+      </p:bgPr>
+    </p:bg>
+    <p:spTree>
+      <p:nvGrpSpPr>
+        <p:cNvPr id="1" name=""/>
+        <p:cNvGrpSpPr/>
+        <p:nvPr/>
+      </p:nvGrpSpPr>
+      <p:grpSpPr>
+        <a:xfrm>
+          <a:off x="0" y="0"/>
+          <a:ext cx="0" cy="0"/>
+          <a:chOff x="0" y="0"/>
+          <a:chExt cx="0" cy="0"/>
+        </a:xfrm>
+      </p:grpSpPr>
+      <p:sp>
+        <p:nvSpPr>
+          <p:cNvPr id="2" name="Text 0"/>
+          <p:cNvSpPr/>
+          <p:nvPr/>
+        </p:nvSpPr>
+        <p:spPr>
+          <a:xfrm>
+            <a:off x="548640" y="1828800"/>
+            <a:ext cx="8046720" cy="1371600"/>
+          </a:xfrm>
+          <a:prstGeom prst="rect">
+            <a:avLst/>
+          </a:prstGeom>
+          <a:noFill/>
+          <a:ln/>
+        </p:spPr>
+        <p:txBody>
+          <a:bodyPr wrap="square" rtlCol="0" anchor="ctr"/>
+          <a:lstStyle/>
+          <a:p>
+            <a:pPr marL="0" indent="0" algn="l">
+              <a:buNone/>
+            </a:pPr>
+            <a:r>
+              <a:rPr lang="en-US" sz="4000" b="1" dirty="0">
+                <a:solidFill>
+                  <a:srgbClr val="111111"/>
+                </a:solidFill>
+                <a:latin typeface="Noto Sans CJK KR" pitchFamily="34" charset="0"/>
+                <a:ea typeface="Noto Sans CJK KR" pitchFamily="34" charset="-122"/>
+                <a:cs typeface="Noto Sans CJK KR" pitchFamily="34" charset="-120"/>
+              </a:rPr>
+              <a:t>3. Master / Slave 구현 사항</a:t>
+            </a:r>
+            <a:endParaRPr lang="en-US" sz="4000" dirty="0"/>
+          </a:p>
+        </p:txBody>
+      </p:sp>
+      <p:sp>
+        <p:nvSpPr>
+          <p:cNvPr id="3" name="Text 1"/>
+          <p:cNvSpPr/>
+          <p:nvPr/>
+        </p:nvSpPr>
+        <p:spPr>
+          <a:xfrm>
+            <a:off x="548640" y="3108960"/>
+            <a:ext cx="8046720" cy="457200"/>
+          </a:xfrm>
+          <a:prstGeom prst="rect">
+            <a:avLst/>
+          </a:prstGeom>
+          <a:noFill/>
+          <a:ln/>
+        </p:spPr>
+        <p:txBody>
+          <a:bodyPr wrap="square" rtlCol="0" anchor="ctr"/>
+          <a:lstStyle/>
+          <a:p>
+            <a:pPr marL="0" indent="0" algn="l">
+              <a:buNone/>
+            </a:pPr>
+            <a:r>
+              <a:rPr lang="en-US" sz="2000" dirty="0">
+                <a:solidFill>
+                  <a:srgbClr val="666666"/>
+                </a:solidFill>
+                <a:latin typeface="Noto Sans CJK KR" pitchFamily="34" charset="0"/>
+                <a:ea typeface="Noto Sans CJK KR" pitchFamily="34" charset="-122"/>
+                <a:cs typeface="Noto Sans CJK KR" pitchFamily="34" charset="-120"/>
+              </a:rPr>
+              <a:t>하드웨어 블록 구성부터 고장 처리 로직까지 구현 세부사항을 짚는다</a:t>
             </a:r>
             <a:endParaRPr lang="en-US" sz="2000" dirty="0"/>
           </a:p>
@@ -3860,7 +2669,7 @@
           <a:bodyPr wrap="square" rtlCol="0" anchor="ctr"/>
           <a:lstStyle/>
           <a:p>
-            <a:pPr algn="r" indent="0" marL="0">
+            <a:pPr marL="0" indent="0" algn="r">
               <a:buNone/>
             </a:pPr>
             <a:r>
@@ -3872,9 +2681,987 @@
                 <a:ea typeface="Noto Sans CJK KR" pitchFamily="34" charset="-122"/>
                 <a:cs typeface="Noto Sans CJK KR" pitchFamily="34" charset="-120"/>
               </a:rPr>
-              <a:t>4</a:t>
+              <a:t>15</a:t>
             </a:r>
             <a:endParaRPr lang="en-US" sz="1200" dirty="0"/>
+          </a:p>
+        </p:txBody>
+      </p:sp>
+    </p:spTree>
+  </p:cSld>
+  <p:clrMapOvr>
+    <a:masterClrMapping/>
+  </p:clrMapOvr>
+</p:sld>
+</file>
+
+<file path=ppt/slides/slide16.xml><?xml version="1.0" encoding="utf-8"?>
+<p:sld xmlns:a="http://schemas.openxmlformats.org/drawingml/2006/main" xmlns:r="http://schemas.openxmlformats.org/officeDocument/2006/relationships" xmlns:p="http://schemas.openxmlformats.org/presentationml/2006/main">
+  <p:cSld>
+    <p:spTree>
+      <p:nvGrpSpPr>
+        <p:cNvPr id="1" name=""/>
+        <p:cNvGrpSpPr/>
+        <p:nvPr/>
+      </p:nvGrpSpPr>
+      <p:grpSpPr>
+        <a:xfrm>
+          <a:off x="0" y="0"/>
+          <a:ext cx="0" cy="0"/>
+          <a:chOff x="0" y="0"/>
+          <a:chExt cx="0" cy="0"/>
+        </a:xfrm>
+      </p:grpSpPr>
+      <p:sp>
+        <p:nvSpPr>
+          <p:cNvPr id="2" name="Text 0"/>
+          <p:cNvSpPr/>
+          <p:nvPr/>
+        </p:nvSpPr>
+        <p:spPr>
+          <a:xfrm>
+            <a:off x="548640" y="274320"/>
+            <a:ext cx="8046720" cy="777240"/>
+          </a:xfrm>
+          <a:prstGeom prst="rect">
+            <a:avLst/>
+          </a:prstGeom>
+          <a:noFill/>
+          <a:ln/>
+        </p:spPr>
+        <p:txBody>
+          <a:bodyPr wrap="square" lIns="0" tIns="0" rIns="0" bIns="0" rtlCol="0" anchor="ctr"/>
+          <a:lstStyle/>
+          <a:p>
+            <a:pPr marL="0" indent="0">
+              <a:buNone/>
+            </a:pPr>
+            <a:r>
+              <a:rPr lang="en-US" sz="3600" b="1" dirty="0">
+                <a:solidFill>
+                  <a:srgbClr val="111111"/>
+                </a:solidFill>
+                <a:latin typeface="Noto Sans CJK KR" pitchFamily="34" charset="0"/>
+                <a:ea typeface="Noto Sans CJK KR" pitchFamily="34" charset="-122"/>
+                <a:cs typeface="Noto Sans CJK KR" pitchFamily="34" charset="-120"/>
+              </a:rPr>
+              <a:t>Master 전체 구조</a:t>
+            </a:r>
+            <a:endParaRPr lang="en-US" sz="3600" dirty="0"/>
+          </a:p>
+        </p:txBody>
+      </p:sp>
+      <p:sp>
+        <p:nvSpPr>
+          <p:cNvPr id="3" name="Text 1"/>
+          <p:cNvSpPr/>
+          <p:nvPr/>
+        </p:nvSpPr>
+        <p:spPr>
+          <a:xfrm>
+            <a:off x="548640" y="1188720"/>
+            <a:ext cx="8046720" cy="594360"/>
+          </a:xfrm>
+          <a:prstGeom prst="rect">
+            <a:avLst/>
+          </a:prstGeom>
+          <a:noFill/>
+          <a:ln/>
+        </p:spPr>
+        <p:txBody>
+          <a:bodyPr wrap="square" rtlCol="0" anchor="t"/>
+          <a:lstStyle/>
+          <a:p>
+            <a:pPr marL="342900" indent="-342900">
+              <a:spcAft>
+                <a:spcPts val="600"/>
+              </a:spcAft>
+              <a:buSzPct val="100000"/>
+              <a:buChar char="•"/>
+            </a:pPr>
+            <a:r>
+              <a:rPr lang="en-US" sz="1700" dirty="0">
+                <a:solidFill>
+                  <a:srgbClr val="222222"/>
+                </a:solidFill>
+                <a:latin typeface="Noto Sans CJK KR" pitchFamily="34" charset="0"/>
+                <a:ea typeface="Noto Sans CJK KR" pitchFamily="34" charset="-122"/>
+                <a:cs typeface="Noto Sans CJK KR" pitchFamily="34" charset="-120"/>
+              </a:rPr>
+              <a:t>테스트 장치 · PS · PL(Master IP 포함) · GPIO 네 영역으로 구성</a:t>
+            </a:r>
+            <a:endParaRPr lang="en-US" sz="1700" dirty="0"/>
+          </a:p>
+          <a:p>
+            <a:pPr marL="342900" indent="-342900">
+              <a:spcAft>
+                <a:spcPts val="600"/>
+              </a:spcAft>
+              <a:buSzPct val="100000"/>
+              <a:buChar char="•"/>
+            </a:pPr>
+            <a:r>
+              <a:rPr lang="en-US" sz="1700" dirty="0">
+                <a:solidFill>
+                  <a:srgbClr val="222222"/>
+                </a:solidFill>
+                <a:latin typeface="Noto Sans CJK KR" pitchFamily="34" charset="0"/>
+                <a:ea typeface="Noto Sans CJK KR" pitchFamily="34" charset="-122"/>
+                <a:cs typeface="Noto Sans CJK KR" pitchFamily="34" charset="-120"/>
+              </a:rPr>
+              <a:t>GPIO를 통해 Slave와 TX/RX 시리얼로 연결 — 이후 슬라이드에서 블록을 하나씩 확대</a:t>
+            </a:r>
+            <a:endParaRPr lang="en-US" sz="1700" dirty="0"/>
+          </a:p>
+        </p:txBody>
+      </p:sp>
+      <p:pic>
+        <p:nvPicPr>
+          <p:cNvPr id="4" name="Image 0" descr="/home/user/SoC_Design_and_Programming/diagrams/section3/zoom/master_overview.png"/>
+          <p:cNvPicPr>
+            <a:picLocks noChangeAspect="1"/>
+          </p:cNvPicPr>
+          <p:nvPr/>
+        </p:nvPicPr>
+        <p:blipFill>
+          <a:blip r:embed="rId2"/>
+          <a:srcRect/>
+          <a:stretch/>
+        </p:blipFill>
+        <p:spPr>
+          <a:xfrm>
+            <a:off x="548640" y="2355513"/>
+            <a:ext cx="8046720" cy="2186162"/>
+          </a:xfrm>
+          <a:prstGeom prst="rect">
+            <a:avLst/>
+          </a:prstGeom>
+        </p:spPr>
+      </p:pic>
+      <p:sp>
+        <p:nvSpPr>
+          <p:cNvPr id="5" name="Text 2"/>
+          <p:cNvSpPr/>
+          <p:nvPr/>
+        </p:nvSpPr>
+        <p:spPr>
+          <a:xfrm>
+            <a:off x="8503920" y="4754880"/>
+            <a:ext cx="457200" cy="274320"/>
+          </a:xfrm>
+          <a:prstGeom prst="rect">
+            <a:avLst/>
+          </a:prstGeom>
+          <a:noFill/>
+          <a:ln/>
+        </p:spPr>
+        <p:txBody>
+          <a:bodyPr wrap="square" rtlCol="0" anchor="ctr"/>
+          <a:lstStyle/>
+          <a:p>
+            <a:pPr marL="0" indent="0" algn="r">
+              <a:buNone/>
+            </a:pPr>
+            <a:r>
+              <a:rPr lang="en-US" sz="1200" dirty="0">
+                <a:solidFill>
+                  <a:srgbClr val="999999"/>
+                </a:solidFill>
+                <a:latin typeface="Noto Sans CJK KR" pitchFamily="34" charset="0"/>
+                <a:ea typeface="Noto Sans CJK KR" pitchFamily="34" charset="-122"/>
+                <a:cs typeface="Noto Sans CJK KR" pitchFamily="34" charset="-120"/>
+              </a:rPr>
+              <a:t>16</a:t>
+            </a:r>
+            <a:endParaRPr lang="en-US" sz="1200" dirty="0"/>
+          </a:p>
+        </p:txBody>
+      </p:sp>
+    </p:spTree>
+  </p:cSld>
+  <p:clrMapOvr>
+    <a:masterClrMapping/>
+  </p:clrMapOvr>
+</p:sld>
+</file>
+
+<file path=ppt/slides/slide17.xml><?xml version="1.0" encoding="utf-8"?>
+<p:sld xmlns:a="http://schemas.openxmlformats.org/drawingml/2006/main" xmlns:r="http://schemas.openxmlformats.org/officeDocument/2006/relationships" xmlns:p="http://schemas.openxmlformats.org/presentationml/2006/main">
+  <p:cSld>
+    <p:spTree>
+      <p:nvGrpSpPr>
+        <p:cNvPr id="1" name=""/>
+        <p:cNvGrpSpPr/>
+        <p:nvPr/>
+      </p:nvGrpSpPr>
+      <p:grpSpPr>
+        <a:xfrm>
+          <a:off x="0" y="0"/>
+          <a:ext cx="0" cy="0"/>
+          <a:chOff x="0" y="0"/>
+          <a:chExt cx="0" cy="0"/>
+        </a:xfrm>
+      </p:grpSpPr>
+      <p:sp>
+        <p:nvSpPr>
+          <p:cNvPr id="2" name="Text 0"/>
+          <p:cNvSpPr/>
+          <p:nvPr/>
+        </p:nvSpPr>
+        <p:spPr>
+          <a:xfrm>
+            <a:off x="548640" y="274320"/>
+            <a:ext cx="8046720" cy="777240"/>
+          </a:xfrm>
+          <a:prstGeom prst="rect">
+            <a:avLst/>
+          </a:prstGeom>
+          <a:noFill/>
+          <a:ln/>
+        </p:spPr>
+        <p:txBody>
+          <a:bodyPr wrap="square" lIns="0" tIns="0" rIns="0" bIns="0" rtlCol="0" anchor="ctr"/>
+          <a:lstStyle/>
+          <a:p>
+            <a:pPr marL="0" indent="0">
+              <a:buNone/>
+            </a:pPr>
+            <a:r>
+              <a:rPr lang="en-US" sz="3600" b="1" dirty="0">
+                <a:solidFill>
+                  <a:srgbClr val="111111"/>
+                </a:solidFill>
+                <a:latin typeface="Noto Sans CJK KR" pitchFamily="34" charset="0"/>
+                <a:ea typeface="Noto Sans CJK KR" pitchFamily="34" charset="-122"/>
+                <a:cs typeface="Noto Sans CJK KR" pitchFamily="34" charset="-120"/>
+              </a:rPr>
+              <a:t>Master - GPIO 확대</a:t>
+            </a:r>
+            <a:endParaRPr lang="en-US" sz="3600" dirty="0"/>
+          </a:p>
+        </p:txBody>
+      </p:sp>
+      <p:sp>
+        <p:nvSpPr>
+          <p:cNvPr id="3" name="Text 1"/>
+          <p:cNvSpPr/>
+          <p:nvPr/>
+        </p:nvSpPr>
+        <p:spPr>
+          <a:xfrm>
+            <a:off x="548640" y="1234440"/>
+            <a:ext cx="4023360" cy="2971800"/>
+          </a:xfrm>
+          <a:prstGeom prst="rect">
+            <a:avLst/>
+          </a:prstGeom>
+          <a:noFill/>
+          <a:ln/>
+        </p:spPr>
+        <p:txBody>
+          <a:bodyPr wrap="square" rtlCol="0" anchor="t"/>
+          <a:lstStyle/>
+          <a:p>
+            <a:pPr marL="342900" indent="-342900">
+              <a:spcAft>
+                <a:spcPts val="1000"/>
+              </a:spcAft>
+              <a:buSzPct val="100000"/>
+              <a:buChar char="•"/>
+            </a:pPr>
+            <a:r>
+              <a:rPr lang="en-US" sz="1800" dirty="0">
+                <a:solidFill>
+                  <a:srgbClr val="222222"/>
+                </a:solidFill>
+                <a:latin typeface="Noto Sans CJK KR" pitchFamily="34" charset="0"/>
+                <a:ea typeface="Noto Sans CJK KR" pitchFamily="34" charset="-122"/>
+                <a:cs typeface="Noto Sans CJK KR" pitchFamily="34" charset="-120"/>
+              </a:rPr>
+              <a:t>GND / RX 포트 / TX 포트로 구성</a:t>
+            </a:r>
+            <a:endParaRPr lang="en-US" sz="1800" dirty="0"/>
+          </a:p>
+          <a:p>
+            <a:pPr marL="342900" indent="-342900">
+              <a:spcAft>
+                <a:spcPts val="1000"/>
+              </a:spcAft>
+              <a:buSzPct val="100000"/>
+              <a:buChar char="•"/>
+            </a:pPr>
+            <a:r>
+              <a:rPr lang="en-US" sz="1800" dirty="0">
+                <a:solidFill>
+                  <a:srgbClr val="222222"/>
+                </a:solidFill>
+                <a:latin typeface="Noto Sans CJK KR" pitchFamily="34" charset="0"/>
+                <a:ea typeface="Noto Sans CJK KR" pitchFamily="34" charset="-122"/>
+                <a:cs typeface="Noto Sans CJK KR" pitchFamily="34" charset="-120"/>
+              </a:rPr>
+              <a:t>TX·RX는 PL(Master IP)과 Slave 사이를 잇는 물리 연결 — 외부 장치-PS-PL 경로와는 분리된 통신 채널</a:t>
+            </a:r>
+            <a:endParaRPr lang="en-US" sz="1800" dirty="0"/>
+          </a:p>
+        </p:txBody>
+      </p:sp>
+      <p:pic>
+        <p:nvPicPr>
+          <p:cNvPr id="4" name="Image 0" descr="/home/user/SoC_Design_and_Programming/diagrams/section3/zoom/m_gpio.png"/>
+          <p:cNvPicPr>
+            <a:picLocks noChangeAspect="1"/>
+          </p:cNvPicPr>
+          <p:nvPr/>
+        </p:nvPicPr>
+        <p:blipFill>
+          <a:blip r:embed="rId2"/>
+          <a:srcRect/>
+          <a:stretch/>
+        </p:blipFill>
+        <p:spPr>
+          <a:xfrm>
+            <a:off x="4846320" y="1916974"/>
+            <a:ext cx="3749040" cy="1606731"/>
+          </a:xfrm>
+          <a:prstGeom prst="rect">
+            <a:avLst/>
+          </a:prstGeom>
+        </p:spPr>
+      </p:pic>
+      <p:sp>
+        <p:nvSpPr>
+          <p:cNvPr id="5" name="Text 2"/>
+          <p:cNvSpPr/>
+          <p:nvPr/>
+        </p:nvSpPr>
+        <p:spPr>
+          <a:xfrm>
+            <a:off x="8503920" y="4754880"/>
+            <a:ext cx="457200" cy="274320"/>
+          </a:xfrm>
+          <a:prstGeom prst="rect">
+            <a:avLst/>
+          </a:prstGeom>
+          <a:noFill/>
+          <a:ln/>
+        </p:spPr>
+        <p:txBody>
+          <a:bodyPr wrap="square" rtlCol="0" anchor="ctr"/>
+          <a:lstStyle/>
+          <a:p>
+            <a:pPr marL="0" indent="0" algn="r">
+              <a:buNone/>
+            </a:pPr>
+            <a:r>
+              <a:rPr lang="en-US" sz="1200" dirty="0">
+                <a:solidFill>
+                  <a:srgbClr val="999999"/>
+                </a:solidFill>
+                <a:latin typeface="Noto Sans CJK KR" pitchFamily="34" charset="0"/>
+                <a:ea typeface="Noto Sans CJK KR" pitchFamily="34" charset="-122"/>
+                <a:cs typeface="Noto Sans CJK KR" pitchFamily="34" charset="-120"/>
+              </a:rPr>
+              <a:t>17</a:t>
+            </a:r>
+            <a:endParaRPr lang="en-US" sz="1200" dirty="0"/>
+          </a:p>
+        </p:txBody>
+      </p:sp>
+    </p:spTree>
+  </p:cSld>
+  <p:clrMapOvr>
+    <a:masterClrMapping/>
+  </p:clrMapOvr>
+</p:sld>
+</file>
+
+<file path=ppt/slides/slide18.xml><?xml version="1.0" encoding="utf-8"?>
+<p:sld xmlns:a="http://schemas.openxmlformats.org/drawingml/2006/main" xmlns:r="http://schemas.openxmlformats.org/officeDocument/2006/relationships" xmlns:p="http://schemas.openxmlformats.org/presentationml/2006/main">
+  <p:cSld>
+    <p:spTree>
+      <p:nvGrpSpPr>
+        <p:cNvPr id="1" name=""/>
+        <p:cNvGrpSpPr/>
+        <p:nvPr/>
+      </p:nvGrpSpPr>
+      <p:grpSpPr>
+        <a:xfrm>
+          <a:off x="0" y="0"/>
+          <a:ext cx="0" cy="0"/>
+          <a:chOff x="0" y="0"/>
+          <a:chExt cx="0" cy="0"/>
+        </a:xfrm>
+      </p:grpSpPr>
+      <p:sp>
+        <p:nvSpPr>
+          <p:cNvPr id="2" name="Text 0"/>
+          <p:cNvSpPr/>
+          <p:nvPr/>
+        </p:nvSpPr>
+        <p:spPr>
+          <a:xfrm>
+            <a:off x="548640" y="274320"/>
+            <a:ext cx="8046720" cy="777240"/>
+          </a:xfrm>
+          <a:prstGeom prst="rect">
+            <a:avLst/>
+          </a:prstGeom>
+          <a:noFill/>
+          <a:ln/>
+        </p:spPr>
+        <p:txBody>
+          <a:bodyPr wrap="square" lIns="0" tIns="0" rIns="0" bIns="0" rtlCol="0" anchor="ctr"/>
+          <a:lstStyle/>
+          <a:p>
+            <a:pPr marL="0" indent="0">
+              <a:buNone/>
+            </a:pPr>
+            <a:r>
+              <a:rPr lang="en-US" sz="3600" b="1" dirty="0">
+                <a:solidFill>
+                  <a:srgbClr val="111111"/>
+                </a:solidFill>
+                <a:latin typeface="Noto Sans CJK KR" pitchFamily="34" charset="0"/>
+                <a:ea typeface="Noto Sans CJK KR" pitchFamily="34" charset="-122"/>
+                <a:cs typeface="Noto Sans CJK KR" pitchFamily="34" charset="-120"/>
+              </a:rPr>
+              <a:t>Master - PS 확대</a:t>
+            </a:r>
+            <a:endParaRPr lang="en-US" sz="3600" dirty="0"/>
+          </a:p>
+        </p:txBody>
+      </p:sp>
+      <p:sp>
+        <p:nvSpPr>
+          <p:cNvPr id="3" name="Text 1"/>
+          <p:cNvSpPr/>
+          <p:nvPr/>
+        </p:nvSpPr>
+        <p:spPr>
+          <a:xfrm>
+            <a:off x="548640" y="1188720"/>
+            <a:ext cx="8046720" cy="594360"/>
+          </a:xfrm>
+          <a:prstGeom prst="rect">
+            <a:avLst/>
+          </a:prstGeom>
+          <a:noFill/>
+          <a:ln/>
+        </p:spPr>
+        <p:txBody>
+          <a:bodyPr wrap="square" rtlCol="0" anchor="t"/>
+          <a:lstStyle/>
+          <a:p>
+            <a:pPr marL="342900" indent="-342900">
+              <a:spcAft>
+                <a:spcPts val="600"/>
+              </a:spcAft>
+              <a:buSzPct val="100000"/>
+              <a:buChar char="•"/>
+            </a:pPr>
+            <a:r>
+              <a:rPr lang="en-US" sz="1700" dirty="0">
+                <a:solidFill>
+                  <a:srgbClr val="222222"/>
+                </a:solidFill>
+                <a:latin typeface="Noto Sans CJK KR" pitchFamily="34" charset="0"/>
+                <a:ea typeface="Noto Sans CJK KR" pitchFamily="34" charset="-122"/>
+                <a:cs typeface="Noto Sans CJK KR" pitchFamily="34" charset="-120"/>
+              </a:rPr>
+              <a:t>외부 테스트 장치에서 초깃값을 입력받아 Master를 초기 구동</a:t>
+            </a:r>
+            <a:endParaRPr lang="en-US" sz="1700" dirty="0"/>
+          </a:p>
+          <a:p>
+            <a:pPr marL="342900" indent="-342900">
+              <a:spcAft>
+                <a:spcPts val="600"/>
+              </a:spcAft>
+              <a:buSzPct val="100000"/>
+              <a:buChar char="•"/>
+            </a:pPr>
+            <a:r>
+              <a:rPr lang="en-US" sz="1700" dirty="0">
+                <a:solidFill>
+                  <a:srgbClr val="222222"/>
+                </a:solidFill>
+                <a:latin typeface="Noto Sans CJK KR" pitchFamily="34" charset="0"/>
+                <a:ea typeface="Noto Sans CJK KR" pitchFamily="34" charset="-122"/>
+                <a:cs typeface="Noto Sans CJK KR" pitchFamily="34" charset="-120"/>
+              </a:rPr>
+              <a:t>구동 중인 Master 값을 레지스터로 읽고, Master가 발생시키는 인터럽트를 수신</a:t>
+            </a:r>
+            <a:endParaRPr lang="en-US" sz="1700" dirty="0"/>
+          </a:p>
+        </p:txBody>
+      </p:sp>
+      <p:pic>
+        <p:nvPicPr>
+          <p:cNvPr id="4" name="Image 0" descr="/home/user/SoC_Design_and_Programming/diagrams/section3/zoom/m_ps.png"/>
+          <p:cNvPicPr>
+            <a:picLocks noChangeAspect="1"/>
+          </p:cNvPicPr>
+          <p:nvPr/>
+        </p:nvPicPr>
+        <p:blipFill>
+          <a:blip r:embed="rId2"/>
+          <a:srcRect/>
+          <a:stretch/>
+        </p:blipFill>
+        <p:spPr>
+          <a:xfrm>
+            <a:off x="1103179" y="2076994"/>
+            <a:ext cx="6937641" cy="2743200"/>
+          </a:xfrm>
+          <a:prstGeom prst="rect">
+            <a:avLst/>
+          </a:prstGeom>
+        </p:spPr>
+      </p:pic>
+      <p:sp>
+        <p:nvSpPr>
+          <p:cNvPr id="5" name="Text 2"/>
+          <p:cNvSpPr/>
+          <p:nvPr/>
+        </p:nvSpPr>
+        <p:spPr>
+          <a:xfrm>
+            <a:off x="8503920" y="4754880"/>
+            <a:ext cx="457200" cy="274320"/>
+          </a:xfrm>
+          <a:prstGeom prst="rect">
+            <a:avLst/>
+          </a:prstGeom>
+          <a:noFill/>
+          <a:ln/>
+        </p:spPr>
+        <p:txBody>
+          <a:bodyPr wrap="square" rtlCol="0" anchor="ctr"/>
+          <a:lstStyle/>
+          <a:p>
+            <a:pPr marL="0" indent="0" algn="r">
+              <a:buNone/>
+            </a:pPr>
+            <a:r>
+              <a:rPr lang="en-US" sz="1200" dirty="0">
+                <a:solidFill>
+                  <a:srgbClr val="999999"/>
+                </a:solidFill>
+                <a:latin typeface="Noto Sans CJK KR" pitchFamily="34" charset="0"/>
+                <a:ea typeface="Noto Sans CJK KR" pitchFamily="34" charset="-122"/>
+                <a:cs typeface="Noto Sans CJK KR" pitchFamily="34" charset="-120"/>
+              </a:rPr>
+              <a:t>18</a:t>
+            </a:r>
+            <a:endParaRPr lang="en-US" sz="1200" dirty="0"/>
+          </a:p>
+        </p:txBody>
+      </p:sp>
+    </p:spTree>
+  </p:cSld>
+  <p:clrMapOvr>
+    <a:masterClrMapping/>
+  </p:clrMapOvr>
+</p:sld>
+</file>
+
+<file path=ppt/slides/slide19.xml><?xml version="1.0" encoding="utf-8"?>
+<p:sld xmlns:a="http://schemas.openxmlformats.org/drawingml/2006/main" xmlns:r="http://schemas.openxmlformats.org/officeDocument/2006/relationships" xmlns:p="http://schemas.openxmlformats.org/presentationml/2006/main">
+  <p:cSld>
+    <p:spTree>
+      <p:nvGrpSpPr>
+        <p:cNvPr id="1" name=""/>
+        <p:cNvGrpSpPr/>
+        <p:nvPr/>
+      </p:nvGrpSpPr>
+      <p:grpSpPr>
+        <a:xfrm>
+          <a:off x="0" y="0"/>
+          <a:ext cx="0" cy="0"/>
+          <a:chOff x="0" y="0"/>
+          <a:chExt cx="0" cy="0"/>
+        </a:xfrm>
+      </p:grpSpPr>
+      <p:sp>
+        <p:nvSpPr>
+          <p:cNvPr id="2" name="Text 0"/>
+          <p:cNvSpPr/>
+          <p:nvPr/>
+        </p:nvSpPr>
+        <p:spPr>
+          <a:xfrm>
+            <a:off x="548640" y="274320"/>
+            <a:ext cx="8046720" cy="777240"/>
+          </a:xfrm>
+          <a:prstGeom prst="rect">
+            <a:avLst/>
+          </a:prstGeom>
+          <a:noFill/>
+          <a:ln/>
+        </p:spPr>
+        <p:txBody>
+          <a:bodyPr wrap="square" lIns="0" tIns="0" rIns="0" bIns="0" rtlCol="0" anchor="ctr"/>
+          <a:lstStyle/>
+          <a:p>
+            <a:pPr marL="0" indent="0">
+              <a:buNone/>
+            </a:pPr>
+            <a:r>
+              <a:rPr lang="en-US" sz="3600" b="1" dirty="0">
+                <a:solidFill>
+                  <a:srgbClr val="111111"/>
+                </a:solidFill>
+                <a:latin typeface="Noto Sans CJK KR" pitchFamily="34" charset="0"/>
+                <a:ea typeface="Noto Sans CJK KR" pitchFamily="34" charset="-122"/>
+                <a:cs typeface="Noto Sans CJK KR" pitchFamily="34" charset="-120"/>
+              </a:rPr>
+              <a:t>Master - PL 확대</a:t>
+            </a:r>
+            <a:endParaRPr lang="en-US" sz="3600" dirty="0"/>
+          </a:p>
+        </p:txBody>
+      </p:sp>
+      <p:sp>
+        <p:nvSpPr>
+          <p:cNvPr id="3" name="Text 1"/>
+          <p:cNvSpPr/>
+          <p:nvPr/>
+        </p:nvSpPr>
+        <p:spPr>
+          <a:xfrm>
+            <a:off x="548640" y="1234440"/>
+            <a:ext cx="4023360" cy="2971800"/>
+          </a:xfrm>
+          <a:prstGeom prst="rect">
+            <a:avLst/>
+          </a:prstGeom>
+          <a:noFill/>
+          <a:ln/>
+        </p:spPr>
+        <p:txBody>
+          <a:bodyPr wrap="square" rtlCol="0" anchor="t"/>
+          <a:lstStyle/>
+          <a:p>
+            <a:pPr marL="342900" indent="-342900">
+              <a:spcAft>
+                <a:spcPts val="1000"/>
+              </a:spcAft>
+              <a:buSzPct val="100000"/>
+              <a:buChar char="•"/>
+            </a:pPr>
+            <a:r>
+              <a:rPr lang="en-US" sz="1800" dirty="0">
+                <a:solidFill>
+                  <a:srgbClr val="222222"/>
+                </a:solidFill>
+                <a:latin typeface="Noto Sans CJK KR" pitchFamily="34" charset="0"/>
+                <a:ea typeface="Noto Sans CJK KR" pitchFamily="34" charset="-122"/>
+                <a:cs typeface="Noto Sans CJK KR" pitchFamily="34" charset="-120"/>
+              </a:rPr>
+              <a:t>LED · 푸시버튼 · DIP 스위치 · 7-seg와 Master IP로 보드 자체의 입출력 구성</a:t>
+            </a:r>
+            <a:endParaRPr lang="en-US" sz="1800" dirty="0"/>
+          </a:p>
+          <a:p>
+            <a:pPr marL="342900" indent="-342900">
+              <a:spcAft>
+                <a:spcPts val="1000"/>
+              </a:spcAft>
+              <a:buSzPct val="100000"/>
+              <a:buChar char="•"/>
+            </a:pPr>
+            <a:r>
+              <a:rPr lang="en-US" sz="1800" dirty="0">
+                <a:solidFill>
+                  <a:srgbClr val="222222"/>
+                </a:solidFill>
+                <a:latin typeface="Noto Sans CJK KR" pitchFamily="34" charset="0"/>
+                <a:ea typeface="Noto Sans CJK KR" pitchFamily="34" charset="-122"/>
+                <a:cs typeface="Noto Sans CJK KR" pitchFamily="34" charset="-120"/>
+              </a:rPr>
+              <a:t>LED는 RX/TX 이진 신호를 그대로 받아 통신 상태를 표시</a:t>
+            </a:r>
+            <a:endParaRPr lang="en-US" sz="1800" dirty="0"/>
+          </a:p>
+          <a:p>
+            <a:pPr marL="342900" indent="-342900">
+              <a:spcAft>
+                <a:spcPts val="1000"/>
+              </a:spcAft>
+              <a:buSzPct val="100000"/>
+              <a:buChar char="•"/>
+            </a:pPr>
+            <a:r>
+              <a:rPr lang="en-US" sz="1800" dirty="0">
+                <a:solidFill>
+                  <a:srgbClr val="222222"/>
+                </a:solidFill>
+                <a:latin typeface="Noto Sans CJK KR" pitchFamily="34" charset="0"/>
+                <a:ea typeface="Noto Sans CJK KR" pitchFamily="34" charset="-122"/>
+                <a:cs typeface="Noto Sans CJK KR" pitchFamily="34" charset="-120"/>
+              </a:rPr>
+              <a:t>DIP 스위치·7-seg는 슬롯별 통신 상태와 수신 데이터를 출력 — Master IP가 이들을 조율</a:t>
+            </a:r>
+            <a:endParaRPr lang="en-US" sz="1800" dirty="0"/>
+          </a:p>
+        </p:txBody>
+      </p:sp>
+      <p:pic>
+        <p:nvPicPr>
+          <p:cNvPr id="4" name="Image 0" descr="/home/user/SoC_Design_and_Programming/diagrams/section3/zoom/m_pl.png"/>
+          <p:cNvPicPr>
+            <a:picLocks noChangeAspect="1"/>
+          </p:cNvPicPr>
+          <p:nvPr/>
+        </p:nvPicPr>
+        <p:blipFill>
+          <a:blip r:embed="rId2"/>
+          <a:srcRect/>
+          <a:stretch/>
+        </p:blipFill>
+        <p:spPr>
+          <a:xfrm>
+            <a:off x="4846320" y="1653968"/>
+            <a:ext cx="3749040" cy="2132745"/>
+          </a:xfrm>
+          <a:prstGeom prst="rect">
+            <a:avLst/>
+          </a:prstGeom>
+        </p:spPr>
+      </p:pic>
+      <p:sp>
+        <p:nvSpPr>
+          <p:cNvPr id="5" name="Text 2"/>
+          <p:cNvSpPr/>
+          <p:nvPr/>
+        </p:nvSpPr>
+        <p:spPr>
+          <a:xfrm>
+            <a:off x="8503920" y="4754880"/>
+            <a:ext cx="457200" cy="274320"/>
+          </a:xfrm>
+          <a:prstGeom prst="rect">
+            <a:avLst/>
+          </a:prstGeom>
+          <a:noFill/>
+          <a:ln/>
+        </p:spPr>
+        <p:txBody>
+          <a:bodyPr wrap="square" rtlCol="0" anchor="ctr"/>
+          <a:lstStyle/>
+          <a:p>
+            <a:pPr marL="0" indent="0" algn="r">
+              <a:buNone/>
+            </a:pPr>
+            <a:r>
+              <a:rPr lang="en-US" sz="1200" dirty="0">
+                <a:solidFill>
+                  <a:srgbClr val="999999"/>
+                </a:solidFill>
+                <a:latin typeface="Noto Sans CJK KR" pitchFamily="34" charset="0"/>
+                <a:ea typeface="Noto Sans CJK KR" pitchFamily="34" charset="-122"/>
+                <a:cs typeface="Noto Sans CJK KR" pitchFamily="34" charset="-120"/>
+              </a:rPr>
+              <a:t>19</a:t>
+            </a:r>
+            <a:endParaRPr lang="en-US" sz="1200" dirty="0"/>
+          </a:p>
+        </p:txBody>
+      </p:sp>
+    </p:spTree>
+  </p:cSld>
+  <p:clrMapOvr>
+    <a:masterClrMapping/>
+  </p:clrMapOvr>
+</p:sld>
+</file>
+
+<file path=ppt/slides/slide2.xml><?xml version="1.0" encoding="utf-8"?>
+<p:sld xmlns:a="http://schemas.openxmlformats.org/drawingml/2006/main" xmlns:r="http://schemas.openxmlformats.org/officeDocument/2006/relationships" xmlns:p="http://schemas.openxmlformats.org/presentationml/2006/main">
+  <p:cSld>
+    <p:spTree>
+      <p:nvGrpSpPr>
+        <p:cNvPr id="1" name=""/>
+        <p:cNvGrpSpPr/>
+        <p:nvPr/>
+      </p:nvGrpSpPr>
+      <p:grpSpPr>
+        <a:xfrm>
+          <a:off x="0" y="0"/>
+          <a:ext cx="0" cy="0"/>
+          <a:chOff x="0" y="0"/>
+          <a:chExt cx="0" cy="0"/>
+        </a:xfrm>
+      </p:grpSpPr>
+      <p:sp>
+        <p:nvSpPr>
+          <p:cNvPr id="2" name="TextBox 1"/>
+          <p:cNvSpPr txBox="1"/>
+          <p:nvPr/>
+        </p:nvSpPr>
+        <p:spPr>
+          <a:xfrm>
+            <a:off x="548640" y="457200"/>
+            <a:ext cx="8046720" cy="774192"/>
+          </a:xfrm>
+          <a:prstGeom prst="rect">
+            <a:avLst/>
+          </a:prstGeom>
+          <a:noFill/>
+        </p:spPr>
+        <p:txBody>
+          <a:bodyPr wrap="none">
+            <a:spAutoFit/>
+          </a:bodyPr>
+          <a:lstStyle/>
+          <a:p>
+            <a:r>
+              <a:rPr sz="3600" b="1">
+                <a:solidFill>
+                  <a:srgbClr val="111111"/>
+                </a:solidFill>
+                <a:latin typeface="Noto Sans CJK KR"/>
+              </a:rPr>
+              <a:t>Contents</a:t>
+            </a:r>
+          </a:p>
+        </p:txBody>
+      </p:sp>
+      <p:sp>
+        <p:nvSpPr>
+          <p:cNvPr id="3" name="TextBox 2"/>
+          <p:cNvSpPr txBox="1"/>
+          <p:nvPr/>
+        </p:nvSpPr>
+        <p:spPr>
+          <a:xfrm>
+            <a:off x="548640" y="1645920"/>
+            <a:ext cx="8046720" cy="3200400"/>
+          </a:xfrm>
+          <a:prstGeom prst="rect">
+            <a:avLst/>
+          </a:prstGeom>
+          <a:noFill/>
+        </p:spPr>
+        <p:txBody>
+          <a:bodyPr wrap="square">
+            <a:spAutoFit/>
+          </a:bodyPr>
+          <a:lstStyle/>
+          <a:p>
+            <a:pPr>
+              <a:spcAft>
+                <a:spcPts val="2000"/>
+              </a:spcAft>
+            </a:pPr>
+            <a:r>
+              <a:rPr sz="2400">
+                <a:solidFill>
+                  <a:srgbClr val="222222"/>
+                </a:solidFill>
+                <a:latin typeface="Noto Sans CJK KR"/>
+              </a:rPr>
+              <a:t>1.  프로젝트 소개</a:t>
+            </a:r>
+          </a:p>
+          <a:p>
+            <a:pPr>
+              <a:spcAft>
+                <a:spcPts val="2000"/>
+              </a:spcAft>
+            </a:pPr>
+            <a:r>
+              <a:rPr sz="2400">
+                <a:solidFill>
+                  <a:srgbClr val="222222"/>
+                </a:solidFill>
+                <a:latin typeface="Noto Sans CJK KR"/>
+              </a:rPr>
+              <a:t>2.  TDMA PHY · Datalink · 프로토콜 정의</a:t>
+            </a:r>
+          </a:p>
+          <a:p>
+            <a:pPr>
+              <a:spcAft>
+                <a:spcPts val="2000"/>
+              </a:spcAft>
+            </a:pPr>
+            <a:r>
+              <a:rPr sz="2400">
+                <a:solidFill>
+                  <a:srgbClr val="222222"/>
+                </a:solidFill>
+                <a:latin typeface="Noto Sans CJK KR"/>
+              </a:rPr>
+              <a:t>3.  Master / Slave 구현 사항</a:t>
+            </a:r>
+          </a:p>
+          <a:p>
+            <a:pPr>
+              <a:spcAft>
+                <a:spcPts val="2000"/>
+              </a:spcAft>
+            </a:pPr>
+            <a:r>
+              <a:rPr sz="2400">
+                <a:solidFill>
+                  <a:srgbClr val="222222"/>
+                </a:solidFill>
+                <a:latin typeface="Noto Sans CJK KR"/>
+              </a:rPr>
+              <a:t>4.  TDMA 통신 시연</a:t>
+            </a:r>
+          </a:p>
+          <a:p>
+            <a:pPr>
+              <a:spcAft>
+                <a:spcPts val="2000"/>
+              </a:spcAft>
+            </a:pPr>
+            <a:r>
+              <a:rPr sz="2400">
+                <a:solidFill>
+                  <a:srgbClr val="222222"/>
+                </a:solidFill>
+                <a:latin typeface="Noto Sans CJK KR"/>
+              </a:rPr>
+              <a:t>5.  마무리</a:t>
+            </a:r>
+          </a:p>
+        </p:txBody>
+      </p:sp>
+      <p:sp>
+        <p:nvSpPr>
+          <p:cNvPr id="4" name="TextBox 3"/>
+          <p:cNvSpPr txBox="1"/>
+          <p:nvPr/>
+        </p:nvSpPr>
+        <p:spPr>
+          <a:xfrm>
+            <a:off x="8503920" y="4754880"/>
+            <a:ext cx="457200" cy="274320"/>
+          </a:xfrm>
+          <a:prstGeom prst="rect">
+            <a:avLst/>
+          </a:prstGeom>
+          <a:noFill/>
+        </p:spPr>
+        <p:txBody>
+          <a:bodyPr wrap="none">
+            <a:spAutoFit/>
+          </a:bodyPr>
+          <a:lstStyle/>
+          <a:p>
+            <a:pPr algn="r"/>
+            <a:r>
+              <a:rPr sz="1200">
+                <a:solidFill>
+                  <a:srgbClr val="999999"/>
+                </a:solidFill>
+                <a:latin typeface="Noto Sans CJK KR"/>
+              </a:rPr>
+              <a:t>2</a:t>
+            </a:r>
           </a:p>
         </p:txBody>
       </p:sp>
@@ -3887,7 +3674,7 @@
 </file>
 
 <file path=ppt/slides/slide20.xml><?xml version="1.0" encoding="utf-8"?>
-<p:sld xmlns:a="http://schemas.openxmlformats.org/drawingml/2006/main" xmlns:p="http://schemas.openxmlformats.org/presentationml/2006/main" xmlns:r="http://schemas.openxmlformats.org/officeDocument/2006/relationships">
+<p:sld xmlns:a="http://schemas.openxmlformats.org/drawingml/2006/main" xmlns:r="http://schemas.openxmlformats.org/officeDocument/2006/relationships" xmlns:p="http://schemas.openxmlformats.org/presentationml/2006/main">
   <p:cSld>
     <p:spTree>
       <p:nvGrpSpPr>
@@ -3895,7 +3682,14 @@
         <p:cNvGrpSpPr/>
         <p:nvPr/>
       </p:nvGrpSpPr>
-      <p:grpSpPr/>
+      <p:grpSpPr>
+        <a:xfrm>
+          <a:off x="0" y="0"/>
+          <a:ext cx="0" cy="0"/>
+          <a:chOff x="0" y="0"/>
+          <a:chExt cx="0" cy="0"/>
+        </a:xfrm>
+      </p:grpSpPr>
       <p:sp>
         <p:nvSpPr>
           <p:cNvPr id="2" name="Text 0"/>
@@ -3917,7 +3711,7 @@
           <a:bodyPr wrap="square" lIns="0" tIns="0" rIns="0" bIns="0" rtlCol="0" anchor="ctr"/>
           <a:lstStyle/>
           <a:p>
-            <a:pPr indent="0" marL="0">
+            <a:pPr marL="0" indent="0">
               <a:buNone/>
             </a:pPr>
             <a:r>
@@ -4001,7 +3795,7 @@
       </p:sp>
       <p:pic>
         <p:nvPicPr>
-          <p:cNvPr id="4" name="Image 0" descr="/home/user/SoC_Design_and_Programming/diagrams/section3/zoom/m_masterip.png">    </p:cNvPr>
+          <p:cNvPr id="4" name="Image 0" descr="/home/user/SoC_Design_and_Programming/diagrams/section3/zoom/m_masterip.png"/>
           <p:cNvPicPr>
             <a:picLocks noChangeAspect="1"/>
           </p:cNvPicPr>
@@ -4009,12 +3803,12 @@
         </p:nvPicPr>
         <p:blipFill>
           <a:blip r:embed="rId2"/>
-          <a:srcRect l="0" r="0" t="0" b="0"/>
+          <a:srcRect/>
           <a:stretch/>
         </p:blipFill>
         <p:spPr>
           <a:xfrm>
-            <a:off x="548640" y="2128313"/>
+            <a:off x="491490" y="2516116"/>
             <a:ext cx="8046720" cy="2052735"/>
           </a:xfrm>
           <a:prstGeom prst="rect">
@@ -4043,7 +3837,7 @@
           <a:bodyPr wrap="square" rtlCol="0" anchor="ctr"/>
           <a:lstStyle/>
           <a:p>
-            <a:pPr algn="r" indent="0" marL="0">
+            <a:pPr marL="0" indent="0" algn="r">
               <a:buNone/>
             </a:pPr>
             <a:r>
@@ -4070,7 +3864,7 @@
 </file>
 
 <file path=ppt/slides/slide21.xml><?xml version="1.0" encoding="utf-8"?>
-<p:sld xmlns:a="http://schemas.openxmlformats.org/drawingml/2006/main" xmlns:p="http://schemas.openxmlformats.org/presentationml/2006/main" xmlns:r="http://schemas.openxmlformats.org/officeDocument/2006/relationships">
+<p:sld xmlns:a="http://schemas.openxmlformats.org/drawingml/2006/main" xmlns:r="http://schemas.openxmlformats.org/officeDocument/2006/relationships" xmlns:p="http://schemas.openxmlformats.org/presentationml/2006/main">
   <p:cSld>
     <p:spTree>
       <p:nvGrpSpPr>
@@ -4078,7 +3872,14 @@
         <p:cNvGrpSpPr/>
         <p:nvPr/>
       </p:nvGrpSpPr>
-      <p:grpSpPr/>
+      <p:grpSpPr>
+        <a:xfrm>
+          <a:off x="0" y="0"/>
+          <a:ext cx="0" cy="0"/>
+          <a:chOff x="0" y="0"/>
+          <a:chExt cx="0" cy="0"/>
+        </a:xfrm>
+      </p:grpSpPr>
       <p:sp>
         <p:nvSpPr>
           <p:cNvPr id="2" name="Text 0"/>
@@ -4100,7 +3901,7 @@
           <a:bodyPr wrap="square" lIns="0" tIns="0" rIns="0" bIns="0" rtlCol="0" anchor="ctr"/>
           <a:lstStyle/>
           <a:p>
-            <a:pPr indent="0" marL="0">
+            <a:pPr marL="0" indent="0">
               <a:buNone/>
             </a:pPr>
             <a:r>
@@ -4184,7 +3985,7 @@
       </p:sp>
       <p:pic>
         <p:nvPicPr>
-          <p:cNvPr id="4" name="Image 0" descr="/home/user/SoC_Design_and_Programming/diagrams/section3/zoom/slave_overview.png">    </p:cNvPr>
+          <p:cNvPr id="4" name="Image 0" descr="/home/user/SoC_Design_and_Programming/diagrams/section3/zoom/slave_overview.png"/>
           <p:cNvPicPr>
             <a:picLocks noChangeAspect="1"/>
           </p:cNvPicPr>
@@ -4192,12 +3993,12 @@
         </p:nvPicPr>
         <p:blipFill>
           <a:blip r:embed="rId2"/>
-          <a:srcRect l="0" r="0" t="0" b="0"/>
+          <a:srcRect/>
           <a:stretch/>
         </p:blipFill>
         <p:spPr>
           <a:xfrm>
-            <a:off x="636404" y="1783080"/>
+            <a:off x="636404" y="1988821"/>
             <a:ext cx="7871192" cy="2743200"/>
           </a:xfrm>
           <a:prstGeom prst="rect">
@@ -4226,7 +4027,7 @@
           <a:bodyPr wrap="square" rtlCol="0" anchor="ctr"/>
           <a:lstStyle/>
           <a:p>
-            <a:pPr algn="r" indent="0" marL="0">
+            <a:pPr marL="0" indent="0" algn="r">
               <a:buNone/>
             </a:pPr>
             <a:r>
@@ -4253,7 +4054,7 @@
 </file>
 
 <file path=ppt/slides/slide22.xml><?xml version="1.0" encoding="utf-8"?>
-<p:sld xmlns:a="http://schemas.openxmlformats.org/drawingml/2006/main" xmlns:p="http://schemas.openxmlformats.org/presentationml/2006/main" xmlns:r="http://schemas.openxmlformats.org/officeDocument/2006/relationships">
+<p:sld xmlns:a="http://schemas.openxmlformats.org/drawingml/2006/main" xmlns:r="http://schemas.openxmlformats.org/officeDocument/2006/relationships" xmlns:p="http://schemas.openxmlformats.org/presentationml/2006/main">
   <p:cSld>
     <p:spTree>
       <p:nvGrpSpPr>
@@ -4261,7 +4062,14 @@
         <p:cNvGrpSpPr/>
         <p:nvPr/>
       </p:nvGrpSpPr>
-      <p:grpSpPr/>
+      <p:grpSpPr>
+        <a:xfrm>
+          <a:off x="0" y="0"/>
+          <a:ext cx="0" cy="0"/>
+          <a:chOff x="0" y="0"/>
+          <a:chExt cx="0" cy="0"/>
+        </a:xfrm>
+      </p:grpSpPr>
       <p:sp>
         <p:nvSpPr>
           <p:cNvPr id="2" name="Text 0"/>
@@ -4283,7 +4091,7 @@
           <a:bodyPr wrap="square" lIns="0" tIns="0" rIns="0" bIns="0" rtlCol="0" anchor="ctr"/>
           <a:lstStyle/>
           <a:p>
-            <a:pPr indent="0" marL="0">
+            <a:pPr marL="0" indent="0">
               <a:buNone/>
             </a:pPr>
             <a:r>
@@ -4367,7 +4175,7 @@
       </p:sp>
       <p:pic>
         <p:nvPicPr>
-          <p:cNvPr id="4" name="Image 0" descr="/home/user/SoC_Design_and_Programming/diagrams/section3/zoom/s_gpio.png">    </p:cNvPr>
+          <p:cNvPr id="4" name="Image 0" descr="/home/user/SoC_Design_and_Programming/diagrams/section3/zoom/s_gpio.png"/>
           <p:cNvPicPr>
             <a:picLocks noChangeAspect="1"/>
           </p:cNvPicPr>
@@ -4375,7 +4183,7 @@
         </p:nvPicPr>
         <p:blipFill>
           <a:blip r:embed="rId2"/>
-          <a:srcRect l="0" r="0" t="0" b="0"/>
+          <a:srcRect/>
           <a:stretch/>
         </p:blipFill>
         <p:spPr>
@@ -4409,7 +4217,7 @@
           <a:bodyPr wrap="square" rtlCol="0" anchor="ctr"/>
           <a:lstStyle/>
           <a:p>
-            <a:pPr algn="r" indent="0" marL="0">
+            <a:pPr marL="0" indent="0" algn="r">
               <a:buNone/>
             </a:pPr>
             <a:r>
@@ -4436,7 +4244,7 @@
 </file>
 
 <file path=ppt/slides/slide23.xml><?xml version="1.0" encoding="utf-8"?>
-<p:sld xmlns:a="http://schemas.openxmlformats.org/drawingml/2006/main" xmlns:p="http://schemas.openxmlformats.org/presentationml/2006/main" xmlns:r="http://schemas.openxmlformats.org/officeDocument/2006/relationships">
+<p:sld xmlns:a="http://schemas.openxmlformats.org/drawingml/2006/main" xmlns:r="http://schemas.openxmlformats.org/officeDocument/2006/relationships" xmlns:p="http://schemas.openxmlformats.org/presentationml/2006/main">
   <p:cSld>
     <p:spTree>
       <p:nvGrpSpPr>
@@ -4444,7 +4252,14 @@
         <p:cNvGrpSpPr/>
         <p:nvPr/>
       </p:nvGrpSpPr>
-      <p:grpSpPr/>
+      <p:grpSpPr>
+        <a:xfrm>
+          <a:off x="0" y="0"/>
+          <a:ext cx="0" cy="0"/>
+          <a:chOff x="0" y="0"/>
+          <a:chExt cx="0" cy="0"/>
+        </a:xfrm>
+      </p:grpSpPr>
       <p:sp>
         <p:nvSpPr>
           <p:cNvPr id="2" name="Text 0"/>
@@ -4466,7 +4281,7 @@
           <a:bodyPr wrap="square" lIns="0" tIns="0" rIns="0" bIns="0" rtlCol="0" anchor="ctr"/>
           <a:lstStyle/>
           <a:p>
-            <a:pPr indent="0" marL="0">
+            <a:pPr marL="0" indent="0">
               <a:buNone/>
             </a:pPr>
             <a:r>
@@ -4550,7 +4365,7 @@
       </p:sp>
       <p:pic>
         <p:nvPicPr>
-          <p:cNvPr id="4" name="Image 0" descr="/home/user/SoC_Design_and_Programming/diagrams/section3/zoom/s_pl.png">    </p:cNvPr>
+          <p:cNvPr id="4" name="Image 0" descr="/home/user/SoC_Design_and_Programming/diagrams/section3/zoom/s_pl.png"/>
           <p:cNvPicPr>
             <a:picLocks noChangeAspect="1"/>
           </p:cNvPicPr>
@@ -4558,7 +4373,7 @@
         </p:nvPicPr>
         <p:blipFill>
           <a:blip r:embed="rId2"/>
-          <a:srcRect l="0" r="0" t="0" b="0"/>
+          <a:srcRect/>
           <a:stretch/>
         </p:blipFill>
         <p:spPr>
@@ -4592,7 +4407,7 @@
           <a:bodyPr wrap="square" rtlCol="0" anchor="ctr"/>
           <a:lstStyle/>
           <a:p>
-            <a:pPr algn="r" indent="0" marL="0">
+            <a:pPr marL="0" indent="0" algn="r">
               <a:buNone/>
             </a:pPr>
             <a:r>
@@ -4619,7 +4434,7 @@
 </file>
 
 <file path=ppt/slides/slide24.xml><?xml version="1.0" encoding="utf-8"?>
-<p:sld xmlns:a="http://schemas.openxmlformats.org/drawingml/2006/main" xmlns:p="http://schemas.openxmlformats.org/presentationml/2006/main" xmlns:r="http://schemas.openxmlformats.org/officeDocument/2006/relationships">
+<p:sld xmlns:a="http://schemas.openxmlformats.org/drawingml/2006/main" xmlns:r="http://schemas.openxmlformats.org/officeDocument/2006/relationships" xmlns:p="http://schemas.openxmlformats.org/presentationml/2006/main">
   <p:cSld>
     <p:spTree>
       <p:nvGrpSpPr>
@@ -4627,7 +4442,14 @@
         <p:cNvGrpSpPr/>
         <p:nvPr/>
       </p:nvGrpSpPr>
-      <p:grpSpPr/>
+      <p:grpSpPr>
+        <a:xfrm>
+          <a:off x="0" y="0"/>
+          <a:ext cx="0" cy="0"/>
+          <a:chOff x="0" y="0"/>
+          <a:chExt cx="0" cy="0"/>
+        </a:xfrm>
+      </p:grpSpPr>
       <p:sp>
         <p:nvSpPr>
           <p:cNvPr id="2" name="Text 0"/>
@@ -4649,7 +4471,7 @@
           <a:bodyPr wrap="square" lIns="0" tIns="0" rIns="0" bIns="0" rtlCol="0" anchor="ctr"/>
           <a:lstStyle/>
           <a:p>
-            <a:pPr indent="0" marL="0">
+            <a:pPr marL="0" indent="0">
               <a:buNone/>
             </a:pPr>
             <a:r>
@@ -4733,7 +4555,7 @@
       </p:sp>
       <p:pic>
         <p:nvPicPr>
-          <p:cNvPr id="4" name="Image 0" descr="/home/user/SoC_Design_and_Programming/diagrams/section3/zoom/s_slaveip.png">    </p:cNvPr>
+          <p:cNvPr id="4" name="Image 0" descr="/home/user/SoC_Design_and_Programming/diagrams/section3/zoom/s_slaveip.png"/>
           <p:cNvPicPr>
             <a:picLocks noChangeAspect="1"/>
           </p:cNvPicPr>
@@ -4741,12 +4563,12 @@
         </p:nvPicPr>
         <p:blipFill>
           <a:blip r:embed="rId2"/>
-          <a:srcRect l="0" r="0" t="0" b="0"/>
+          <a:srcRect/>
           <a:stretch/>
         </p:blipFill>
         <p:spPr>
           <a:xfrm>
-            <a:off x="745187" y="1783080"/>
+            <a:off x="708448" y="2286000"/>
             <a:ext cx="7653626" cy="2743200"/>
           </a:xfrm>
           <a:prstGeom prst="rect">
@@ -4775,7 +4597,7 @@
           <a:bodyPr wrap="square" rtlCol="0" anchor="ctr"/>
           <a:lstStyle/>
           <a:p>
-            <a:pPr algn="r" indent="0" marL="0">
+            <a:pPr marL="0" indent="0" algn="r">
               <a:buNone/>
             </a:pPr>
             <a:r>
@@ -4802,7 +4624,7 @@
 </file>
 
 <file path=ppt/slides/slide25.xml><?xml version="1.0" encoding="utf-8"?>
-<p:sld xmlns:a="http://schemas.openxmlformats.org/drawingml/2006/main" xmlns:p="http://schemas.openxmlformats.org/presentationml/2006/main" xmlns:r="http://schemas.openxmlformats.org/officeDocument/2006/relationships">
+<p:sld xmlns:a="http://schemas.openxmlformats.org/drawingml/2006/main" xmlns:r="http://schemas.openxmlformats.org/officeDocument/2006/relationships" xmlns:p="http://schemas.openxmlformats.org/presentationml/2006/main">
   <p:cSld>
     <p:spTree>
       <p:nvGrpSpPr>
@@ -4810,7 +4632,14 @@
         <p:cNvGrpSpPr/>
         <p:nvPr/>
       </p:nvGrpSpPr>
-      <p:grpSpPr/>
+      <p:grpSpPr>
+        <a:xfrm>
+          <a:off x="0" y="0"/>
+          <a:ext cx="0" cy="0"/>
+          <a:chOff x="0" y="0"/>
+          <a:chExt cx="0" cy="0"/>
+        </a:xfrm>
+      </p:grpSpPr>
       <p:sp>
         <p:nvSpPr>
           <p:cNvPr id="2" name="Text 0"/>
@@ -4832,7 +4661,7 @@
           <a:bodyPr wrap="square" lIns="0" tIns="0" rIns="0" bIns="0" rtlCol="0" anchor="ctr"/>
           <a:lstStyle/>
           <a:p>
-            <a:pPr indent="0" marL="0">
+            <a:pPr marL="0" indent="0">
               <a:buNone/>
             </a:pPr>
             <a:r>
@@ -4956,7 +4785,7 @@
           <a:bodyPr wrap="square" rtlCol="0" anchor="ctr"/>
           <a:lstStyle/>
           <a:p>
-            <a:pPr algn="r" indent="0" marL="0">
+            <a:pPr marL="0" indent="0" algn="r">
               <a:buNone/>
             </a:pPr>
             <a:r>
@@ -4983,7 +4812,7 @@
 </file>
 
 <file path=ppt/slides/slide26.xml><?xml version="1.0" encoding="utf-8"?>
-<p:sld xmlns:a="http://schemas.openxmlformats.org/drawingml/2006/main" xmlns:p="http://schemas.openxmlformats.org/presentationml/2006/main" xmlns:r="http://schemas.openxmlformats.org/officeDocument/2006/relationships">
+<p:sld xmlns:a="http://schemas.openxmlformats.org/drawingml/2006/main" xmlns:r="http://schemas.openxmlformats.org/officeDocument/2006/relationships" xmlns:p="http://schemas.openxmlformats.org/presentationml/2006/main">
   <p:cSld>
     <p:spTree>
       <p:nvGrpSpPr>
@@ -4991,7 +4820,14 @@
         <p:cNvGrpSpPr/>
         <p:nvPr/>
       </p:nvGrpSpPr>
-      <p:grpSpPr/>
+      <p:grpSpPr>
+        <a:xfrm>
+          <a:off x="0" y="0"/>
+          <a:ext cx="0" cy="0"/>
+          <a:chOff x="0" y="0"/>
+          <a:chExt cx="0" cy="0"/>
+        </a:xfrm>
+      </p:grpSpPr>
       <p:sp>
         <p:nvSpPr>
           <p:cNvPr id="2" name="Text 0"/>
@@ -5013,7 +4849,7 @@
           <a:bodyPr wrap="square" lIns="0" tIns="0" rIns="0" bIns="0" rtlCol="0" anchor="ctr"/>
           <a:lstStyle/>
           <a:p>
-            <a:pPr indent="0" marL="0">
+            <a:pPr marL="0" indent="0">
               <a:buNone/>
             </a:pPr>
             <a:r>
@@ -5115,15 +4951,69 @@
             <a:tbl>
               <a:tblPr/>
               <a:tblGrid>
-                <a:gridCol w="894080"/>
-                <a:gridCol w="894080"/>
-                <a:gridCol w="894080"/>
-                <a:gridCol w="894080"/>
-                <a:gridCol w="894080"/>
-                <a:gridCol w="894080"/>
-                <a:gridCol w="894080"/>
-                <a:gridCol w="894080"/>
-                <a:gridCol w="894080"/>
+                <a:gridCol w="894080">
+                  <a:extLst>
+                    <a:ext uri="{9D8B030D-6E8A-4147-A177-3AD203B41FA5}">
+                      <a16:colId xmlns:a16="http://schemas.microsoft.com/office/drawing/2014/main" val="20000"/>
+                    </a:ext>
+                  </a:extLst>
+                </a:gridCol>
+                <a:gridCol w="894080">
+                  <a:extLst>
+                    <a:ext uri="{9D8B030D-6E8A-4147-A177-3AD203B41FA5}">
+                      <a16:colId xmlns:a16="http://schemas.microsoft.com/office/drawing/2014/main" val="20001"/>
+                    </a:ext>
+                  </a:extLst>
+                </a:gridCol>
+                <a:gridCol w="894080">
+                  <a:extLst>
+                    <a:ext uri="{9D8B030D-6E8A-4147-A177-3AD203B41FA5}">
+                      <a16:colId xmlns:a16="http://schemas.microsoft.com/office/drawing/2014/main" val="20002"/>
+                    </a:ext>
+                  </a:extLst>
+                </a:gridCol>
+                <a:gridCol w="894080">
+                  <a:extLst>
+                    <a:ext uri="{9D8B030D-6E8A-4147-A177-3AD203B41FA5}">
+                      <a16:colId xmlns:a16="http://schemas.microsoft.com/office/drawing/2014/main" val="20003"/>
+                    </a:ext>
+                  </a:extLst>
+                </a:gridCol>
+                <a:gridCol w="894080">
+                  <a:extLst>
+                    <a:ext uri="{9D8B030D-6E8A-4147-A177-3AD203B41FA5}">
+                      <a16:colId xmlns:a16="http://schemas.microsoft.com/office/drawing/2014/main" val="20004"/>
+                    </a:ext>
+                  </a:extLst>
+                </a:gridCol>
+                <a:gridCol w="894080">
+                  <a:extLst>
+                    <a:ext uri="{9D8B030D-6E8A-4147-A177-3AD203B41FA5}">
+                      <a16:colId xmlns:a16="http://schemas.microsoft.com/office/drawing/2014/main" val="20005"/>
+                    </a:ext>
+                  </a:extLst>
+                </a:gridCol>
+                <a:gridCol w="894080">
+                  <a:extLst>
+                    <a:ext uri="{9D8B030D-6E8A-4147-A177-3AD203B41FA5}">
+                      <a16:colId xmlns:a16="http://schemas.microsoft.com/office/drawing/2014/main" val="20006"/>
+                    </a:ext>
+                  </a:extLst>
+                </a:gridCol>
+                <a:gridCol w="894080">
+                  <a:extLst>
+                    <a:ext uri="{9D8B030D-6E8A-4147-A177-3AD203B41FA5}">
+                      <a16:colId xmlns:a16="http://schemas.microsoft.com/office/drawing/2014/main" val="20007"/>
+                    </a:ext>
+                  </a:extLst>
+                </a:gridCol>
+                <a:gridCol w="894080">
+                  <a:extLst>
+                    <a:ext uri="{9D8B030D-6E8A-4147-A177-3AD203B41FA5}">
+                      <a16:colId xmlns:a16="http://schemas.microsoft.com/office/drawing/2014/main" val="20008"/>
+                    </a:ext>
+                  </a:extLst>
+                </a:gridCol>
               </a:tblGrid>
               <a:tr h="457200">
                 <a:tc>
@@ -5131,7 +5021,7 @@
                     <a:bodyPr/>
                     <a:lstStyle/>
                     <a:p>
-                      <a:pPr algn="ctr" indent="0" marL="0">
+                      <a:pPr marL="0" indent="0" algn="ctr">
                         <a:buNone/>
                       </a:pPr>
                       <a:r>
@@ -5152,7 +5042,7 @@
                       </a:endParaRPr>
                     </a:p>
                   </a:txBody>
-                  <a:tcPr marL="91440" marR="91440" marT="45720" marB="45720">
+                  <a:tcPr>
                     <a:lnL w="6350" cap="flat" cmpd="sng" algn="ctr">
                       <a:solidFill>
                         <a:srgbClr val="CCCCCC"/>
@@ -5199,7 +5089,7 @@
                     <a:bodyPr/>
                     <a:lstStyle/>
                     <a:p>
-                      <a:pPr algn="ctr" indent="0" marL="0">
+                      <a:pPr marL="0" indent="0" algn="ctr">
                         <a:buNone/>
                       </a:pPr>
                       <a:r>
@@ -5220,7 +5110,7 @@
                       </a:endParaRPr>
                     </a:p>
                   </a:txBody>
-                  <a:tcPr marL="91440" marR="91440" marT="45720" marB="45720">
+                  <a:tcPr>
                     <a:lnL w="6350" cap="flat" cmpd="sng" algn="ctr">
                       <a:solidFill>
                         <a:srgbClr val="CCCCCC"/>
@@ -5267,7 +5157,7 @@
                     <a:bodyPr/>
                     <a:lstStyle/>
                     <a:p>
-                      <a:pPr algn="ctr" indent="0" marL="0">
+                      <a:pPr marL="0" indent="0" algn="ctr">
                         <a:buNone/>
                       </a:pPr>
                       <a:r>
@@ -5288,7 +5178,7 @@
                       </a:endParaRPr>
                     </a:p>
                   </a:txBody>
-                  <a:tcPr marL="91440" marR="91440" marT="45720" marB="45720">
+                  <a:tcPr>
                     <a:lnL w="6350" cap="flat" cmpd="sng" algn="ctr">
                       <a:solidFill>
                         <a:srgbClr val="CCCCCC"/>
@@ -5335,7 +5225,7 @@
                     <a:bodyPr/>
                     <a:lstStyle/>
                     <a:p>
-                      <a:pPr algn="ctr" indent="0" marL="0">
+                      <a:pPr marL="0" indent="0" algn="ctr">
                         <a:buNone/>
                       </a:pPr>
                       <a:r>
@@ -5356,7 +5246,7 @@
                       </a:endParaRPr>
                     </a:p>
                   </a:txBody>
-                  <a:tcPr marL="91440" marR="91440" marT="45720" marB="45720">
+                  <a:tcPr>
                     <a:lnL w="6350" cap="flat" cmpd="sng" algn="ctr">
                       <a:solidFill>
                         <a:srgbClr val="CCCCCC"/>
@@ -5403,7 +5293,7 @@
                     <a:bodyPr/>
                     <a:lstStyle/>
                     <a:p>
-                      <a:pPr algn="ctr" indent="0" marL="0">
+                      <a:pPr marL="0" indent="0" algn="ctr">
                         <a:buNone/>
                       </a:pPr>
                       <a:r>
@@ -5424,7 +5314,7 @@
                       </a:endParaRPr>
                     </a:p>
                   </a:txBody>
-                  <a:tcPr marL="91440" marR="91440" marT="45720" marB="45720">
+                  <a:tcPr>
                     <a:lnL w="6350" cap="flat" cmpd="sng" algn="ctr">
                       <a:solidFill>
                         <a:srgbClr val="CCCCCC"/>
@@ -5471,7 +5361,7 @@
                     <a:bodyPr/>
                     <a:lstStyle/>
                     <a:p>
-                      <a:pPr algn="ctr" indent="0" marL="0">
+                      <a:pPr marL="0" indent="0" algn="ctr">
                         <a:buNone/>
                       </a:pPr>
                       <a:r>
@@ -5492,7 +5382,7 @@
                       </a:endParaRPr>
                     </a:p>
                   </a:txBody>
-                  <a:tcPr marL="91440" marR="91440" marT="45720" marB="45720">
+                  <a:tcPr>
                     <a:lnL w="6350" cap="flat" cmpd="sng" algn="ctr">
                       <a:solidFill>
                         <a:srgbClr val="CCCCCC"/>
@@ -5539,7 +5429,7 @@
                     <a:bodyPr/>
                     <a:lstStyle/>
                     <a:p>
-                      <a:pPr algn="ctr" indent="0" marL="0">
+                      <a:pPr marL="0" indent="0" algn="ctr">
                         <a:buNone/>
                       </a:pPr>
                       <a:r>
@@ -5560,7 +5450,7 @@
                       </a:endParaRPr>
                     </a:p>
                   </a:txBody>
-                  <a:tcPr marL="91440" marR="91440" marT="45720" marB="45720">
+                  <a:tcPr>
                     <a:lnL w="6350" cap="flat" cmpd="sng" algn="ctr">
                       <a:solidFill>
                         <a:srgbClr val="CCCCCC"/>
@@ -5607,7 +5497,7 @@
                     <a:bodyPr/>
                     <a:lstStyle/>
                     <a:p>
-                      <a:pPr algn="ctr" indent="0" marL="0">
+                      <a:pPr marL="0" indent="0" algn="ctr">
                         <a:buNone/>
                       </a:pPr>
                       <a:r>
@@ -5628,7 +5518,7 @@
                       </a:endParaRPr>
                     </a:p>
                   </a:txBody>
-                  <a:tcPr marL="91440" marR="91440" marT="45720" marB="45720">
+                  <a:tcPr>
                     <a:lnL w="6350" cap="flat" cmpd="sng" algn="ctr">
                       <a:solidFill>
                         <a:srgbClr val="CCCCCC"/>
@@ -5675,7 +5565,7 @@
                     <a:bodyPr/>
                     <a:lstStyle/>
                     <a:p>
-                      <a:pPr algn="ctr" indent="0" marL="0">
+                      <a:pPr marL="0" indent="0" algn="ctr">
                         <a:buNone/>
                       </a:pPr>
                       <a:r>
@@ -5696,7 +5586,7 @@
                       </a:endParaRPr>
                     </a:p>
                   </a:txBody>
-                  <a:tcPr marL="91440" marR="91440" marT="45720" marB="45720">
+                  <a:tcPr>
                     <a:lnL w="6350" cap="flat" cmpd="sng" algn="ctr">
                       <a:solidFill>
                         <a:srgbClr val="CCCCCC"/>
@@ -5738,6 +5628,11 @@
                     </a:solidFill>
                   </a:tcPr>
                 </a:tc>
+                <a:extLst>
+                  <a:ext uri="{0D108BD9-81ED-4DB2-BD59-A6C34878D82A}">
+                    <a16:rowId xmlns:a16="http://schemas.microsoft.com/office/drawing/2014/main" val="10000"/>
+                  </a:ext>
+                </a:extLst>
               </a:tr>
               <a:tr h="457200">
                 <a:tc>
@@ -5745,7 +5640,7 @@
                     <a:bodyPr/>
                     <a:lstStyle/>
                     <a:p>
-                      <a:pPr algn="ctr" indent="0" marL="0">
+                      <a:pPr marL="0" indent="0" algn="ctr">
                         <a:buNone/>
                       </a:pPr>
                       <a:r>
@@ -5766,7 +5661,7 @@
                       </a:endParaRPr>
                     </a:p>
                   </a:txBody>
-                  <a:tcPr marL="91440" marR="91440" marT="45720" marB="45720">
+                  <a:tcPr>
                     <a:lnL w="6350" cap="flat" cmpd="sng" algn="ctr">
                       <a:solidFill>
                         <a:srgbClr val="CCCCCC"/>
@@ -5810,7 +5705,7 @@
                     <a:bodyPr/>
                     <a:lstStyle/>
                     <a:p>
-                      <a:pPr algn="ctr" indent="0" marL="0">
+                      <a:pPr marL="0" indent="0" algn="ctr">
                         <a:buNone/>
                       </a:pPr>
                       <a:r>
@@ -5831,7 +5726,7 @@
                       </a:endParaRPr>
                     </a:p>
                   </a:txBody>
-                  <a:tcPr marL="91440" marR="91440" marT="45720" marB="45720">
+                  <a:tcPr>
                     <a:lnL w="6350" cap="flat" cmpd="sng" algn="ctr">
                       <a:solidFill>
                         <a:srgbClr val="CCCCCC"/>
@@ -5875,7 +5770,7 @@
                     <a:bodyPr/>
                     <a:lstStyle/>
                     <a:p>
-                      <a:pPr algn="ctr" indent="0" marL="0">
+                      <a:pPr marL="0" indent="0" algn="ctr">
                         <a:buNone/>
                       </a:pPr>
                       <a:r>
@@ -5896,7 +5791,7 @@
                       </a:endParaRPr>
                     </a:p>
                   </a:txBody>
-                  <a:tcPr marL="91440" marR="91440" marT="45720" marB="45720">
+                  <a:tcPr>
                     <a:lnL w="6350" cap="flat" cmpd="sng" algn="ctr">
                       <a:solidFill>
                         <a:srgbClr val="CCCCCC"/>
@@ -5940,7 +5835,7 @@
                     <a:bodyPr/>
                     <a:lstStyle/>
                     <a:p>
-                      <a:pPr algn="ctr" indent="0" marL="0">
+                      <a:pPr marL="0" indent="0" algn="ctr">
                         <a:buNone/>
                       </a:pPr>
                       <a:r>
@@ -5961,7 +5856,7 @@
                       </a:endParaRPr>
                     </a:p>
                   </a:txBody>
-                  <a:tcPr marL="91440" marR="91440" marT="45720" marB="45720">
+                  <a:tcPr>
                     <a:lnL w="6350" cap="flat" cmpd="sng" algn="ctr">
                       <a:solidFill>
                         <a:srgbClr val="CCCCCC"/>
@@ -6005,7 +5900,7 @@
                     <a:bodyPr/>
                     <a:lstStyle/>
                     <a:p>
-                      <a:pPr algn="ctr" indent="0" marL="0">
+                      <a:pPr marL="0" indent="0" algn="ctr">
                         <a:buNone/>
                       </a:pPr>
                       <a:r>
@@ -6026,7 +5921,7 @@
                       </a:endParaRPr>
                     </a:p>
                   </a:txBody>
-                  <a:tcPr marL="91440" marR="91440" marT="45720" marB="45720">
+                  <a:tcPr>
                     <a:lnL w="6350" cap="flat" cmpd="sng" algn="ctr">
                       <a:solidFill>
                         <a:srgbClr val="CCCCCC"/>
@@ -6070,7 +5965,7 @@
                     <a:bodyPr/>
                     <a:lstStyle/>
                     <a:p>
-                      <a:pPr algn="ctr" indent="0" marL="0">
+                      <a:pPr marL="0" indent="0" algn="ctr">
                         <a:buNone/>
                       </a:pPr>
                       <a:r>
@@ -6091,7 +5986,7 @@
                       </a:endParaRPr>
                     </a:p>
                   </a:txBody>
-                  <a:tcPr marL="91440" marR="91440" marT="45720" marB="45720">
+                  <a:tcPr>
                     <a:lnL w="6350" cap="flat" cmpd="sng" algn="ctr">
                       <a:solidFill>
                         <a:srgbClr val="CCCCCC"/>
@@ -6135,7 +6030,7 @@
                     <a:bodyPr/>
                     <a:lstStyle/>
                     <a:p>
-                      <a:pPr algn="ctr" indent="0" marL="0">
+                      <a:pPr marL="0" indent="0" algn="ctr">
                         <a:buNone/>
                       </a:pPr>
                       <a:r>
@@ -6156,7 +6051,7 @@
                       </a:endParaRPr>
                     </a:p>
                   </a:txBody>
-                  <a:tcPr marL="91440" marR="91440" marT="45720" marB="45720">
+                  <a:tcPr>
                     <a:lnL w="6350" cap="flat" cmpd="sng" algn="ctr">
                       <a:solidFill>
                         <a:srgbClr val="CCCCCC"/>
@@ -6200,7 +6095,7 @@
                     <a:bodyPr/>
                     <a:lstStyle/>
                     <a:p>
-                      <a:pPr algn="ctr" indent="0" marL="0">
+                      <a:pPr marL="0" indent="0" algn="ctr">
                         <a:buNone/>
                       </a:pPr>
                       <a:r>
@@ -6221,7 +6116,7 @@
                       </a:endParaRPr>
                     </a:p>
                   </a:txBody>
-                  <a:tcPr marL="91440" marR="91440" marT="45720" marB="45720">
+                  <a:tcPr>
                     <a:lnL w="6350" cap="flat" cmpd="sng" algn="ctr">
                       <a:solidFill>
                         <a:srgbClr val="CCCCCC"/>
@@ -6265,7 +6160,7 @@
                     <a:bodyPr/>
                     <a:lstStyle/>
                     <a:p>
-                      <a:pPr algn="ctr" indent="0" marL="0">
+                      <a:pPr marL="0" indent="0" algn="ctr">
                         <a:buNone/>
                       </a:pPr>
                       <a:r>
@@ -6286,7 +6181,7 @@
                       </a:endParaRPr>
                     </a:p>
                   </a:txBody>
-                  <a:tcPr marL="91440" marR="91440" marT="45720" marB="45720">
+                  <a:tcPr>
                     <a:lnL w="6350" cap="flat" cmpd="sng" algn="ctr">
                       <a:solidFill>
                         <a:srgbClr val="CCCCCC"/>
@@ -6325,6 +6220,11 @@
                     </a:lnB>
                   </a:tcPr>
                 </a:tc>
+                <a:extLst>
+                  <a:ext uri="{0D108BD9-81ED-4DB2-BD59-A6C34878D82A}">
+                    <a16:rowId xmlns:a16="http://schemas.microsoft.com/office/drawing/2014/main" val="10001"/>
+                  </a:ext>
+                </a:extLst>
               </a:tr>
             </a:tbl>
           </a:graphicData>
@@ -6351,7 +6251,7 @@
           <a:bodyPr wrap="square" rtlCol="0" anchor="ctr"/>
           <a:lstStyle/>
           <a:p>
-            <a:pPr algn="r" indent="0" marL="0">
+            <a:pPr marL="0" indent="0" algn="r">
               <a:buNone/>
             </a:pPr>
             <a:r>
@@ -6378,7 +6278,7 @@
 </file>
 
 <file path=ppt/slides/slide27.xml><?xml version="1.0" encoding="utf-8"?>
-<p:sld xmlns:a="http://schemas.openxmlformats.org/drawingml/2006/main" xmlns:p="http://schemas.openxmlformats.org/presentationml/2006/main" xmlns:r="http://schemas.openxmlformats.org/officeDocument/2006/relationships">
+<p:sld xmlns:a="http://schemas.openxmlformats.org/drawingml/2006/main" xmlns:r="http://schemas.openxmlformats.org/officeDocument/2006/relationships" xmlns:p="http://schemas.openxmlformats.org/presentationml/2006/main">
   <p:cSld>
     <p:spTree>
       <p:nvGrpSpPr>
@@ -6386,7 +6286,14 @@
         <p:cNvGrpSpPr/>
         <p:nvPr/>
       </p:nvGrpSpPr>
-      <p:grpSpPr/>
+      <p:grpSpPr>
+        <a:xfrm>
+          <a:off x="0" y="0"/>
+          <a:ext cx="0" cy="0"/>
+          <a:chOff x="0" y="0"/>
+          <a:chExt cx="0" cy="0"/>
+        </a:xfrm>
+      </p:grpSpPr>
       <p:sp>
         <p:nvSpPr>
           <p:cNvPr id="2" name="Text 0"/>
@@ -6408,7 +6315,7 @@
           <a:bodyPr wrap="square" lIns="0" tIns="0" rIns="0" bIns="0" rtlCol="0" anchor="ctr"/>
           <a:lstStyle/>
           <a:p>
-            <a:pPr indent="0" marL="0">
+            <a:pPr marL="0" indent="0">
               <a:buNone/>
             </a:pPr>
             <a:r>
@@ -6553,7 +6460,7 @@
           <a:bodyPr wrap="square" rtlCol="0" anchor="ctr"/>
           <a:lstStyle/>
           <a:p>
-            <a:pPr algn="r" indent="0" marL="0">
+            <a:pPr marL="0" indent="0" algn="r">
               <a:buNone/>
             </a:pPr>
             <a:r>
@@ -6580,7 +6487,7 @@
 </file>
 
 <file path=ppt/slides/slide28.xml><?xml version="1.0" encoding="utf-8"?>
-<p:sld xmlns:a="http://schemas.openxmlformats.org/drawingml/2006/main" xmlns:p="http://schemas.openxmlformats.org/presentationml/2006/main" xmlns:r="http://schemas.openxmlformats.org/officeDocument/2006/relationships">
+<p:sld xmlns:a="http://schemas.openxmlformats.org/drawingml/2006/main" xmlns:r="http://schemas.openxmlformats.org/officeDocument/2006/relationships" xmlns:p="http://schemas.openxmlformats.org/presentationml/2006/main">
   <p:cSld>
     <p:spTree>
       <p:nvGrpSpPr>
@@ -6588,7 +6495,14 @@
         <p:cNvGrpSpPr/>
         <p:nvPr/>
       </p:nvGrpSpPr>
-      <p:grpSpPr/>
+      <p:grpSpPr>
+        <a:xfrm>
+          <a:off x="0" y="0"/>
+          <a:ext cx="0" cy="0"/>
+          <a:chOff x="0" y="0"/>
+          <a:chExt cx="0" cy="0"/>
+        </a:xfrm>
+      </p:grpSpPr>
       <p:sp>
         <p:nvSpPr>
           <p:cNvPr id="2" name="Text 0"/>
@@ -6610,7 +6524,7 @@
           <a:bodyPr wrap="square" lIns="0" tIns="0" rIns="0" bIns="0" rtlCol="0" anchor="ctr"/>
           <a:lstStyle/>
           <a:p>
-            <a:pPr indent="0" marL="0">
+            <a:pPr marL="0" indent="0">
               <a:buNone/>
             </a:pPr>
             <a:r>
@@ -6736,7 +6650,7 @@
       </p:sp>
       <p:pic>
         <p:nvPicPr>
-          <p:cNvPr id="4" name="Image 0" descr="/home/user/SoC_Design_and_Programming/diagrams/section3/zoom/master_fault_flow.png">    </p:cNvPr>
+          <p:cNvPr id="4" name="Image 0" descr="/home/user/SoC_Design_and_Programming/diagrams/section3/zoom/master_fault_flow.png"/>
           <p:cNvPicPr>
             <a:picLocks noChangeAspect="1"/>
           </p:cNvPicPr>
@@ -6744,12 +6658,12 @@
         </p:nvPicPr>
         <p:blipFill>
           <a:blip r:embed="rId2"/>
-          <a:srcRect l="0" r="0" t="0" b="0"/>
+          <a:srcRect/>
           <a:stretch/>
         </p:blipFill>
         <p:spPr>
           <a:xfrm>
-            <a:off x="1383381" y="1920240"/>
+            <a:off x="1411956" y="2491740"/>
             <a:ext cx="6377239" cy="2651760"/>
           </a:xfrm>
           <a:prstGeom prst="rect">
@@ -6778,7 +6692,7 @@
           <a:bodyPr wrap="square" rtlCol="0" anchor="ctr"/>
           <a:lstStyle/>
           <a:p>
-            <a:pPr algn="r" indent="0" marL="0">
+            <a:pPr marL="0" indent="0" algn="r">
               <a:buNone/>
             </a:pPr>
             <a:r>
@@ -6805,7 +6719,7 @@
 </file>
 
 <file path=ppt/slides/slide29.xml><?xml version="1.0" encoding="utf-8"?>
-<p:sld xmlns:a="http://schemas.openxmlformats.org/drawingml/2006/main" xmlns:p="http://schemas.openxmlformats.org/presentationml/2006/main" xmlns:r="http://schemas.openxmlformats.org/officeDocument/2006/relationships">
+<p:sld xmlns:a="http://schemas.openxmlformats.org/drawingml/2006/main" xmlns:r="http://schemas.openxmlformats.org/officeDocument/2006/relationships" xmlns:p="http://schemas.openxmlformats.org/presentationml/2006/main">
   <p:cSld>
     <p:spTree>
       <p:nvGrpSpPr>
@@ -6813,7 +6727,14 @@
         <p:cNvGrpSpPr/>
         <p:nvPr/>
       </p:nvGrpSpPr>
-      <p:grpSpPr/>
+      <p:grpSpPr>
+        <a:xfrm>
+          <a:off x="0" y="0"/>
+          <a:ext cx="0" cy="0"/>
+          <a:chOff x="0" y="0"/>
+          <a:chExt cx="0" cy="0"/>
+        </a:xfrm>
+      </p:grpSpPr>
       <p:sp>
         <p:nvSpPr>
           <p:cNvPr id="2" name="Text 0"/>
@@ -6835,7 +6756,7 @@
           <a:bodyPr wrap="square" lIns="0" tIns="0" rIns="0" bIns="0" rtlCol="0" anchor="ctr"/>
           <a:lstStyle/>
           <a:p>
-            <a:pPr indent="0" marL="0">
+            <a:pPr marL="0" indent="0">
               <a:buNone/>
             </a:pPr>
             <a:r>
@@ -6959,7 +6880,7 @@
           <a:bodyPr wrap="square" rtlCol="0" anchor="ctr"/>
           <a:lstStyle/>
           <a:p>
-            <a:pPr algn="r" indent="0" marL="0">
+            <a:pPr marL="0" indent="0" algn="r">
               <a:buNone/>
             </a:pPr>
             <a:r>
@@ -6986,6 +6907,634 @@
 </file>
 
 <file path=ppt/slides/slide3.xml><?xml version="1.0" encoding="utf-8"?>
+<p:sld xmlns:a="http://schemas.openxmlformats.org/drawingml/2006/main" xmlns:r="http://schemas.openxmlformats.org/officeDocument/2006/relationships" xmlns:p="http://schemas.openxmlformats.org/presentationml/2006/main">
+  <p:cSld>
+    <p:bg>
+      <p:bgPr>
+        <a:solidFill>
+          <a:srgbClr val="F2F2F2"/>
+        </a:solidFill>
+        <a:effectLst/>
+      </p:bgPr>
+    </p:bg>
+    <p:spTree>
+      <p:nvGrpSpPr>
+        <p:cNvPr id="1" name=""/>
+        <p:cNvGrpSpPr/>
+        <p:nvPr/>
+      </p:nvGrpSpPr>
+      <p:grpSpPr>
+        <a:xfrm>
+          <a:off x="0" y="0"/>
+          <a:ext cx="0" cy="0"/>
+          <a:chOff x="0" y="0"/>
+          <a:chExt cx="0" cy="0"/>
+        </a:xfrm>
+      </p:grpSpPr>
+      <p:sp>
+        <p:nvSpPr>
+          <p:cNvPr id="2" name="TextBox 1"/>
+          <p:cNvSpPr txBox="1"/>
+          <p:nvPr/>
+        </p:nvSpPr>
+        <p:spPr>
+          <a:xfrm>
+            <a:off x="548640" y="1828800"/>
+            <a:ext cx="8046720" cy="1371600"/>
+          </a:xfrm>
+          <a:prstGeom prst="rect">
+            <a:avLst/>
+          </a:prstGeom>
+          <a:noFill/>
+        </p:spPr>
+        <p:txBody>
+          <a:bodyPr wrap="square">
+            <a:spAutoFit/>
+          </a:bodyPr>
+          <a:lstStyle/>
+          <a:p>
+            <a:pPr algn="l"/>
+            <a:r>
+              <a:rPr sz="4000" b="1">
+                <a:solidFill>
+                  <a:srgbClr val="111111"/>
+                </a:solidFill>
+                <a:latin typeface="Noto Sans CJK KR"/>
+              </a:rPr>
+              <a:t>1. 프로젝트 소개</a:t>
+            </a:r>
+          </a:p>
+        </p:txBody>
+      </p:sp>
+      <p:sp>
+        <p:nvSpPr>
+          <p:cNvPr id="3" name="TextBox 2"/>
+          <p:cNvSpPr txBox="1"/>
+          <p:nvPr/>
+        </p:nvSpPr>
+        <p:spPr>
+          <a:xfrm>
+            <a:off x="548640" y="3111120"/>
+            <a:ext cx="8046720" cy="457200"/>
+          </a:xfrm>
+          <a:prstGeom prst="rect">
+            <a:avLst/>
+          </a:prstGeom>
+          <a:noFill/>
+        </p:spPr>
+        <p:txBody>
+          <a:bodyPr wrap="square">
+            <a:spAutoFit/>
+          </a:bodyPr>
+          <a:lstStyle/>
+          <a:p>
+            <a:r>
+              <a:rPr sz="1800">
+                <a:solidFill>
+                  <a:srgbClr val="666666"/>
+                </a:solidFill>
+                <a:latin typeface="Noto Sans CJK KR"/>
+              </a:rPr>
+              <a:t>왜 시간을 나누어 전송해야 하는지, 프로젝트의 목표를 짚는다</a:t>
+            </a:r>
+          </a:p>
+        </p:txBody>
+      </p:sp>
+      <p:sp>
+        <p:nvSpPr>
+          <p:cNvPr id="4" name="TextBox 3"/>
+          <p:cNvSpPr txBox="1"/>
+          <p:nvPr/>
+        </p:nvSpPr>
+        <p:spPr>
+          <a:xfrm>
+            <a:off x="8503920" y="4754880"/>
+            <a:ext cx="457200" cy="274320"/>
+          </a:xfrm>
+          <a:prstGeom prst="rect">
+            <a:avLst/>
+          </a:prstGeom>
+          <a:noFill/>
+        </p:spPr>
+        <p:txBody>
+          <a:bodyPr wrap="none">
+            <a:spAutoFit/>
+          </a:bodyPr>
+          <a:lstStyle/>
+          <a:p>
+            <a:pPr algn="r"/>
+            <a:r>
+              <a:rPr sz="1200">
+                <a:solidFill>
+                  <a:srgbClr val="999999"/>
+                </a:solidFill>
+                <a:latin typeface="Noto Sans CJK KR"/>
+              </a:rPr>
+              <a:t>3</a:t>
+            </a:r>
+          </a:p>
+        </p:txBody>
+      </p:sp>
+    </p:spTree>
+  </p:cSld>
+  <p:clrMapOvr>
+    <a:masterClrMapping/>
+  </p:clrMapOvr>
+</p:sld>
+</file>
+
+<file path=ppt/slides/slide30.xml><?xml version="1.0" encoding="utf-8"?>
+<p:sld xmlns:a="http://schemas.openxmlformats.org/drawingml/2006/main" xmlns:r="http://schemas.openxmlformats.org/officeDocument/2006/relationships" xmlns:p="http://schemas.openxmlformats.org/presentationml/2006/main">
+  <p:cSld>
+    <p:bg>
+      <p:bgPr>
+        <a:solidFill>
+          <a:srgbClr val="F2F2F2"/>
+        </a:solidFill>
+        <a:effectLst/>
+      </p:bgPr>
+    </p:bg>
+    <p:spTree>
+      <p:nvGrpSpPr>
+        <p:cNvPr id="1" name=""/>
+        <p:cNvGrpSpPr/>
+        <p:nvPr/>
+      </p:nvGrpSpPr>
+      <p:grpSpPr>
+        <a:xfrm>
+          <a:off x="0" y="0"/>
+          <a:ext cx="0" cy="0"/>
+          <a:chOff x="0" y="0"/>
+          <a:chExt cx="0" cy="0"/>
+        </a:xfrm>
+      </p:grpSpPr>
+      <p:sp>
+        <p:nvSpPr>
+          <p:cNvPr id="2" name="TextBox 1"/>
+          <p:cNvSpPr txBox="1"/>
+          <p:nvPr/>
+        </p:nvSpPr>
+        <p:spPr>
+          <a:xfrm>
+            <a:off x="548640" y="1828800"/>
+            <a:ext cx="8046720" cy="1371600"/>
+          </a:xfrm>
+          <a:prstGeom prst="rect">
+            <a:avLst/>
+          </a:prstGeom>
+          <a:noFill/>
+        </p:spPr>
+        <p:txBody>
+          <a:bodyPr wrap="square">
+            <a:spAutoFit/>
+          </a:bodyPr>
+          <a:lstStyle/>
+          <a:p>
+            <a:pPr algn="l"/>
+            <a:r>
+              <a:rPr sz="4000" b="1">
+                <a:solidFill>
+                  <a:srgbClr val="111111"/>
+                </a:solidFill>
+                <a:latin typeface="Noto Sans CJK KR"/>
+              </a:rPr>
+              <a:t>4. TDMA 통신 시연</a:t>
+            </a:r>
+          </a:p>
+        </p:txBody>
+      </p:sp>
+      <p:sp>
+        <p:nvSpPr>
+          <p:cNvPr id="3" name="TextBox 2"/>
+          <p:cNvSpPr txBox="1"/>
+          <p:nvPr/>
+        </p:nvSpPr>
+        <p:spPr>
+          <a:xfrm>
+            <a:off x="548640" y="3111120"/>
+            <a:ext cx="8046720" cy="457200"/>
+          </a:xfrm>
+          <a:prstGeom prst="rect">
+            <a:avLst/>
+          </a:prstGeom>
+          <a:noFill/>
+        </p:spPr>
+        <p:txBody>
+          <a:bodyPr wrap="square">
+            <a:spAutoFit/>
+          </a:bodyPr>
+          <a:lstStyle/>
+          <a:p>
+            <a:r>
+              <a:rPr sz="1800">
+                <a:solidFill>
+                  <a:srgbClr val="666666"/>
+                </a:solidFill>
+                <a:latin typeface="Noto Sans CJK KR"/>
+              </a:rPr>
+              <a:t>실제 보드에서 TDMA 통신이 동작하는 과정을 시연한다</a:t>
+            </a:r>
+          </a:p>
+        </p:txBody>
+      </p:sp>
+      <p:sp>
+        <p:nvSpPr>
+          <p:cNvPr id="4" name="TextBox 3"/>
+          <p:cNvSpPr txBox="1"/>
+          <p:nvPr/>
+        </p:nvSpPr>
+        <p:spPr>
+          <a:xfrm>
+            <a:off x="8503920" y="4754880"/>
+            <a:ext cx="457200" cy="274320"/>
+          </a:xfrm>
+          <a:prstGeom prst="rect">
+            <a:avLst/>
+          </a:prstGeom>
+          <a:noFill/>
+        </p:spPr>
+        <p:txBody>
+          <a:bodyPr wrap="none">
+            <a:spAutoFit/>
+          </a:bodyPr>
+          <a:lstStyle/>
+          <a:p>
+            <a:pPr algn="r"/>
+            <a:r>
+              <a:rPr sz="1200">
+                <a:solidFill>
+                  <a:srgbClr val="999999"/>
+                </a:solidFill>
+                <a:latin typeface="Noto Sans CJK KR"/>
+              </a:rPr>
+              <a:t>30</a:t>
+            </a:r>
+          </a:p>
+        </p:txBody>
+      </p:sp>
+    </p:spTree>
+  </p:cSld>
+  <p:clrMapOvr>
+    <a:masterClrMapping/>
+  </p:clrMapOvr>
+</p:sld>
+</file>
+
+<file path=ppt/slides/slide31.xml><?xml version="1.0" encoding="utf-8"?>
+<p:sld xmlns:a="http://schemas.openxmlformats.org/drawingml/2006/main" xmlns:r="http://schemas.openxmlformats.org/officeDocument/2006/relationships" xmlns:p="http://schemas.openxmlformats.org/presentationml/2006/main">
+  <p:cSld>
+    <p:bg>
+      <p:bgPr>
+        <a:solidFill>
+          <a:srgbClr val="F2F2F2"/>
+        </a:solidFill>
+        <a:effectLst/>
+      </p:bgPr>
+    </p:bg>
+    <p:spTree>
+      <p:nvGrpSpPr>
+        <p:cNvPr id="1" name=""/>
+        <p:cNvGrpSpPr/>
+        <p:nvPr/>
+      </p:nvGrpSpPr>
+      <p:grpSpPr>
+        <a:xfrm>
+          <a:off x="0" y="0"/>
+          <a:ext cx="0" cy="0"/>
+          <a:chOff x="0" y="0"/>
+          <a:chExt cx="0" cy="0"/>
+        </a:xfrm>
+      </p:grpSpPr>
+      <p:sp>
+        <p:nvSpPr>
+          <p:cNvPr id="2" name="TextBox 1"/>
+          <p:cNvSpPr txBox="1"/>
+          <p:nvPr/>
+        </p:nvSpPr>
+        <p:spPr>
+          <a:xfrm>
+            <a:off x="548640" y="1828800"/>
+            <a:ext cx="8046720" cy="1371600"/>
+          </a:xfrm>
+          <a:prstGeom prst="rect">
+            <a:avLst/>
+          </a:prstGeom>
+          <a:noFill/>
+        </p:spPr>
+        <p:txBody>
+          <a:bodyPr wrap="square">
+            <a:spAutoFit/>
+          </a:bodyPr>
+          <a:lstStyle/>
+          <a:p>
+            <a:pPr algn="l"/>
+            <a:r>
+              <a:rPr sz="4000" b="1">
+                <a:solidFill>
+                  <a:srgbClr val="111111"/>
+                </a:solidFill>
+                <a:latin typeface="Noto Sans CJK KR"/>
+              </a:rPr>
+              <a:t>5. 마무리</a:t>
+            </a:r>
+          </a:p>
+        </p:txBody>
+      </p:sp>
+      <p:sp>
+        <p:nvSpPr>
+          <p:cNvPr id="3" name="TextBox 2"/>
+          <p:cNvSpPr txBox="1"/>
+          <p:nvPr/>
+        </p:nvSpPr>
+        <p:spPr>
+          <a:xfrm>
+            <a:off x="8503920" y="4754880"/>
+            <a:ext cx="457200" cy="274320"/>
+          </a:xfrm>
+          <a:prstGeom prst="rect">
+            <a:avLst/>
+          </a:prstGeom>
+          <a:noFill/>
+        </p:spPr>
+        <p:txBody>
+          <a:bodyPr wrap="none">
+            <a:spAutoFit/>
+          </a:bodyPr>
+          <a:lstStyle/>
+          <a:p>
+            <a:pPr algn="r"/>
+            <a:r>
+              <a:rPr sz="1200">
+                <a:solidFill>
+                  <a:srgbClr val="999999"/>
+                </a:solidFill>
+                <a:latin typeface="Noto Sans CJK KR"/>
+              </a:rPr>
+              <a:t>31</a:t>
+            </a:r>
+          </a:p>
+        </p:txBody>
+      </p:sp>
+    </p:spTree>
+  </p:cSld>
+  <p:clrMapOvr>
+    <a:masterClrMapping/>
+  </p:clrMapOvr>
+</p:sld>
+</file>
+
+<file path=ppt/slides/slide4.xml><?xml version="1.0" encoding="utf-8"?>
+<p:sld xmlns:a="http://schemas.openxmlformats.org/drawingml/2006/main" xmlns:r="http://schemas.openxmlformats.org/officeDocument/2006/relationships" xmlns:p="http://schemas.openxmlformats.org/presentationml/2006/main">
+  <p:cSld name="Slide 2">
+    <p:spTree>
+      <p:nvGrpSpPr>
+        <p:cNvPr id="1" name=""/>
+        <p:cNvGrpSpPr/>
+        <p:nvPr/>
+      </p:nvGrpSpPr>
+      <p:grpSpPr>
+        <a:xfrm>
+          <a:off x="0" y="0"/>
+          <a:ext cx="0" cy="0"/>
+          <a:chOff x="0" y="0"/>
+          <a:chExt cx="0" cy="0"/>
+        </a:xfrm>
+      </p:grpSpPr>
+      <p:sp>
+        <p:nvSpPr>
+          <p:cNvPr id="2" name="Text 0"/>
+          <p:cNvSpPr/>
+          <p:nvPr/>
+        </p:nvSpPr>
+        <p:spPr>
+          <a:xfrm>
+            <a:off x="548640" y="274320"/>
+            <a:ext cx="8046720" cy="777240"/>
+          </a:xfrm>
+          <a:prstGeom prst="rect">
+            <a:avLst/>
+          </a:prstGeom>
+          <a:noFill/>
+          <a:ln/>
+        </p:spPr>
+        <p:txBody>
+          <a:bodyPr wrap="square" lIns="0" tIns="0" rIns="0" bIns="0" rtlCol="0" anchor="ctr"/>
+          <a:lstStyle/>
+          <a:p>
+            <a:pPr marL="0" indent="0">
+              <a:buNone/>
+            </a:pPr>
+            <a:r>
+              <a:rPr lang="en-US" sz="3600" b="1" dirty="0">
+                <a:solidFill>
+                  <a:srgbClr val="111111"/>
+                </a:solidFill>
+                <a:latin typeface="Noto Sans CJK KR" pitchFamily="34" charset="0"/>
+                <a:ea typeface="Noto Sans CJK KR" pitchFamily="34" charset="-122"/>
+                <a:cs typeface="Noto Sans CJK KR" pitchFamily="34" charset="-120"/>
+              </a:rPr>
+              <a:t>왜 결정론적 통신이 필요한가</a:t>
+            </a:r>
+            <a:endParaRPr lang="en-US" sz="3600" dirty="0"/>
+          </a:p>
+        </p:txBody>
+      </p:sp>
+      <p:sp>
+        <p:nvSpPr>
+          <p:cNvPr id="3" name="Text 1"/>
+          <p:cNvSpPr/>
+          <p:nvPr/>
+        </p:nvSpPr>
+        <p:spPr>
+          <a:xfrm>
+            <a:off x="548640" y="1234440"/>
+            <a:ext cx="8046720" cy="2971800"/>
+          </a:xfrm>
+          <a:prstGeom prst="rect">
+            <a:avLst/>
+          </a:prstGeom>
+          <a:noFill/>
+          <a:ln/>
+        </p:spPr>
+        <p:txBody>
+          <a:bodyPr wrap="square" rtlCol="0" anchor="t"/>
+          <a:lstStyle/>
+          <a:p>
+            <a:pPr marL="342900" indent="-342900">
+              <a:spcAft>
+                <a:spcPts val="1200"/>
+              </a:spcAft>
+              <a:buSzPct val="100000"/>
+              <a:buChar char="•"/>
+            </a:pPr>
+            <a:r>
+              <a:rPr lang="en-US" sz="2000" dirty="0">
+                <a:solidFill>
+                  <a:srgbClr val="222222"/>
+                </a:solidFill>
+                <a:latin typeface="Noto Sans CJK KR" pitchFamily="34" charset="0"/>
+                <a:ea typeface="Noto Sans CJK KR" pitchFamily="34" charset="-122"/>
+                <a:cs typeface="Noto Sans CJK KR" pitchFamily="34" charset="-120"/>
+              </a:rPr>
+              <a:t>RT·안전-critical 통신 시스템의 요구사항</a:t>
+            </a:r>
+            <a:endParaRPr lang="en-US" sz="2000" dirty="0"/>
+          </a:p>
+          <a:p>
+            <a:pPr marL="685800" lvl="1" indent="-342900">
+              <a:spcAft>
+                <a:spcPts val="800"/>
+              </a:spcAft>
+              <a:buSzPct val="100000"/>
+              <a:buChar char="•"/>
+            </a:pPr>
+            <a:r>
+              <a:rPr lang="en-US" sz="1700" dirty="0">
+                <a:solidFill>
+                  <a:srgbClr val="444444"/>
+                </a:solidFill>
+                <a:latin typeface="Noto Sans CJK KR" pitchFamily="34" charset="0"/>
+                <a:ea typeface="Noto Sans CJK KR" pitchFamily="34" charset="-122"/>
+                <a:cs typeface="Noto Sans CJK KR" pitchFamily="34" charset="-120"/>
+              </a:rPr>
+              <a:t>예측 가능성(Predictability) — 시스템의 시간적 동작이 사전에 보장되어야 함</a:t>
+            </a:r>
+            <a:endParaRPr lang="en-US" sz="2000" dirty="0"/>
+          </a:p>
+          <a:p>
+            <a:pPr marL="685800" lvl="1" indent="-342900">
+              <a:spcAft>
+                <a:spcPts val="800"/>
+              </a:spcAft>
+              <a:buSzPct val="100000"/>
+              <a:buChar char="•"/>
+            </a:pPr>
+            <a:r>
+              <a:rPr lang="en-US" sz="1700" dirty="0">
+                <a:solidFill>
+                  <a:srgbClr val="444444"/>
+                </a:solidFill>
+                <a:latin typeface="Noto Sans CJK KR" pitchFamily="34" charset="0"/>
+                <a:ea typeface="Noto Sans CJK KR" pitchFamily="34" charset="-122"/>
+                <a:cs typeface="Noto Sans CJK KR" pitchFamily="34" charset="-120"/>
+              </a:rPr>
+              <a:t>결정성(Determinism) — 메시지 수신 시점이 미리 알려져 있어야 함</a:t>
+            </a:r>
+            <a:endParaRPr lang="en-US" sz="2000" dirty="0"/>
+          </a:p>
+          <a:p>
+            <a:pPr marL="342900" indent="-342900">
+              <a:spcAft>
+                <a:spcPts val="1200"/>
+              </a:spcAft>
+              <a:buSzPct val="100000"/>
+              <a:buChar char="•"/>
+            </a:pPr>
+            <a:r>
+              <a:rPr lang="en-US" sz="2000" dirty="0">
+                <a:solidFill>
+                  <a:srgbClr val="222222"/>
+                </a:solidFill>
+                <a:latin typeface="Noto Sans CJK KR" pitchFamily="34" charset="0"/>
+                <a:ea typeface="Noto Sans CJK KR" pitchFamily="34" charset="-122"/>
+                <a:cs typeface="Noto Sans CJK KR" pitchFamily="34" charset="-120"/>
+              </a:rPr>
+              <a:t>사건 기반(Event-Triggered) 통신의 한계</a:t>
+            </a:r>
+            <a:endParaRPr lang="en-US" sz="2000" dirty="0"/>
+          </a:p>
+          <a:p>
+            <a:pPr marL="685800" lvl="1" indent="-342900">
+              <a:spcAft>
+                <a:spcPts val="800"/>
+              </a:spcAft>
+              <a:buSzPct val="100000"/>
+              <a:buChar char="•"/>
+            </a:pPr>
+            <a:r>
+              <a:rPr lang="en-US" sz="1700" dirty="0">
+                <a:solidFill>
+                  <a:srgbClr val="444444"/>
+                </a:solidFill>
+                <a:latin typeface="Noto Sans CJK KR" pitchFamily="34" charset="0"/>
+                <a:ea typeface="Noto Sans CJK KR" pitchFamily="34" charset="-122"/>
+                <a:cs typeface="Noto Sans CJK KR" pitchFamily="34" charset="-120"/>
+              </a:rPr>
+              <a:t>충돌과 재전송으로 지연이 랜덤하게 변동 → 예측 불가</a:t>
+            </a:r>
+            <a:endParaRPr lang="en-US" sz="2000" dirty="0"/>
+          </a:p>
+          <a:p>
+            <a:pPr marL="685800" lvl="1" indent="-342900">
+              <a:spcAft>
+                <a:spcPts val="800"/>
+              </a:spcAft>
+              <a:buSzPct val="100000"/>
+              <a:buChar char="•"/>
+            </a:pPr>
+            <a:r>
+              <a:rPr lang="en-US" sz="1700" dirty="0">
+                <a:solidFill>
+                  <a:srgbClr val="444444"/>
+                </a:solidFill>
+                <a:latin typeface="Noto Sans CJK KR" pitchFamily="34" charset="0"/>
+                <a:ea typeface="Noto Sans CJK KR" pitchFamily="34" charset="-122"/>
+                <a:cs typeface="Noto Sans CJK KR" pitchFamily="34" charset="-120"/>
+              </a:rPr>
+              <a:t>자동차·산업용 네트워크에서는 이 불확실성이 곧 안전 문제로 직결</a:t>
+            </a:r>
+            <a:endParaRPr lang="en-US" sz="2000" dirty="0"/>
+          </a:p>
+        </p:txBody>
+      </p:sp>
+      <p:sp>
+        <p:nvSpPr>
+          <p:cNvPr id="4" name="Text 2"/>
+          <p:cNvSpPr/>
+          <p:nvPr/>
+        </p:nvSpPr>
+        <p:spPr>
+          <a:xfrm>
+            <a:off x="8503920" y="4754880"/>
+            <a:ext cx="457200" cy="274320"/>
+          </a:xfrm>
+          <a:prstGeom prst="rect">
+            <a:avLst/>
+          </a:prstGeom>
+          <a:noFill/>
+          <a:ln/>
+        </p:spPr>
+        <p:txBody>
+          <a:bodyPr wrap="square" rtlCol="0" anchor="ctr"/>
+          <a:lstStyle/>
+          <a:p>
+            <a:pPr marL="0" indent="0" algn="r">
+              <a:buNone/>
+            </a:pPr>
+            <a:r>
+              <a:rPr lang="en-US" sz="1200" dirty="0">
+                <a:solidFill>
+                  <a:srgbClr val="999999"/>
+                </a:solidFill>
+                <a:latin typeface="Noto Sans CJK KR" pitchFamily="34" charset="0"/>
+                <a:ea typeface="Noto Sans CJK KR" pitchFamily="34" charset="-122"/>
+                <a:cs typeface="Noto Sans CJK KR" pitchFamily="34" charset="-120"/>
+              </a:rPr>
+              <a:t>4</a:t>
+            </a:r>
+            <a:endParaRPr lang="en-US" sz="1200" dirty="0"/>
+          </a:p>
+        </p:txBody>
+      </p:sp>
+    </p:spTree>
+  </p:cSld>
+  <p:clrMapOvr>
+    <a:masterClrMapping/>
+  </p:clrMapOvr>
+</p:sld>
+</file>
+
+<file path=ppt/slides/slide5.xml><?xml version="1.0" encoding="utf-8"?>
 <p:sld xmlns:a="http://schemas.openxmlformats.org/drawingml/2006/main" xmlns:r="http://schemas.openxmlformats.org/officeDocument/2006/relationships" xmlns:p="http://schemas.openxmlformats.org/presentationml/2006/main">
   <p:cSld name="Slide 3">
     <p:spTree>
@@ -7023,7 +7572,7 @@
           <a:bodyPr wrap="square" lIns="0" tIns="0" rIns="0" bIns="0" rtlCol="0" anchor="ctr"/>
           <a:lstStyle/>
           <a:p>
-            <a:pPr indent="0" marL="0">
+            <a:pPr marL="0" indent="0">
               <a:buNone/>
             </a:pPr>
             <a:r>
@@ -7083,7 +7632,7 @@
             <a:endParaRPr lang="en-US" sz="2000" dirty="0"/>
           </a:p>
           <a:p>
-            <a:pPr lvl="1" marL="685800" indent="-342900">
+            <a:pPr marL="685800" lvl="1" indent="-342900">
               <a:spcAft>
                 <a:spcPts val="800"/>
               </a:spcAft>
@@ -7104,7 +7653,7 @@
             <a:endParaRPr lang="en-US" sz="2000" dirty="0"/>
           </a:p>
           <a:p>
-            <a:pPr lvl="1" marL="685800" indent="-342900">
+            <a:pPr marL="685800" lvl="1" indent="-342900">
               <a:spcAft>
                 <a:spcPts val="800"/>
               </a:spcAft>
@@ -7146,7 +7695,7 @@
             <a:endParaRPr lang="en-US" sz="2000" dirty="0"/>
           </a:p>
           <a:p>
-            <a:pPr lvl="1" marL="685800" indent="-342900">
+            <a:pPr marL="685800" lvl="1" indent="-342900">
               <a:spcAft>
                 <a:spcPts val="800"/>
               </a:spcAft>
@@ -7189,7 +7738,7 @@
           <a:bodyPr wrap="square" rtlCol="0" anchor="ctr"/>
           <a:lstStyle/>
           <a:p>
-            <a:pPr algn="r" indent="0" marL="0">
+            <a:pPr marL="0" indent="0" algn="r">
               <a:buNone/>
             </a:pPr>
             <a:r>
@@ -7215,233 +7764,7 @@
 </p:sld>
 </file>
 
-<file path=ppt/slides/slide30.xml><?xml version="1.0" encoding="utf-8"?>
-<p:sld xmlns:a="http://schemas.openxmlformats.org/drawingml/2006/main" xmlns:p="http://schemas.openxmlformats.org/presentationml/2006/main" xmlns:r="http://schemas.openxmlformats.org/officeDocument/2006/relationships">
-  <p:cSld>
-    <p:bg>
-      <p:bgPr>
-        <a:solidFill>
-          <a:srgbClr val="F2F2F2"/>
-        </a:solidFill>
-        <a:effectLst/>
-      </p:bgPr>
-    </p:bg>
-    <p:spTree>
-      <p:nvGrpSpPr>
-        <p:cNvPr id="1" name=""/>
-        <p:cNvGrpSpPr/>
-        <p:nvPr/>
-      </p:nvGrpSpPr>
-      <p:grpSpPr/>
-      <p:sp>
-        <p:nvSpPr>
-          <p:cNvPr id="2" name="TextBox 1"/>
-          <p:cNvSpPr txBox="1"/>
-          <p:nvPr/>
-        </p:nvSpPr>
-        <p:spPr>
-          <a:xfrm>
-            <a:off x="548640" y="1828800"/>
-            <a:ext cx="8046720" cy="1371600"/>
-          </a:xfrm>
-          <a:prstGeom prst="rect">
-            <a:avLst/>
-          </a:prstGeom>
-          <a:noFill/>
-        </p:spPr>
-        <p:txBody>
-          <a:bodyPr wrap="square">
-            <a:spAutoFit/>
-          </a:bodyPr>
-          <a:lstStyle/>
-          <a:p>
-            <a:pPr algn="l"/>
-            <a:r>
-              <a:rPr sz="4000" b="1">
-                <a:solidFill>
-                  <a:srgbClr val="111111"/>
-                </a:solidFill>
-                <a:latin typeface="Noto Sans CJK KR"/>
-              </a:rPr>
-              <a:t>4. TDMA 통신 시연</a:t>
-            </a:r>
-          </a:p>
-        </p:txBody>
-      </p:sp>
-      <p:sp>
-        <p:nvSpPr>
-          <p:cNvPr id="3" name="TextBox 2"/>
-          <p:cNvSpPr txBox="1"/>
-          <p:nvPr/>
-        </p:nvSpPr>
-        <p:spPr>
-          <a:xfrm>
-            <a:off x="548640" y="3111120"/>
-            <a:ext cx="8046720" cy="457200"/>
-          </a:xfrm>
-          <a:prstGeom prst="rect">
-            <a:avLst/>
-          </a:prstGeom>
-          <a:noFill/>
-        </p:spPr>
-        <p:txBody>
-          <a:bodyPr wrap="square">
-            <a:spAutoFit/>
-          </a:bodyPr>
-          <a:lstStyle/>
-          <a:p>
-            <a:r>
-              <a:rPr sz="1800">
-                <a:solidFill>
-                  <a:srgbClr val="666666"/>
-                </a:solidFill>
-                <a:latin typeface="Noto Sans CJK KR"/>
-              </a:rPr>
-              <a:t>실제 보드에서 TDMA 통신이 동작하는 과정을 시연한다</a:t>
-            </a:r>
-          </a:p>
-        </p:txBody>
-      </p:sp>
-      <p:sp>
-        <p:nvSpPr>
-          <p:cNvPr id="4" name="TextBox 3"/>
-          <p:cNvSpPr txBox="1"/>
-          <p:nvPr/>
-        </p:nvSpPr>
-        <p:spPr>
-          <a:xfrm>
-            <a:off x="8503920" y="4754880"/>
-            <a:ext cx="457200" cy="274320"/>
-          </a:xfrm>
-          <a:prstGeom prst="rect">
-            <a:avLst/>
-          </a:prstGeom>
-          <a:noFill/>
-        </p:spPr>
-        <p:txBody>
-          <a:bodyPr wrap="none">
-            <a:spAutoFit/>
-          </a:bodyPr>
-          <a:lstStyle/>
-          <a:p>
-            <a:pPr algn="r"/>
-            <a:r>
-              <a:rPr sz="1200">
-                <a:solidFill>
-                  <a:srgbClr val="999999"/>
-                </a:solidFill>
-                <a:latin typeface="Noto Sans CJK KR"/>
-              </a:rPr>
-              <a:t>30</a:t>
-            </a:r>
-          </a:p>
-        </p:txBody>
-      </p:sp>
-    </p:spTree>
-  </p:cSld>
-  <p:clrMapOvr>
-    <a:masterClrMapping/>
-  </p:clrMapOvr>
-</p:sld>
-</file>
-
-<file path=ppt/slides/slide31.xml><?xml version="1.0" encoding="utf-8"?>
-<p:sld xmlns:a="http://schemas.openxmlformats.org/drawingml/2006/main" xmlns:p="http://schemas.openxmlformats.org/presentationml/2006/main" xmlns:r="http://schemas.openxmlformats.org/officeDocument/2006/relationships">
-  <p:cSld>
-    <p:bg>
-      <p:bgPr>
-        <a:solidFill>
-          <a:srgbClr val="F2F2F2"/>
-        </a:solidFill>
-        <a:effectLst/>
-      </p:bgPr>
-    </p:bg>
-    <p:spTree>
-      <p:nvGrpSpPr>
-        <p:cNvPr id="1" name=""/>
-        <p:cNvGrpSpPr/>
-        <p:nvPr/>
-      </p:nvGrpSpPr>
-      <p:grpSpPr/>
-      <p:sp>
-        <p:nvSpPr>
-          <p:cNvPr id="2" name="TextBox 1"/>
-          <p:cNvSpPr txBox="1"/>
-          <p:nvPr/>
-        </p:nvSpPr>
-        <p:spPr>
-          <a:xfrm>
-            <a:off x="548640" y="1828800"/>
-            <a:ext cx="8046720" cy="1371600"/>
-          </a:xfrm>
-          <a:prstGeom prst="rect">
-            <a:avLst/>
-          </a:prstGeom>
-          <a:noFill/>
-        </p:spPr>
-        <p:txBody>
-          <a:bodyPr wrap="square">
-            <a:spAutoFit/>
-          </a:bodyPr>
-          <a:lstStyle/>
-          <a:p>
-            <a:pPr algn="l"/>
-            <a:r>
-              <a:rPr sz="4000" b="1">
-                <a:solidFill>
-                  <a:srgbClr val="111111"/>
-                </a:solidFill>
-                <a:latin typeface="Noto Sans CJK KR"/>
-              </a:rPr>
-              <a:t>5. 마무리</a:t>
-            </a:r>
-          </a:p>
-        </p:txBody>
-      </p:sp>
-      <p:sp>
-        <p:nvSpPr>
-          <p:cNvPr id="3" name="TextBox 2"/>
-          <p:cNvSpPr txBox="1"/>
-          <p:nvPr/>
-        </p:nvSpPr>
-        <p:spPr>
-          <a:xfrm>
-            <a:off x="8503920" y="4754880"/>
-            <a:ext cx="457200" cy="274320"/>
-          </a:xfrm>
-          <a:prstGeom prst="rect">
-            <a:avLst/>
-          </a:prstGeom>
-          <a:noFill/>
-        </p:spPr>
-        <p:txBody>
-          <a:bodyPr wrap="none">
-            <a:spAutoFit/>
-          </a:bodyPr>
-          <a:lstStyle/>
-          <a:p>
-            <a:pPr algn="r"/>
-            <a:r>
-              <a:rPr sz="1200">
-                <a:solidFill>
-                  <a:srgbClr val="999999"/>
-                </a:solidFill>
-                <a:latin typeface="Noto Sans CJK KR"/>
-              </a:rPr>
-              <a:t>31</a:t>
-            </a:r>
-          </a:p>
-        </p:txBody>
-      </p:sp>
-    </p:spTree>
-  </p:cSld>
-  <p:clrMapOvr>
-    <a:masterClrMapping/>
-  </p:clrMapOvr>
-</p:sld>
-</file>
-
-<file path=ppt/slides/slide4.xml><?xml version="1.0" encoding="utf-8"?>
+<file path=ppt/slides/slide6.xml><?xml version="1.0" encoding="utf-8"?>
 <p:sld xmlns:a="http://schemas.openxmlformats.org/drawingml/2006/main" xmlns:r="http://schemas.openxmlformats.org/officeDocument/2006/relationships" xmlns:p="http://schemas.openxmlformats.org/presentationml/2006/main">
   <p:cSld name="Slide 4">
     <p:spTree>
@@ -7479,7 +7802,7 @@
           <a:bodyPr wrap="square" lIns="0" tIns="0" rIns="0" bIns="0" rtlCol="0" anchor="ctr"/>
           <a:lstStyle/>
           <a:p>
-            <a:pPr indent="0" marL="0">
+            <a:pPr marL="0" indent="0">
               <a:buNone/>
             </a:pPr>
             <a:r>
@@ -7539,7 +7862,7 @@
             <a:endParaRPr lang="en-US" sz="2000" dirty="0"/>
           </a:p>
           <a:p>
-            <a:pPr lvl="1" marL="685800" indent="-342900">
+            <a:pPr marL="685800" lvl="1" indent="-342900">
               <a:spcAft>
                 <a:spcPts val="800"/>
               </a:spcAft>
@@ -7581,7 +7904,7 @@
             <a:endParaRPr lang="en-US" sz="2000" dirty="0"/>
           </a:p>
           <a:p>
-            <a:pPr lvl="1" marL="685800" indent="-342900">
+            <a:pPr marL="685800" lvl="1" indent="-342900">
               <a:spcAft>
                 <a:spcPts val="800"/>
               </a:spcAft>
@@ -7624,7 +7947,7 @@
           <a:bodyPr wrap="square" rtlCol="0" anchor="ctr"/>
           <a:lstStyle/>
           <a:p>
-            <a:pPr algn="r" indent="0" marL="0">
+            <a:pPr marL="0" indent="0" algn="r">
               <a:buNone/>
             </a:pPr>
             <a:r>
@@ -7650,198 +7973,8 @@
 </p:sld>
 </file>
 
-<file path=ppt/slides/slide5.xml><?xml version="1.0" encoding="utf-8"?>
-<p:sld xmlns:a="http://schemas.openxmlformats.org/drawingml/2006/main" xmlns:p="http://schemas.openxmlformats.org/presentationml/2006/main" xmlns:r="http://schemas.openxmlformats.org/officeDocument/2006/relationships">
-  <p:cSld>
-    <p:spTree>
-      <p:nvGrpSpPr>
-        <p:cNvPr id="1" name=""/>
-        <p:cNvGrpSpPr/>
-        <p:nvPr/>
-      </p:nvGrpSpPr>
-      <p:grpSpPr/>
-      <p:sp>
-        <p:nvSpPr>
-          <p:cNvPr id="2" name="TextBox 1"/>
-          <p:cNvSpPr txBox="1"/>
-          <p:nvPr/>
-        </p:nvSpPr>
-        <p:spPr>
-          <a:xfrm>
-            <a:off x="548640" y="457200"/>
-            <a:ext cx="8046720" cy="774192"/>
-          </a:xfrm>
-          <a:prstGeom prst="rect">
-            <a:avLst/>
-          </a:prstGeom>
-          <a:noFill/>
-        </p:spPr>
-        <p:txBody>
-          <a:bodyPr wrap="none">
-            <a:spAutoFit/>
-          </a:bodyPr>
-          <a:lstStyle/>
-          <a:p>
-            <a:r>
-              <a:rPr sz="3600" b="1">
-                <a:solidFill>
-                  <a:srgbClr val="111111"/>
-                </a:solidFill>
-                <a:latin typeface="Noto Sans CJK KR"/>
-              </a:rPr>
-              <a:t>Contents</a:t>
-            </a:r>
-          </a:p>
-        </p:txBody>
-      </p:sp>
-      <p:sp>
-        <p:nvSpPr>
-          <p:cNvPr id="3" name="TextBox 2"/>
-          <p:cNvSpPr txBox="1"/>
-          <p:nvPr/>
-        </p:nvSpPr>
-        <p:spPr>
-          <a:xfrm>
-            <a:off x="548640" y="1645920"/>
-            <a:ext cx="8046720" cy="3200400"/>
-          </a:xfrm>
-          <a:prstGeom prst="rect">
-            <a:avLst/>
-          </a:prstGeom>
-          <a:noFill/>
-        </p:spPr>
-        <p:txBody>
-          <a:bodyPr wrap="square">
-            <a:spAutoFit/>
-          </a:bodyPr>
-          <a:lstStyle/>
-          <a:p>
-            <a:pPr>
-              <a:spcAft>
-                <a:spcPts val="2000"/>
-              </a:spcAft>
-            </a:pPr>
-            <a:r>
-              <a:rPr sz="2400">
-                <a:solidFill>
-                  <a:srgbClr val="222222"/>
-                </a:solidFill>
-                <a:latin typeface="Noto Sans CJK KR"/>
-              </a:rPr>
-              <a:t>1.  프로젝트 소개</a:t>
-            </a:r>
-          </a:p>
-          <a:p>
-            <a:pPr>
-              <a:spcAft>
-                <a:spcPts val="2000"/>
-              </a:spcAft>
-            </a:pPr>
-            <a:r>
-              <a:rPr sz="2400">
-                <a:solidFill>
-                  <a:srgbClr val="222222"/>
-                </a:solidFill>
-                <a:latin typeface="Noto Sans CJK KR"/>
-              </a:rPr>
-              <a:t>2.  TDMA PHY · Datalink · 프로토콜 정의</a:t>
-            </a:r>
-          </a:p>
-          <a:p>
-            <a:pPr>
-              <a:spcAft>
-                <a:spcPts val="2000"/>
-              </a:spcAft>
-            </a:pPr>
-            <a:r>
-              <a:rPr sz="2400">
-                <a:solidFill>
-                  <a:srgbClr val="222222"/>
-                </a:solidFill>
-                <a:latin typeface="Noto Sans CJK KR"/>
-              </a:rPr>
-              <a:t>3.  Master / Slave 구현 사항</a:t>
-            </a:r>
-          </a:p>
-          <a:p>
-            <a:pPr>
-              <a:spcAft>
-                <a:spcPts val="2000"/>
-              </a:spcAft>
-            </a:pPr>
-            <a:r>
-              <a:rPr sz="2400">
-                <a:solidFill>
-                  <a:srgbClr val="222222"/>
-                </a:solidFill>
-                <a:latin typeface="Noto Sans CJK KR"/>
-              </a:rPr>
-              <a:t>4.  TDMA 통신 시연</a:t>
-            </a:r>
-          </a:p>
-          <a:p>
-            <a:pPr>
-              <a:spcAft>
-                <a:spcPts val="2000"/>
-              </a:spcAft>
-            </a:pPr>
-            <a:r>
-              <a:rPr sz="2400">
-                <a:solidFill>
-                  <a:srgbClr val="222222"/>
-                </a:solidFill>
-                <a:latin typeface="Noto Sans CJK KR"/>
-              </a:rPr>
-              <a:t>5.  마무리</a:t>
-            </a:r>
-          </a:p>
-        </p:txBody>
-      </p:sp>
-      <p:sp>
-        <p:nvSpPr>
-          <p:cNvPr id="4" name="TextBox 3"/>
-          <p:cNvSpPr txBox="1"/>
-          <p:nvPr/>
-        </p:nvSpPr>
-        <p:spPr>
-          <a:xfrm>
-            <a:off x="8503920" y="4754880"/>
-            <a:ext cx="457200" cy="274320"/>
-          </a:xfrm>
-          <a:prstGeom prst="rect">
-            <a:avLst/>
-          </a:prstGeom>
-          <a:noFill/>
-        </p:spPr>
-        <p:txBody>
-          <a:bodyPr wrap="none">
-            <a:spAutoFit/>
-          </a:bodyPr>
-          <a:lstStyle/>
-          <a:p>
-            <a:pPr algn="r"/>
-            <a:r>
-              <a:rPr sz="1200">
-                <a:solidFill>
-                  <a:srgbClr val="999999"/>
-                </a:solidFill>
-                <a:latin typeface="Noto Sans CJK KR"/>
-              </a:rPr>
-              <a:t>2</a:t>
-            </a:r>
-          </a:p>
-        </p:txBody>
-      </p:sp>
-    </p:spTree>
-  </p:cSld>
-  <p:clrMapOvr>
-    <a:masterClrMapping/>
-  </p:clrMapOvr>
-</p:sld>
-</file>
-
-<file path=ppt/slides/slide6.xml><?xml version="1.0" encoding="utf-8"?>
-<p:sld xmlns:a="http://schemas.openxmlformats.org/drawingml/2006/main" xmlns:p="http://schemas.openxmlformats.org/presentationml/2006/main" xmlns:r="http://schemas.openxmlformats.org/officeDocument/2006/relationships">
+<file path=ppt/slides/slide7.xml><?xml version="1.0" encoding="utf-8"?>
+<p:sld xmlns:a="http://schemas.openxmlformats.org/drawingml/2006/main" xmlns:r="http://schemas.openxmlformats.org/officeDocument/2006/relationships" xmlns:p="http://schemas.openxmlformats.org/presentationml/2006/main">
   <p:cSld>
     <p:bg>
       <p:bgPr>
@@ -7857,11 +7990,18 @@
         <p:cNvGrpSpPr/>
         <p:nvPr/>
       </p:nvGrpSpPr>
-      <p:grpSpPr/>
-      <p:sp>
-        <p:nvSpPr>
-          <p:cNvPr id="2" name="TextBox 1"/>
-          <p:cNvSpPr txBox="1"/>
+      <p:grpSpPr>
+        <a:xfrm>
+          <a:off x="0" y="0"/>
+          <a:ext cx="0" cy="0"/>
+          <a:chOff x="0" y="0"/>
+          <a:chExt cx="0" cy="0"/>
+        </a:xfrm>
+      </p:grpSpPr>
+      <p:sp>
+        <p:nvSpPr>
+          <p:cNvPr id="2" name="Text 0"/>
+          <p:cNvSpPr/>
           <p:nvPr/>
         </p:nvSpPr>
         <p:spPr>
@@ -7873,64 +8013,73 @@
             <a:avLst/>
           </a:prstGeom>
           <a:noFill/>
-        </p:spPr>
-        <p:txBody>
-          <a:bodyPr wrap="square">
-            <a:spAutoFit/>
-          </a:bodyPr>
-          <a:lstStyle/>
-          <a:p>
-            <a:pPr algn="l"/>
-            <a:r>
-              <a:rPr sz="4000" b="1">
+          <a:ln/>
+        </p:spPr>
+        <p:txBody>
+          <a:bodyPr wrap="square" rtlCol="0" anchor="ctr"/>
+          <a:lstStyle/>
+          <a:p>
+            <a:pPr marL="0" indent="0" algn="l">
+              <a:buNone/>
+            </a:pPr>
+            <a:r>
+              <a:rPr lang="en-US" sz="4000" b="1" dirty="0">
                 <a:solidFill>
                   <a:srgbClr val="111111"/>
                 </a:solidFill>
-                <a:latin typeface="Noto Sans CJK KR"/>
-              </a:rPr>
-              <a:t>1. 프로젝트 소개</a:t>
-            </a:r>
-          </a:p>
-        </p:txBody>
-      </p:sp>
-      <p:sp>
-        <p:nvSpPr>
-          <p:cNvPr id="3" name="TextBox 2"/>
-          <p:cNvSpPr txBox="1"/>
-          <p:nvPr/>
-        </p:nvSpPr>
-        <p:spPr>
-          <a:xfrm>
-            <a:off x="548640" y="3111120"/>
+                <a:latin typeface="Noto Sans CJK KR" pitchFamily="34" charset="0"/>
+                <a:ea typeface="Noto Sans CJK KR" pitchFamily="34" charset="-122"/>
+                <a:cs typeface="Noto Sans CJK KR" pitchFamily="34" charset="-120"/>
+              </a:rPr>
+              <a:t>2. TDMA PHY · Datalink · 프로토콜 정의</a:t>
+            </a:r>
+            <a:endParaRPr lang="en-US" sz="4000" dirty="0"/>
+          </a:p>
+        </p:txBody>
+      </p:sp>
+      <p:sp>
+        <p:nvSpPr>
+          <p:cNvPr id="3" name="Text 1"/>
+          <p:cNvSpPr/>
+          <p:nvPr/>
+        </p:nvSpPr>
+        <p:spPr>
+          <a:xfrm>
+            <a:off x="548640" y="3108960"/>
             <a:ext cx="8046720" cy="457200"/>
           </a:xfrm>
           <a:prstGeom prst="rect">
             <a:avLst/>
           </a:prstGeom>
           <a:noFill/>
-        </p:spPr>
-        <p:txBody>
-          <a:bodyPr wrap="square">
-            <a:spAutoFit/>
-          </a:bodyPr>
-          <a:lstStyle/>
-          <a:p>
-            <a:r>
-              <a:rPr sz="1800">
+          <a:ln/>
+        </p:spPr>
+        <p:txBody>
+          <a:bodyPr wrap="square" rtlCol="0" anchor="ctr"/>
+          <a:lstStyle/>
+          <a:p>
+            <a:pPr marL="0" indent="0" algn="l">
+              <a:buNone/>
+            </a:pPr>
+            <a:r>
+              <a:rPr lang="en-US" sz="2000" dirty="0">
                 <a:solidFill>
                   <a:srgbClr val="666666"/>
                 </a:solidFill>
-                <a:latin typeface="Noto Sans CJK KR"/>
-              </a:rPr>
-              <a:t>왜 시간을 나누어 전송해야 하는지, 프로젝트의 목표를 짚는다</a:t>
-            </a:r>
-          </a:p>
-        </p:txBody>
-      </p:sp>
-      <p:sp>
-        <p:nvSpPr>
-          <p:cNvPr id="4" name="TextBox 3"/>
-          <p:cNvSpPr txBox="1"/>
+                <a:latin typeface="Noto Sans CJK KR" pitchFamily="34" charset="0"/>
+                <a:ea typeface="Noto Sans CJK KR" pitchFamily="34" charset="-122"/>
+                <a:cs typeface="Noto Sans CJK KR" pitchFamily="34" charset="-120"/>
+              </a:rPr>
+              <a:t>프레임 구조부터 동기화, 흐름 제어까지 통신 규약을 설계한다</a:t>
+            </a:r>
+            <a:endParaRPr lang="en-US" sz="2000" dirty="0"/>
+          </a:p>
+        </p:txBody>
+      </p:sp>
+      <p:sp>
+        <p:nvSpPr>
+          <p:cNvPr id="4" name="Text 2"/>
+          <p:cNvSpPr/>
           <p:nvPr/>
         </p:nvSpPr>
         <p:spPr>
@@ -7942,151 +8091,13 @@
             <a:avLst/>
           </a:prstGeom>
           <a:noFill/>
-        </p:spPr>
-        <p:txBody>
-          <a:bodyPr wrap="none">
-            <a:spAutoFit/>
-          </a:bodyPr>
-          <a:lstStyle/>
-          <a:p>
-            <a:pPr algn="r"/>
-            <a:r>
-              <a:rPr sz="1200">
-                <a:solidFill>
-                  <a:srgbClr val="999999"/>
-                </a:solidFill>
-                <a:latin typeface="Noto Sans CJK KR"/>
-              </a:rPr>
-              <a:t>3</a:t>
-            </a:r>
-          </a:p>
-        </p:txBody>
-      </p:sp>
-    </p:spTree>
-  </p:cSld>
-  <p:clrMapOvr>
-    <a:masterClrMapping/>
-  </p:clrMapOvr>
-</p:sld>
-</file>
-
-<file path=ppt/slides/slide7.xml><?xml version="1.0" encoding="utf-8"?>
-<p:sld xmlns:a="http://schemas.openxmlformats.org/drawingml/2006/main" xmlns:p="http://schemas.openxmlformats.org/presentationml/2006/main" xmlns:r="http://schemas.openxmlformats.org/officeDocument/2006/relationships">
-  <p:cSld>
-    <p:bg>
-      <p:bgPr>
-        <a:solidFill>
-          <a:srgbClr val="F2F2F2"/>
-        </a:solidFill>
-      </p:bgPr>
-    </p:bg>
-    <p:spTree>
-      <p:nvGrpSpPr>
-        <p:cNvPr id="1" name=""/>
-        <p:cNvGrpSpPr/>
-        <p:nvPr/>
-      </p:nvGrpSpPr>
-      <p:grpSpPr/>
-      <p:sp>
-        <p:nvSpPr>
-          <p:cNvPr id="2" name="Text 0"/>
-          <p:cNvSpPr/>
-          <p:nvPr/>
-        </p:nvSpPr>
-        <p:spPr>
-          <a:xfrm>
-            <a:off x="548640" y="1828800"/>
-            <a:ext cx="8046720" cy="1371600"/>
-          </a:xfrm>
-          <a:prstGeom prst="rect">
-            <a:avLst/>
-          </a:prstGeom>
-          <a:noFill/>
           <a:ln/>
         </p:spPr>
         <p:txBody>
           <a:bodyPr wrap="square" rtlCol="0" anchor="ctr"/>
           <a:lstStyle/>
           <a:p>
-            <a:pPr algn="l" indent="0" marL="0">
-              <a:buNone/>
-            </a:pPr>
-            <a:r>
-              <a:rPr lang="en-US" sz="4000" b="1" dirty="0">
-                <a:solidFill>
-                  <a:srgbClr val="111111"/>
-                </a:solidFill>
-                <a:latin typeface="Noto Sans CJK KR" pitchFamily="34" charset="0"/>
-                <a:ea typeface="Noto Sans CJK KR" pitchFamily="34" charset="-122"/>
-                <a:cs typeface="Noto Sans CJK KR" pitchFamily="34" charset="-120"/>
-              </a:rPr>
-              <a:t>2. TDMA PHY · Datalink · 프로토콜 정의</a:t>
-            </a:r>
-            <a:endParaRPr lang="en-US" sz="4000" dirty="0"/>
-          </a:p>
-        </p:txBody>
-      </p:sp>
-      <p:sp>
-        <p:nvSpPr>
-          <p:cNvPr id="3" name="Text 1"/>
-          <p:cNvSpPr/>
-          <p:nvPr/>
-        </p:nvSpPr>
-        <p:spPr>
-          <a:xfrm>
-            <a:off x="548640" y="3108960"/>
-            <a:ext cx="8046720" cy="457200"/>
-          </a:xfrm>
-          <a:prstGeom prst="rect">
-            <a:avLst/>
-          </a:prstGeom>
-          <a:noFill/>
-          <a:ln/>
-        </p:spPr>
-        <p:txBody>
-          <a:bodyPr wrap="square" rtlCol="0" anchor="ctr"/>
-          <a:lstStyle/>
-          <a:p>
-            <a:pPr algn="l" indent="0" marL="0">
-              <a:buNone/>
-            </a:pPr>
-            <a:r>
-              <a:rPr lang="en-US" sz="2000" dirty="0">
-                <a:solidFill>
-                  <a:srgbClr val="666666"/>
-                </a:solidFill>
-                <a:latin typeface="Noto Sans CJK KR" pitchFamily="34" charset="0"/>
-                <a:ea typeface="Noto Sans CJK KR" pitchFamily="34" charset="-122"/>
-                <a:cs typeface="Noto Sans CJK KR" pitchFamily="34" charset="-120"/>
-              </a:rPr>
-              <a:t>프레임 구조부터 동기화, 흐름 제어까지 통신 규약을 설계한다</a:t>
-            </a:r>
-            <a:endParaRPr lang="en-US" sz="2000" dirty="0"/>
-          </a:p>
-        </p:txBody>
-      </p:sp>
-      <p:sp>
-        <p:nvSpPr>
-          <p:cNvPr id="4" name="Text 2"/>
-          <p:cNvSpPr/>
-          <p:nvPr/>
-        </p:nvSpPr>
-        <p:spPr>
-          <a:xfrm>
-            <a:off x="8503920" y="4754880"/>
-            <a:ext cx="457200" cy="274320"/>
-          </a:xfrm>
-          <a:prstGeom prst="rect">
-            <a:avLst/>
-          </a:prstGeom>
-          <a:noFill/>
-          <a:ln/>
-        </p:spPr>
-        <p:txBody>
-          <a:bodyPr wrap="square" rtlCol="0" anchor="ctr"/>
-          <a:lstStyle/>
-          <a:p>
-            <a:pPr algn="r" indent="0" marL="0">
+            <a:pPr marL="0" indent="0" algn="r">
               <a:buNone/>
             </a:pPr>
             <a:r>
@@ -8113,7 +8124,7 @@
 </file>
 
 <file path=ppt/slides/slide8.xml><?xml version="1.0" encoding="utf-8"?>
-<p:sld xmlns:a="http://schemas.openxmlformats.org/drawingml/2006/main" xmlns:p="http://schemas.openxmlformats.org/presentationml/2006/main" xmlns:r="http://schemas.openxmlformats.org/officeDocument/2006/relationships">
+<p:sld xmlns:a="http://schemas.openxmlformats.org/drawingml/2006/main" xmlns:r="http://schemas.openxmlformats.org/officeDocument/2006/relationships" xmlns:p="http://schemas.openxmlformats.org/presentationml/2006/main">
   <p:cSld>
     <p:spTree>
       <p:nvGrpSpPr>
@@ -8121,7 +8132,14 @@
         <p:cNvGrpSpPr/>
         <p:nvPr/>
       </p:nvGrpSpPr>
-      <p:grpSpPr/>
+      <p:grpSpPr>
+        <a:xfrm>
+          <a:off x="0" y="0"/>
+          <a:ext cx="0" cy="0"/>
+          <a:chOff x="0" y="0"/>
+          <a:chExt cx="0" cy="0"/>
+        </a:xfrm>
+      </p:grpSpPr>
       <p:sp>
         <p:nvSpPr>
           <p:cNvPr id="2" name="Text 0"/>
@@ -8143,7 +8161,7 @@
           <a:bodyPr wrap="square" lIns="0" tIns="0" rIns="0" bIns="0" rtlCol="0" anchor="ctr"/>
           <a:lstStyle/>
           <a:p>
-            <a:pPr indent="0" marL="0">
+            <a:pPr marL="0" indent="0">
               <a:buNone/>
             </a:pPr>
             <a:r>
@@ -8203,7 +8221,7 @@
             <a:endParaRPr lang="en-US" sz="2000" dirty="0"/>
           </a:p>
           <a:p>
-            <a:pPr lvl="1" marL="685800" indent="-342900">
+            <a:pPr marL="685800" lvl="1" indent="-342900">
               <a:spcAft>
                 <a:spcPts val="800"/>
               </a:spcAft>
@@ -8245,7 +8263,7 @@
             <a:endParaRPr lang="en-US" sz="2000" dirty="0"/>
           </a:p>
           <a:p>
-            <a:pPr lvl="1" marL="685800" indent="-342900">
+            <a:pPr marL="685800" lvl="1" indent="-342900">
               <a:spcAft>
                 <a:spcPts val="800"/>
               </a:spcAft>
@@ -8306,7 +8324,7 @@
           <a:bodyPr wrap="square" rtlCol="0" anchor="ctr"/>
           <a:lstStyle/>
           <a:p>
-            <a:pPr algn="r" indent="0" marL="0">
+            <a:pPr marL="0" indent="0" algn="r">
               <a:buNone/>
             </a:pPr>
             <a:r>
@@ -8333,7 +8351,7 @@
 </file>
 
 <file path=ppt/slides/slide9.xml><?xml version="1.0" encoding="utf-8"?>
-<p:sld xmlns:a="http://schemas.openxmlformats.org/drawingml/2006/main" xmlns:p="http://schemas.openxmlformats.org/presentationml/2006/main" xmlns:r="http://schemas.openxmlformats.org/officeDocument/2006/relationships">
+<p:sld xmlns:a="http://schemas.openxmlformats.org/drawingml/2006/main" xmlns:r="http://schemas.openxmlformats.org/officeDocument/2006/relationships" xmlns:p="http://schemas.openxmlformats.org/presentationml/2006/main">
   <p:cSld>
     <p:spTree>
       <p:nvGrpSpPr>
@@ -8341,7 +8359,14 @@
         <p:cNvGrpSpPr/>
         <p:nvPr/>
       </p:nvGrpSpPr>
-      <p:grpSpPr/>
+      <p:grpSpPr>
+        <a:xfrm>
+          <a:off x="0" y="0"/>
+          <a:ext cx="0" cy="0"/>
+          <a:chOff x="0" y="0"/>
+          <a:chExt cx="0" cy="0"/>
+        </a:xfrm>
+      </p:grpSpPr>
       <p:sp>
         <p:nvSpPr>
           <p:cNvPr id="2" name="Text 0"/>
@@ -8363,7 +8388,7 @@
           <a:bodyPr wrap="square" lIns="0" tIns="0" rIns="0" bIns="0" rtlCol="0" anchor="ctr"/>
           <a:lstStyle/>
           <a:p>
-            <a:pPr indent="0" marL="0">
+            <a:pPr marL="0" indent="0">
               <a:buNone/>
             </a:pPr>
             <a:r>
@@ -8423,7 +8448,7 @@
             <a:endParaRPr lang="en-US" sz="1900" dirty="0"/>
           </a:p>
           <a:p>
-            <a:pPr lvl="1" marL="685800" indent="-342900">
+            <a:pPr marL="685800" lvl="1" indent="-342900">
               <a:spcAft>
                 <a:spcPts val="600"/>
               </a:spcAft>
@@ -8465,7 +8490,7 @@
             <a:endParaRPr lang="en-US" sz="1900" dirty="0"/>
           </a:p>
           <a:p>
-            <a:pPr lvl="1" marL="685800" indent="-342900">
+            <a:pPr marL="685800" lvl="1" indent="-342900">
               <a:spcAft>
                 <a:spcPts val="600"/>
               </a:spcAft>
@@ -8507,7 +8532,7 @@
             <a:endParaRPr lang="en-US" sz="1900" dirty="0"/>
           </a:p>
           <a:p>
-            <a:pPr lvl="1" marL="685800" indent="-342900">
+            <a:pPr marL="685800" lvl="1" indent="-342900">
               <a:buSzPct val="100000"/>
               <a:buChar char="•"/>
             </a:pPr>
@@ -8528,7 +8553,7 @@
       </p:sp>
       <p:pic>
         <p:nvPicPr>
-          <p:cNvPr id="4" name="Image 0" descr="/home/user/SoC_Design_and_Programming/diagrams/phy_wiring.png">    </p:cNvPr>
+          <p:cNvPr id="4" name="Image 0" descr="/home/user/SoC_Design_and_Programming/diagrams/phy_wiring.png"/>
           <p:cNvPicPr>
             <a:picLocks noChangeAspect="1"/>
           </p:cNvPicPr>
@@ -8536,7 +8561,7 @@
         </p:nvPicPr>
         <p:blipFill>
           <a:blip r:embed="rId2"/>
-          <a:srcRect l="0" r="0" t="0" b="0"/>
+          <a:srcRect/>
           <a:stretch/>
         </p:blipFill>
         <p:spPr>
@@ -8570,7 +8595,7 @@
           <a:bodyPr wrap="square" rtlCol="0" anchor="ctr"/>
           <a:lstStyle/>
           <a:p>
-            <a:pPr algn="ctr" indent="0" marL="0">
+            <a:pPr marL="0" indent="0" algn="ctr">
               <a:buNone/>
             </a:pPr>
             <a:r>
@@ -8609,7 +8634,7 @@
           <a:bodyPr wrap="square" rtlCol="0" anchor="ctr"/>
           <a:lstStyle/>
           <a:p>
-            <a:pPr algn="r" indent="0" marL="0">
+            <a:pPr marL="0" indent="0" algn="r">
               <a:buNone/>
             </a:pPr>
             <a:r>
@@ -8928,4 +8953,319 @@
     </a:ext>
   </a:extLst>
 </a:theme>
+</file>
+
+<file path=ppt/theme/theme2.xml><?xml version="1.0" encoding="utf-8"?>
+<a:theme xmlns:a="http://schemas.openxmlformats.org/drawingml/2006/main" name="Office 테마">
+  <a:themeElements>
+    <a:clrScheme name="Office">
+      <a:dk1>
+        <a:sysClr val="windowText" lastClr="000000"/>
+      </a:dk1>
+      <a:lt1>
+        <a:sysClr val="window" lastClr="FFFFFF"/>
+      </a:lt1>
+      <a:dk2>
+        <a:srgbClr val="0E2841"/>
+      </a:dk2>
+      <a:lt2>
+        <a:srgbClr val="E8E8E8"/>
+      </a:lt2>
+      <a:accent1>
+        <a:srgbClr val="156082"/>
+      </a:accent1>
+      <a:accent2>
+        <a:srgbClr val="E97132"/>
+      </a:accent2>
+      <a:accent3>
+        <a:srgbClr val="196B24"/>
+      </a:accent3>
+      <a:accent4>
+        <a:srgbClr val="0F9ED5"/>
+      </a:accent4>
+      <a:accent5>
+        <a:srgbClr val="A02B93"/>
+      </a:accent5>
+      <a:accent6>
+        <a:srgbClr val="4EA72E"/>
+      </a:accent6>
+      <a:hlink>
+        <a:srgbClr val="467886"/>
+      </a:hlink>
+      <a:folHlink>
+        <a:srgbClr val="96607D"/>
+      </a:folHlink>
+    </a:clrScheme>
+    <a:fontScheme name="Office">
+      <a:majorFont>
+        <a:latin typeface="맑은 고딕" panose="02110004020202020204"/>
+        <a:ea typeface=""/>
+        <a:cs typeface=""/>
+        <a:font script="Jpan" typeface="游ゴシック Light"/>
+        <a:font script="Hang" typeface="맑은 고딕"/>
+        <a:font script="Hans" typeface="等线 Light"/>
+        <a:font script="Hant" typeface="新細明體"/>
+        <a:font script="Arab" typeface="Times New Roman"/>
+        <a:font script="Hebr" typeface="Times New Roman"/>
+        <a:font script="Thai" typeface="Angsana New"/>
+        <a:font script="Ethi" typeface="Nyala"/>
+        <a:font script="Beng" typeface="Vrinda"/>
+        <a:font script="Gujr" typeface="Shruti"/>
+        <a:font script="Khmr" typeface="MoolBoran"/>
+        <a:font script="Knda" typeface="Tunga"/>
+        <a:font script="Guru" typeface="Raavi"/>
+        <a:font script="Cans" typeface="Euphemia"/>
+        <a:font script="Cher" typeface="Plantagenet Cherokee"/>
+        <a:font script="Yiii" typeface="Microsoft Yi Baiti"/>
+        <a:font script="Tibt" typeface="Microsoft Himalaya"/>
+        <a:font script="Thaa" typeface="MV Boli"/>
+        <a:font script="Deva" typeface="Mangal"/>
+        <a:font script="Telu" typeface="Gautami"/>
+        <a:font script="Taml" typeface="Latha"/>
+        <a:font script="Syrc" typeface="Estrangelo Edessa"/>
+        <a:font script="Orya" typeface="Kalinga"/>
+        <a:font script="Mlym" typeface="Kartika"/>
+        <a:font script="Laoo" typeface="DokChampa"/>
+        <a:font script="Sinh" typeface="Iskoola Pota"/>
+        <a:font script="Mong" typeface="Mongolian Baiti"/>
+        <a:font script="Viet" typeface="Times New Roman"/>
+        <a:font script="Uigh" typeface="Microsoft Uighur"/>
+        <a:font script="Geor" typeface="Sylfaen"/>
+        <a:font script="Armn" typeface="Arial"/>
+        <a:font script="Bugi" typeface="Leelawadee UI"/>
+        <a:font script="Bopo" typeface="Microsoft JhengHei"/>
+        <a:font script="Java" typeface="Javanese Text"/>
+        <a:font script="Lisu" typeface="Segoe UI"/>
+        <a:font script="Mymr" typeface="Myanmar Text"/>
+        <a:font script="Nkoo" typeface="Ebrima"/>
+        <a:font script="Olck" typeface="Nirmala UI"/>
+        <a:font script="Osma" typeface="Ebrima"/>
+        <a:font script="Phag" typeface="Phagspa"/>
+        <a:font script="Syrn" typeface="Estrangelo Edessa"/>
+        <a:font script="Syrj" typeface="Estrangelo Edessa"/>
+        <a:font script="Syre" typeface="Estrangelo Edessa"/>
+        <a:font script="Sora" typeface="Nirmala UI"/>
+        <a:font script="Tale" typeface="Microsoft Tai Le"/>
+        <a:font script="Talu" typeface="Microsoft New Tai Lue"/>
+        <a:font script="Tfng" typeface="Ebrima"/>
+      </a:majorFont>
+      <a:minorFont>
+        <a:latin typeface="맑은 고딕" panose="02110004020202020204"/>
+        <a:ea typeface=""/>
+        <a:cs typeface=""/>
+        <a:font script="Jpan" typeface="游ゴシック"/>
+        <a:font script="Hang" typeface="맑은 고딕"/>
+        <a:font script="Hans" typeface="等线"/>
+        <a:font script="Hant" typeface="新細明體"/>
+        <a:font script="Arab" typeface="Arial"/>
+        <a:font script="Hebr" typeface="Arial"/>
+        <a:font script="Thai" typeface="Cordia New"/>
+        <a:font script="Ethi" typeface="Nyala"/>
+        <a:font script="Beng" typeface="Vrinda"/>
+        <a:font script="Gujr" typeface="Shruti"/>
+        <a:font script="Khmr" typeface="DaunPenh"/>
+        <a:font script="Knda" typeface="Tunga"/>
+        <a:font script="Guru" typeface="Raavi"/>
+        <a:font script="Cans" typeface="Euphemia"/>
+        <a:font script="Cher" typeface="Plantagenet Cherokee"/>
+        <a:font script="Yiii" typeface="Microsoft Yi Baiti"/>
+        <a:font script="Tibt" typeface="Microsoft Himalaya"/>
+        <a:font script="Thaa" typeface="MV Boli"/>
+        <a:font script="Deva" typeface="Mangal"/>
+        <a:font script="Telu" typeface="Gautami"/>
+        <a:font script="Taml" typeface="Latha"/>
+        <a:font script="Syrc" typeface="Estrangelo Edessa"/>
+        <a:font script="Orya" typeface="Kalinga"/>
+        <a:font script="Mlym" typeface="Kartika"/>
+        <a:font script="Laoo" typeface="DokChampa"/>
+        <a:font script="Sinh" typeface="Iskoola Pota"/>
+        <a:font script="Mong" typeface="Mongolian Baiti"/>
+        <a:font script="Viet" typeface="Arial"/>
+        <a:font script="Uigh" typeface="Microsoft Uighur"/>
+        <a:font script="Geor" typeface="Sylfaen"/>
+        <a:font script="Armn" typeface="Arial"/>
+        <a:font script="Bugi" typeface="Leelawadee UI"/>
+        <a:font script="Bopo" typeface="Microsoft JhengHei"/>
+        <a:font script="Java" typeface="Javanese Text"/>
+        <a:font script="Lisu" typeface="Segoe UI"/>
+        <a:font script="Mymr" typeface="Myanmar Text"/>
+        <a:font script="Nkoo" typeface="Ebrima"/>
+        <a:font script="Olck" typeface="Nirmala UI"/>
+        <a:font script="Osma" typeface="Ebrima"/>
+        <a:font script="Phag" typeface="Phagspa"/>
+        <a:font script="Syrn" typeface="Estrangelo Edessa"/>
+        <a:font script="Syrj" typeface="Estrangelo Edessa"/>
+        <a:font script="Syre" typeface="Estrangelo Edessa"/>
+        <a:font script="Sora" typeface="Nirmala UI"/>
+        <a:font script="Tale" typeface="Microsoft Tai Le"/>
+        <a:font script="Talu" typeface="Microsoft New Tai Lue"/>
+        <a:font script="Tfng" typeface="Ebrima"/>
+      </a:minorFont>
+    </a:fontScheme>
+    <a:fmtScheme name="Office">
+      <a:fillStyleLst>
+        <a:solidFill>
+          <a:schemeClr val="phClr"/>
+        </a:solidFill>
+        <a:gradFill rotWithShape="1">
+          <a:gsLst>
+            <a:gs pos="0">
+              <a:schemeClr val="phClr">
+                <a:lumMod val="110000"/>
+                <a:satMod val="105000"/>
+                <a:tint val="67000"/>
+              </a:schemeClr>
+            </a:gs>
+            <a:gs pos="50000">
+              <a:schemeClr val="phClr">
+                <a:lumMod val="105000"/>
+                <a:satMod val="103000"/>
+                <a:tint val="73000"/>
+              </a:schemeClr>
+            </a:gs>
+            <a:gs pos="100000">
+              <a:schemeClr val="phClr">
+                <a:lumMod val="105000"/>
+                <a:satMod val="109000"/>
+                <a:tint val="81000"/>
+              </a:schemeClr>
+            </a:gs>
+          </a:gsLst>
+          <a:lin ang="5400000" scaled="0"/>
+        </a:gradFill>
+        <a:gradFill rotWithShape="1">
+          <a:gsLst>
+            <a:gs pos="0">
+              <a:schemeClr val="phClr">
+                <a:satMod val="103000"/>
+                <a:lumMod val="102000"/>
+                <a:tint val="94000"/>
+              </a:schemeClr>
+            </a:gs>
+            <a:gs pos="50000">
+              <a:schemeClr val="phClr">
+                <a:satMod val="110000"/>
+                <a:lumMod val="100000"/>
+                <a:shade val="100000"/>
+              </a:schemeClr>
+            </a:gs>
+            <a:gs pos="100000">
+              <a:schemeClr val="phClr">
+                <a:lumMod val="99000"/>
+                <a:satMod val="120000"/>
+                <a:shade val="78000"/>
+              </a:schemeClr>
+            </a:gs>
+          </a:gsLst>
+          <a:lin ang="5400000" scaled="0"/>
+        </a:gradFill>
+      </a:fillStyleLst>
+      <a:lnStyleLst>
+        <a:ln w="12700" cap="flat" cmpd="sng" algn="ctr">
+          <a:solidFill>
+            <a:schemeClr val="phClr"/>
+          </a:solidFill>
+          <a:prstDash val="solid"/>
+          <a:miter lim="800000"/>
+        </a:ln>
+        <a:ln w="19050" cap="flat" cmpd="sng" algn="ctr">
+          <a:solidFill>
+            <a:schemeClr val="phClr"/>
+          </a:solidFill>
+          <a:prstDash val="solid"/>
+          <a:miter lim="800000"/>
+        </a:ln>
+        <a:ln w="25400" cap="flat" cmpd="sng" algn="ctr">
+          <a:solidFill>
+            <a:schemeClr val="phClr"/>
+          </a:solidFill>
+          <a:prstDash val="solid"/>
+          <a:miter lim="800000"/>
+        </a:ln>
+      </a:lnStyleLst>
+      <a:effectStyleLst>
+        <a:effectStyle>
+          <a:effectLst/>
+        </a:effectStyle>
+        <a:effectStyle>
+          <a:effectLst/>
+        </a:effectStyle>
+        <a:effectStyle>
+          <a:effectLst>
+            <a:outerShdw blurRad="57150" dist="19050" dir="5400000" algn="ctr" rotWithShape="0">
+              <a:srgbClr val="000000">
+                <a:alpha val="63000"/>
+              </a:srgbClr>
+            </a:outerShdw>
+          </a:effectLst>
+        </a:effectStyle>
+      </a:effectStyleLst>
+      <a:bgFillStyleLst>
+        <a:solidFill>
+          <a:schemeClr val="phClr"/>
+        </a:solidFill>
+        <a:solidFill>
+          <a:schemeClr val="phClr">
+            <a:tint val="95000"/>
+            <a:satMod val="170000"/>
+          </a:schemeClr>
+        </a:solidFill>
+        <a:gradFill rotWithShape="1">
+          <a:gsLst>
+            <a:gs pos="0">
+              <a:schemeClr val="phClr">
+                <a:tint val="93000"/>
+                <a:satMod val="150000"/>
+                <a:shade val="98000"/>
+                <a:lumMod val="102000"/>
+              </a:schemeClr>
+            </a:gs>
+            <a:gs pos="50000">
+              <a:schemeClr val="phClr">
+                <a:tint val="98000"/>
+                <a:satMod val="130000"/>
+                <a:shade val="90000"/>
+                <a:lumMod val="103000"/>
+              </a:schemeClr>
+            </a:gs>
+            <a:gs pos="100000">
+              <a:schemeClr val="phClr">
+                <a:shade val="63000"/>
+                <a:satMod val="120000"/>
+              </a:schemeClr>
+            </a:gs>
+          </a:gsLst>
+          <a:lin ang="5400000" scaled="0"/>
+        </a:gradFill>
+      </a:bgFillStyleLst>
+    </a:fmtScheme>
+  </a:themeElements>
+  <a:objectDefaults>
+    <a:lnDef>
+      <a:spPr/>
+      <a:bodyPr/>
+      <a:lstStyle/>
+      <a:style>
+        <a:lnRef idx="2">
+          <a:schemeClr val="accent1"/>
+        </a:lnRef>
+        <a:fillRef idx="0">
+          <a:schemeClr val="accent1"/>
+        </a:fillRef>
+        <a:effectRef idx="1">
+          <a:schemeClr val="accent1"/>
+        </a:effectRef>
+        <a:fontRef idx="minor">
+          <a:schemeClr val="tx1"/>
+        </a:fontRef>
+      </a:style>
+    </a:lnDef>
+  </a:objectDefaults>
+  <a:extraClrSchemeLst/>
+  <a:extLst>
+    <a:ext uri="{05A4C25C-085E-4340-85A3-A5531E510DB2}">
+      <thm15:themeFamily xmlns:thm15="http://schemas.microsoft.com/office/thememl/2012/main" name="Office Theme" id="{2E142A2C-CD16-42D6-873A-C26D2A0506FA}" vid="{1BDDFF52-6CD6-40A5-AB3C-68EB2F1E4D0A}"/>
+    </a:ext>
+  </a:extLst>
+</a:theme>
 </file>